--- a/Student_Registration_Presentation.pptx
+++ b/Student_Registration_Presentation.pptx
@@ -13,6 +13,12 @@
     <p:sldId id="261" r:id="rId12"/>
     <p:sldId id="262" r:id="rId13"/>
     <p:sldId id="263" r:id="rId14"/>
+    <p:sldId id="264" r:id="rId15"/>
+    <p:sldId id="265" r:id="rId16"/>
+    <p:sldId id="266" r:id="rId17"/>
+    <p:sldId id="267" r:id="rId18"/>
+    <p:sldId id="268" r:id="rId19"/>
+    <p:sldId id="269" r:id="rId20"/>
   </p:sldIdLst>
   <p:sldSz cx="12191695" cy="6858000" type="screen4x3"/>
   <p:notesSz cx="6858000" cy="9144000"/>
@@ -3271,7 +3277,7 @@
 </p:sld>
 </file>
 
-<file path=ppt/slides/slide2.xml><?xml version="1.0" encoding="utf-8"?>
+<file path=ppt/slides/slide10.xml><?xml version="1.0" encoding="utf-8"?>
 <p:sld xmlns:a="http://schemas.openxmlformats.org/drawingml/2006/main" xmlns:p="http://schemas.openxmlformats.org/presentationml/2006/main" xmlns:r="http://schemas.openxmlformats.org/officeDocument/2006/relationships">
   <p:cSld>
     <p:bg>
@@ -3380,7 +3386,7 @@
               </a:defRPr>
             </a:pPr>
             <a:r>
-              <a:t>What is Student Hub?</a:t>
+              <a:t>Admin Analytics &amp; KPI Cards</a:t>
             </a:r>
           </a:p>
         </p:txBody>
@@ -3454,7 +3460,7 @@
           <a:p>
             <a:pPr>
               <a:spcAft>
-                <a:spcPts val="2000"/>
+                <a:spcPts val="1400"/>
               </a:spcAft>
               <a:defRPr sz="1800">
                 <a:solidFill>
@@ -3464,13 +3470,13 @@
               </a:defRPr>
             </a:pPr>
             <a:r>
-              <a:t>A modern, highly secure online student registration platform designed to eliminate offline paperwork and streamline the enrollment process.</a:t>
+              <a:t>Administrators gain access to a dedicated business intelligence layer, enabling visual insights into student admissions metrics.</a:t>
             </a:r>
           </a:p>
           <a:p>
             <a:pPr>
               <a:spcBef>
-                <a:spcPts val="1200"/>
+                <a:spcPts val="1000"/>
               </a:spcBef>
               <a:defRPr sz="1500">
                 <a:solidFill>
@@ -3480,13 +3486,13 @@
               </a:defRPr>
             </a:pPr>
             <a:r>
-              <a:t>⚡ Fast &amp; Intuitive: Replaces complex admission forms with a 4-step wizard.</a:t>
+              <a:t>📊 Dynamically Served KPIs: Displays Total Registrations, Majors distribution count, and active schedules.</a:t>
             </a:r>
           </a:p>
           <a:p>
             <a:pPr>
               <a:spcBef>
-                <a:spcPts val="1200"/>
+                <a:spcPts val="1000"/>
               </a:spcBef>
               <a:defRPr sz="1500">
                 <a:solidFill>
@@ -3496,13 +3502,13 @@
               </a:defRPr>
             </a:pPr>
             <a:r>
-              <a:t>📱 Responsive Architecture: Works flawlessly across mobiles, tablets, and desktops.</a:t>
+              <a:t>📡 Stats API Endpoint (/api/stats): Dynamic JSON route returning real-time student numbers to the landing page.</a:t>
             </a:r>
           </a:p>
           <a:p>
             <a:pPr>
               <a:spcBef>
-                <a:spcPts val="1200"/>
+                <a:spcPts val="1000"/>
               </a:spcBef>
               <a:defRPr sz="1500">
                 <a:solidFill>
@@ -3512,13 +3518,13 @@
               </a:defRPr>
             </a:pPr>
             <a:r>
-              <a:t>🔒 Local Asset Security: Self-hosts all font and icons vectors to comply with local CSP restrictions.</a:t>
+              <a:t>📈 Chart.js Charting Interface: Administrative screens render real-time majors breakdown graphs.</a:t>
             </a:r>
           </a:p>
           <a:p>
             <a:pPr>
               <a:spcBef>
-                <a:spcPts val="1200"/>
+                <a:spcPts val="1000"/>
               </a:spcBef>
               <a:defRPr sz="1500">
                 <a:solidFill>
@@ -3528,7 +3534,7 @@
               </a:defRPr>
             </a:pPr>
             <a:r>
-              <a:t>💼 Institutional Readiness: Designed to match university style systems with dedicated student &amp; admin controls.</a:t>
+              <a:t>📉 Interactive Major Filtering: Click elements in Chart.js legends to filter candidate records.</a:t>
             </a:r>
           </a:p>
         </p:txBody>
@@ -3548,7 +3554,7 @@
             <a:avLst/>
           </a:prstGeom>
           <a:solidFill>
-            <a:srgbClr val="F2F2F7"/>
+            <a:srgbClr val="1C1C1E"/>
           </a:solidFill>
           <a:ln w="19050">
             <a:solidFill>
@@ -3586,8 +3592,8 @@
         </p:nvSpPr>
         <p:spPr>
           <a:xfrm>
-            <a:off x="8321040" y="1920240"/>
-            <a:ext cx="2834640" cy="3474720"/>
+            <a:off x="8229600" y="1828800"/>
+            <a:ext cx="3017520" cy="3657600"/>
           </a:xfrm>
           <a:prstGeom prst="rect">
             <a:avLst/>
@@ -3602,25 +3608,9 @@
           <a:p>
             <a:pPr>
               <a:spcAft>
-                <a:spcPts val="1400"/>
+                <a:spcPts val="1000"/>
               </a:spcAft>
-              <a:defRPr sz="1400" b="1">
-                <a:solidFill>
-                  <a:srgbClr val="00317E"/>
-                </a:solidFill>
-                <a:latin typeface="Arial"/>
-              </a:defRPr>
-            </a:pPr>
-            <a:r>
-              <a:t>CORE METRICS</a:t>
-            </a:r>
-          </a:p>
-          <a:p>
-            <a:pPr>
-              <a:spcBef>
-                <a:spcPts val="800"/>
-              </a:spcBef>
-              <a:defRPr sz="1600" b="1">
+              <a:defRPr sz="1200" b="1">
                 <a:solidFill>
                   <a:srgbClr val="D4AF37"/>
                 </a:solidFill>
@@ -3628,119 +3618,75 @@
               </a:defRPr>
             </a:pPr>
             <a:r>
-              <a:t>• 3 mins</a:t>
-            </a:r>
-          </a:p>
-          <a:p>
-            <a:pPr>
-              <a:spcAft>
-                <a:spcPts val="400"/>
-              </a:spcAft>
-              <a:defRPr sz="1200">
-                <a:solidFill>
-                  <a:srgbClr val="1C1C1E"/>
-                </a:solidFill>
-                <a:latin typeface="Arial"/>
-              </a:defRPr>
-            </a:pPr>
-            <a:r>
-              <a:t>Average student registration time</a:t>
-            </a:r>
-          </a:p>
-          <a:p>
-            <a:pPr>
-              <a:spcBef>
-                <a:spcPts val="800"/>
-              </a:spcBef>
-              <a:defRPr sz="1600" b="1">
-                <a:solidFill>
-                  <a:srgbClr val="D4AF37"/>
-                </a:solidFill>
-                <a:latin typeface="Arial"/>
-              </a:defRPr>
-            </a:pPr>
-            <a:r>
-              <a:t>• 100%</a:t>
-            </a:r>
-          </a:p>
-          <a:p>
-            <a:pPr>
-              <a:spcAft>
-                <a:spcPts val="400"/>
-              </a:spcAft>
-              <a:defRPr sz="1200">
-                <a:solidFill>
-                  <a:srgbClr val="1C1C1E"/>
-                </a:solidFill>
-                <a:latin typeface="Arial"/>
-              </a:defRPr>
-            </a:pPr>
-            <a:r>
-              <a:t>Paperless online workflow</a:t>
-            </a:r>
-          </a:p>
-          <a:p>
-            <a:pPr>
-              <a:spcBef>
-                <a:spcPts val="800"/>
-              </a:spcBef>
-              <a:defRPr sz="1600" b="1">
-                <a:solidFill>
-                  <a:srgbClr val="D4AF37"/>
-                </a:solidFill>
-                <a:latin typeface="Arial"/>
-              </a:defRPr>
-            </a:pPr>
-            <a:r>
-              <a:t>• Instant</a:t>
-            </a:r>
-          </a:p>
-          <a:p>
-            <a:pPr>
-              <a:spcAft>
-                <a:spcPts val="400"/>
-              </a:spcAft>
-              <a:defRPr sz="1200">
-                <a:solidFill>
-                  <a:srgbClr val="1C1C1E"/>
-                </a:solidFill>
-                <a:latin typeface="Arial"/>
-              </a:defRPr>
-            </a:pPr>
-            <a:r>
-              <a:t>ID generation (e.g. STU-2026-XXXX)</a:t>
-            </a:r>
-          </a:p>
-          <a:p>
-            <a:pPr>
-              <a:spcBef>
-                <a:spcPts val="800"/>
-              </a:spcBef>
-              <a:defRPr sz="1600" b="1">
-                <a:solidFill>
-                  <a:srgbClr val="D4AF37"/>
-                </a:solidFill>
-                <a:latin typeface="Arial"/>
-              </a:defRPr>
-            </a:pPr>
-            <a:r>
-              <a:t>• Bank-Grade</a:t>
-            </a:r>
-          </a:p>
-          <a:p>
-            <a:pPr>
-              <a:spcAft>
-                <a:spcPts val="400"/>
-              </a:spcAft>
-              <a:defRPr sz="1200">
-                <a:solidFill>
-                  <a:srgbClr val="1C1C1E"/>
-                </a:solidFill>
-                <a:latin typeface="Arial"/>
-              </a:defRPr>
-            </a:pPr>
-            <a:r>
-              <a:t>Bcrypt hashing &amp; JWT protection</a:t>
+              <a:t>API JSON SAMPLE (/api/stats)</a:t>
+            </a:r>
+          </a:p>
+          <a:p>
+            <a:pPr>
+              <a:lnSpc>
+                <a:spcPct val="110000"/>
+              </a:lnSpc>
+              <a:defRPr sz="1100">
+                <a:solidFill>
+                  <a:srgbClr val="00FF00"/>
+                </a:solidFill>
+                <a:latin typeface="Courier New"/>
+              </a:defRPr>
+            </a:pPr>
+            <a:r>
+              <a:t>{</a:t>
+            </a:r>
+            <a:br/>
+            <a:r>
+              <a:t>  "status": "success",</a:t>
+            </a:r>
+            <a:br/>
+            <a:r>
+              <a:t>  "total_students": 20,</a:t>
+            </a:r>
+            <a:br/>
+            <a:r>
+              <a:t>  "majors": {</a:t>
+            </a:r>
+            <a:br/>
+            <a:r>
+              <a:t>    "Computer Science": 8,</a:t>
+            </a:r>
+            <a:br/>
+            <a:r>
+              <a:t>    "Data Science": 5,</a:t>
+            </a:r>
+            <a:br/>
+            <a:r>
+              <a:t>    "Electrical": 4,</a:t>
+            </a:r>
+            <a:br/>
+            <a:r>
+              <a:t>    "Mechanical": 3</a:t>
+            </a:r>
+            <a:br/>
+            <a:r>
+              <a:t>  },</a:t>
+            </a:r>
+            <a:br/>
+            <a:r>
+              <a:t>  "types": {</a:t>
+            </a:r>
+            <a:br/>
+            <a:r>
+              <a:t>    "Full-Time": 14,</a:t>
+            </a:r>
+            <a:br/>
+            <a:r>
+              <a:t>    "Part-Time": 6</a:t>
+            </a:r>
+            <a:br/>
+            <a:r>
+              <a:t>  }</a:t>
+            </a:r>
+            <a:br/>
+            <a:r>
+              <a:t>}</a:t>
             </a:r>
           </a:p>
         </p:txBody>
@@ -3753,7 +3699,7 @@
 </p:sld>
 </file>
 
-<file path=ppt/slides/slide3.xml><?xml version="1.0" encoding="utf-8"?>
+<file path=ppt/slides/slide11.xml><?xml version="1.0" encoding="utf-8"?>
 <p:sld xmlns:a="http://schemas.openxmlformats.org/drawingml/2006/main" xmlns:p="http://schemas.openxmlformats.org/presentationml/2006/main" xmlns:r="http://schemas.openxmlformats.org/officeDocument/2006/relationships">
   <p:cSld>
     <p:bg>
@@ -3862,7 +3808,7 @@
               </a:defRPr>
             </a:pPr>
             <a:r>
-              <a:t>Key Features</a:t>
+              <a:t>Production Security &amp; Compliance</a:t>
             </a:r>
           </a:p>
         </p:txBody>
@@ -3914,24 +3860,24 @@
       </p:sp>
       <p:sp>
         <p:nvSpPr>
-          <p:cNvPr id="6" name="Rounded Rectangle 5"/>
+          <p:cNvPr id="6" name="Rectangle 5"/>
           <p:cNvSpPr/>
           <p:nvPr/>
         </p:nvSpPr>
         <p:spPr>
           <a:xfrm>
-            <a:off x="731520" y="1463040"/>
-            <a:ext cx="5212080" cy="2011680"/>
-          </a:xfrm>
-          <a:prstGeom prst="roundRect">
+            <a:off x="731520" y="1645920"/>
+            <a:ext cx="5212080" cy="1920240"/>
+          </a:xfrm>
+          <a:prstGeom prst="rect">
             <a:avLst/>
           </a:prstGeom>
           <a:solidFill>
             <a:srgbClr val="F2F2F7"/>
           </a:solidFill>
-          <a:ln>
+          <a:ln w="12700">
             <a:solidFill>
-              <a:srgbClr val="F2F2F7"/>
+              <a:srgbClr val="D4AF37"/>
             </a:solidFill>
           </a:ln>
         </p:spPr>
@@ -3965,7 +3911,7 @@
         </p:nvSpPr>
         <p:spPr>
           <a:xfrm>
-            <a:off x="914400" y="1645920"/>
+            <a:off x="914400" y="1783080"/>
             <a:ext cx="4846320" cy="1645920"/>
           </a:xfrm>
           <a:prstGeom prst="rect">
@@ -3981,9 +3927,9 @@
           <a:p>
             <a:pPr>
               <a:spcAft>
-                <a:spcPts val="800"/>
+                <a:spcPts val="600"/>
               </a:spcAft>
-              <a:defRPr sz="1700" b="1">
+              <a:defRPr sz="1600" b="1">
                 <a:solidFill>
                   <a:srgbClr val="00317E"/>
                 </a:solidFill>
@@ -3991,12 +3937,12 @@
               </a:defRPr>
             </a:pPr>
             <a:r>
-              <a:t>⚡ 4-Step Registration Wizard</a:t>
-            </a:r>
-          </a:p>
-          <a:p>
-            <a:pPr>
-              <a:defRPr sz="1300">
+              <a:t>🔐 Cryptographic Password Protection</a:t>
+            </a:r>
+          </a:p>
+          <a:p>
+            <a:pPr>
+              <a:defRPr sz="1250">
                 <a:solidFill>
                   <a:srgbClr val="1C1C1E"/>
                 </a:solidFill>
@@ -4004,31 +3950,31 @@
               </a:defRPr>
             </a:pPr>
             <a:r>
-              <a:t>Personal, Address, Academic, and Account creation screens featuring dynamic validations.</a:t>
-            </a:r>
-          </a:p>
-        </p:txBody>
-      </p:sp>
-      <p:sp>
-        <p:nvSpPr>
-          <p:cNvPr id="8" name="Rounded Rectangle 7"/>
+              <a:t>User passwords undergo hashing using the blowfish Bcrypt algorithm (work factor: 12) before database write.</a:t>
+            </a:r>
+          </a:p>
+        </p:txBody>
+      </p:sp>
+      <p:sp>
+        <p:nvSpPr>
+          <p:cNvPr id="8" name="Rectangle 7"/>
           <p:cNvSpPr/>
           <p:nvPr/>
         </p:nvSpPr>
         <p:spPr>
           <a:xfrm>
-            <a:off x="6217920" y="1463040"/>
-            <a:ext cx="5212080" cy="2011680"/>
-          </a:xfrm>
-          <a:prstGeom prst="roundRect">
+            <a:off x="6217920" y="1645920"/>
+            <a:ext cx="5212080" cy="1920240"/>
+          </a:xfrm>
+          <a:prstGeom prst="rect">
             <a:avLst/>
           </a:prstGeom>
           <a:solidFill>
             <a:srgbClr val="F2F2F7"/>
           </a:solidFill>
-          <a:ln>
+          <a:ln w="12700">
             <a:solidFill>
-              <a:srgbClr val="F2F2F7"/>
+              <a:srgbClr val="D4AF37"/>
             </a:solidFill>
           </a:ln>
         </p:spPr>
@@ -4062,7 +4008,7 @@
         </p:nvSpPr>
         <p:spPr>
           <a:xfrm>
-            <a:off x="6400800" y="1645920"/>
+            <a:off x="6400800" y="1783080"/>
             <a:ext cx="4846320" cy="1645920"/>
           </a:xfrm>
           <a:prstGeom prst="rect">
@@ -4078,9 +4024,9 @@
           <a:p>
             <a:pPr>
               <a:spcAft>
-                <a:spcPts val="800"/>
+                <a:spcPts val="600"/>
               </a:spcAft>
-              <a:defRPr sz="1700" b="1">
+              <a:defRPr sz="1600" b="1">
                 <a:solidFill>
                   <a:srgbClr val="00317E"/>
                 </a:solidFill>
@@ -4088,12 +4034,12 @@
               </a:defRPr>
             </a:pPr>
             <a:r>
-              <a:t>👤 Dynamic Student Dashboard</a:t>
-            </a:r>
-          </a:p>
-          <a:p>
-            <a:pPr>
-              <a:defRPr sz="1300">
+              <a:t>🛡️ Content Security Policy (CSP)</a:t>
+            </a:r>
+          </a:p>
+          <a:p>
+            <a:pPr>
+              <a:defRPr sz="1250">
                 <a:solidFill>
                   <a:srgbClr val="1C1C1E"/>
                 </a:solidFill>
@@ -4101,31 +4047,31 @@
               </a:defRPr>
             </a:pPr>
             <a:r>
-              <a:t>Allows students to view profile completion metrics, deadlines, course information, and manage details.</a:t>
-            </a:r>
-          </a:p>
-        </p:txBody>
-      </p:sp>
-      <p:sp>
-        <p:nvSpPr>
-          <p:cNvPr id="10" name="Rounded Rectangle 9"/>
+              <a:t>Rigid HTTP security policies restrict resource downloads exclusively to 'self' and approved endpoints, preventing injections.</a:t>
+            </a:r>
+          </a:p>
+        </p:txBody>
+      </p:sp>
+      <p:sp>
+        <p:nvSpPr>
+          <p:cNvPr id="10" name="Rectangle 9"/>
           <p:cNvSpPr/>
           <p:nvPr/>
         </p:nvSpPr>
         <p:spPr>
           <a:xfrm>
-            <a:off x="731520" y="3749039"/>
-            <a:ext cx="5212080" cy="2011680"/>
-          </a:xfrm>
-          <a:prstGeom prst="roundRect">
+            <a:off x="731520" y="3931920"/>
+            <a:ext cx="5212080" cy="1920240"/>
+          </a:xfrm>
+          <a:prstGeom prst="rect">
             <a:avLst/>
           </a:prstGeom>
           <a:solidFill>
             <a:srgbClr val="F2F2F7"/>
           </a:solidFill>
-          <a:ln>
+          <a:ln w="12700">
             <a:solidFill>
-              <a:srgbClr val="F2F2F7"/>
+              <a:srgbClr val="D4AF37"/>
             </a:solidFill>
           </a:ln>
         </p:spPr>
@@ -4159,7 +4105,7 @@
         </p:nvSpPr>
         <p:spPr>
           <a:xfrm>
-            <a:off x="914400" y="3931919"/>
+            <a:off x="914400" y="4069080"/>
             <a:ext cx="4846320" cy="1645920"/>
           </a:xfrm>
           <a:prstGeom prst="rect">
@@ -4175,9 +4121,9 @@
           <a:p>
             <a:pPr>
               <a:spcAft>
-                <a:spcPts val="800"/>
+                <a:spcPts val="600"/>
               </a:spcAft>
-              <a:defRPr sz="1700" b="1">
+              <a:defRPr sz="1600" b="1">
                 <a:solidFill>
                   <a:srgbClr val="00317E"/>
                 </a:solidFill>
@@ -4185,12 +4131,12 @@
               </a:defRPr>
             </a:pPr>
             <a:r>
-              <a:t>🔐 Enterprise Security System</a:t>
-            </a:r>
-          </a:p>
-          <a:p>
-            <a:pPr>
-              <a:defRPr sz="1300">
+              <a:t>🚫 Rate-Limiter Interceptor</a:t>
+            </a:r>
+          </a:p>
+          <a:p>
+            <a:pPr>
+              <a:defRPr sz="1250">
                 <a:solidFill>
                   <a:srgbClr val="1C1C1E"/>
                 </a:solidFill>
@@ -4198,31 +4144,31 @@
               </a:defRPr>
             </a:pPr>
             <a:r>
-              <a:t>Features bcrypt password hashing, CSRF token validation, rate-limiting, and detailed request audit logging.</a:t>
-            </a:r>
-          </a:p>
-        </p:txBody>
-      </p:sp>
-      <p:sp>
-        <p:nvSpPr>
-          <p:cNvPr id="12" name="Rounded Rectangle 11"/>
+              <a:t>Protects authentication interfaces against dictionary attacks. Registers max 10 attempts/hour per IP.</a:t>
+            </a:r>
+          </a:p>
+        </p:txBody>
+      </p:sp>
+      <p:sp>
+        <p:nvSpPr>
+          <p:cNvPr id="12" name="Rectangle 11"/>
           <p:cNvSpPr/>
           <p:nvPr/>
         </p:nvSpPr>
         <p:spPr>
           <a:xfrm>
-            <a:off x="6217920" y="3749039"/>
-            <a:ext cx="5212080" cy="2011680"/>
-          </a:xfrm>
-          <a:prstGeom prst="roundRect">
+            <a:off x="6217920" y="3931920"/>
+            <a:ext cx="5212080" cy="1920240"/>
+          </a:xfrm>
+          <a:prstGeom prst="rect">
             <a:avLst/>
           </a:prstGeom>
           <a:solidFill>
             <a:srgbClr val="F2F2F7"/>
           </a:solidFill>
-          <a:ln>
+          <a:ln w="12700">
             <a:solidFill>
-              <a:srgbClr val="F2F2F7"/>
+              <a:srgbClr val="D4AF37"/>
             </a:solidFill>
           </a:ln>
         </p:spPr>
@@ -4256,7 +4202,7 @@
         </p:nvSpPr>
         <p:spPr>
           <a:xfrm>
-            <a:off x="6400800" y="3931919"/>
+            <a:off x="6400800" y="4069080"/>
             <a:ext cx="4846320" cy="1645920"/>
           </a:xfrm>
           <a:prstGeom prst="rect">
@@ -4272,9 +4218,9 @@
           <a:p>
             <a:pPr>
               <a:spcAft>
-                <a:spcPts val="800"/>
+                <a:spcPts val="600"/>
               </a:spcAft>
-              <a:defRPr sz="1700" b="1">
+              <a:defRPr sz="1600" b="1">
                 <a:solidFill>
                   <a:srgbClr val="00317E"/>
                 </a:solidFill>
@@ -4282,12 +4228,12 @@
               </a:defRPr>
             </a:pPr>
             <a:r>
-              <a:t>📊 Admin Analytics Dashboard</a:t>
-            </a:r>
-          </a:p>
-          <a:p>
-            <a:pPr>
-              <a:defRPr sz="1300">
+              <a:t>📜 Cross-Site Request Forgery (CSRF)</a:t>
+            </a:r>
+          </a:p>
+          <a:p>
+            <a:pPr>
+              <a:defRPr sz="1250">
                 <a:solidFill>
                   <a:srgbClr val="1C1C1E"/>
                 </a:solidFill>
@@ -4295,7 +4241,7 @@
               </a:defRPr>
             </a:pPr>
             <a:r>
-              <a:t>Provides real-time student search, sorting, details editors, and major enrollment analytics using Chart.js.</a:t>
+              <a:t>Flask-WTForms forces cryptographic signature checks on every POST payload, neutralizing CSRF attacks.</a:t>
             </a:r>
           </a:p>
         </p:txBody>
@@ -4308,7 +4254,7 @@
 </p:sld>
 </file>
 
-<file path=ppt/slides/slide4.xml><?xml version="1.0" encoding="utf-8"?>
+<file path=ppt/slides/slide12.xml><?xml version="1.0" encoding="utf-8"?>
 <p:sld xmlns:a="http://schemas.openxmlformats.org/drawingml/2006/main" xmlns:p="http://schemas.openxmlformats.org/presentationml/2006/main" xmlns:r="http://schemas.openxmlformats.org/officeDocument/2006/relationships">
   <p:cSld>
     <p:bg>
@@ -4417,7 +4363,7 @@
               </a:defRPr>
             </a:pPr>
             <a:r>
-              <a:t>The Student Registration Process</a:t>
+              <a:t>Audit Logging &amp; Middleware</a:t>
             </a:r>
           </a:p>
         </p:txBody>
@@ -4469,22 +4415,125 @@
       </p:sp>
       <p:sp>
         <p:nvSpPr>
-          <p:cNvPr id="6" name="Oval 5"/>
+          <p:cNvPr id="6" name="TextBox 5"/>
+          <p:cNvSpPr txBox="1"/>
+          <p:nvPr/>
+        </p:nvSpPr>
+        <p:spPr>
+          <a:xfrm>
+            <a:off x="731520" y="1463040"/>
+            <a:ext cx="6858000" cy="4389120"/>
+          </a:xfrm>
+          <a:prstGeom prst="rect">
+            <a:avLst/>
+          </a:prstGeom>
+          <a:noFill/>
+        </p:spPr>
+        <p:txBody>
+          <a:bodyPr wrap="square" lIns="0" tIns="0" bIns="0" rIns="0">
+            <a:spAutoFit/>
+          </a:bodyPr>
+          <a:lstStyle/>
+          <a:p>
+            <a:pPr>
+              <a:spcAft>
+                <a:spcPts val="1400"/>
+              </a:spcAft>
+              <a:defRPr sz="1800">
+                <a:solidFill>
+                  <a:srgbClr val="1C1C1E"/>
+                </a:solidFill>
+                <a:latin typeface="Arial"/>
+              </a:defRPr>
+            </a:pPr>
+            <a:r>
+              <a:t>Student Hub logs every critical operation in the server logs (audit.py) to meet corporate compliance standards.</a:t>
+            </a:r>
+          </a:p>
+          <a:p>
+            <a:pPr>
+              <a:spcBef>
+                <a:spcPts val="1000"/>
+              </a:spcBef>
+              <a:defRPr sz="1500">
+                <a:solidFill>
+                  <a:srgbClr val="1C1C1E"/>
+                </a:solidFill>
+                <a:latin typeface="Arial"/>
+              </a:defRPr>
+            </a:pPr>
+            <a:r>
+              <a:t>📋 Session Isolation: Keeps Administrator and Student credentials separated at the controller layer.</a:t>
+            </a:r>
+          </a:p>
+          <a:p>
+            <a:pPr>
+              <a:spcBef>
+                <a:spcPts val="1000"/>
+              </a:spcBef>
+              <a:defRPr sz="1500">
+                <a:solidFill>
+                  <a:srgbClr val="1C1C1E"/>
+                </a:solidFill>
+                <a:latin typeface="Arial"/>
+              </a:defRPr>
+            </a:pPr>
+            <a:r>
+              <a:t>🖥️ Audit Logs: Writes time, operation context, client IP, and target candidate IDs for all admin edits.</a:t>
+            </a:r>
+          </a:p>
+          <a:p>
+            <a:pPr>
+              <a:spcBef>
+                <a:spcPts val="1000"/>
+              </a:spcBef>
+              <a:defRPr sz="1500">
+                <a:solidFill>
+                  <a:srgbClr val="1C1C1E"/>
+                </a:solidFill>
+                <a:latin typeface="Arial"/>
+              </a:defRPr>
+            </a:pPr>
+            <a:r>
+              <a:t>🧹 Input Sanitizer: Filter classes inspect all inbound strings to wipe out SQL injections and HTML tags.</a:t>
+            </a:r>
+          </a:p>
+          <a:p>
+            <a:pPr>
+              <a:spcBef>
+                <a:spcPts val="1000"/>
+              </a:spcBef>
+              <a:defRPr sz="1500">
+                <a:solidFill>
+                  <a:srgbClr val="1C1C1E"/>
+                </a:solidFill>
+                <a:latin typeface="Arial"/>
+              </a:defRPr>
+            </a:pPr>
+            <a:r>
+              <a:t>🔓 JWT Authentication: Endpoint controller decorator `@token_required` validates student API sessions.</a:t>
+            </a:r>
+          </a:p>
+        </p:txBody>
+      </p:sp>
+      <p:sp>
+        <p:nvSpPr>
+          <p:cNvPr id="7" name="Rounded Rectangle 6"/>
           <p:cNvSpPr/>
           <p:nvPr/>
         </p:nvSpPr>
         <p:spPr>
           <a:xfrm>
-            <a:off x="1554480" y="1828800"/>
-            <a:ext cx="1051560" cy="1051560"/>
-          </a:xfrm>
-          <a:prstGeom prst="ellipse">
+            <a:off x="8046720" y="1645920"/>
+            <a:ext cx="3383280" cy="4023360"/>
+          </a:xfrm>
+          <a:prstGeom prst="roundRect">
             <a:avLst/>
           </a:prstGeom>
           <a:solidFill>
-            <a:srgbClr val="00317E"/>
+            <a:srgbClr val="1C1C1E"/>
           </a:solidFill>
-          <a:ln w="25400">
+          <a:ln w="19050">
             <a:solidFill>
               <a:srgbClr val="D4AF37"/>
             </a:solidFill>
@@ -4508,61 +4557,6 @@
           <a:bodyPr rtlCol="0" anchor="ctr"/>
           <a:lstStyle/>
           <a:p>
-            <a:pPr algn="ctr">
-              <a:defRPr sz="2800" b="1">
-                <a:solidFill>
-                  <a:srgbClr val="D4AF37"/>
-                </a:solidFill>
-                <a:latin typeface="Arial"/>
-              </a:defRPr>
-            </a:pPr>
-            <a:r>
-              <a:t>1</a:t>
-            </a:r>
-          </a:p>
-        </p:txBody>
-      </p:sp>
-      <p:sp>
-        <p:nvSpPr>
-          <p:cNvPr id="7" name="Rectangle 6"/>
-          <p:cNvSpPr/>
-          <p:nvPr/>
-        </p:nvSpPr>
-        <p:spPr>
-          <a:xfrm>
-            <a:off x="731520" y="3108960"/>
-            <a:ext cx="2697480" cy="2743200"/>
-          </a:xfrm>
-          <a:prstGeom prst="rect">
-            <a:avLst/>
-          </a:prstGeom>
-          <a:solidFill>
-            <a:srgbClr val="F2F2F7"/>
-          </a:solidFill>
-          <a:ln>
-            <a:solidFill>
-              <a:srgbClr val="F2F2F7"/>
-            </a:solidFill>
-          </a:ln>
-        </p:spPr>
-        <p:style>
-          <a:lnRef idx="1">
-            <a:schemeClr val="accent1"/>
-          </a:lnRef>
-          <a:fillRef idx="3">
-            <a:schemeClr val="accent1"/>
-          </a:fillRef>
-          <a:effectRef idx="2">
-            <a:schemeClr val="accent1"/>
-          </a:effectRef>
-          <a:fontRef idx="minor">
-            <a:schemeClr val="lt1"/>
-          </a:fontRef>
-        </p:style>
-        <p:txBody>
-          <a:bodyPr rtlCol="0" anchor="ctr"/>
-          <a:lstStyle/>
-          <a:p>
             <a:pPr algn="ctr"/>
           </a:p>
         </p:txBody>
@@ -4575,8 +4569,8 @@
         </p:nvSpPr>
         <p:spPr>
           <a:xfrm>
-            <a:off x="822960" y="3200400"/>
-            <a:ext cx="2514600" cy="2560320"/>
+            <a:off x="8229600" y="1828800"/>
+            <a:ext cx="3017520" cy="3657600"/>
           </a:xfrm>
           <a:prstGeom prst="rect">
             <a:avLst/>
@@ -4589,79 +4583,11 @@
           </a:bodyPr>
           <a:lstStyle/>
           <a:p>
-            <a:pPr algn="ctr">
+            <a:pPr>
               <a:spcAft>
                 <a:spcPts val="1000"/>
               </a:spcAft>
-              <a:defRPr sz="1600" b="1">
-                <a:solidFill>
-                  <a:srgbClr val="00317E"/>
-                </a:solidFill>
-                <a:latin typeface="Arial"/>
-              </a:defRPr>
-            </a:pPr>
-            <a:r>
-              <a:t>Personal Info</a:t>
-            </a:r>
-          </a:p>
-          <a:p>
-            <a:pPr algn="ctr">
-              <a:defRPr sz="1200">
-                <a:solidFill>
-                  <a:srgbClr val="1C1C1E"/>
-                </a:solidFill>
-                <a:latin typeface="Arial"/>
-              </a:defRPr>
-            </a:pPr>
-            <a:r>
-              <a:t>Full name, DOB, email, and phone validation.</a:t>
-            </a:r>
-          </a:p>
-        </p:txBody>
-      </p:sp>
-      <p:sp>
-        <p:nvSpPr>
-          <p:cNvPr id="9" name="Oval 8"/>
-          <p:cNvSpPr/>
-          <p:nvPr/>
-        </p:nvSpPr>
-        <p:spPr>
-          <a:xfrm>
-            <a:off x="4251960" y="1828800"/>
-            <a:ext cx="1051560" cy="1051560"/>
-          </a:xfrm>
-          <a:prstGeom prst="ellipse">
-            <a:avLst/>
-          </a:prstGeom>
-          <a:solidFill>
-            <a:srgbClr val="00317E"/>
-          </a:solidFill>
-          <a:ln w="25400">
-            <a:solidFill>
-              <a:srgbClr val="D4AF37"/>
-            </a:solidFill>
-          </a:ln>
-        </p:spPr>
-        <p:style>
-          <a:lnRef idx="1">
-            <a:schemeClr val="accent1"/>
-          </a:lnRef>
-          <a:fillRef idx="3">
-            <a:schemeClr val="accent1"/>
-          </a:fillRef>
-          <a:effectRef idx="2">
-            <a:schemeClr val="accent1"/>
-          </a:effectRef>
-          <a:fontRef idx="minor">
-            <a:schemeClr val="lt1"/>
-          </a:fontRef>
-        </p:style>
-        <p:txBody>
-          <a:bodyPr rtlCol="0" anchor="ctr"/>
-          <a:lstStyle/>
-          <a:p>
-            <a:pPr algn="ctr">
-              <a:defRPr sz="2800" b="1">
+              <a:defRPr sz="1200" b="1">
                 <a:solidFill>
                   <a:srgbClr val="D4AF37"/>
                 </a:solidFill>
@@ -4669,408 +4595,67 @@
               </a:defRPr>
             </a:pPr>
             <a:r>
-              <a:t>2</a:t>
-            </a:r>
-          </a:p>
-        </p:txBody>
-      </p:sp>
-      <p:sp>
-        <p:nvSpPr>
-          <p:cNvPr id="10" name="Rectangle 9"/>
-          <p:cNvSpPr/>
-          <p:nvPr/>
-        </p:nvSpPr>
-        <p:spPr>
-          <a:xfrm>
-            <a:off x="3429000" y="3108960"/>
-            <a:ext cx="2697480" cy="2743200"/>
-          </a:xfrm>
-          <a:prstGeom prst="rect">
-            <a:avLst/>
-          </a:prstGeom>
-          <a:solidFill>
-            <a:srgbClr val="F2F2F7"/>
-          </a:solidFill>
-          <a:ln>
-            <a:solidFill>
-              <a:srgbClr val="F2F2F7"/>
-            </a:solidFill>
-          </a:ln>
-        </p:spPr>
-        <p:style>
-          <a:lnRef idx="1">
-            <a:schemeClr val="accent1"/>
-          </a:lnRef>
-          <a:fillRef idx="3">
-            <a:schemeClr val="accent1"/>
-          </a:fillRef>
-          <a:effectRef idx="2">
-            <a:schemeClr val="accent1"/>
-          </a:effectRef>
-          <a:fontRef idx="minor">
-            <a:schemeClr val="lt1"/>
-          </a:fontRef>
-        </p:style>
-        <p:txBody>
-          <a:bodyPr rtlCol="0" anchor="ctr"/>
-          <a:lstStyle/>
-          <a:p>
-            <a:pPr algn="ctr"/>
-          </a:p>
-        </p:txBody>
-      </p:sp>
-      <p:sp>
-        <p:nvSpPr>
-          <p:cNvPr id="11" name="TextBox 10"/>
-          <p:cNvSpPr txBox="1"/>
-          <p:nvPr/>
-        </p:nvSpPr>
-        <p:spPr>
-          <a:xfrm>
-            <a:off x="3520440" y="3200400"/>
-            <a:ext cx="2514600" cy="2560320"/>
-          </a:xfrm>
-          <a:prstGeom prst="rect">
-            <a:avLst/>
-          </a:prstGeom>
-          <a:noFill/>
-        </p:spPr>
-        <p:txBody>
-          <a:bodyPr wrap="square">
-            <a:spAutoFit/>
-          </a:bodyPr>
-          <a:lstStyle/>
-          <a:p>
-            <a:pPr algn="ctr">
-              <a:spcAft>
-                <a:spcPts val="1000"/>
-              </a:spcAft>
-              <a:defRPr sz="1600" b="1">
-                <a:solidFill>
-                  <a:srgbClr val="00317E"/>
-                </a:solidFill>
-                <a:latin typeface="Arial"/>
-              </a:defRPr>
-            </a:pPr>
-            <a:r>
-              <a:t>Address Details</a:t>
-            </a:r>
-          </a:p>
-          <a:p>
-            <a:pPr algn="ctr">
-              <a:defRPr sz="1200">
-                <a:solidFill>
-                  <a:srgbClr val="1C1C1E"/>
-                </a:solidFill>
-                <a:latin typeface="Arial"/>
-              </a:defRPr>
-            </a:pPr>
-            <a:r>
-              <a:t>Mailing address, state, city, and ZIP validations.</a:t>
-            </a:r>
-          </a:p>
-        </p:txBody>
-      </p:sp>
-      <p:sp>
-        <p:nvSpPr>
-          <p:cNvPr id="12" name="Oval 11"/>
-          <p:cNvSpPr/>
-          <p:nvPr/>
-        </p:nvSpPr>
-        <p:spPr>
-          <a:xfrm>
-            <a:off x="6949440" y="1828800"/>
-            <a:ext cx="1051560" cy="1051560"/>
-          </a:xfrm>
-          <a:prstGeom prst="ellipse">
-            <a:avLst/>
-          </a:prstGeom>
-          <a:solidFill>
-            <a:srgbClr val="00317E"/>
-          </a:solidFill>
-          <a:ln w="25400">
-            <a:solidFill>
-              <a:srgbClr val="D4AF37"/>
-            </a:solidFill>
-          </a:ln>
-        </p:spPr>
-        <p:style>
-          <a:lnRef idx="1">
-            <a:schemeClr val="accent1"/>
-          </a:lnRef>
-          <a:fillRef idx="3">
-            <a:schemeClr val="accent1"/>
-          </a:fillRef>
-          <a:effectRef idx="2">
-            <a:schemeClr val="accent1"/>
-          </a:effectRef>
-          <a:fontRef idx="minor">
-            <a:schemeClr val="lt1"/>
-          </a:fontRef>
-        </p:style>
-        <p:txBody>
-          <a:bodyPr rtlCol="0" anchor="ctr"/>
-          <a:lstStyle/>
-          <a:p>
-            <a:pPr algn="ctr">
-              <a:defRPr sz="2800" b="1">
-                <a:solidFill>
-                  <a:srgbClr val="D4AF37"/>
-                </a:solidFill>
-                <a:latin typeface="Arial"/>
-              </a:defRPr>
-            </a:pPr>
-            <a:r>
-              <a:t>3</a:t>
-            </a:r>
-          </a:p>
-        </p:txBody>
-      </p:sp>
-      <p:sp>
-        <p:nvSpPr>
-          <p:cNvPr id="13" name="Rectangle 12"/>
-          <p:cNvSpPr/>
-          <p:nvPr/>
-        </p:nvSpPr>
-        <p:spPr>
-          <a:xfrm>
-            <a:off x="6126480" y="3108960"/>
-            <a:ext cx="2697480" cy="2743200"/>
-          </a:xfrm>
-          <a:prstGeom prst="rect">
-            <a:avLst/>
-          </a:prstGeom>
-          <a:solidFill>
-            <a:srgbClr val="F2F2F7"/>
-          </a:solidFill>
-          <a:ln>
-            <a:solidFill>
-              <a:srgbClr val="F2F2F7"/>
-            </a:solidFill>
-          </a:ln>
-        </p:spPr>
-        <p:style>
-          <a:lnRef idx="1">
-            <a:schemeClr val="accent1"/>
-          </a:lnRef>
-          <a:fillRef idx="3">
-            <a:schemeClr val="accent1"/>
-          </a:fillRef>
-          <a:effectRef idx="2">
-            <a:schemeClr val="accent1"/>
-          </a:effectRef>
-          <a:fontRef idx="minor">
-            <a:schemeClr val="lt1"/>
-          </a:fontRef>
-        </p:style>
-        <p:txBody>
-          <a:bodyPr rtlCol="0" anchor="ctr"/>
-          <a:lstStyle/>
-          <a:p>
-            <a:pPr algn="ctr"/>
-          </a:p>
-        </p:txBody>
-      </p:sp>
-      <p:sp>
-        <p:nvSpPr>
-          <p:cNvPr id="14" name="TextBox 13"/>
-          <p:cNvSpPr txBox="1"/>
-          <p:nvPr/>
-        </p:nvSpPr>
-        <p:spPr>
-          <a:xfrm>
-            <a:off x="6217920" y="3200400"/>
-            <a:ext cx="2514600" cy="2560320"/>
-          </a:xfrm>
-          <a:prstGeom prst="rect">
-            <a:avLst/>
-          </a:prstGeom>
-          <a:noFill/>
-        </p:spPr>
-        <p:txBody>
-          <a:bodyPr wrap="square">
-            <a:spAutoFit/>
-          </a:bodyPr>
-          <a:lstStyle/>
-          <a:p>
-            <a:pPr algn="ctr">
-              <a:spcAft>
-                <a:spcPts val="1000"/>
-              </a:spcAft>
-              <a:defRPr sz="1600" b="1">
-                <a:solidFill>
-                  <a:srgbClr val="00317E"/>
-                </a:solidFill>
-                <a:latin typeface="Arial"/>
-              </a:defRPr>
-            </a:pPr>
-            <a:r>
-              <a:t>Academic Profile</a:t>
-            </a:r>
-          </a:p>
-          <a:p>
-            <a:pPr algn="ctr">
-              <a:defRPr sz="1200">
-                <a:solidFill>
-                  <a:srgbClr val="1C1C1E"/>
-                </a:solidFill>
-                <a:latin typeface="Arial"/>
-              </a:defRPr>
-            </a:pPr>
-            <a:r>
-              <a:t>Select high school, graduation year, major, and course schedule.</a:t>
-            </a:r>
-          </a:p>
-        </p:txBody>
-      </p:sp>
-      <p:sp>
-        <p:nvSpPr>
-          <p:cNvPr id="15" name="Oval 14"/>
-          <p:cNvSpPr/>
-          <p:nvPr/>
-        </p:nvSpPr>
-        <p:spPr>
-          <a:xfrm>
-            <a:off x="9646920" y="1828800"/>
-            <a:ext cx="1051560" cy="1051560"/>
-          </a:xfrm>
-          <a:prstGeom prst="ellipse">
-            <a:avLst/>
-          </a:prstGeom>
-          <a:solidFill>
-            <a:srgbClr val="00317E"/>
-          </a:solidFill>
-          <a:ln w="25400">
-            <a:solidFill>
-              <a:srgbClr val="D4AF37"/>
-            </a:solidFill>
-          </a:ln>
-        </p:spPr>
-        <p:style>
-          <a:lnRef idx="1">
-            <a:schemeClr val="accent1"/>
-          </a:lnRef>
-          <a:fillRef idx="3">
-            <a:schemeClr val="accent1"/>
-          </a:fillRef>
-          <a:effectRef idx="2">
-            <a:schemeClr val="accent1"/>
-          </a:effectRef>
-          <a:fontRef idx="minor">
-            <a:schemeClr val="lt1"/>
-          </a:fontRef>
-        </p:style>
-        <p:txBody>
-          <a:bodyPr rtlCol="0" anchor="ctr"/>
-          <a:lstStyle/>
-          <a:p>
-            <a:pPr algn="ctr">
-              <a:defRPr sz="2800" b="1">
-                <a:solidFill>
-                  <a:srgbClr val="D4AF37"/>
-                </a:solidFill>
-                <a:latin typeface="Arial"/>
-              </a:defRPr>
-            </a:pPr>
-            <a:r>
-              <a:t>4</a:t>
-            </a:r>
-          </a:p>
-        </p:txBody>
-      </p:sp>
-      <p:sp>
-        <p:nvSpPr>
-          <p:cNvPr id="16" name="Rectangle 15"/>
-          <p:cNvSpPr/>
-          <p:nvPr/>
-        </p:nvSpPr>
-        <p:spPr>
-          <a:xfrm>
-            <a:off x="8823960" y="3108960"/>
-            <a:ext cx="2697480" cy="2743200"/>
-          </a:xfrm>
-          <a:prstGeom prst="rect">
-            <a:avLst/>
-          </a:prstGeom>
-          <a:solidFill>
-            <a:srgbClr val="F2F2F7"/>
-          </a:solidFill>
-          <a:ln>
-            <a:solidFill>
-              <a:srgbClr val="F2F2F7"/>
-            </a:solidFill>
-          </a:ln>
-        </p:spPr>
-        <p:style>
-          <a:lnRef idx="1">
-            <a:schemeClr val="accent1"/>
-          </a:lnRef>
-          <a:fillRef idx="3">
-            <a:schemeClr val="accent1"/>
-          </a:fillRef>
-          <a:effectRef idx="2">
-            <a:schemeClr val="accent1"/>
-          </a:effectRef>
-          <a:fontRef idx="minor">
-            <a:schemeClr val="lt1"/>
-          </a:fontRef>
-        </p:style>
-        <p:txBody>
-          <a:bodyPr rtlCol="0" anchor="ctr"/>
-          <a:lstStyle/>
-          <a:p>
-            <a:pPr algn="ctr"/>
-          </a:p>
-        </p:txBody>
-      </p:sp>
-      <p:sp>
-        <p:nvSpPr>
-          <p:cNvPr id="17" name="TextBox 16"/>
-          <p:cNvSpPr txBox="1"/>
-          <p:nvPr/>
-        </p:nvSpPr>
-        <p:spPr>
-          <a:xfrm>
-            <a:off x="8915400" y="3200400"/>
-            <a:ext cx="2514600" cy="2560320"/>
-          </a:xfrm>
-          <a:prstGeom prst="rect">
-            <a:avLst/>
-          </a:prstGeom>
-          <a:noFill/>
-        </p:spPr>
-        <p:txBody>
-          <a:bodyPr wrap="square">
-            <a:spAutoFit/>
-          </a:bodyPr>
-          <a:lstStyle/>
-          <a:p>
-            <a:pPr algn="ctr">
-              <a:spcAft>
-                <a:spcPts val="1000"/>
-              </a:spcAft>
-              <a:defRPr sz="1600" b="1">
-                <a:solidFill>
-                  <a:srgbClr val="00317E"/>
-                </a:solidFill>
-                <a:latin typeface="Arial"/>
-              </a:defRPr>
-            </a:pPr>
-            <a:r>
-              <a:t>Account Settings</a:t>
-            </a:r>
-          </a:p>
-          <a:p>
-            <a:pPr algn="ctr">
-              <a:defRPr sz="1200">
-                <a:solidFill>
-                  <a:srgbClr val="1C1C1E"/>
-                </a:solidFill>
-                <a:latin typeface="Arial"/>
-              </a:defRPr>
-            </a:pPr>
-            <a:r>
-              <a:t>Set up password with strength meter, and review terms.</a:t>
+              <a:t>LOG FORMAT SAMPLE</a:t>
+            </a:r>
+          </a:p>
+          <a:p>
+            <a:pPr>
+              <a:lnSpc>
+                <a:spcPct val="110000"/>
+              </a:lnSpc>
+              <a:defRPr sz="1050">
+                <a:solidFill>
+                  <a:srgbClr val="00FFFF"/>
+                </a:solidFill>
+                <a:latin typeface="Courier New"/>
+              </a:defRPr>
+            </a:pPr>
+            <a:r>
+              <a:t>2026-05-24 10:45:01 [INFO]</a:t>
+            </a:r>
+            <a:br/>
+            <a:r>
+              <a:t>AuditLog: {</a:t>
+            </a:r>
+            <a:br/>
+            <a:r>
+              <a:t>  "request_id": "8a32-9b2f",</a:t>
+            </a:r>
+            <a:br/>
+            <a:r>
+              <a:t>  "user_id": 14,</a:t>
+            </a:r>
+            <a:br/>
+            <a:r>
+              <a:t>  "action": "UPDATE_PROFILE",</a:t>
+            </a:r>
+            <a:br/>
+            <a:r>
+              <a:t>  "ip": "127.0.0.1",</a:t>
+            </a:r>
+            <a:br/>
+            <a:r>
+              <a:t>  "timestamp": "10:45:01",</a:t>
+            </a:r>
+            <a:br/>
+            <a:r>
+              <a:t>  "details": {</a:t>
+            </a:r>
+            <a:br/>
+            <a:r>
+              <a:t>    "student_id": "STU-2026-A3",</a:t>
+            </a:r>
+            <a:br/>
+            <a:r>
+              <a:t>    "status": "active"</a:t>
+            </a:r>
+            <a:br/>
+            <a:r>
+              <a:t>  }</a:t>
+            </a:r>
+            <a:br/>
+            <a:r>
+              <a:t>}</a:t>
             </a:r>
           </a:p>
         </p:txBody>
@@ -5083,7 +4668,7 @@
 </p:sld>
 </file>
 
-<file path=ppt/slides/slide5.xml><?xml version="1.0" encoding="utf-8"?>
+<file path=ppt/slides/slide13.xml><?xml version="1.0" encoding="utf-8"?>
 <p:sld xmlns:a="http://schemas.openxmlformats.org/drawingml/2006/main" xmlns:p="http://schemas.openxmlformats.org/presentationml/2006/main" xmlns:r="http://schemas.openxmlformats.org/officeDocument/2006/relationships">
   <p:cSld>
     <p:bg>
@@ -5192,1000 +4777,7 @@
               </a:defRPr>
             </a:pPr>
             <a:r>
-              <a:t>Admin Panel &amp; Data Control</a:t>
-            </a:r>
-          </a:p>
-        </p:txBody>
-      </p:sp>
-      <p:sp>
-        <p:nvSpPr>
-          <p:cNvPr id="5" name="Rectangle 4"/>
-          <p:cNvSpPr/>
-          <p:nvPr/>
-        </p:nvSpPr>
-        <p:spPr>
-          <a:xfrm>
-            <a:off x="731520" y="1051560"/>
-            <a:ext cx="10698480" cy="36576"/>
-          </a:xfrm>
-          <a:prstGeom prst="rect">
-            <a:avLst/>
-          </a:prstGeom>
-          <a:solidFill>
-            <a:srgbClr val="D4AF37"/>
-          </a:solidFill>
-          <a:ln>
-            <a:solidFill>
-              <a:srgbClr val="D4AF37"/>
-            </a:solidFill>
-          </a:ln>
-        </p:spPr>
-        <p:style>
-          <a:lnRef idx="1">
-            <a:schemeClr val="accent1"/>
-          </a:lnRef>
-          <a:fillRef idx="3">
-            <a:schemeClr val="accent1"/>
-          </a:fillRef>
-          <a:effectRef idx="2">
-            <a:schemeClr val="accent1"/>
-          </a:effectRef>
-          <a:fontRef idx="minor">
-            <a:schemeClr val="lt1"/>
-          </a:fontRef>
-        </p:style>
-        <p:txBody>
-          <a:bodyPr rtlCol="0" anchor="ctr"/>
-          <a:lstStyle/>
-          <a:p>
-            <a:pPr algn="ctr"/>
-          </a:p>
-        </p:txBody>
-      </p:sp>
-      <p:sp>
-        <p:nvSpPr>
-          <p:cNvPr id="6" name="TextBox 5"/>
-          <p:cNvSpPr txBox="1"/>
-          <p:nvPr/>
-        </p:nvSpPr>
-        <p:spPr>
-          <a:xfrm>
-            <a:off x="731520" y="1463040"/>
-            <a:ext cx="6858000" cy="4389120"/>
-          </a:xfrm>
-          <a:prstGeom prst="rect">
-            <a:avLst/>
-          </a:prstGeom>
-          <a:noFill/>
-        </p:spPr>
-        <p:txBody>
-          <a:bodyPr wrap="square" lIns="0" tIns="0" bIns="0" rIns="0">
-            <a:spAutoFit/>
-          </a:bodyPr>
-          <a:lstStyle/>
-          <a:p>
-            <a:pPr>
-              <a:spcAft>
-                <a:spcPts val="2000"/>
-              </a:spcAft>
-              <a:defRPr sz="1800">
-                <a:solidFill>
-                  <a:srgbClr val="1C1C1E"/>
-                </a:solidFill>
-                <a:latin typeface="Arial"/>
-              </a:defRPr>
-            </a:pPr>
-            <a:r>
-              <a:t>The Admin Console (/admin) provides university administrators with total authority over candidate files, enrollment figures, and system settings.</a:t>
-            </a:r>
-          </a:p>
-          <a:p>
-            <a:pPr>
-              <a:spcBef>
-                <a:spcPts val="1200"/>
-              </a:spcBef>
-              <a:defRPr sz="1500">
-                <a:solidFill>
-                  <a:srgbClr val="1C1C1E"/>
-                </a:solidFill>
-                <a:latin typeface="Arial"/>
-              </a:defRPr>
-            </a:pPr>
-            <a:r>
-              <a:t>👥 Integrated Search &amp; Sort: Locate candidates instantly by Name, ID, or Major.</a:t>
-            </a:r>
-          </a:p>
-          <a:p>
-            <a:pPr>
-              <a:spcBef>
-                <a:spcPts val="1200"/>
-              </a:spcBef>
-              <a:defRPr sz="1500">
-                <a:solidFill>
-                  <a:srgbClr val="1C1C1E"/>
-                </a:solidFill>
-                <a:latin typeface="Arial"/>
-              </a:defRPr>
-            </a:pPr>
-            <a:r>
-              <a:t>📊 KPI Analysis Cards: Visual cards showing total enrollments, active courses, and status.</a:t>
-            </a:r>
-          </a:p>
-          <a:p>
-            <a:pPr>
-              <a:spcBef>
-                <a:spcPts val="1200"/>
-              </a:spcBef>
-              <a:defRPr sz="1500">
-                <a:solidFill>
-                  <a:srgbClr val="1C1C1E"/>
-                </a:solidFill>
-                <a:latin typeface="Arial"/>
-              </a:defRPr>
-            </a:pPr>
-            <a:r>
-              <a:t>📈 Analytics Graphs: Chart.js rendering breakdown percentages of academic majors.</a:t>
-            </a:r>
-          </a:p>
-          <a:p>
-            <a:pPr>
-              <a:spcBef>
-                <a:spcPts val="1200"/>
-              </a:spcBef>
-              <a:defRPr sz="1500">
-                <a:solidFill>
-                  <a:srgbClr val="1C1C1E"/>
-                </a:solidFill>
-                <a:latin typeface="Arial"/>
-              </a:defRPr>
-            </a:pPr>
-            <a:r>
-              <a:t>✏️ Profile Editor: Update course schedules, academic records, and statuses.</a:t>
-            </a:r>
-          </a:p>
-        </p:txBody>
-      </p:sp>
-      <p:sp>
-        <p:nvSpPr>
-          <p:cNvPr id="7" name="Rounded Rectangle 6"/>
-          <p:cNvSpPr/>
-          <p:nvPr/>
-        </p:nvSpPr>
-        <p:spPr>
-          <a:xfrm>
-            <a:off x="8046720" y="1645920"/>
-            <a:ext cx="3383280" cy="4023360"/>
-          </a:xfrm>
-          <a:prstGeom prst="roundRect">
-            <a:avLst/>
-          </a:prstGeom>
-          <a:solidFill>
-            <a:srgbClr val="F2F2F7"/>
-          </a:solidFill>
-          <a:ln w="19050">
-            <a:solidFill>
-              <a:srgbClr val="00317E"/>
-            </a:solidFill>
-          </a:ln>
-        </p:spPr>
-        <p:style>
-          <a:lnRef idx="1">
-            <a:schemeClr val="accent1"/>
-          </a:lnRef>
-          <a:fillRef idx="3">
-            <a:schemeClr val="accent1"/>
-          </a:fillRef>
-          <a:effectRef idx="2">
-            <a:schemeClr val="accent1"/>
-          </a:effectRef>
-          <a:fontRef idx="minor">
-            <a:schemeClr val="lt1"/>
-          </a:fontRef>
-        </p:style>
-        <p:txBody>
-          <a:bodyPr rtlCol="0" anchor="ctr"/>
-          <a:lstStyle/>
-          <a:p>
-            <a:pPr algn="ctr"/>
-          </a:p>
-        </p:txBody>
-      </p:sp>
-      <p:sp>
-        <p:nvSpPr>
-          <p:cNvPr id="8" name="TextBox 7"/>
-          <p:cNvSpPr txBox="1"/>
-          <p:nvPr/>
-        </p:nvSpPr>
-        <p:spPr>
-          <a:xfrm>
-            <a:off x="8321040" y="1920240"/>
-            <a:ext cx="2834640" cy="3474720"/>
-          </a:xfrm>
-          <a:prstGeom prst="rect">
-            <a:avLst/>
-          </a:prstGeom>
-          <a:noFill/>
-        </p:spPr>
-        <p:txBody>
-          <a:bodyPr wrap="square">
-            <a:spAutoFit/>
-          </a:bodyPr>
-          <a:lstStyle/>
-          <a:p>
-            <a:pPr>
-              <a:spcAft>
-                <a:spcPts val="2000"/>
-              </a:spcAft>
-              <a:defRPr sz="1400" b="1">
-                <a:solidFill>
-                  <a:srgbClr val="D4AF37"/>
-                </a:solidFill>
-                <a:latin typeface="Arial"/>
-              </a:defRPr>
-            </a:pPr>
-            <a:r>
-              <a:t>PORTAL ACCESS</a:t>
-            </a:r>
-          </a:p>
-          <a:p>
-            <a:pPr>
-              <a:defRPr sz="1300" b="1">
-                <a:solidFill>
-                  <a:srgbClr val="00317E"/>
-                </a:solidFill>
-                <a:latin typeface="Arial"/>
-              </a:defRPr>
-            </a:pPr>
-            <a:r>
-              <a:t>🔒 Admin URL:</a:t>
-            </a:r>
-          </a:p>
-          <a:p>
-            <a:pPr>
-              <a:spcAft>
-                <a:spcPts val="1000"/>
-              </a:spcAft>
-              <a:defRPr sz="1100">
-                <a:solidFill>
-                  <a:srgbClr val="1C1C1E"/>
-                </a:solidFill>
-                <a:latin typeface="Courier New"/>
-              </a:defRPr>
-            </a:pPr>
-            <a:r>
-              <a:t>https://f0e3e2dbe03207.lhr.life/admin</a:t>
-            </a:r>
-          </a:p>
-          <a:p>
-            <a:pPr>
-              <a:defRPr sz="1300" b="1">
-                <a:solidFill>
-                  <a:srgbClr val="00317E"/>
-                </a:solidFill>
-                <a:latin typeface="Arial"/>
-              </a:defRPr>
-            </a:pPr>
-            <a:r>
-              <a:t>📧 Email login:</a:t>
-            </a:r>
-          </a:p>
-          <a:p>
-            <a:pPr>
-              <a:spcAft>
-                <a:spcPts val="1000"/>
-              </a:spcAft>
-              <a:defRPr sz="1200">
-                <a:solidFill>
-                  <a:srgbClr val="1C1C1E"/>
-                </a:solidFill>
-                <a:latin typeface="Courier New"/>
-              </a:defRPr>
-            </a:pPr>
-            <a:r>
-              <a:t>admin@school.com</a:t>
-            </a:r>
-          </a:p>
-          <a:p>
-            <a:pPr>
-              <a:defRPr sz="1300" b="1">
-                <a:solidFill>
-                  <a:srgbClr val="00317E"/>
-                </a:solidFill>
-                <a:latin typeface="Arial"/>
-              </a:defRPr>
-            </a:pPr>
-            <a:r>
-              <a:t>🔑 Password:</a:t>
-            </a:r>
-          </a:p>
-          <a:p>
-            <a:pPr>
-              <a:defRPr sz="1200">
-                <a:solidFill>
-                  <a:srgbClr val="1C1C1E"/>
-                </a:solidFill>
-                <a:latin typeface="Courier New"/>
-              </a:defRPr>
-            </a:pPr>
-            <a:r>
-              <a:t>Admin123!</a:t>
-            </a:r>
-          </a:p>
-        </p:txBody>
-      </p:sp>
-    </p:spTree>
-  </p:cSld>
-  <p:clrMapOvr>
-    <a:masterClrMapping/>
-  </p:clrMapOvr>
-</p:sld>
-</file>
-
-<file path=ppt/slides/slide6.xml><?xml version="1.0" encoding="utf-8"?>
-<p:sld xmlns:a="http://schemas.openxmlformats.org/drawingml/2006/main" xmlns:p="http://schemas.openxmlformats.org/presentationml/2006/main" xmlns:r="http://schemas.openxmlformats.org/officeDocument/2006/relationships">
-  <p:cSld>
-    <p:bg>
-      <p:bgPr>
-        <a:solidFill>
-          <a:srgbClr val="FFFFFF"/>
-        </a:solidFill>
-        <a:effectLst/>
-      </p:bgPr>
-    </p:bg>
-    <p:spTree>
-      <p:nvGrpSpPr>
-        <p:cNvPr id="1" name=""/>
-        <p:cNvGrpSpPr/>
-        <p:nvPr/>
-      </p:nvGrpSpPr>
-      <p:grpSpPr/>
-      <p:pic>
-        <p:nvPicPr>
-          <p:cNvPr id="2" name="Picture 1" descr="logo.png"/>
-          <p:cNvPicPr>
-            <a:picLocks noChangeAspect="1"/>
-          </p:cNvPicPr>
-          <p:nvPr/>
-        </p:nvPicPr>
-        <p:blipFill>
-          <a:blip r:embed="rId2"/>
-          <a:stretch>
-            <a:fillRect/>
-          </a:stretch>
-        </p:blipFill>
-        <p:spPr>
-          <a:xfrm>
-            <a:off x="9601200" y="228600"/>
-            <a:ext cx="2286000" cy="699304"/>
-          </a:xfrm>
-          <a:prstGeom prst="rect">
-            <a:avLst/>
-          </a:prstGeom>
-        </p:spPr>
-      </p:pic>
-      <p:sp>
-        <p:nvSpPr>
-          <p:cNvPr id="3" name="TextBox 2"/>
-          <p:cNvSpPr txBox="1"/>
-          <p:nvPr/>
-        </p:nvSpPr>
-        <p:spPr>
-          <a:xfrm>
-            <a:off x="731520" y="6400800"/>
-            <a:ext cx="10698480" cy="365760"/>
-          </a:xfrm>
-          <a:prstGeom prst="rect">
-            <a:avLst/>
-          </a:prstGeom>
-          <a:noFill/>
-        </p:spPr>
-        <p:txBody>
-          <a:bodyPr wrap="square" lIns="0" tIns="0" bIns="0" rIns="0">
-            <a:spAutoFit/>
-          </a:bodyPr>
-          <a:lstStyle/>
-          <a:p>
-            <a:pPr algn="ctr">
-              <a:defRPr sz="950">
-                <a:solidFill>
-                  <a:srgbClr val="6E6E73"/>
-                </a:solidFill>
-                <a:latin typeface="Arial"/>
-              </a:defRPr>
-            </a:pPr>
-            <a:r>
-              <a:t>Student Hub  |  Sapthagiri University  |  Keerthana GP (24SUUBECS0914)  |  Keerthana BS (23SUUBECS0909)  |  Kiran M Biradar (24SUUBECS0937)</a:t>
-            </a:r>
-          </a:p>
-        </p:txBody>
-      </p:sp>
-      <p:sp>
-        <p:nvSpPr>
-          <p:cNvPr id="4" name="TextBox 3"/>
-          <p:cNvSpPr txBox="1"/>
-          <p:nvPr/>
-        </p:nvSpPr>
-        <p:spPr>
-          <a:xfrm>
-            <a:off x="731520" y="365760"/>
-            <a:ext cx="8686800" cy="731520"/>
-          </a:xfrm>
-          <a:prstGeom prst="rect">
-            <a:avLst/>
-          </a:prstGeom>
-          <a:noFill/>
-        </p:spPr>
-        <p:txBody>
-          <a:bodyPr wrap="square" lIns="0" tIns="0" bIns="0" rIns="0">
-            <a:spAutoFit/>
-          </a:bodyPr>
-          <a:lstStyle/>
-          <a:p>
-            <a:pPr>
-              <a:defRPr sz="2800" b="1">
-                <a:solidFill>
-                  <a:srgbClr val="00317E"/>
-                </a:solidFill>
-                <a:latin typeface="Arial"/>
-              </a:defRPr>
-            </a:pPr>
-            <a:r>
-              <a:t>Production Security Architecture</a:t>
-            </a:r>
-          </a:p>
-        </p:txBody>
-      </p:sp>
-      <p:sp>
-        <p:nvSpPr>
-          <p:cNvPr id="5" name="Rectangle 4"/>
-          <p:cNvSpPr/>
-          <p:nvPr/>
-        </p:nvSpPr>
-        <p:spPr>
-          <a:xfrm>
-            <a:off x="731520" y="1051560"/>
-            <a:ext cx="10698480" cy="36576"/>
-          </a:xfrm>
-          <a:prstGeom prst="rect">
-            <a:avLst/>
-          </a:prstGeom>
-          <a:solidFill>
-            <a:srgbClr val="D4AF37"/>
-          </a:solidFill>
-          <a:ln>
-            <a:solidFill>
-              <a:srgbClr val="D4AF37"/>
-            </a:solidFill>
-          </a:ln>
-        </p:spPr>
-        <p:style>
-          <a:lnRef idx="1">
-            <a:schemeClr val="accent1"/>
-          </a:lnRef>
-          <a:fillRef idx="3">
-            <a:schemeClr val="accent1"/>
-          </a:fillRef>
-          <a:effectRef idx="2">
-            <a:schemeClr val="accent1"/>
-          </a:effectRef>
-          <a:fontRef idx="minor">
-            <a:schemeClr val="lt1"/>
-          </a:fontRef>
-        </p:style>
-        <p:txBody>
-          <a:bodyPr rtlCol="0" anchor="ctr"/>
-          <a:lstStyle/>
-          <a:p>
-            <a:pPr algn="ctr"/>
-          </a:p>
-        </p:txBody>
-      </p:sp>
-      <p:sp>
-        <p:nvSpPr>
-          <p:cNvPr id="6" name="Rectangle 5"/>
-          <p:cNvSpPr/>
-          <p:nvPr/>
-        </p:nvSpPr>
-        <p:spPr>
-          <a:xfrm>
-            <a:off x="731520" y="1645920"/>
-            <a:ext cx="5212080" cy="1920240"/>
-          </a:xfrm>
-          <a:prstGeom prst="rect">
-            <a:avLst/>
-          </a:prstGeom>
-          <a:solidFill>
-            <a:srgbClr val="F2F2F7"/>
-          </a:solidFill>
-          <a:ln>
-            <a:solidFill>
-              <a:srgbClr val="F2F2F7"/>
-            </a:solidFill>
-          </a:ln>
-        </p:spPr>
-        <p:style>
-          <a:lnRef idx="1">
-            <a:schemeClr val="accent1"/>
-          </a:lnRef>
-          <a:fillRef idx="3">
-            <a:schemeClr val="accent1"/>
-          </a:fillRef>
-          <a:effectRef idx="2">
-            <a:schemeClr val="accent1"/>
-          </a:effectRef>
-          <a:fontRef idx="minor">
-            <a:schemeClr val="lt1"/>
-          </a:fontRef>
-        </p:style>
-        <p:txBody>
-          <a:bodyPr rtlCol="0" anchor="ctr"/>
-          <a:lstStyle/>
-          <a:p>
-            <a:pPr algn="ctr"/>
-          </a:p>
-        </p:txBody>
-      </p:sp>
-      <p:sp>
-        <p:nvSpPr>
-          <p:cNvPr id="7" name="TextBox 6"/>
-          <p:cNvSpPr txBox="1"/>
-          <p:nvPr/>
-        </p:nvSpPr>
-        <p:spPr>
-          <a:xfrm>
-            <a:off x="914400" y="1783080"/>
-            <a:ext cx="4846320" cy="1645920"/>
-          </a:xfrm>
-          <a:prstGeom prst="rect">
-            <a:avLst/>
-          </a:prstGeom>
-          <a:noFill/>
-        </p:spPr>
-        <p:txBody>
-          <a:bodyPr wrap="square">
-            <a:spAutoFit/>
-          </a:bodyPr>
-          <a:lstStyle/>
-          <a:p>
-            <a:pPr>
-              <a:spcAft>
-                <a:spcPts val="600"/>
-              </a:spcAft>
-              <a:defRPr sz="1600" b="1">
-                <a:solidFill>
-                  <a:srgbClr val="00317E"/>
-                </a:solidFill>
-                <a:latin typeface="Arial"/>
-              </a:defRPr>
-            </a:pPr>
-            <a:r>
-              <a:t>🛡️ Content Security Policy</a:t>
-            </a:r>
-          </a:p>
-          <a:p>
-            <a:pPr>
-              <a:defRPr sz="1250">
-                <a:solidFill>
-                  <a:srgbClr val="1C1C1E"/>
-                </a:solidFill>
-                <a:latin typeface="Arial"/>
-              </a:defRPr>
-            </a:pPr>
-            <a:r>
-              <a:t>Strict HTTP headers restricting script origins to self and approved CDN domains. Self-hosted Material Symbols font file avoids cross-site tracking/loading blockers.</a:t>
-            </a:r>
-          </a:p>
-        </p:txBody>
-      </p:sp>
-      <p:sp>
-        <p:nvSpPr>
-          <p:cNvPr id="8" name="Rectangle 7"/>
-          <p:cNvSpPr/>
-          <p:nvPr/>
-        </p:nvSpPr>
-        <p:spPr>
-          <a:xfrm>
-            <a:off x="6217920" y="1645920"/>
-            <a:ext cx="5212080" cy="1920240"/>
-          </a:xfrm>
-          <a:prstGeom prst="rect">
-            <a:avLst/>
-          </a:prstGeom>
-          <a:solidFill>
-            <a:srgbClr val="F2F2F7"/>
-          </a:solidFill>
-          <a:ln>
-            <a:solidFill>
-              <a:srgbClr val="F2F2F7"/>
-            </a:solidFill>
-          </a:ln>
-        </p:spPr>
-        <p:style>
-          <a:lnRef idx="1">
-            <a:schemeClr val="accent1"/>
-          </a:lnRef>
-          <a:fillRef idx="3">
-            <a:schemeClr val="accent1"/>
-          </a:fillRef>
-          <a:effectRef idx="2">
-            <a:schemeClr val="accent1"/>
-          </a:effectRef>
-          <a:fontRef idx="minor">
-            <a:schemeClr val="lt1"/>
-          </a:fontRef>
-        </p:style>
-        <p:txBody>
-          <a:bodyPr rtlCol="0" anchor="ctr"/>
-          <a:lstStyle/>
-          <a:p>
-            <a:pPr algn="ctr"/>
-          </a:p>
-        </p:txBody>
-      </p:sp>
-      <p:sp>
-        <p:nvSpPr>
-          <p:cNvPr id="9" name="TextBox 8"/>
-          <p:cNvSpPr txBox="1"/>
-          <p:nvPr/>
-        </p:nvSpPr>
-        <p:spPr>
-          <a:xfrm>
-            <a:off x="6400800" y="1783080"/>
-            <a:ext cx="4846320" cy="1645920"/>
-          </a:xfrm>
-          <a:prstGeom prst="rect">
-            <a:avLst/>
-          </a:prstGeom>
-          <a:noFill/>
-        </p:spPr>
-        <p:txBody>
-          <a:bodyPr wrap="square">
-            <a:spAutoFit/>
-          </a:bodyPr>
-          <a:lstStyle/>
-          <a:p>
-            <a:pPr>
-              <a:spcAft>
-                <a:spcPts val="600"/>
-              </a:spcAft>
-              <a:defRPr sz="1600" b="1">
-                <a:solidFill>
-                  <a:srgbClr val="00317E"/>
-                </a:solidFill>
-                <a:latin typeface="Arial"/>
-              </a:defRPr>
-            </a:pPr>
-            <a:r>
-              <a:t>🔐 Cryptographic Safety</a:t>
-            </a:r>
-          </a:p>
-          <a:p>
-            <a:pPr>
-              <a:defRPr sz="1250">
-                <a:solidFill>
-                  <a:srgbClr val="1C1C1E"/>
-                </a:solidFill>
-                <a:latin typeface="Arial"/>
-              </a:defRPr>
-            </a:pPr>
-            <a:r>
-              <a:t>Sensitive user passwords are encrypted using Bcrypt (cost factor 12) before storage. Separate Flask-Login and JWT authorization protect endpoint controllers.</a:t>
-            </a:r>
-          </a:p>
-        </p:txBody>
-      </p:sp>
-      <p:sp>
-        <p:nvSpPr>
-          <p:cNvPr id="10" name="Rectangle 9"/>
-          <p:cNvSpPr/>
-          <p:nvPr/>
-        </p:nvSpPr>
-        <p:spPr>
-          <a:xfrm>
-            <a:off x="731520" y="3931920"/>
-            <a:ext cx="5212080" cy="1920240"/>
-          </a:xfrm>
-          <a:prstGeom prst="rect">
-            <a:avLst/>
-          </a:prstGeom>
-          <a:solidFill>
-            <a:srgbClr val="F2F2F7"/>
-          </a:solidFill>
-          <a:ln>
-            <a:solidFill>
-              <a:srgbClr val="F2F2F7"/>
-            </a:solidFill>
-          </a:ln>
-        </p:spPr>
-        <p:style>
-          <a:lnRef idx="1">
-            <a:schemeClr val="accent1"/>
-          </a:lnRef>
-          <a:fillRef idx="3">
-            <a:schemeClr val="accent1"/>
-          </a:fillRef>
-          <a:effectRef idx="2">
-            <a:schemeClr val="accent1"/>
-          </a:effectRef>
-          <a:fontRef idx="minor">
-            <a:schemeClr val="lt1"/>
-          </a:fontRef>
-        </p:style>
-        <p:txBody>
-          <a:bodyPr rtlCol="0" anchor="ctr"/>
-          <a:lstStyle/>
-          <a:p>
-            <a:pPr algn="ctr"/>
-          </a:p>
-        </p:txBody>
-      </p:sp>
-      <p:sp>
-        <p:nvSpPr>
-          <p:cNvPr id="11" name="TextBox 10"/>
-          <p:cNvSpPr txBox="1"/>
-          <p:nvPr/>
-        </p:nvSpPr>
-        <p:spPr>
-          <a:xfrm>
-            <a:off x="914400" y="4069080"/>
-            <a:ext cx="4846320" cy="1645920"/>
-          </a:xfrm>
-          <a:prstGeom prst="rect">
-            <a:avLst/>
-          </a:prstGeom>
-          <a:noFill/>
-        </p:spPr>
-        <p:txBody>
-          <a:bodyPr wrap="square">
-            <a:spAutoFit/>
-          </a:bodyPr>
-          <a:lstStyle/>
-          <a:p>
-            <a:pPr>
-              <a:spcAft>
-                <a:spcPts val="600"/>
-              </a:spcAft>
-              <a:defRPr sz="1600" b="1">
-                <a:solidFill>
-                  <a:srgbClr val="00317E"/>
-                </a:solidFill>
-                <a:latin typeface="Arial"/>
-              </a:defRPr>
-            </a:pPr>
-            <a:r>
-              <a:t>📊 Request Audit Logging</a:t>
-            </a:r>
-          </a:p>
-          <a:p>
-            <a:pPr>
-              <a:defRPr sz="1250">
-                <a:solidFill>
-                  <a:srgbClr val="1C1C1E"/>
-                </a:solidFill>
-                <a:latin typeface="Arial"/>
-              </a:defRPr>
-            </a:pPr>
-            <a:r>
-              <a:t>Every HTTP request and response payload is recorded securely inside a logging system to track user sessions, deactivations, and configuration changes.</a:t>
-            </a:r>
-          </a:p>
-        </p:txBody>
-      </p:sp>
-      <p:sp>
-        <p:nvSpPr>
-          <p:cNvPr id="12" name="Rectangle 11"/>
-          <p:cNvSpPr/>
-          <p:nvPr/>
-        </p:nvSpPr>
-        <p:spPr>
-          <a:xfrm>
-            <a:off x="6217920" y="3931920"/>
-            <a:ext cx="5212080" cy="1920240"/>
-          </a:xfrm>
-          <a:prstGeom prst="rect">
-            <a:avLst/>
-          </a:prstGeom>
-          <a:solidFill>
-            <a:srgbClr val="F2F2F7"/>
-          </a:solidFill>
-          <a:ln>
-            <a:solidFill>
-              <a:srgbClr val="F2F2F7"/>
-            </a:solidFill>
-          </a:ln>
-        </p:spPr>
-        <p:style>
-          <a:lnRef idx="1">
-            <a:schemeClr val="accent1"/>
-          </a:lnRef>
-          <a:fillRef idx="3">
-            <a:schemeClr val="accent1"/>
-          </a:fillRef>
-          <a:effectRef idx="2">
-            <a:schemeClr val="accent1"/>
-          </a:effectRef>
-          <a:fontRef idx="minor">
-            <a:schemeClr val="lt1"/>
-          </a:fontRef>
-        </p:style>
-        <p:txBody>
-          <a:bodyPr rtlCol="0" anchor="ctr"/>
-          <a:lstStyle/>
-          <a:p>
-            <a:pPr algn="ctr"/>
-          </a:p>
-        </p:txBody>
-      </p:sp>
-      <p:sp>
-        <p:nvSpPr>
-          <p:cNvPr id="13" name="TextBox 12"/>
-          <p:cNvSpPr txBox="1"/>
-          <p:nvPr/>
-        </p:nvSpPr>
-        <p:spPr>
-          <a:xfrm>
-            <a:off x="6400800" y="4069080"/>
-            <a:ext cx="4846320" cy="1645920"/>
-          </a:xfrm>
-          <a:prstGeom prst="rect">
-            <a:avLst/>
-          </a:prstGeom>
-          <a:noFill/>
-        </p:spPr>
-        <p:txBody>
-          <a:bodyPr wrap="square">
-            <a:spAutoFit/>
-          </a:bodyPr>
-          <a:lstStyle/>
-          <a:p>
-            <a:pPr>
-              <a:spcAft>
-                <a:spcPts val="600"/>
-              </a:spcAft>
-              <a:defRPr sz="1600" b="1">
-                <a:solidFill>
-                  <a:srgbClr val="00317E"/>
-                </a:solidFill>
-                <a:latin typeface="Arial"/>
-              </a:defRPr>
-            </a:pPr>
-            <a:r>
-              <a:t>🛑 Rate Limiting</a:t>
-            </a:r>
-          </a:p>
-          <a:p>
-            <a:pPr>
-              <a:defRPr sz="1250">
-                <a:solidFill>
-                  <a:srgbClr val="1C1C1E"/>
-                </a:solidFill>
-                <a:latin typeface="Arial"/>
-              </a:defRPr>
-            </a:pPr>
-            <a:r>
-              <a:t>Flask-Limiter intercepts login and registration routes to lock out automated brute force actions (e.g. max 5 login attempts / 15 mins).</a:t>
-            </a:r>
-          </a:p>
-        </p:txBody>
-      </p:sp>
-    </p:spTree>
-  </p:cSld>
-  <p:clrMapOvr>
-    <a:masterClrMapping/>
-  </p:clrMapOvr>
-</p:sld>
-</file>
-
-<file path=ppt/slides/slide7.xml><?xml version="1.0" encoding="utf-8"?>
-<p:sld xmlns:a="http://schemas.openxmlformats.org/drawingml/2006/main" xmlns:p="http://schemas.openxmlformats.org/presentationml/2006/main" xmlns:r="http://schemas.openxmlformats.org/officeDocument/2006/relationships">
-  <p:cSld>
-    <p:bg>
-      <p:bgPr>
-        <a:solidFill>
-          <a:srgbClr val="FFFFFF"/>
-        </a:solidFill>
-        <a:effectLst/>
-      </p:bgPr>
-    </p:bg>
-    <p:spTree>
-      <p:nvGrpSpPr>
-        <p:cNvPr id="1" name=""/>
-        <p:cNvGrpSpPr/>
-        <p:nvPr/>
-      </p:nvGrpSpPr>
-      <p:grpSpPr/>
-      <p:pic>
-        <p:nvPicPr>
-          <p:cNvPr id="2" name="Picture 1" descr="logo.png"/>
-          <p:cNvPicPr>
-            <a:picLocks noChangeAspect="1"/>
-          </p:cNvPicPr>
-          <p:nvPr/>
-        </p:nvPicPr>
-        <p:blipFill>
-          <a:blip r:embed="rId2"/>
-          <a:stretch>
-            <a:fillRect/>
-          </a:stretch>
-        </p:blipFill>
-        <p:spPr>
-          <a:xfrm>
-            <a:off x="9601200" y="228600"/>
-            <a:ext cx="2286000" cy="699304"/>
-          </a:xfrm>
-          <a:prstGeom prst="rect">
-            <a:avLst/>
-          </a:prstGeom>
-        </p:spPr>
-      </p:pic>
-      <p:sp>
-        <p:nvSpPr>
-          <p:cNvPr id="3" name="TextBox 2"/>
-          <p:cNvSpPr txBox="1"/>
-          <p:nvPr/>
-        </p:nvSpPr>
-        <p:spPr>
-          <a:xfrm>
-            <a:off x="731520" y="6400800"/>
-            <a:ext cx="10698480" cy="365760"/>
-          </a:xfrm>
-          <a:prstGeom prst="rect">
-            <a:avLst/>
-          </a:prstGeom>
-          <a:noFill/>
-        </p:spPr>
-        <p:txBody>
-          <a:bodyPr wrap="square" lIns="0" tIns="0" bIns="0" rIns="0">
-            <a:spAutoFit/>
-          </a:bodyPr>
-          <a:lstStyle/>
-          <a:p>
-            <a:pPr algn="ctr">
-              <a:defRPr sz="950">
-                <a:solidFill>
-                  <a:srgbClr val="6E6E73"/>
-                </a:solidFill>
-                <a:latin typeface="Arial"/>
-              </a:defRPr>
-            </a:pPr>
-            <a:r>
-              <a:t>Student Hub  |  Sapthagiri University  |  Keerthana GP (24SUUBECS0914)  |  Keerthana BS (23SUUBECS0909)  |  Kiran M Biradar (24SUUBECS0937)</a:t>
-            </a:r>
-          </a:p>
-        </p:txBody>
-      </p:sp>
-      <p:sp>
-        <p:nvSpPr>
-          <p:cNvPr id="4" name="TextBox 3"/>
-          <p:cNvSpPr txBox="1"/>
-          <p:nvPr/>
-        </p:nvSpPr>
-        <p:spPr>
-          <a:xfrm>
-            <a:off x="731520" y="365760"/>
-            <a:ext cx="8686800" cy="731520"/>
-          </a:xfrm>
-          <a:prstGeom prst="rect">
-            <a:avLst/>
-          </a:prstGeom>
-          <a:noFill/>
-        </p:spPr>
-        <p:txBody>
-          <a:bodyPr wrap="square" lIns="0" tIns="0" bIns="0" rIns="0">
-            <a:spAutoFit/>
-          </a:bodyPr>
-          <a:lstStyle/>
-          <a:p>
-            <a:pPr>
-              <a:defRPr sz="2800" b="1">
-                <a:solidFill>
-                  <a:srgbClr val="00317E"/>
-                </a:solidFill>
-                <a:latin typeface="Arial"/>
-              </a:defRPr>
-            </a:pPr>
-            <a:r>
-              <a:t>Technical Stack</a:t>
+              <a:t>The Technology Stack</a:t>
             </a:r>
           </a:p>
         </p:txBody>
@@ -6343,7 +4935,7 @@
                         </a:defRPr>
                       </a:pPr>
                       <a:r>
-                        <a:t>Backend Framework</a:t>
+                        <a:t>Backend logic</a:t>
                       </a:r>
                     </a:p>
                   </a:txBody>
@@ -6389,7 +4981,7 @@
                         </a:defRPr>
                       </a:pPr>
                       <a:r>
-                        <a:t>Handles HTTP endpoints, controllers, and routes lifecycle.</a:t>
+                        <a:t>Handles HTTP endpoints, controller mapping, and route lifecycle.</a:t>
                       </a:r>
                     </a:p>
                   </a:txBody>
@@ -6414,7 +5006,7 @@
                         </a:defRPr>
                       </a:pPr>
                       <a:r>
-                        <a:t>Database / ORM</a:t>
+                        <a:t>ORM / Database</a:t>
                       </a:r>
                     </a:p>
                   </a:txBody>
@@ -6460,7 +5052,7 @@
                         </a:defRPr>
                       </a:pPr>
                       <a:r>
-                        <a:t>Relational database maps schemas dynamically; Dev default uses SQLite.</a:t>
+                        <a:t>Relational database models mapping. Dev fallback utilizes SQLite.</a:t>
                       </a:r>
                     </a:p>
                   </a:txBody>
@@ -6485,7 +5077,7 @@
                         </a:defRPr>
                       </a:pPr>
                       <a:r>
-                        <a:t>Frontend Styles</a:t>
+                        <a:t>UI Styling</a:t>
                       </a:r>
                     </a:p>
                   </a:txBody>
@@ -6531,7 +5123,7 @@
                         </a:defRPr>
                       </a:pPr>
                       <a:r>
-                        <a:t>Apple-inspired styling, glassmorphism filters, and Dark/Light styles.</a:t>
+                        <a:t>Apple-inspired styling, glassmorphism cards, and Dark/Light templates.</a:t>
                       </a:r>
                     </a:p>
                   </a:txBody>
@@ -6556,7 +5148,7 @@
                         </a:defRPr>
                       </a:pPr>
                       <a:r>
-                        <a:t>Font &amp; Vectors</a:t>
+                        <a:t>Fonts &amp; Icons</a:t>
                       </a:r>
                     </a:p>
                   </a:txBody>
@@ -6602,7 +5194,7 @@
                         </a:defRPr>
                       </a:pPr>
                       <a:r>
-                        <a:t>Local .ttf font files serve UI vectors securely without CDN redirects.</a:t>
+                        <a:t>Local .ttf font files serve vectors securely, bypassing CDN blocks.</a:t>
                       </a:r>
                     </a:p>
                   </a:txBody>
@@ -6673,7 +5265,7 @@
                         </a:defRPr>
                       </a:pPr>
                       <a:r>
-                        <a:t>Manages user state sessions and API authorization controllers.</a:t>
+                        <a:t>Manages student session states and API authorization headers.</a:t>
                       </a:r>
                     </a:p>
                   </a:txBody>
@@ -6698,7 +5290,7 @@
                         </a:defRPr>
                       </a:pPr>
                       <a:r>
-                        <a:t>Security Helpers</a:t>
+                        <a:t>Enterprise Safety</a:t>
                       </a:r>
                     </a:p>
                   </a:txBody>
@@ -6721,7 +5313,7 @@
                         </a:defRPr>
                       </a:pPr>
                       <a:r>
-                        <a:t>Flask-Limiter / Bcrypt / WTForms CSRF</a:t>
+                        <a:t>Flask-Limiter / Bcrypt / WTForms</a:t>
                       </a:r>
                     </a:p>
                   </a:txBody>
@@ -6744,7 +5336,7 @@
                         </a:defRPr>
                       </a:pPr>
                       <a:r>
-                        <a:t>Halts brute-force attacks, hashes user passwords, and stops CSRF injections.</a:t>
+                        <a:t>Halts brute-force attacks, hashes user passwords, and prevents CSRF.</a:t>
                       </a:r>
                     </a:p>
                   </a:txBody>
@@ -6759,6 +5351,3520 @@
           </a:graphicData>
         </a:graphic>
       </p:graphicFrame>
+    </p:spTree>
+  </p:cSld>
+  <p:clrMapOvr>
+    <a:masterClrMapping/>
+  </p:clrMapOvr>
+</p:sld>
+</file>
+
+<file path=ppt/slides/slide14.xml><?xml version="1.0" encoding="utf-8"?>
+<p:sld xmlns:a="http://schemas.openxmlformats.org/drawingml/2006/main" xmlns:p="http://schemas.openxmlformats.org/presentationml/2006/main" xmlns:r="http://schemas.openxmlformats.org/officeDocument/2006/relationships">
+  <p:cSld>
+    <p:bg>
+      <p:bgPr>
+        <a:solidFill>
+          <a:srgbClr val="FFFFFF"/>
+        </a:solidFill>
+        <a:effectLst/>
+      </p:bgPr>
+    </p:bg>
+    <p:spTree>
+      <p:nvGrpSpPr>
+        <p:cNvPr id="1" name=""/>
+        <p:cNvGrpSpPr/>
+        <p:nvPr/>
+      </p:nvGrpSpPr>
+      <p:grpSpPr/>
+      <p:pic>
+        <p:nvPicPr>
+          <p:cNvPr id="2" name="Picture 1" descr="logo.png"/>
+          <p:cNvPicPr>
+            <a:picLocks noChangeAspect="1"/>
+          </p:cNvPicPr>
+          <p:nvPr/>
+        </p:nvPicPr>
+        <p:blipFill>
+          <a:blip r:embed="rId2"/>
+          <a:stretch>
+            <a:fillRect/>
+          </a:stretch>
+        </p:blipFill>
+        <p:spPr>
+          <a:xfrm>
+            <a:off x="4114800" y="1371600"/>
+            <a:ext cx="3959352" cy="1211194"/>
+          </a:xfrm>
+          <a:prstGeom prst="rect">
+            <a:avLst/>
+          </a:prstGeom>
+        </p:spPr>
+      </p:pic>
+      <p:sp>
+        <p:nvSpPr>
+          <p:cNvPr id="3" name="TextBox 2"/>
+          <p:cNvSpPr txBox="1"/>
+          <p:nvPr/>
+        </p:nvSpPr>
+        <p:spPr>
+          <a:xfrm>
+            <a:off x="731520" y="2834640"/>
+            <a:ext cx="10698480" cy="1645920"/>
+          </a:xfrm>
+          <a:prstGeom prst="rect">
+            <a:avLst/>
+          </a:prstGeom>
+          <a:noFill/>
+        </p:spPr>
+        <p:txBody>
+          <a:bodyPr wrap="square">
+            <a:spAutoFit/>
+          </a:bodyPr>
+          <a:lstStyle/>
+          <a:p>
+            <a:pPr algn="ctr">
+              <a:spcAft>
+                <a:spcPts val="1000"/>
+              </a:spcAft>
+              <a:defRPr sz="4800" b="1">
+                <a:solidFill>
+                  <a:srgbClr val="00317E"/>
+                </a:solidFill>
+                <a:latin typeface="Arial"/>
+              </a:defRPr>
+            </a:pPr>
+            <a:r>
+              <a:t>Thank You!</a:t>
+            </a:r>
+          </a:p>
+          <a:p>
+            <a:pPr algn="ctr">
+              <a:defRPr sz="1800" b="1">
+                <a:solidFill>
+                  <a:srgbClr val="D4AF37"/>
+                </a:solidFill>
+                <a:latin typeface="Arial"/>
+              </a:defRPr>
+            </a:pPr>
+            <a:r>
+              <a:t>Student Hub: Streamlined, Secure, and Ready for Enterprise Enrollment.</a:t>
+            </a:r>
+          </a:p>
+        </p:txBody>
+      </p:sp>
+      <p:sp>
+        <p:nvSpPr>
+          <p:cNvPr id="4" name="TextBox 3"/>
+          <p:cNvSpPr txBox="1"/>
+          <p:nvPr/>
+        </p:nvSpPr>
+        <p:spPr>
+          <a:xfrm>
+            <a:off x="731520" y="4937760"/>
+            <a:ext cx="10698480" cy="1371600"/>
+          </a:xfrm>
+          <a:prstGeom prst="rect">
+            <a:avLst/>
+          </a:prstGeom>
+          <a:noFill/>
+        </p:spPr>
+        <p:txBody>
+          <a:bodyPr wrap="square">
+            <a:spAutoFit/>
+          </a:bodyPr>
+          <a:lstStyle/>
+          <a:p>
+            <a:pPr algn="ctr">
+              <a:defRPr sz="1100">
+                <a:solidFill>
+                  <a:srgbClr val="6E6E73"/>
+                </a:solidFill>
+                <a:latin typeface="Arial"/>
+              </a:defRPr>
+            </a:pPr>
+            <a:r>
+              <a:t>Student Hub Development Team:  Keerthana GP (24SUUBECS0914)  |  Keerthana BS (23SUUBECS0909)  |  Kiran M Biradar (24SUUBECS0937)</a:t>
+            </a:r>
+          </a:p>
+        </p:txBody>
+      </p:sp>
+    </p:spTree>
+  </p:cSld>
+  <p:clrMapOvr>
+    <a:masterClrMapping/>
+  </p:clrMapOvr>
+</p:sld>
+</file>
+
+<file path=ppt/slides/slide2.xml><?xml version="1.0" encoding="utf-8"?>
+<p:sld xmlns:a="http://schemas.openxmlformats.org/drawingml/2006/main" xmlns:p="http://schemas.openxmlformats.org/presentationml/2006/main" xmlns:r="http://schemas.openxmlformats.org/officeDocument/2006/relationships">
+  <p:cSld>
+    <p:bg>
+      <p:bgPr>
+        <a:solidFill>
+          <a:srgbClr val="FFFFFF"/>
+        </a:solidFill>
+        <a:effectLst/>
+      </p:bgPr>
+    </p:bg>
+    <p:spTree>
+      <p:nvGrpSpPr>
+        <p:cNvPr id="1" name=""/>
+        <p:cNvGrpSpPr/>
+        <p:nvPr/>
+      </p:nvGrpSpPr>
+      <p:grpSpPr/>
+      <p:pic>
+        <p:nvPicPr>
+          <p:cNvPr id="2" name="Picture 1" descr="logo.png"/>
+          <p:cNvPicPr>
+            <a:picLocks noChangeAspect="1"/>
+          </p:cNvPicPr>
+          <p:nvPr/>
+        </p:nvPicPr>
+        <p:blipFill>
+          <a:blip r:embed="rId2"/>
+          <a:stretch>
+            <a:fillRect/>
+          </a:stretch>
+        </p:blipFill>
+        <p:spPr>
+          <a:xfrm>
+            <a:off x="9601200" y="228600"/>
+            <a:ext cx="2286000" cy="699304"/>
+          </a:xfrm>
+          <a:prstGeom prst="rect">
+            <a:avLst/>
+          </a:prstGeom>
+        </p:spPr>
+      </p:pic>
+      <p:sp>
+        <p:nvSpPr>
+          <p:cNvPr id="3" name="TextBox 2"/>
+          <p:cNvSpPr txBox="1"/>
+          <p:nvPr/>
+        </p:nvSpPr>
+        <p:spPr>
+          <a:xfrm>
+            <a:off x="731520" y="6400800"/>
+            <a:ext cx="10698480" cy="365760"/>
+          </a:xfrm>
+          <a:prstGeom prst="rect">
+            <a:avLst/>
+          </a:prstGeom>
+          <a:noFill/>
+        </p:spPr>
+        <p:txBody>
+          <a:bodyPr wrap="square" lIns="0" tIns="0" bIns="0" rIns="0">
+            <a:spAutoFit/>
+          </a:bodyPr>
+          <a:lstStyle/>
+          <a:p>
+            <a:pPr algn="ctr">
+              <a:defRPr sz="950">
+                <a:solidFill>
+                  <a:srgbClr val="6E6E73"/>
+                </a:solidFill>
+                <a:latin typeface="Arial"/>
+              </a:defRPr>
+            </a:pPr>
+            <a:r>
+              <a:t>Student Hub  |  Sapthagiri University  |  Keerthana GP (24SUUBECS0914)  |  Keerthana BS (23SUUBECS0909)  |  Kiran M Biradar (24SUUBECS0937)</a:t>
+            </a:r>
+          </a:p>
+        </p:txBody>
+      </p:sp>
+      <p:sp>
+        <p:nvSpPr>
+          <p:cNvPr id="4" name="TextBox 3"/>
+          <p:cNvSpPr txBox="1"/>
+          <p:nvPr/>
+        </p:nvSpPr>
+        <p:spPr>
+          <a:xfrm>
+            <a:off x="731520" y="365760"/>
+            <a:ext cx="8686800" cy="731520"/>
+          </a:xfrm>
+          <a:prstGeom prst="rect">
+            <a:avLst/>
+          </a:prstGeom>
+          <a:noFill/>
+        </p:spPr>
+        <p:txBody>
+          <a:bodyPr wrap="square" lIns="0" tIns="0" bIns="0" rIns="0">
+            <a:spAutoFit/>
+          </a:bodyPr>
+          <a:lstStyle/>
+          <a:p>
+            <a:pPr>
+              <a:defRPr sz="2800" b="1">
+                <a:solidFill>
+                  <a:srgbClr val="00317E"/>
+                </a:solidFill>
+                <a:latin typeface="Arial"/>
+              </a:defRPr>
+            </a:pPr>
+            <a:r>
+              <a:t>Executive Summary</a:t>
+            </a:r>
+          </a:p>
+        </p:txBody>
+      </p:sp>
+      <p:sp>
+        <p:nvSpPr>
+          <p:cNvPr id="5" name="Rectangle 4"/>
+          <p:cNvSpPr/>
+          <p:nvPr/>
+        </p:nvSpPr>
+        <p:spPr>
+          <a:xfrm>
+            <a:off x="731520" y="1051560"/>
+            <a:ext cx="10698480" cy="36576"/>
+          </a:xfrm>
+          <a:prstGeom prst="rect">
+            <a:avLst/>
+          </a:prstGeom>
+          <a:solidFill>
+            <a:srgbClr val="D4AF37"/>
+          </a:solidFill>
+          <a:ln>
+            <a:solidFill>
+              <a:srgbClr val="D4AF37"/>
+            </a:solidFill>
+          </a:ln>
+        </p:spPr>
+        <p:style>
+          <a:lnRef idx="1">
+            <a:schemeClr val="accent1"/>
+          </a:lnRef>
+          <a:fillRef idx="3">
+            <a:schemeClr val="accent1"/>
+          </a:fillRef>
+          <a:effectRef idx="2">
+            <a:schemeClr val="accent1"/>
+          </a:effectRef>
+          <a:fontRef idx="minor">
+            <a:schemeClr val="lt1"/>
+          </a:fontRef>
+        </p:style>
+        <p:txBody>
+          <a:bodyPr rtlCol="0" anchor="ctr"/>
+          <a:lstStyle/>
+          <a:p>
+            <a:pPr algn="ctr"/>
+          </a:p>
+        </p:txBody>
+      </p:sp>
+      <p:sp>
+        <p:nvSpPr>
+          <p:cNvPr id="6" name="TextBox 5"/>
+          <p:cNvSpPr txBox="1"/>
+          <p:nvPr/>
+        </p:nvSpPr>
+        <p:spPr>
+          <a:xfrm>
+            <a:off x="731520" y="1463040"/>
+            <a:ext cx="6858000" cy="4389120"/>
+          </a:xfrm>
+          <a:prstGeom prst="rect">
+            <a:avLst/>
+          </a:prstGeom>
+          <a:noFill/>
+        </p:spPr>
+        <p:txBody>
+          <a:bodyPr wrap="square" lIns="0" tIns="0" bIns="0" rIns="0">
+            <a:spAutoFit/>
+          </a:bodyPr>
+          <a:lstStyle/>
+          <a:p>
+            <a:pPr>
+              <a:spcAft>
+                <a:spcPts val="2000"/>
+              </a:spcAft>
+              <a:defRPr sz="1800">
+                <a:solidFill>
+                  <a:srgbClr val="1C1C1E"/>
+                </a:solidFill>
+                <a:latin typeface="Arial"/>
+              </a:defRPr>
+            </a:pPr>
+            <a:r>
+              <a:t>The modern higher education landscape demands automated, paperless, and secure administration systems. Student Hub provides a production-ready solution.</a:t>
+            </a:r>
+          </a:p>
+          <a:p>
+            <a:pPr>
+              <a:spcBef>
+                <a:spcPts val="1200"/>
+              </a:spcBef>
+              <a:defRPr sz="1500">
+                <a:solidFill>
+                  <a:srgbClr val="1C1C1E"/>
+                </a:solidFill>
+                <a:latin typeface="Arial"/>
+              </a:defRPr>
+            </a:pPr>
+            <a:r>
+              <a:t>🌐 Digital Transformation: Replaces manual, physical registry routines with secure online registration.</a:t>
+            </a:r>
+          </a:p>
+          <a:p>
+            <a:pPr>
+              <a:spcBef>
+                <a:spcPts val="1200"/>
+              </a:spcBef>
+              <a:defRPr sz="1500">
+                <a:solidFill>
+                  <a:srgbClr val="1C1C1E"/>
+                </a:solidFill>
+                <a:latin typeface="Arial"/>
+              </a:defRPr>
+            </a:pPr>
+            <a:r>
+              <a:t>🔒 Self-Contained Assets: Standardized local asset hosting (fonts, styles) guarantees CSP security compliance.</a:t>
+            </a:r>
+          </a:p>
+          <a:p>
+            <a:pPr>
+              <a:spcBef>
+                <a:spcPts val="1200"/>
+              </a:spcBef>
+              <a:defRPr sz="1500">
+                <a:solidFill>
+                  <a:srgbClr val="1C1C1E"/>
+                </a:solidFill>
+                <a:latin typeface="Arial"/>
+              </a:defRPr>
+            </a:pPr>
+            <a:r>
+              <a:t>⚡ Integrated Workflow: Merges registration, dashboard trackers, dynamic courses search, and admin charts.</a:t>
+            </a:r>
+          </a:p>
+          <a:p>
+            <a:pPr>
+              <a:spcBef>
+                <a:spcPts val="1200"/>
+              </a:spcBef>
+              <a:defRPr sz="1500">
+                <a:solidFill>
+                  <a:srgbClr val="1C1C1E"/>
+                </a:solidFill>
+                <a:latin typeface="Arial"/>
+              </a:defRPr>
+            </a:pPr>
+            <a:r>
+              <a:t>📊 Dynamic Database Adapters: Runs SQLite in development environments and transitions easily to production-ready MySQL.</a:t>
+            </a:r>
+          </a:p>
+        </p:txBody>
+      </p:sp>
+      <p:sp>
+        <p:nvSpPr>
+          <p:cNvPr id="7" name="Rounded Rectangle 6"/>
+          <p:cNvSpPr/>
+          <p:nvPr/>
+        </p:nvSpPr>
+        <p:spPr>
+          <a:xfrm>
+            <a:off x="8046720" y="1645920"/>
+            <a:ext cx="3383280" cy="4023360"/>
+          </a:xfrm>
+          <a:prstGeom prst="roundRect">
+            <a:avLst/>
+          </a:prstGeom>
+          <a:solidFill>
+            <a:srgbClr val="F2F2F7"/>
+          </a:solidFill>
+          <a:ln w="19050">
+            <a:solidFill>
+              <a:srgbClr val="D4AF37"/>
+            </a:solidFill>
+          </a:ln>
+        </p:spPr>
+        <p:style>
+          <a:lnRef idx="1">
+            <a:schemeClr val="accent1"/>
+          </a:lnRef>
+          <a:fillRef idx="3">
+            <a:schemeClr val="accent1"/>
+          </a:fillRef>
+          <a:effectRef idx="2">
+            <a:schemeClr val="accent1"/>
+          </a:effectRef>
+          <a:fontRef idx="minor">
+            <a:schemeClr val="lt1"/>
+          </a:fontRef>
+        </p:style>
+        <p:txBody>
+          <a:bodyPr rtlCol="0" anchor="ctr"/>
+          <a:lstStyle/>
+          <a:p>
+            <a:pPr algn="ctr"/>
+          </a:p>
+        </p:txBody>
+      </p:sp>
+      <p:sp>
+        <p:nvSpPr>
+          <p:cNvPr id="8" name="TextBox 7"/>
+          <p:cNvSpPr txBox="1"/>
+          <p:nvPr/>
+        </p:nvSpPr>
+        <p:spPr>
+          <a:xfrm>
+            <a:off x="8321040" y="1920240"/>
+            <a:ext cx="2834640" cy="3474720"/>
+          </a:xfrm>
+          <a:prstGeom prst="rect">
+            <a:avLst/>
+          </a:prstGeom>
+          <a:noFill/>
+        </p:spPr>
+        <p:txBody>
+          <a:bodyPr wrap="square">
+            <a:spAutoFit/>
+          </a:bodyPr>
+          <a:lstStyle/>
+          <a:p>
+            <a:pPr>
+              <a:spcAft>
+                <a:spcPts val="1600"/>
+              </a:spcAft>
+              <a:defRPr sz="1400" b="1">
+                <a:solidFill>
+                  <a:srgbClr val="00317E"/>
+                </a:solidFill>
+                <a:latin typeface="Arial"/>
+              </a:defRPr>
+            </a:pPr>
+            <a:r>
+              <a:t>PROJECT MISSION</a:t>
+            </a:r>
+          </a:p>
+          <a:p>
+            <a:pPr>
+              <a:spcBef>
+                <a:spcPts val="800"/>
+              </a:spcBef>
+              <a:defRPr sz="1500" b="1">
+                <a:solidFill>
+                  <a:srgbClr val="D4AF37"/>
+                </a:solidFill>
+                <a:latin typeface="Arial"/>
+              </a:defRPr>
+            </a:pPr>
+            <a:r>
+              <a:t>✔ Speed</a:t>
+            </a:r>
+          </a:p>
+          <a:p>
+            <a:pPr>
+              <a:defRPr sz="1150">
+                <a:solidFill>
+                  <a:srgbClr val="1C1C1E"/>
+                </a:solidFill>
+                <a:latin typeface="Arial"/>
+              </a:defRPr>
+            </a:pPr>
+            <a:r>
+              <a:t>Optimize client forms to complete in under 3 minutes.</a:t>
+            </a:r>
+          </a:p>
+          <a:p>
+            <a:pPr>
+              <a:spcBef>
+                <a:spcPts val="800"/>
+              </a:spcBef>
+              <a:defRPr sz="1500" b="1">
+                <a:solidFill>
+                  <a:srgbClr val="D4AF37"/>
+                </a:solidFill>
+                <a:latin typeface="Arial"/>
+              </a:defRPr>
+            </a:pPr>
+            <a:r>
+              <a:t>✔ Security</a:t>
+            </a:r>
+          </a:p>
+          <a:p>
+            <a:pPr>
+              <a:defRPr sz="1150">
+                <a:solidFill>
+                  <a:srgbClr val="1C1C1E"/>
+                </a:solidFill>
+                <a:latin typeface="Arial"/>
+              </a:defRPr>
+            </a:pPr>
+            <a:r>
+              <a:t>Implement strict CSP and Bcrypt encryptions.</a:t>
+            </a:r>
+          </a:p>
+          <a:p>
+            <a:pPr>
+              <a:spcBef>
+                <a:spcPts val="800"/>
+              </a:spcBef>
+              <a:defRPr sz="1500" b="1">
+                <a:solidFill>
+                  <a:srgbClr val="D4AF37"/>
+                </a:solidFill>
+                <a:latin typeface="Arial"/>
+              </a:defRPr>
+            </a:pPr>
+            <a:r>
+              <a:t>✔ Compliance</a:t>
+            </a:r>
+          </a:p>
+          <a:p>
+            <a:pPr>
+              <a:defRPr sz="1150">
+                <a:solidFill>
+                  <a:srgbClr val="1C1C1E"/>
+                </a:solidFill>
+                <a:latin typeface="Arial"/>
+              </a:defRPr>
+            </a:pPr>
+            <a:r>
+              <a:t>Create transparent request audit logging trails.</a:t>
+            </a:r>
+          </a:p>
+          <a:p>
+            <a:pPr>
+              <a:spcBef>
+                <a:spcPts val="800"/>
+              </a:spcBef>
+              <a:defRPr sz="1500" b="1">
+                <a:solidFill>
+                  <a:srgbClr val="D4AF37"/>
+                </a:solidFill>
+                <a:latin typeface="Arial"/>
+              </a:defRPr>
+            </a:pPr>
+            <a:r>
+              <a:t>✔ Adaptability</a:t>
+            </a:r>
+          </a:p>
+          <a:p>
+            <a:pPr>
+              <a:defRPr sz="1150">
+                <a:solidFill>
+                  <a:srgbClr val="1C1C1E"/>
+                </a:solidFill>
+                <a:latin typeface="Arial"/>
+              </a:defRPr>
+            </a:pPr>
+            <a:r>
+              <a:t>Design database-agnostic backend models.</a:t>
+            </a:r>
+          </a:p>
+        </p:txBody>
+      </p:sp>
+    </p:spTree>
+  </p:cSld>
+  <p:clrMapOvr>
+    <a:masterClrMapping/>
+  </p:clrMapOvr>
+</p:sld>
+</file>
+
+<file path=ppt/slides/slide3.xml><?xml version="1.0" encoding="utf-8"?>
+<p:sld xmlns:a="http://schemas.openxmlformats.org/drawingml/2006/main" xmlns:p="http://schemas.openxmlformats.org/presentationml/2006/main" xmlns:r="http://schemas.openxmlformats.org/officeDocument/2006/relationships">
+  <p:cSld>
+    <p:bg>
+      <p:bgPr>
+        <a:solidFill>
+          <a:srgbClr val="FFFFFF"/>
+        </a:solidFill>
+        <a:effectLst/>
+      </p:bgPr>
+    </p:bg>
+    <p:spTree>
+      <p:nvGrpSpPr>
+        <p:cNvPr id="1" name=""/>
+        <p:cNvGrpSpPr/>
+        <p:nvPr/>
+      </p:nvGrpSpPr>
+      <p:grpSpPr/>
+      <p:pic>
+        <p:nvPicPr>
+          <p:cNvPr id="2" name="Picture 1" descr="logo.png"/>
+          <p:cNvPicPr>
+            <a:picLocks noChangeAspect="1"/>
+          </p:cNvPicPr>
+          <p:nvPr/>
+        </p:nvPicPr>
+        <p:blipFill>
+          <a:blip r:embed="rId2"/>
+          <a:stretch>
+            <a:fillRect/>
+          </a:stretch>
+        </p:blipFill>
+        <p:spPr>
+          <a:xfrm>
+            <a:off x="9601200" y="228600"/>
+            <a:ext cx="2286000" cy="699304"/>
+          </a:xfrm>
+          <a:prstGeom prst="rect">
+            <a:avLst/>
+          </a:prstGeom>
+        </p:spPr>
+      </p:pic>
+      <p:sp>
+        <p:nvSpPr>
+          <p:cNvPr id="3" name="TextBox 2"/>
+          <p:cNvSpPr txBox="1"/>
+          <p:nvPr/>
+        </p:nvSpPr>
+        <p:spPr>
+          <a:xfrm>
+            <a:off x="731520" y="6400800"/>
+            <a:ext cx="10698480" cy="365760"/>
+          </a:xfrm>
+          <a:prstGeom prst="rect">
+            <a:avLst/>
+          </a:prstGeom>
+          <a:noFill/>
+        </p:spPr>
+        <p:txBody>
+          <a:bodyPr wrap="square" lIns="0" tIns="0" bIns="0" rIns="0">
+            <a:spAutoFit/>
+          </a:bodyPr>
+          <a:lstStyle/>
+          <a:p>
+            <a:pPr algn="ctr">
+              <a:defRPr sz="950">
+                <a:solidFill>
+                  <a:srgbClr val="6E6E73"/>
+                </a:solidFill>
+                <a:latin typeface="Arial"/>
+              </a:defRPr>
+            </a:pPr>
+            <a:r>
+              <a:t>Student Hub  |  Sapthagiri University  |  Keerthana GP (24SUUBECS0914)  |  Keerthana BS (23SUUBECS0909)  |  Kiran M Biradar (24SUUBECS0937)</a:t>
+            </a:r>
+          </a:p>
+        </p:txBody>
+      </p:sp>
+      <p:sp>
+        <p:nvSpPr>
+          <p:cNvPr id="4" name="TextBox 3"/>
+          <p:cNvSpPr txBox="1"/>
+          <p:nvPr/>
+        </p:nvSpPr>
+        <p:spPr>
+          <a:xfrm>
+            <a:off x="731520" y="365760"/>
+            <a:ext cx="8686800" cy="731520"/>
+          </a:xfrm>
+          <a:prstGeom prst="rect">
+            <a:avLst/>
+          </a:prstGeom>
+          <a:noFill/>
+        </p:spPr>
+        <p:txBody>
+          <a:bodyPr wrap="square" lIns="0" tIns="0" bIns="0" rIns="0">
+            <a:spAutoFit/>
+          </a:bodyPr>
+          <a:lstStyle/>
+          <a:p>
+            <a:pPr>
+              <a:defRPr sz="2800" b="1">
+                <a:solidFill>
+                  <a:srgbClr val="00317E"/>
+                </a:solidFill>
+                <a:latin typeface="Arial"/>
+              </a:defRPr>
+            </a:pPr>
+            <a:r>
+              <a:t>The Problem Statement</a:t>
+            </a:r>
+          </a:p>
+        </p:txBody>
+      </p:sp>
+      <p:sp>
+        <p:nvSpPr>
+          <p:cNvPr id="5" name="Rectangle 4"/>
+          <p:cNvSpPr/>
+          <p:nvPr/>
+        </p:nvSpPr>
+        <p:spPr>
+          <a:xfrm>
+            <a:off x="731520" y="1051560"/>
+            <a:ext cx="10698480" cy="36576"/>
+          </a:xfrm>
+          <a:prstGeom prst="rect">
+            <a:avLst/>
+          </a:prstGeom>
+          <a:solidFill>
+            <a:srgbClr val="D4AF37"/>
+          </a:solidFill>
+          <a:ln>
+            <a:solidFill>
+              <a:srgbClr val="D4AF37"/>
+            </a:solidFill>
+          </a:ln>
+        </p:spPr>
+        <p:style>
+          <a:lnRef idx="1">
+            <a:schemeClr val="accent1"/>
+          </a:lnRef>
+          <a:fillRef idx="3">
+            <a:schemeClr val="accent1"/>
+          </a:fillRef>
+          <a:effectRef idx="2">
+            <a:schemeClr val="accent1"/>
+          </a:effectRef>
+          <a:fontRef idx="minor">
+            <a:schemeClr val="lt1"/>
+          </a:fontRef>
+        </p:style>
+        <p:txBody>
+          <a:bodyPr rtlCol="0" anchor="ctr"/>
+          <a:lstStyle/>
+          <a:p>
+            <a:pPr algn="ctr"/>
+          </a:p>
+        </p:txBody>
+      </p:sp>
+      <p:sp>
+        <p:nvSpPr>
+          <p:cNvPr id="6" name="Rounded Rectangle 5"/>
+          <p:cNvSpPr/>
+          <p:nvPr/>
+        </p:nvSpPr>
+        <p:spPr>
+          <a:xfrm>
+            <a:off x="731520" y="1645920"/>
+            <a:ext cx="5212080" cy="1920240"/>
+          </a:xfrm>
+          <a:prstGeom prst="roundRect">
+            <a:avLst/>
+          </a:prstGeom>
+          <a:solidFill>
+            <a:srgbClr val="F2F2F7"/>
+          </a:solidFill>
+          <a:ln w="12700">
+            <a:solidFill>
+              <a:srgbClr val="EF4444"/>
+            </a:solidFill>
+          </a:ln>
+        </p:spPr>
+        <p:style>
+          <a:lnRef idx="1">
+            <a:schemeClr val="accent1"/>
+          </a:lnRef>
+          <a:fillRef idx="3">
+            <a:schemeClr val="accent1"/>
+          </a:fillRef>
+          <a:effectRef idx="2">
+            <a:schemeClr val="accent1"/>
+          </a:effectRef>
+          <a:fontRef idx="minor">
+            <a:schemeClr val="lt1"/>
+          </a:fontRef>
+        </p:style>
+        <p:txBody>
+          <a:bodyPr rtlCol="0" anchor="ctr"/>
+          <a:lstStyle/>
+          <a:p>
+            <a:pPr algn="ctr"/>
+          </a:p>
+        </p:txBody>
+      </p:sp>
+      <p:sp>
+        <p:nvSpPr>
+          <p:cNvPr id="7" name="TextBox 6"/>
+          <p:cNvSpPr txBox="1"/>
+          <p:nvPr/>
+        </p:nvSpPr>
+        <p:spPr>
+          <a:xfrm>
+            <a:off x="914400" y="1783080"/>
+            <a:ext cx="4846320" cy="1645920"/>
+          </a:xfrm>
+          <a:prstGeom prst="rect">
+            <a:avLst/>
+          </a:prstGeom>
+          <a:noFill/>
+        </p:spPr>
+        <p:txBody>
+          <a:bodyPr wrap="square">
+            <a:spAutoFit/>
+          </a:bodyPr>
+          <a:lstStyle/>
+          <a:p>
+            <a:pPr>
+              <a:spcAft>
+                <a:spcPts val="600"/>
+              </a:spcAft>
+              <a:defRPr sz="1600" b="1">
+                <a:solidFill>
+                  <a:srgbClr val="00317E"/>
+                </a:solidFill>
+                <a:latin typeface="Arial"/>
+              </a:defRPr>
+            </a:pPr>
+            <a:r>
+              <a:t>📁 Heavy Paperwork &amp; Admin Overload</a:t>
+            </a:r>
+          </a:p>
+          <a:p>
+            <a:pPr>
+              <a:defRPr sz="1300">
+                <a:solidFill>
+                  <a:srgbClr val="1C1C1E"/>
+                </a:solidFill>
+                <a:latin typeface="Arial"/>
+              </a:defRPr>
+            </a:pPr>
+            <a:r>
+              <a:t>Manual, paper-based student registrations cause massive administrative workloads and high processing delays.</a:t>
+            </a:r>
+          </a:p>
+        </p:txBody>
+      </p:sp>
+      <p:sp>
+        <p:nvSpPr>
+          <p:cNvPr id="8" name="Rounded Rectangle 7"/>
+          <p:cNvSpPr/>
+          <p:nvPr/>
+        </p:nvSpPr>
+        <p:spPr>
+          <a:xfrm>
+            <a:off x="6217920" y="1645920"/>
+            <a:ext cx="5212080" cy="1920240"/>
+          </a:xfrm>
+          <a:prstGeom prst="roundRect">
+            <a:avLst/>
+          </a:prstGeom>
+          <a:solidFill>
+            <a:srgbClr val="F2F2F7"/>
+          </a:solidFill>
+          <a:ln w="12700">
+            <a:solidFill>
+              <a:srgbClr val="EF4444"/>
+            </a:solidFill>
+          </a:ln>
+        </p:spPr>
+        <p:style>
+          <a:lnRef idx="1">
+            <a:schemeClr val="accent1"/>
+          </a:lnRef>
+          <a:fillRef idx="3">
+            <a:schemeClr val="accent1"/>
+          </a:fillRef>
+          <a:effectRef idx="2">
+            <a:schemeClr val="accent1"/>
+          </a:effectRef>
+          <a:fontRef idx="minor">
+            <a:schemeClr val="lt1"/>
+          </a:fontRef>
+        </p:style>
+        <p:txBody>
+          <a:bodyPr rtlCol="0" anchor="ctr"/>
+          <a:lstStyle/>
+          <a:p>
+            <a:pPr algn="ctr"/>
+          </a:p>
+        </p:txBody>
+      </p:sp>
+      <p:sp>
+        <p:nvSpPr>
+          <p:cNvPr id="9" name="TextBox 8"/>
+          <p:cNvSpPr txBox="1"/>
+          <p:nvPr/>
+        </p:nvSpPr>
+        <p:spPr>
+          <a:xfrm>
+            <a:off x="6400800" y="1783080"/>
+            <a:ext cx="4846320" cy="1645920"/>
+          </a:xfrm>
+          <a:prstGeom prst="rect">
+            <a:avLst/>
+          </a:prstGeom>
+          <a:noFill/>
+        </p:spPr>
+        <p:txBody>
+          <a:bodyPr wrap="square">
+            <a:spAutoFit/>
+          </a:bodyPr>
+          <a:lstStyle/>
+          <a:p>
+            <a:pPr>
+              <a:spcAft>
+                <a:spcPts val="600"/>
+              </a:spcAft>
+              <a:defRPr sz="1600" b="1">
+                <a:solidFill>
+                  <a:srgbClr val="00317E"/>
+                </a:solidFill>
+                <a:latin typeface="Arial"/>
+              </a:defRPr>
+            </a:pPr>
+            <a:r>
+              <a:t>🛑 CSRF &amp; Session Vulnerabilities</a:t>
+            </a:r>
+          </a:p>
+          <a:p>
+            <a:pPr>
+              <a:defRPr sz="1300">
+                <a:solidFill>
+                  <a:srgbClr val="1C1C1E"/>
+                </a:solidFill>
+                <a:latin typeface="Arial"/>
+              </a:defRPr>
+            </a:pPr>
+            <a:r>
+              <a:t>Insecure registration web applications risk session hijacking, credential leaks, and data breaches.</a:t>
+            </a:r>
+          </a:p>
+        </p:txBody>
+      </p:sp>
+      <p:sp>
+        <p:nvSpPr>
+          <p:cNvPr id="10" name="Rounded Rectangle 9"/>
+          <p:cNvSpPr/>
+          <p:nvPr/>
+        </p:nvSpPr>
+        <p:spPr>
+          <a:xfrm>
+            <a:off x="731520" y="3931920"/>
+            <a:ext cx="5212080" cy="1920240"/>
+          </a:xfrm>
+          <a:prstGeom prst="roundRect">
+            <a:avLst/>
+          </a:prstGeom>
+          <a:solidFill>
+            <a:srgbClr val="F2F2F7"/>
+          </a:solidFill>
+          <a:ln w="12700">
+            <a:solidFill>
+              <a:srgbClr val="EF4444"/>
+            </a:solidFill>
+          </a:ln>
+        </p:spPr>
+        <p:style>
+          <a:lnRef idx="1">
+            <a:schemeClr val="accent1"/>
+          </a:lnRef>
+          <a:fillRef idx="3">
+            <a:schemeClr val="accent1"/>
+          </a:fillRef>
+          <a:effectRef idx="2">
+            <a:schemeClr val="accent1"/>
+          </a:effectRef>
+          <a:fontRef idx="minor">
+            <a:schemeClr val="lt1"/>
+          </a:fontRef>
+        </p:style>
+        <p:txBody>
+          <a:bodyPr rtlCol="0" anchor="ctr"/>
+          <a:lstStyle/>
+          <a:p>
+            <a:pPr algn="ctr"/>
+          </a:p>
+        </p:txBody>
+      </p:sp>
+      <p:sp>
+        <p:nvSpPr>
+          <p:cNvPr id="11" name="TextBox 10"/>
+          <p:cNvSpPr txBox="1"/>
+          <p:nvPr/>
+        </p:nvSpPr>
+        <p:spPr>
+          <a:xfrm>
+            <a:off x="914400" y="4069080"/>
+            <a:ext cx="4846320" cy="1645920"/>
+          </a:xfrm>
+          <a:prstGeom prst="rect">
+            <a:avLst/>
+          </a:prstGeom>
+          <a:noFill/>
+        </p:spPr>
+        <p:txBody>
+          <a:bodyPr wrap="square">
+            <a:spAutoFit/>
+          </a:bodyPr>
+          <a:lstStyle/>
+          <a:p>
+            <a:pPr>
+              <a:spcAft>
+                <a:spcPts val="600"/>
+              </a:spcAft>
+              <a:defRPr sz="1600" b="1">
+                <a:solidFill>
+                  <a:srgbClr val="00317E"/>
+                </a:solidFill>
+                <a:latin typeface="Arial"/>
+              </a:defRPr>
+            </a:pPr>
+            <a:r>
+              <a:t>⚡ High User Friction &amp; Dropouts</a:t>
+            </a:r>
+          </a:p>
+          <a:p>
+            <a:pPr>
+              <a:defRPr sz="1300">
+                <a:solidFill>
+                  <a:srgbClr val="1C1C1E"/>
+                </a:solidFill>
+                <a:latin typeface="Arial"/>
+              </a:defRPr>
+            </a:pPr>
+            <a:r>
+              <a:t>Complex, single-page application forms without real-time validations result in validation failures and high dropout rates.</a:t>
+            </a:r>
+          </a:p>
+        </p:txBody>
+      </p:sp>
+      <p:sp>
+        <p:nvSpPr>
+          <p:cNvPr id="12" name="Rounded Rectangle 11"/>
+          <p:cNvSpPr/>
+          <p:nvPr/>
+        </p:nvSpPr>
+        <p:spPr>
+          <a:xfrm>
+            <a:off x="6217920" y="3931920"/>
+            <a:ext cx="5212080" cy="1920240"/>
+          </a:xfrm>
+          <a:prstGeom prst="roundRect">
+            <a:avLst/>
+          </a:prstGeom>
+          <a:solidFill>
+            <a:srgbClr val="F2F2F7"/>
+          </a:solidFill>
+          <a:ln w="12700">
+            <a:solidFill>
+              <a:srgbClr val="EF4444"/>
+            </a:solidFill>
+          </a:ln>
+        </p:spPr>
+        <p:style>
+          <a:lnRef idx="1">
+            <a:schemeClr val="accent1"/>
+          </a:lnRef>
+          <a:fillRef idx="3">
+            <a:schemeClr val="accent1"/>
+          </a:fillRef>
+          <a:effectRef idx="2">
+            <a:schemeClr val="accent1"/>
+          </a:effectRef>
+          <a:fontRef idx="minor">
+            <a:schemeClr val="lt1"/>
+          </a:fontRef>
+        </p:style>
+        <p:txBody>
+          <a:bodyPr rtlCol="0" anchor="ctr"/>
+          <a:lstStyle/>
+          <a:p>
+            <a:pPr algn="ctr"/>
+          </a:p>
+        </p:txBody>
+      </p:sp>
+      <p:sp>
+        <p:nvSpPr>
+          <p:cNvPr id="13" name="TextBox 12"/>
+          <p:cNvSpPr txBox="1"/>
+          <p:nvPr/>
+        </p:nvSpPr>
+        <p:spPr>
+          <a:xfrm>
+            <a:off x="6400800" y="4069080"/>
+            <a:ext cx="4846320" cy="1645920"/>
+          </a:xfrm>
+          <a:prstGeom prst="rect">
+            <a:avLst/>
+          </a:prstGeom>
+          <a:noFill/>
+        </p:spPr>
+        <p:txBody>
+          <a:bodyPr wrap="square">
+            <a:spAutoFit/>
+          </a:bodyPr>
+          <a:lstStyle/>
+          <a:p>
+            <a:pPr>
+              <a:spcAft>
+                <a:spcPts val="600"/>
+              </a:spcAft>
+              <a:defRPr sz="1600" b="1">
+                <a:solidFill>
+                  <a:srgbClr val="00317E"/>
+                </a:solidFill>
+                <a:latin typeface="Arial"/>
+              </a:defRPr>
+            </a:pPr>
+            <a:r>
+              <a:t>🔌 Third-Party Assets Dependency</a:t>
+            </a:r>
+          </a:p>
+          <a:p>
+            <a:pPr>
+              <a:defRPr sz="1300">
+                <a:solidFill>
+                  <a:srgbClr val="1C1C1E"/>
+                </a:solidFill>
+                <a:latin typeface="Arial"/>
+              </a:defRPr>
+            </a:pPr>
+            <a:r>
+              <a:t>Loading UI symbols/fonts via public CDNs leaves portals open to CSP failures, tracking, and offline loading crashes.</a:t>
+            </a:r>
+          </a:p>
+        </p:txBody>
+      </p:sp>
+    </p:spTree>
+  </p:cSld>
+  <p:clrMapOvr>
+    <a:masterClrMapping/>
+  </p:clrMapOvr>
+</p:sld>
+</file>
+
+<file path=ppt/slides/slide4.xml><?xml version="1.0" encoding="utf-8"?>
+<p:sld xmlns:a="http://schemas.openxmlformats.org/drawingml/2006/main" xmlns:p="http://schemas.openxmlformats.org/presentationml/2006/main" xmlns:r="http://schemas.openxmlformats.org/officeDocument/2006/relationships">
+  <p:cSld>
+    <p:bg>
+      <p:bgPr>
+        <a:solidFill>
+          <a:srgbClr val="FFFFFF"/>
+        </a:solidFill>
+        <a:effectLst/>
+      </p:bgPr>
+    </p:bg>
+    <p:spTree>
+      <p:nvGrpSpPr>
+        <p:cNvPr id="1" name=""/>
+        <p:cNvGrpSpPr/>
+        <p:nvPr/>
+      </p:nvGrpSpPr>
+      <p:grpSpPr/>
+      <p:pic>
+        <p:nvPicPr>
+          <p:cNvPr id="2" name="Picture 1" descr="logo.png"/>
+          <p:cNvPicPr>
+            <a:picLocks noChangeAspect="1"/>
+          </p:cNvPicPr>
+          <p:nvPr/>
+        </p:nvPicPr>
+        <p:blipFill>
+          <a:blip r:embed="rId2"/>
+          <a:stretch>
+            <a:fillRect/>
+          </a:stretch>
+        </p:blipFill>
+        <p:spPr>
+          <a:xfrm>
+            <a:off x="9601200" y="228600"/>
+            <a:ext cx="2286000" cy="699304"/>
+          </a:xfrm>
+          <a:prstGeom prst="rect">
+            <a:avLst/>
+          </a:prstGeom>
+        </p:spPr>
+      </p:pic>
+      <p:sp>
+        <p:nvSpPr>
+          <p:cNvPr id="3" name="TextBox 2"/>
+          <p:cNvSpPr txBox="1"/>
+          <p:nvPr/>
+        </p:nvSpPr>
+        <p:spPr>
+          <a:xfrm>
+            <a:off x="731520" y="6400800"/>
+            <a:ext cx="10698480" cy="365760"/>
+          </a:xfrm>
+          <a:prstGeom prst="rect">
+            <a:avLst/>
+          </a:prstGeom>
+          <a:noFill/>
+        </p:spPr>
+        <p:txBody>
+          <a:bodyPr wrap="square" lIns="0" tIns="0" bIns="0" rIns="0">
+            <a:spAutoFit/>
+          </a:bodyPr>
+          <a:lstStyle/>
+          <a:p>
+            <a:pPr algn="ctr">
+              <a:defRPr sz="950">
+                <a:solidFill>
+                  <a:srgbClr val="6E6E73"/>
+                </a:solidFill>
+                <a:latin typeface="Arial"/>
+              </a:defRPr>
+            </a:pPr>
+            <a:r>
+              <a:t>Student Hub  |  Sapthagiri University  |  Keerthana GP (24SUUBECS0914)  |  Keerthana BS (23SUUBECS0909)  |  Kiran M Biradar (24SUUBECS0937)</a:t>
+            </a:r>
+          </a:p>
+        </p:txBody>
+      </p:sp>
+      <p:sp>
+        <p:nvSpPr>
+          <p:cNvPr id="4" name="TextBox 3"/>
+          <p:cNvSpPr txBox="1"/>
+          <p:nvPr/>
+        </p:nvSpPr>
+        <p:spPr>
+          <a:xfrm>
+            <a:off x="731520" y="365760"/>
+            <a:ext cx="8686800" cy="731520"/>
+          </a:xfrm>
+          <a:prstGeom prst="rect">
+            <a:avLst/>
+          </a:prstGeom>
+          <a:noFill/>
+        </p:spPr>
+        <p:txBody>
+          <a:bodyPr wrap="square" lIns="0" tIns="0" bIns="0" rIns="0">
+            <a:spAutoFit/>
+          </a:bodyPr>
+          <a:lstStyle/>
+          <a:p>
+            <a:pPr>
+              <a:defRPr sz="2800" b="1">
+                <a:solidFill>
+                  <a:srgbClr val="00317E"/>
+                </a:solidFill>
+                <a:latin typeface="Arial"/>
+              </a:defRPr>
+            </a:pPr>
+            <a:r>
+              <a:t>The Proposed Solution: Student Hub</a:t>
+            </a:r>
+          </a:p>
+        </p:txBody>
+      </p:sp>
+      <p:sp>
+        <p:nvSpPr>
+          <p:cNvPr id="5" name="Rectangle 4"/>
+          <p:cNvSpPr/>
+          <p:nvPr/>
+        </p:nvSpPr>
+        <p:spPr>
+          <a:xfrm>
+            <a:off x="731520" y="1051560"/>
+            <a:ext cx="10698480" cy="36576"/>
+          </a:xfrm>
+          <a:prstGeom prst="rect">
+            <a:avLst/>
+          </a:prstGeom>
+          <a:solidFill>
+            <a:srgbClr val="D4AF37"/>
+          </a:solidFill>
+          <a:ln>
+            <a:solidFill>
+              <a:srgbClr val="D4AF37"/>
+            </a:solidFill>
+          </a:ln>
+        </p:spPr>
+        <p:style>
+          <a:lnRef idx="1">
+            <a:schemeClr val="accent1"/>
+          </a:lnRef>
+          <a:fillRef idx="3">
+            <a:schemeClr val="accent1"/>
+          </a:fillRef>
+          <a:effectRef idx="2">
+            <a:schemeClr val="accent1"/>
+          </a:effectRef>
+          <a:fontRef idx="minor">
+            <a:schemeClr val="lt1"/>
+          </a:fontRef>
+        </p:style>
+        <p:txBody>
+          <a:bodyPr rtlCol="0" anchor="ctr"/>
+          <a:lstStyle/>
+          <a:p>
+            <a:pPr algn="ctr"/>
+          </a:p>
+        </p:txBody>
+      </p:sp>
+      <p:sp>
+        <p:nvSpPr>
+          <p:cNvPr id="6" name="Rounded Rectangle 5"/>
+          <p:cNvSpPr/>
+          <p:nvPr/>
+        </p:nvSpPr>
+        <p:spPr>
+          <a:xfrm>
+            <a:off x="731520" y="1645920"/>
+            <a:ext cx="5212080" cy="1920240"/>
+          </a:xfrm>
+          <a:prstGeom prst="roundRect">
+            <a:avLst/>
+          </a:prstGeom>
+          <a:solidFill>
+            <a:srgbClr val="F2F2F7"/>
+          </a:solidFill>
+          <a:ln w="12700">
+            <a:solidFill>
+              <a:srgbClr val="10B981"/>
+            </a:solidFill>
+          </a:ln>
+        </p:spPr>
+        <p:style>
+          <a:lnRef idx="1">
+            <a:schemeClr val="accent1"/>
+          </a:lnRef>
+          <a:fillRef idx="3">
+            <a:schemeClr val="accent1"/>
+          </a:fillRef>
+          <a:effectRef idx="2">
+            <a:schemeClr val="accent1"/>
+          </a:effectRef>
+          <a:fontRef idx="minor">
+            <a:schemeClr val="lt1"/>
+          </a:fontRef>
+        </p:style>
+        <p:txBody>
+          <a:bodyPr rtlCol="0" anchor="ctr"/>
+          <a:lstStyle/>
+          <a:p>
+            <a:pPr algn="ctr"/>
+          </a:p>
+        </p:txBody>
+      </p:sp>
+      <p:sp>
+        <p:nvSpPr>
+          <p:cNvPr id="7" name="TextBox 6"/>
+          <p:cNvSpPr txBox="1"/>
+          <p:nvPr/>
+        </p:nvSpPr>
+        <p:spPr>
+          <a:xfrm>
+            <a:off x="914400" y="1783080"/>
+            <a:ext cx="4846320" cy="1645920"/>
+          </a:xfrm>
+          <a:prstGeom prst="rect">
+            <a:avLst/>
+          </a:prstGeom>
+          <a:noFill/>
+        </p:spPr>
+        <p:txBody>
+          <a:bodyPr wrap="square">
+            <a:spAutoFit/>
+          </a:bodyPr>
+          <a:lstStyle/>
+          <a:p>
+            <a:pPr>
+              <a:spcAft>
+                <a:spcPts val="600"/>
+              </a:spcAft>
+              <a:defRPr sz="1600" b="1">
+                <a:solidFill>
+                  <a:srgbClr val="00317E"/>
+                </a:solidFill>
+                <a:latin typeface="Arial"/>
+              </a:defRPr>
+            </a:pPr>
+            <a:r>
+              <a:t>⚡ Streamlined 4-Step Form</a:t>
+            </a:r>
+          </a:p>
+          <a:p>
+            <a:pPr>
+              <a:defRPr sz="1300">
+                <a:solidFill>
+                  <a:srgbClr val="1C1C1E"/>
+                </a:solidFill>
+                <a:latin typeface="Arial"/>
+              </a:defRPr>
+            </a:pPr>
+            <a:r>
+              <a:t>Replaces complex inputs with a clean wizard interface, keeping cognitive load low and completing files in 3 mins.</a:t>
+            </a:r>
+          </a:p>
+        </p:txBody>
+      </p:sp>
+      <p:sp>
+        <p:nvSpPr>
+          <p:cNvPr id="8" name="Rounded Rectangle 7"/>
+          <p:cNvSpPr/>
+          <p:nvPr/>
+        </p:nvSpPr>
+        <p:spPr>
+          <a:xfrm>
+            <a:off x="6217920" y="1645920"/>
+            <a:ext cx="5212080" cy="1920240"/>
+          </a:xfrm>
+          <a:prstGeom prst="roundRect">
+            <a:avLst/>
+          </a:prstGeom>
+          <a:solidFill>
+            <a:srgbClr val="F2F2F7"/>
+          </a:solidFill>
+          <a:ln w="12700">
+            <a:solidFill>
+              <a:srgbClr val="10B981"/>
+            </a:solidFill>
+          </a:ln>
+        </p:spPr>
+        <p:style>
+          <a:lnRef idx="1">
+            <a:schemeClr val="accent1"/>
+          </a:lnRef>
+          <a:fillRef idx="3">
+            <a:schemeClr val="accent1"/>
+          </a:fillRef>
+          <a:effectRef idx="2">
+            <a:schemeClr val="accent1"/>
+          </a:effectRef>
+          <a:fontRef idx="minor">
+            <a:schemeClr val="lt1"/>
+          </a:fontRef>
+        </p:style>
+        <p:txBody>
+          <a:bodyPr rtlCol="0" anchor="ctr"/>
+          <a:lstStyle/>
+          <a:p>
+            <a:pPr algn="ctr"/>
+          </a:p>
+        </p:txBody>
+      </p:sp>
+      <p:sp>
+        <p:nvSpPr>
+          <p:cNvPr id="9" name="TextBox 8"/>
+          <p:cNvSpPr txBox="1"/>
+          <p:nvPr/>
+        </p:nvSpPr>
+        <p:spPr>
+          <a:xfrm>
+            <a:off x="6400800" y="1783080"/>
+            <a:ext cx="4846320" cy="1645920"/>
+          </a:xfrm>
+          <a:prstGeom prst="rect">
+            <a:avLst/>
+          </a:prstGeom>
+          <a:noFill/>
+        </p:spPr>
+        <p:txBody>
+          <a:bodyPr wrap="square">
+            <a:spAutoFit/>
+          </a:bodyPr>
+          <a:lstStyle/>
+          <a:p>
+            <a:pPr>
+              <a:spcAft>
+                <a:spcPts val="600"/>
+              </a:spcAft>
+              <a:defRPr sz="1600" b="1">
+                <a:solidFill>
+                  <a:srgbClr val="00317E"/>
+                </a:solidFill>
+                <a:latin typeface="Arial"/>
+              </a:defRPr>
+            </a:pPr>
+            <a:r>
+              <a:t>🔒 Multi-Layered Cryptography</a:t>
+            </a:r>
+          </a:p>
+          <a:p>
+            <a:pPr>
+              <a:defRPr sz="1300">
+                <a:solidFill>
+                  <a:srgbClr val="1C1C1E"/>
+                </a:solidFill>
+                <a:latin typeface="Arial"/>
+              </a:defRPr>
+            </a:pPr>
+            <a:r>
+              <a:t>Implements Bcrypt hashes, WTForms CSRF validation, Separate session managers, and custom JWT tokens.</a:t>
+            </a:r>
+          </a:p>
+        </p:txBody>
+      </p:sp>
+      <p:sp>
+        <p:nvSpPr>
+          <p:cNvPr id="10" name="Rounded Rectangle 9"/>
+          <p:cNvSpPr/>
+          <p:nvPr/>
+        </p:nvSpPr>
+        <p:spPr>
+          <a:xfrm>
+            <a:off x="731520" y="3931920"/>
+            <a:ext cx="5212080" cy="1920240"/>
+          </a:xfrm>
+          <a:prstGeom prst="roundRect">
+            <a:avLst/>
+          </a:prstGeom>
+          <a:solidFill>
+            <a:srgbClr val="F2F2F7"/>
+          </a:solidFill>
+          <a:ln w="12700">
+            <a:solidFill>
+              <a:srgbClr val="10B981"/>
+            </a:solidFill>
+          </a:ln>
+        </p:spPr>
+        <p:style>
+          <a:lnRef idx="1">
+            <a:schemeClr val="accent1"/>
+          </a:lnRef>
+          <a:fillRef idx="3">
+            <a:schemeClr val="accent1"/>
+          </a:fillRef>
+          <a:effectRef idx="2">
+            <a:schemeClr val="accent1"/>
+          </a:effectRef>
+          <a:fontRef idx="minor">
+            <a:schemeClr val="lt1"/>
+          </a:fontRef>
+        </p:style>
+        <p:txBody>
+          <a:bodyPr rtlCol="0" anchor="ctr"/>
+          <a:lstStyle/>
+          <a:p>
+            <a:pPr algn="ctr"/>
+          </a:p>
+        </p:txBody>
+      </p:sp>
+      <p:sp>
+        <p:nvSpPr>
+          <p:cNvPr id="11" name="TextBox 10"/>
+          <p:cNvSpPr txBox="1"/>
+          <p:nvPr/>
+        </p:nvSpPr>
+        <p:spPr>
+          <a:xfrm>
+            <a:off x="914400" y="4069080"/>
+            <a:ext cx="4846320" cy="1645920"/>
+          </a:xfrm>
+          <a:prstGeom prst="rect">
+            <a:avLst/>
+          </a:prstGeom>
+          <a:noFill/>
+        </p:spPr>
+        <p:txBody>
+          <a:bodyPr wrap="square">
+            <a:spAutoFit/>
+          </a:bodyPr>
+          <a:lstStyle/>
+          <a:p>
+            <a:pPr>
+              <a:spcAft>
+                <a:spcPts val="600"/>
+              </a:spcAft>
+              <a:defRPr sz="1600" b="1">
+                <a:solidFill>
+                  <a:srgbClr val="00317E"/>
+                </a:solidFill>
+                <a:latin typeface="Arial"/>
+              </a:defRPr>
+            </a:pPr>
+            <a:r>
+              <a:t>🌐 100% Local CSP Integration</a:t>
+            </a:r>
+          </a:p>
+          <a:p>
+            <a:pPr>
+              <a:defRPr sz="1300">
+                <a:solidFill>
+                  <a:srgbClr val="1C1C1E"/>
+                </a:solidFill>
+                <a:latin typeface="Arial"/>
+              </a:defRPr>
+            </a:pPr>
+            <a:r>
+              <a:t>Assets like the Material Symbols font file are self-hosted inside static folders, removing external dependencies.</a:t>
+            </a:r>
+          </a:p>
+        </p:txBody>
+      </p:sp>
+      <p:sp>
+        <p:nvSpPr>
+          <p:cNvPr id="12" name="Rounded Rectangle 11"/>
+          <p:cNvSpPr/>
+          <p:nvPr/>
+        </p:nvSpPr>
+        <p:spPr>
+          <a:xfrm>
+            <a:off x="6217920" y="3931920"/>
+            <a:ext cx="5212080" cy="1920240"/>
+          </a:xfrm>
+          <a:prstGeom prst="roundRect">
+            <a:avLst/>
+          </a:prstGeom>
+          <a:solidFill>
+            <a:srgbClr val="F2F2F7"/>
+          </a:solidFill>
+          <a:ln w="12700">
+            <a:solidFill>
+              <a:srgbClr val="10B981"/>
+            </a:solidFill>
+          </a:ln>
+        </p:spPr>
+        <p:style>
+          <a:lnRef idx="1">
+            <a:schemeClr val="accent1"/>
+          </a:lnRef>
+          <a:fillRef idx="3">
+            <a:schemeClr val="accent1"/>
+          </a:fillRef>
+          <a:effectRef idx="2">
+            <a:schemeClr val="accent1"/>
+          </a:effectRef>
+          <a:fontRef idx="minor">
+            <a:schemeClr val="lt1"/>
+          </a:fontRef>
+        </p:style>
+        <p:txBody>
+          <a:bodyPr rtlCol="0" anchor="ctr"/>
+          <a:lstStyle/>
+          <a:p>
+            <a:pPr algn="ctr"/>
+          </a:p>
+        </p:txBody>
+      </p:sp>
+      <p:sp>
+        <p:nvSpPr>
+          <p:cNvPr id="13" name="TextBox 12"/>
+          <p:cNvSpPr txBox="1"/>
+          <p:nvPr/>
+        </p:nvSpPr>
+        <p:spPr>
+          <a:xfrm>
+            <a:off x="6400800" y="4069080"/>
+            <a:ext cx="4846320" cy="1645920"/>
+          </a:xfrm>
+          <a:prstGeom prst="rect">
+            <a:avLst/>
+          </a:prstGeom>
+          <a:noFill/>
+        </p:spPr>
+        <p:txBody>
+          <a:bodyPr wrap="square">
+            <a:spAutoFit/>
+          </a:bodyPr>
+          <a:lstStyle/>
+          <a:p>
+            <a:pPr>
+              <a:spcAft>
+                <a:spcPts val="600"/>
+              </a:spcAft>
+              <a:defRPr sz="1600" b="1">
+                <a:solidFill>
+                  <a:srgbClr val="00317E"/>
+                </a:solidFill>
+                <a:latin typeface="Arial"/>
+              </a:defRPr>
+            </a:pPr>
+            <a:r>
+              <a:t>📈 Centralized Admin Dashboard</a:t>
+            </a:r>
+          </a:p>
+          <a:p>
+            <a:pPr>
+              <a:defRPr sz="1300">
+                <a:solidFill>
+                  <a:srgbClr val="1C1C1E"/>
+                </a:solidFill>
+                <a:latin typeface="Arial"/>
+              </a:defRPr>
+            </a:pPr>
+            <a:r>
+              <a:t>Provides administrators with real-time sortable tables, candidate editors, CSV exports, and dynamic stats.</a:t>
+            </a:r>
+          </a:p>
+        </p:txBody>
+      </p:sp>
+    </p:spTree>
+  </p:cSld>
+  <p:clrMapOvr>
+    <a:masterClrMapping/>
+  </p:clrMapOvr>
+</p:sld>
+</file>
+
+<file path=ppt/slides/slide5.xml><?xml version="1.0" encoding="utf-8"?>
+<p:sld xmlns:a="http://schemas.openxmlformats.org/drawingml/2006/main" xmlns:p="http://schemas.openxmlformats.org/presentationml/2006/main" xmlns:r="http://schemas.openxmlformats.org/officeDocument/2006/relationships">
+  <p:cSld>
+    <p:bg>
+      <p:bgPr>
+        <a:solidFill>
+          <a:srgbClr val="FFFFFF"/>
+        </a:solidFill>
+        <a:effectLst/>
+      </p:bgPr>
+    </p:bg>
+    <p:spTree>
+      <p:nvGrpSpPr>
+        <p:cNvPr id="1" name=""/>
+        <p:cNvGrpSpPr/>
+        <p:nvPr/>
+      </p:nvGrpSpPr>
+      <p:grpSpPr/>
+      <p:pic>
+        <p:nvPicPr>
+          <p:cNvPr id="2" name="Picture 1" descr="logo.png"/>
+          <p:cNvPicPr>
+            <a:picLocks noChangeAspect="1"/>
+          </p:cNvPicPr>
+          <p:nvPr/>
+        </p:nvPicPr>
+        <p:blipFill>
+          <a:blip r:embed="rId2"/>
+          <a:stretch>
+            <a:fillRect/>
+          </a:stretch>
+        </p:blipFill>
+        <p:spPr>
+          <a:xfrm>
+            <a:off x="9601200" y="228600"/>
+            <a:ext cx="2286000" cy="699304"/>
+          </a:xfrm>
+          <a:prstGeom prst="rect">
+            <a:avLst/>
+          </a:prstGeom>
+        </p:spPr>
+      </p:pic>
+      <p:sp>
+        <p:nvSpPr>
+          <p:cNvPr id="3" name="TextBox 2"/>
+          <p:cNvSpPr txBox="1"/>
+          <p:nvPr/>
+        </p:nvSpPr>
+        <p:spPr>
+          <a:xfrm>
+            <a:off x="731520" y="6400800"/>
+            <a:ext cx="10698480" cy="365760"/>
+          </a:xfrm>
+          <a:prstGeom prst="rect">
+            <a:avLst/>
+          </a:prstGeom>
+          <a:noFill/>
+        </p:spPr>
+        <p:txBody>
+          <a:bodyPr wrap="square" lIns="0" tIns="0" bIns="0" rIns="0">
+            <a:spAutoFit/>
+          </a:bodyPr>
+          <a:lstStyle/>
+          <a:p>
+            <a:pPr algn="ctr">
+              <a:defRPr sz="950">
+                <a:solidFill>
+                  <a:srgbClr val="6E6E73"/>
+                </a:solidFill>
+                <a:latin typeface="Arial"/>
+              </a:defRPr>
+            </a:pPr>
+            <a:r>
+              <a:t>Student Hub  |  Sapthagiri University  |  Keerthana GP (24SUUBECS0914)  |  Keerthana BS (23SUUBECS0909)  |  Kiran M Biradar (24SUUBECS0937)</a:t>
+            </a:r>
+          </a:p>
+        </p:txBody>
+      </p:sp>
+      <p:sp>
+        <p:nvSpPr>
+          <p:cNvPr id="4" name="TextBox 3"/>
+          <p:cNvSpPr txBox="1"/>
+          <p:nvPr/>
+        </p:nvSpPr>
+        <p:spPr>
+          <a:xfrm>
+            <a:off x="731520" y="365760"/>
+            <a:ext cx="8686800" cy="731520"/>
+          </a:xfrm>
+          <a:prstGeom prst="rect">
+            <a:avLst/>
+          </a:prstGeom>
+          <a:noFill/>
+        </p:spPr>
+        <p:txBody>
+          <a:bodyPr wrap="square" lIns="0" tIns="0" bIns="0" rIns="0">
+            <a:spAutoFit/>
+          </a:bodyPr>
+          <a:lstStyle/>
+          <a:p>
+            <a:pPr>
+              <a:defRPr sz="2800" b="1">
+                <a:solidFill>
+                  <a:srgbClr val="00317E"/>
+                </a:solidFill>
+                <a:latin typeface="Arial"/>
+              </a:defRPr>
+            </a:pPr>
+            <a:r>
+              <a:t>System Architecture</a:t>
+            </a:r>
+          </a:p>
+        </p:txBody>
+      </p:sp>
+      <p:sp>
+        <p:nvSpPr>
+          <p:cNvPr id="5" name="Rectangle 4"/>
+          <p:cNvSpPr/>
+          <p:nvPr/>
+        </p:nvSpPr>
+        <p:spPr>
+          <a:xfrm>
+            <a:off x="731520" y="1051560"/>
+            <a:ext cx="10698480" cy="36576"/>
+          </a:xfrm>
+          <a:prstGeom prst="rect">
+            <a:avLst/>
+          </a:prstGeom>
+          <a:solidFill>
+            <a:srgbClr val="D4AF37"/>
+          </a:solidFill>
+          <a:ln>
+            <a:solidFill>
+              <a:srgbClr val="D4AF37"/>
+            </a:solidFill>
+          </a:ln>
+        </p:spPr>
+        <p:style>
+          <a:lnRef idx="1">
+            <a:schemeClr val="accent1"/>
+          </a:lnRef>
+          <a:fillRef idx="3">
+            <a:schemeClr val="accent1"/>
+          </a:fillRef>
+          <a:effectRef idx="2">
+            <a:schemeClr val="accent1"/>
+          </a:effectRef>
+          <a:fontRef idx="minor">
+            <a:schemeClr val="lt1"/>
+          </a:fontRef>
+        </p:style>
+        <p:txBody>
+          <a:bodyPr rtlCol="0" anchor="ctr"/>
+          <a:lstStyle/>
+          <a:p>
+            <a:pPr algn="ctr"/>
+          </a:p>
+        </p:txBody>
+      </p:sp>
+      <p:sp>
+        <p:nvSpPr>
+          <p:cNvPr id="6" name="Rectangle 5"/>
+          <p:cNvSpPr/>
+          <p:nvPr/>
+        </p:nvSpPr>
+        <p:spPr>
+          <a:xfrm>
+            <a:off x="731520" y="1645920"/>
+            <a:ext cx="3429000" cy="4023360"/>
+          </a:xfrm>
+          <a:prstGeom prst="rect">
+            <a:avLst/>
+          </a:prstGeom>
+          <a:solidFill>
+            <a:srgbClr val="F2F2F7"/>
+          </a:solidFill>
+          <a:ln w="19050">
+            <a:solidFill>
+              <a:srgbClr val="D4AF37"/>
+            </a:solidFill>
+          </a:ln>
+        </p:spPr>
+        <p:style>
+          <a:lnRef idx="1">
+            <a:schemeClr val="accent1"/>
+          </a:lnRef>
+          <a:fillRef idx="3">
+            <a:schemeClr val="accent1"/>
+          </a:fillRef>
+          <a:effectRef idx="2">
+            <a:schemeClr val="accent1"/>
+          </a:effectRef>
+          <a:fontRef idx="minor">
+            <a:schemeClr val="lt1"/>
+          </a:fontRef>
+        </p:style>
+        <p:txBody>
+          <a:bodyPr rtlCol="0" anchor="ctr"/>
+          <a:lstStyle/>
+          <a:p>
+            <a:pPr algn="ctr"/>
+          </a:p>
+        </p:txBody>
+      </p:sp>
+      <p:sp>
+        <p:nvSpPr>
+          <p:cNvPr id="7" name="TextBox 6"/>
+          <p:cNvSpPr txBox="1"/>
+          <p:nvPr/>
+        </p:nvSpPr>
+        <p:spPr>
+          <a:xfrm>
+            <a:off x="868680" y="1828800"/>
+            <a:ext cx="3154680" cy="3657600"/>
+          </a:xfrm>
+          <a:prstGeom prst="rect">
+            <a:avLst/>
+          </a:prstGeom>
+          <a:noFill/>
+        </p:spPr>
+        <p:txBody>
+          <a:bodyPr wrap="square">
+            <a:spAutoFit/>
+          </a:bodyPr>
+          <a:lstStyle/>
+          <a:p>
+            <a:pPr>
+              <a:defRPr sz="1600" b="1">
+                <a:solidFill>
+                  <a:srgbClr val="00317E"/>
+                </a:solidFill>
+                <a:latin typeface="Arial"/>
+              </a:defRPr>
+            </a:pPr>
+            <a:r>
+              <a:t>📂 VISUAL LAYER</a:t>
+            </a:r>
+          </a:p>
+          <a:p>
+            <a:pPr>
+              <a:spcAft>
+                <a:spcPts val="1400"/>
+              </a:spcAft>
+              <a:defRPr sz="1200" i="1">
+                <a:solidFill>
+                  <a:srgbClr val="D4AF37"/>
+                </a:solidFill>
+                <a:latin typeface="Arial"/>
+              </a:defRPr>
+            </a:pPr>
+            <a:r>
+              <a:t>Client-Side</a:t>
+            </a:r>
+          </a:p>
+          <a:p>
+            <a:pPr>
+              <a:spcBef>
+                <a:spcPts val="800"/>
+              </a:spcBef>
+              <a:defRPr sz="1300">
+                <a:solidFill>
+                  <a:srgbClr val="1C1C1E"/>
+                </a:solidFill>
+                <a:latin typeface="Arial"/>
+              </a:defRPr>
+            </a:pPr>
+            <a:r>
+              <a:t>• HTML5 semantic structures</a:t>
+            </a:r>
+          </a:p>
+          <a:p>
+            <a:pPr>
+              <a:spcBef>
+                <a:spcPts val="800"/>
+              </a:spcBef>
+              <a:defRPr sz="1300">
+                <a:solidFill>
+                  <a:srgbClr val="1C1C1E"/>
+                </a:solidFill>
+                <a:latin typeface="Arial"/>
+              </a:defRPr>
+            </a:pPr>
+            <a:r>
+              <a:t>• CSS3 custom variables theme</a:t>
+            </a:r>
+          </a:p>
+          <a:p>
+            <a:pPr>
+              <a:spcBef>
+                <a:spcPts val="800"/>
+              </a:spcBef>
+              <a:defRPr sz="1300">
+                <a:solidFill>
+                  <a:srgbClr val="1C1C1E"/>
+                </a:solidFill>
+                <a:latin typeface="Arial"/>
+              </a:defRPr>
+            </a:pPr>
+            <a:r>
+              <a:t>• Vanilla JS state engine</a:t>
+            </a:r>
+          </a:p>
+          <a:p>
+            <a:pPr>
+              <a:spcBef>
+                <a:spcPts val="800"/>
+              </a:spcBef>
+              <a:defRPr sz="1300">
+                <a:solidFill>
+                  <a:srgbClr val="1C1C1E"/>
+                </a:solidFill>
+                <a:latin typeface="Arial"/>
+              </a:defRPr>
+            </a:pPr>
+            <a:r>
+              <a:t>• Local Material Symbols font</a:t>
+            </a:r>
+          </a:p>
+          <a:p>
+            <a:pPr>
+              <a:spcBef>
+                <a:spcPts val="800"/>
+              </a:spcBef>
+              <a:defRPr sz="1300">
+                <a:solidFill>
+                  <a:srgbClr val="1C1C1E"/>
+                </a:solidFill>
+                <a:latin typeface="Arial"/>
+              </a:defRPr>
+            </a:pPr>
+            <a:r>
+              <a:t>• Responsive viewport adapter</a:t>
+            </a:r>
+          </a:p>
+        </p:txBody>
+      </p:sp>
+      <p:sp>
+        <p:nvSpPr>
+          <p:cNvPr id="8" name="Rectangle 7"/>
+          <p:cNvSpPr/>
+          <p:nvPr/>
+        </p:nvSpPr>
+        <p:spPr>
+          <a:xfrm>
+            <a:off x="4389120" y="1645920"/>
+            <a:ext cx="3429000" cy="4023360"/>
+          </a:xfrm>
+          <a:prstGeom prst="rect">
+            <a:avLst/>
+          </a:prstGeom>
+          <a:solidFill>
+            <a:srgbClr val="F2F2F7"/>
+          </a:solidFill>
+          <a:ln w="19050">
+            <a:solidFill>
+              <a:srgbClr val="D4AF37"/>
+            </a:solidFill>
+          </a:ln>
+        </p:spPr>
+        <p:style>
+          <a:lnRef idx="1">
+            <a:schemeClr val="accent1"/>
+          </a:lnRef>
+          <a:fillRef idx="3">
+            <a:schemeClr val="accent1"/>
+          </a:fillRef>
+          <a:effectRef idx="2">
+            <a:schemeClr val="accent1"/>
+          </a:effectRef>
+          <a:fontRef idx="minor">
+            <a:schemeClr val="lt1"/>
+          </a:fontRef>
+        </p:style>
+        <p:txBody>
+          <a:bodyPr rtlCol="0" anchor="ctr"/>
+          <a:lstStyle/>
+          <a:p>
+            <a:pPr algn="ctr"/>
+          </a:p>
+        </p:txBody>
+      </p:sp>
+      <p:sp>
+        <p:nvSpPr>
+          <p:cNvPr id="9" name="TextBox 8"/>
+          <p:cNvSpPr txBox="1"/>
+          <p:nvPr/>
+        </p:nvSpPr>
+        <p:spPr>
+          <a:xfrm>
+            <a:off x="4526280" y="1828800"/>
+            <a:ext cx="3154680" cy="3657600"/>
+          </a:xfrm>
+          <a:prstGeom prst="rect">
+            <a:avLst/>
+          </a:prstGeom>
+          <a:noFill/>
+        </p:spPr>
+        <p:txBody>
+          <a:bodyPr wrap="square">
+            <a:spAutoFit/>
+          </a:bodyPr>
+          <a:lstStyle/>
+          <a:p>
+            <a:pPr>
+              <a:defRPr sz="1600" b="1">
+                <a:solidFill>
+                  <a:srgbClr val="00317E"/>
+                </a:solidFill>
+                <a:latin typeface="Arial"/>
+              </a:defRPr>
+            </a:pPr>
+            <a:r>
+              <a:t>⚙️ LOGIC LAYER</a:t>
+            </a:r>
+          </a:p>
+          <a:p>
+            <a:pPr>
+              <a:spcAft>
+                <a:spcPts val="1400"/>
+              </a:spcAft>
+              <a:defRPr sz="1200" i="1">
+                <a:solidFill>
+                  <a:srgbClr val="D4AF37"/>
+                </a:solidFill>
+                <a:latin typeface="Arial"/>
+              </a:defRPr>
+            </a:pPr>
+            <a:r>
+              <a:t>Server-Side</a:t>
+            </a:r>
+          </a:p>
+          <a:p>
+            <a:pPr>
+              <a:spcBef>
+                <a:spcPts val="800"/>
+              </a:spcBef>
+              <a:defRPr sz="1300">
+                <a:solidFill>
+                  <a:srgbClr val="1C1C1E"/>
+                </a:solidFill>
+                <a:latin typeface="Arial"/>
+              </a:defRPr>
+            </a:pPr>
+            <a:r>
+              <a:t>• Flask 3.0 controller routing</a:t>
+            </a:r>
+          </a:p>
+          <a:p>
+            <a:pPr>
+              <a:spcBef>
+                <a:spcPts val="800"/>
+              </a:spcBef>
+              <a:defRPr sz="1300">
+                <a:solidFill>
+                  <a:srgbClr val="1C1C1E"/>
+                </a:solidFill>
+                <a:latin typeface="Arial"/>
+              </a:defRPr>
+            </a:pPr>
+            <a:r>
+              <a:t>• SQLAlchemy ORM adapter</a:t>
+            </a:r>
+          </a:p>
+          <a:p>
+            <a:pPr>
+              <a:spcBef>
+                <a:spcPts val="800"/>
+              </a:spcBef>
+              <a:defRPr sz="1300">
+                <a:solidFill>
+                  <a:srgbClr val="1C1C1E"/>
+                </a:solidFill>
+                <a:latin typeface="Arial"/>
+              </a:defRPr>
+            </a:pPr>
+            <a:r>
+              <a:t>• Bcrypt passwords generator</a:t>
+            </a:r>
+          </a:p>
+          <a:p>
+            <a:pPr>
+              <a:spcBef>
+                <a:spcPts val="800"/>
+              </a:spcBef>
+              <a:defRPr sz="1300">
+                <a:solidFill>
+                  <a:srgbClr val="1C1C1E"/>
+                </a:solidFill>
+                <a:latin typeface="Arial"/>
+              </a:defRPr>
+            </a:pPr>
+            <a:r>
+              <a:t>• JWT secure API tokens</a:t>
+            </a:r>
+          </a:p>
+          <a:p>
+            <a:pPr>
+              <a:spcBef>
+                <a:spcPts val="800"/>
+              </a:spcBef>
+              <a:defRPr sz="1300">
+                <a:solidFill>
+                  <a:srgbClr val="1C1C1E"/>
+                </a:solidFill>
+                <a:latin typeface="Arial"/>
+              </a:defRPr>
+            </a:pPr>
+            <a:r>
+              <a:t>• Request Audit Logging (audit.py)</a:t>
+            </a:r>
+          </a:p>
+        </p:txBody>
+      </p:sp>
+      <p:sp>
+        <p:nvSpPr>
+          <p:cNvPr id="10" name="Rectangle 9"/>
+          <p:cNvSpPr/>
+          <p:nvPr/>
+        </p:nvSpPr>
+        <p:spPr>
+          <a:xfrm>
+            <a:off x="8046720" y="1645920"/>
+            <a:ext cx="3429000" cy="4023360"/>
+          </a:xfrm>
+          <a:prstGeom prst="rect">
+            <a:avLst/>
+          </a:prstGeom>
+          <a:solidFill>
+            <a:srgbClr val="F2F2F7"/>
+          </a:solidFill>
+          <a:ln w="19050">
+            <a:solidFill>
+              <a:srgbClr val="D4AF37"/>
+            </a:solidFill>
+          </a:ln>
+        </p:spPr>
+        <p:style>
+          <a:lnRef idx="1">
+            <a:schemeClr val="accent1"/>
+          </a:lnRef>
+          <a:fillRef idx="3">
+            <a:schemeClr val="accent1"/>
+          </a:fillRef>
+          <a:effectRef idx="2">
+            <a:schemeClr val="accent1"/>
+          </a:effectRef>
+          <a:fontRef idx="minor">
+            <a:schemeClr val="lt1"/>
+          </a:fontRef>
+        </p:style>
+        <p:txBody>
+          <a:bodyPr rtlCol="0" anchor="ctr"/>
+          <a:lstStyle/>
+          <a:p>
+            <a:pPr algn="ctr"/>
+          </a:p>
+        </p:txBody>
+      </p:sp>
+      <p:sp>
+        <p:nvSpPr>
+          <p:cNvPr id="11" name="TextBox 10"/>
+          <p:cNvSpPr txBox="1"/>
+          <p:nvPr/>
+        </p:nvSpPr>
+        <p:spPr>
+          <a:xfrm>
+            <a:off x="8183880" y="1828800"/>
+            <a:ext cx="3154680" cy="3657600"/>
+          </a:xfrm>
+          <a:prstGeom prst="rect">
+            <a:avLst/>
+          </a:prstGeom>
+          <a:noFill/>
+        </p:spPr>
+        <p:txBody>
+          <a:bodyPr wrap="square">
+            <a:spAutoFit/>
+          </a:bodyPr>
+          <a:lstStyle/>
+          <a:p>
+            <a:pPr>
+              <a:defRPr sz="1600" b="1">
+                <a:solidFill>
+                  <a:srgbClr val="00317E"/>
+                </a:solidFill>
+                <a:latin typeface="Arial"/>
+              </a:defRPr>
+            </a:pPr>
+            <a:r>
+              <a:t>🗄️ STORAGE LAYER</a:t>
+            </a:r>
+          </a:p>
+          <a:p>
+            <a:pPr>
+              <a:spcAft>
+                <a:spcPts val="1400"/>
+              </a:spcAft>
+              <a:defRPr sz="1200" i="1">
+                <a:solidFill>
+                  <a:srgbClr val="D4AF37"/>
+                </a:solidFill>
+                <a:latin typeface="Arial"/>
+              </a:defRPr>
+            </a:pPr>
+            <a:r>
+              <a:t>Database Engine</a:t>
+            </a:r>
+          </a:p>
+          <a:p>
+            <a:pPr>
+              <a:spcBef>
+                <a:spcPts val="800"/>
+              </a:spcBef>
+              <a:defRPr sz="1300">
+                <a:solidFill>
+                  <a:srgbClr val="1C1C1E"/>
+                </a:solidFill>
+                <a:latin typeface="Arial"/>
+              </a:defRPr>
+            </a:pPr>
+            <a:r>
+              <a:t>• SQLite for local testing</a:t>
+            </a:r>
+          </a:p>
+          <a:p>
+            <a:pPr>
+              <a:spcBef>
+                <a:spcPts val="800"/>
+              </a:spcBef>
+              <a:defRPr sz="1300">
+                <a:solidFill>
+                  <a:srgbClr val="1C1C1E"/>
+                </a:solidFill>
+                <a:latin typeface="Arial"/>
+              </a:defRPr>
+            </a:pPr>
+            <a:r>
+              <a:t>• MySQL 8+ for production setup</a:t>
+            </a:r>
+          </a:p>
+          <a:p>
+            <a:pPr>
+              <a:spcBef>
+                <a:spcPts val="800"/>
+              </a:spcBef>
+              <a:defRPr sz="1300">
+                <a:solidFill>
+                  <a:srgbClr val="1C1C1E"/>
+                </a:solidFill>
+                <a:latin typeface="Arial"/>
+              </a:defRPr>
+            </a:pPr>
+            <a:r>
+              <a:t>• Candidate/Admin schemas</a:t>
+            </a:r>
+          </a:p>
+          <a:p>
+            <a:pPr>
+              <a:spcBef>
+                <a:spcPts val="800"/>
+              </a:spcBef>
+              <a:defRPr sz="1300">
+                <a:solidFill>
+                  <a:srgbClr val="1C1C1E"/>
+                </a:solidFill>
+                <a:latin typeface="Arial"/>
+              </a:defRPr>
+            </a:pPr>
+            <a:r>
+              <a:t>• Uniqueness indexes on DB</a:t>
+            </a:r>
+          </a:p>
+          <a:p>
+            <a:pPr>
+              <a:spcBef>
+                <a:spcPts val="800"/>
+              </a:spcBef>
+              <a:defRPr sz="1300">
+                <a:solidFill>
+                  <a:srgbClr val="1C1C1E"/>
+                </a:solidFill>
+                <a:latin typeface="Arial"/>
+              </a:defRPr>
+            </a:pPr>
+            <a:r>
+              <a:t>• Relational catalog tables</a:t>
+            </a:r>
+          </a:p>
+        </p:txBody>
+      </p:sp>
+    </p:spTree>
+  </p:cSld>
+  <p:clrMapOvr>
+    <a:masterClrMapping/>
+  </p:clrMapOvr>
+</p:sld>
+</file>
+
+<file path=ppt/slides/slide6.xml><?xml version="1.0" encoding="utf-8"?>
+<p:sld xmlns:a="http://schemas.openxmlformats.org/drawingml/2006/main" xmlns:p="http://schemas.openxmlformats.org/presentationml/2006/main" xmlns:r="http://schemas.openxmlformats.org/officeDocument/2006/relationships">
+  <p:cSld>
+    <p:bg>
+      <p:bgPr>
+        <a:solidFill>
+          <a:srgbClr val="FFFFFF"/>
+        </a:solidFill>
+        <a:effectLst/>
+      </p:bgPr>
+    </p:bg>
+    <p:spTree>
+      <p:nvGrpSpPr>
+        <p:cNvPr id="1" name=""/>
+        <p:cNvGrpSpPr/>
+        <p:nvPr/>
+      </p:nvGrpSpPr>
+      <p:grpSpPr/>
+      <p:pic>
+        <p:nvPicPr>
+          <p:cNvPr id="2" name="Picture 1" descr="logo.png"/>
+          <p:cNvPicPr>
+            <a:picLocks noChangeAspect="1"/>
+          </p:cNvPicPr>
+          <p:nvPr/>
+        </p:nvPicPr>
+        <p:blipFill>
+          <a:blip r:embed="rId2"/>
+          <a:stretch>
+            <a:fillRect/>
+          </a:stretch>
+        </p:blipFill>
+        <p:spPr>
+          <a:xfrm>
+            <a:off x="9601200" y="228600"/>
+            <a:ext cx="2286000" cy="699304"/>
+          </a:xfrm>
+          <a:prstGeom prst="rect">
+            <a:avLst/>
+          </a:prstGeom>
+        </p:spPr>
+      </p:pic>
+      <p:sp>
+        <p:nvSpPr>
+          <p:cNvPr id="3" name="TextBox 2"/>
+          <p:cNvSpPr txBox="1"/>
+          <p:nvPr/>
+        </p:nvSpPr>
+        <p:spPr>
+          <a:xfrm>
+            <a:off x="731520" y="6400800"/>
+            <a:ext cx="10698480" cy="365760"/>
+          </a:xfrm>
+          <a:prstGeom prst="rect">
+            <a:avLst/>
+          </a:prstGeom>
+          <a:noFill/>
+        </p:spPr>
+        <p:txBody>
+          <a:bodyPr wrap="square" lIns="0" tIns="0" bIns="0" rIns="0">
+            <a:spAutoFit/>
+          </a:bodyPr>
+          <a:lstStyle/>
+          <a:p>
+            <a:pPr algn="ctr">
+              <a:defRPr sz="950">
+                <a:solidFill>
+                  <a:srgbClr val="6E6E73"/>
+                </a:solidFill>
+                <a:latin typeface="Arial"/>
+              </a:defRPr>
+            </a:pPr>
+            <a:r>
+              <a:t>Student Hub  |  Sapthagiri University  |  Keerthana GP (24SUUBECS0914)  |  Keerthana BS (23SUUBECS0909)  |  Kiran M Biradar (24SUUBECS0937)</a:t>
+            </a:r>
+          </a:p>
+        </p:txBody>
+      </p:sp>
+      <p:sp>
+        <p:nvSpPr>
+          <p:cNvPr id="4" name="TextBox 3"/>
+          <p:cNvSpPr txBox="1"/>
+          <p:nvPr/>
+        </p:nvSpPr>
+        <p:spPr>
+          <a:xfrm>
+            <a:off x="731520" y="365760"/>
+            <a:ext cx="8686800" cy="731520"/>
+          </a:xfrm>
+          <a:prstGeom prst="rect">
+            <a:avLst/>
+          </a:prstGeom>
+          <a:noFill/>
+        </p:spPr>
+        <p:txBody>
+          <a:bodyPr wrap="square" lIns="0" tIns="0" bIns="0" rIns="0">
+            <a:spAutoFit/>
+          </a:bodyPr>
+          <a:lstStyle/>
+          <a:p>
+            <a:pPr>
+              <a:defRPr sz="2800" b="1">
+                <a:solidFill>
+                  <a:srgbClr val="00317E"/>
+                </a:solidFill>
+                <a:latin typeface="Arial"/>
+              </a:defRPr>
+            </a:pPr>
+            <a:r>
+              <a:t>Registration Process: Steps 1 &amp; 2</a:t>
+            </a:r>
+          </a:p>
+        </p:txBody>
+      </p:sp>
+      <p:sp>
+        <p:nvSpPr>
+          <p:cNvPr id="5" name="Rectangle 4"/>
+          <p:cNvSpPr/>
+          <p:nvPr/>
+        </p:nvSpPr>
+        <p:spPr>
+          <a:xfrm>
+            <a:off x="731520" y="1051560"/>
+            <a:ext cx="10698480" cy="36576"/>
+          </a:xfrm>
+          <a:prstGeom prst="rect">
+            <a:avLst/>
+          </a:prstGeom>
+          <a:solidFill>
+            <a:srgbClr val="D4AF37"/>
+          </a:solidFill>
+          <a:ln>
+            <a:solidFill>
+              <a:srgbClr val="D4AF37"/>
+            </a:solidFill>
+          </a:ln>
+        </p:spPr>
+        <p:style>
+          <a:lnRef idx="1">
+            <a:schemeClr val="accent1"/>
+          </a:lnRef>
+          <a:fillRef idx="3">
+            <a:schemeClr val="accent1"/>
+          </a:fillRef>
+          <a:effectRef idx="2">
+            <a:schemeClr val="accent1"/>
+          </a:effectRef>
+          <a:fontRef idx="minor">
+            <a:schemeClr val="lt1"/>
+          </a:fontRef>
+        </p:style>
+        <p:txBody>
+          <a:bodyPr rtlCol="0" anchor="ctr"/>
+          <a:lstStyle/>
+          <a:p>
+            <a:pPr algn="ctr"/>
+          </a:p>
+        </p:txBody>
+      </p:sp>
+      <p:sp>
+        <p:nvSpPr>
+          <p:cNvPr id="6" name="Rectangle 5"/>
+          <p:cNvSpPr/>
+          <p:nvPr/>
+        </p:nvSpPr>
+        <p:spPr>
+          <a:xfrm>
+            <a:off x="731520" y="1371600"/>
+            <a:ext cx="10698480" cy="137160"/>
+          </a:xfrm>
+          <a:prstGeom prst="rect">
+            <a:avLst/>
+          </a:prstGeom>
+          <a:solidFill>
+            <a:srgbClr val="F2F2F7"/>
+          </a:solidFill>
+          <a:ln>
+            <a:noFill/>
+          </a:ln>
+        </p:spPr>
+        <p:style>
+          <a:lnRef idx="1">
+            <a:schemeClr val="accent1"/>
+          </a:lnRef>
+          <a:fillRef idx="3">
+            <a:schemeClr val="accent1"/>
+          </a:fillRef>
+          <a:effectRef idx="2">
+            <a:schemeClr val="accent1"/>
+          </a:effectRef>
+          <a:fontRef idx="minor">
+            <a:schemeClr val="lt1"/>
+          </a:fontRef>
+        </p:style>
+        <p:txBody>
+          <a:bodyPr rtlCol="0" anchor="ctr"/>
+          <a:lstStyle/>
+          <a:p>
+            <a:pPr algn="ctr"/>
+          </a:p>
+        </p:txBody>
+      </p:sp>
+      <p:sp>
+        <p:nvSpPr>
+          <p:cNvPr id="7" name="Rectangle 6"/>
+          <p:cNvSpPr/>
+          <p:nvPr/>
+        </p:nvSpPr>
+        <p:spPr>
+          <a:xfrm>
+            <a:off x="731520" y="1371600"/>
+            <a:ext cx="5349240" cy="137160"/>
+          </a:xfrm>
+          <a:prstGeom prst="rect">
+            <a:avLst/>
+          </a:prstGeom>
+          <a:solidFill>
+            <a:srgbClr val="D4AF37"/>
+          </a:solidFill>
+          <a:ln>
+            <a:noFill/>
+          </a:ln>
+        </p:spPr>
+        <p:style>
+          <a:lnRef idx="1">
+            <a:schemeClr val="accent1"/>
+          </a:lnRef>
+          <a:fillRef idx="3">
+            <a:schemeClr val="accent1"/>
+          </a:fillRef>
+          <a:effectRef idx="2">
+            <a:schemeClr val="accent1"/>
+          </a:effectRef>
+          <a:fontRef idx="minor">
+            <a:schemeClr val="lt1"/>
+          </a:fontRef>
+        </p:style>
+        <p:txBody>
+          <a:bodyPr rtlCol="0" anchor="ctr"/>
+          <a:lstStyle/>
+          <a:p>
+            <a:pPr algn="ctr"/>
+          </a:p>
+        </p:txBody>
+      </p:sp>
+      <p:sp>
+        <p:nvSpPr>
+          <p:cNvPr id="8" name="Rounded Rectangle 7"/>
+          <p:cNvSpPr/>
+          <p:nvPr/>
+        </p:nvSpPr>
+        <p:spPr>
+          <a:xfrm>
+            <a:off x="731520" y="1737360"/>
+            <a:ext cx="5120640" cy="4023360"/>
+          </a:xfrm>
+          <a:prstGeom prst="roundRect">
+            <a:avLst/>
+          </a:prstGeom>
+          <a:solidFill>
+            <a:srgbClr val="F2F2F7"/>
+          </a:solidFill>
+          <a:ln w="12700">
+            <a:solidFill>
+              <a:srgbClr val="00317E"/>
+            </a:solidFill>
+          </a:ln>
+        </p:spPr>
+        <p:style>
+          <a:lnRef idx="1">
+            <a:schemeClr val="accent1"/>
+          </a:lnRef>
+          <a:fillRef idx="3">
+            <a:schemeClr val="accent1"/>
+          </a:fillRef>
+          <a:effectRef idx="2">
+            <a:schemeClr val="accent1"/>
+          </a:effectRef>
+          <a:fontRef idx="minor">
+            <a:schemeClr val="lt1"/>
+          </a:fontRef>
+        </p:style>
+        <p:txBody>
+          <a:bodyPr rtlCol="0" anchor="ctr"/>
+          <a:lstStyle/>
+          <a:p>
+            <a:pPr algn="ctr"/>
+          </a:p>
+        </p:txBody>
+      </p:sp>
+      <p:sp>
+        <p:nvSpPr>
+          <p:cNvPr id="9" name="TextBox 8"/>
+          <p:cNvSpPr txBox="1"/>
+          <p:nvPr/>
+        </p:nvSpPr>
+        <p:spPr>
+          <a:xfrm>
+            <a:off x="914400" y="1920240"/>
+            <a:ext cx="4754880" cy="3657600"/>
+          </a:xfrm>
+          <a:prstGeom prst="rect">
+            <a:avLst/>
+          </a:prstGeom>
+          <a:noFill/>
+        </p:spPr>
+        <p:txBody>
+          <a:bodyPr wrap="square">
+            <a:spAutoFit/>
+          </a:bodyPr>
+          <a:lstStyle/>
+          <a:p>
+            <a:pPr>
+              <a:spcAft>
+                <a:spcPts val="1400"/>
+              </a:spcAft>
+              <a:defRPr sz="1800" b="1">
+                <a:solidFill>
+                  <a:srgbClr val="00317E"/>
+                </a:solidFill>
+                <a:latin typeface="Arial"/>
+              </a:defRPr>
+            </a:pPr>
+            <a:r>
+              <a:t>STEP 1: PERSONAL INFORMATION</a:t>
+            </a:r>
+          </a:p>
+          <a:p>
+            <a:pPr>
+              <a:spcBef>
+                <a:spcPts val="1000"/>
+              </a:spcBef>
+              <a:defRPr sz="1400">
+                <a:solidFill>
+                  <a:srgbClr val="1C1C1E"/>
+                </a:solidFill>
+                <a:latin typeface="Arial"/>
+              </a:defRPr>
+            </a:pPr>
+            <a:r>
+              <a:t>👥 Full Identity Fields: First and Last Name entries.</a:t>
+            </a:r>
+          </a:p>
+          <a:p>
+            <a:pPr>
+              <a:spcBef>
+                <a:spcPts val="1000"/>
+              </a:spcBef>
+              <a:defRPr sz="1400">
+                <a:solidFill>
+                  <a:srgbClr val="1C1C1E"/>
+                </a:solidFill>
+                <a:latin typeface="Arial"/>
+              </a:defRPr>
+            </a:pPr>
+            <a:r>
+              <a:t>📅 Date of Birth Validation: Enforces appropriate age validations.</a:t>
+            </a:r>
+          </a:p>
+          <a:p>
+            <a:pPr>
+              <a:spcBef>
+                <a:spcPts val="1000"/>
+              </a:spcBef>
+              <a:defRPr sz="1400">
+                <a:solidFill>
+                  <a:srgbClr val="1C1C1E"/>
+                </a:solidFill>
+                <a:latin typeface="Arial"/>
+              </a:defRPr>
+            </a:pPr>
+            <a:r>
+              <a:t>✉️ Email Verification: Validates format on form focus and checks uniqueness on the DB.</a:t>
+            </a:r>
+          </a:p>
+          <a:p>
+            <a:pPr>
+              <a:spcBef>
+                <a:spcPts val="1000"/>
+              </a:spcBef>
+              <a:defRPr sz="1400">
+                <a:solidFill>
+                  <a:srgbClr val="1C1C1E"/>
+                </a:solidFill>
+                <a:latin typeface="Arial"/>
+              </a:defRPr>
+            </a:pPr>
+            <a:r>
+              <a:t>📞 Phone Formatter: Enforces correct local phone number formatting patterns.</a:t>
+            </a:r>
+          </a:p>
+        </p:txBody>
+      </p:sp>
+      <p:sp>
+        <p:nvSpPr>
+          <p:cNvPr id="10" name="Rounded Rectangle 9"/>
+          <p:cNvSpPr/>
+          <p:nvPr/>
+        </p:nvSpPr>
+        <p:spPr>
+          <a:xfrm>
+            <a:off x="6309360" y="1737360"/>
+            <a:ext cx="5120640" cy="4023360"/>
+          </a:xfrm>
+          <a:prstGeom prst="roundRect">
+            <a:avLst/>
+          </a:prstGeom>
+          <a:solidFill>
+            <a:srgbClr val="F2F2F7"/>
+          </a:solidFill>
+          <a:ln w="12700">
+            <a:solidFill>
+              <a:srgbClr val="00317E"/>
+            </a:solidFill>
+          </a:ln>
+        </p:spPr>
+        <p:style>
+          <a:lnRef idx="1">
+            <a:schemeClr val="accent1"/>
+          </a:lnRef>
+          <a:fillRef idx="3">
+            <a:schemeClr val="accent1"/>
+          </a:fillRef>
+          <a:effectRef idx="2">
+            <a:schemeClr val="accent1"/>
+          </a:effectRef>
+          <a:fontRef idx="minor">
+            <a:schemeClr val="lt1"/>
+          </a:fontRef>
+        </p:style>
+        <p:txBody>
+          <a:bodyPr rtlCol="0" anchor="ctr"/>
+          <a:lstStyle/>
+          <a:p>
+            <a:pPr algn="ctr"/>
+          </a:p>
+        </p:txBody>
+      </p:sp>
+      <p:sp>
+        <p:nvSpPr>
+          <p:cNvPr id="11" name="TextBox 10"/>
+          <p:cNvSpPr txBox="1"/>
+          <p:nvPr/>
+        </p:nvSpPr>
+        <p:spPr>
+          <a:xfrm>
+            <a:off x="6492240" y="1920240"/>
+            <a:ext cx="4754880" cy="3657600"/>
+          </a:xfrm>
+          <a:prstGeom prst="rect">
+            <a:avLst/>
+          </a:prstGeom>
+          <a:noFill/>
+        </p:spPr>
+        <p:txBody>
+          <a:bodyPr wrap="square">
+            <a:spAutoFit/>
+          </a:bodyPr>
+          <a:lstStyle/>
+          <a:p>
+            <a:pPr>
+              <a:spcAft>
+                <a:spcPts val="1400"/>
+              </a:spcAft>
+              <a:defRPr sz="1800" b="1">
+                <a:solidFill>
+                  <a:srgbClr val="00317E"/>
+                </a:solidFill>
+                <a:latin typeface="Arial"/>
+              </a:defRPr>
+            </a:pPr>
+            <a:r>
+              <a:t>STEP 2: MAILING ADDRESS</a:t>
+            </a:r>
+          </a:p>
+          <a:p>
+            <a:pPr>
+              <a:spcBef>
+                <a:spcPts val="1000"/>
+              </a:spcBef>
+              <a:defRPr sz="1400">
+                <a:solidFill>
+                  <a:srgbClr val="1C1C1E"/>
+                </a:solidFill>
+                <a:latin typeface="Arial"/>
+              </a:defRPr>
+            </a:pPr>
+            <a:r>
+              <a:t>🏠 Street Address: Simple, auto-completable single line field.</a:t>
+            </a:r>
+          </a:p>
+          <a:p>
+            <a:pPr>
+              <a:spcBef>
+                <a:spcPts val="1000"/>
+              </a:spcBef>
+              <a:defRPr sz="1400">
+                <a:solidFill>
+                  <a:srgbClr val="1C1C1E"/>
+                </a:solidFill>
+                <a:latin typeface="Arial"/>
+              </a:defRPr>
+            </a:pPr>
+            <a:r>
+              <a:t>🏙️ City &amp; State Inputs: Splits local municipal registry areas.</a:t>
+            </a:r>
+          </a:p>
+          <a:p>
+            <a:pPr>
+              <a:spcBef>
+                <a:spcPts val="1000"/>
+              </a:spcBef>
+              <a:defRPr sz="1400">
+                <a:solidFill>
+                  <a:srgbClr val="1C1C1E"/>
+                </a:solidFill>
+                <a:latin typeface="Arial"/>
+              </a:defRPr>
+            </a:pPr>
+            <a:r>
+              <a:t>🔢 ZIP / Postal Code Match: Ensures correct numeric zip codes (regex check).</a:t>
+            </a:r>
+          </a:p>
+          <a:p>
+            <a:pPr>
+              <a:spcBef>
+                <a:spcPts val="1000"/>
+              </a:spcBef>
+              <a:defRPr sz="1400">
+                <a:solidFill>
+                  <a:srgbClr val="1C1C1E"/>
+                </a:solidFill>
+                <a:latin typeface="Arial"/>
+              </a:defRPr>
+            </a:pPr>
+            <a:r>
+              <a:t>🌐 Country Selection: Standardized drop-down listing for foreign admissions.</a:t>
+            </a:r>
+          </a:p>
+        </p:txBody>
+      </p:sp>
+    </p:spTree>
+  </p:cSld>
+  <p:clrMapOvr>
+    <a:masterClrMapping/>
+  </p:clrMapOvr>
+</p:sld>
+</file>
+
+<file path=ppt/slides/slide7.xml><?xml version="1.0" encoding="utf-8"?>
+<p:sld xmlns:a="http://schemas.openxmlformats.org/drawingml/2006/main" xmlns:p="http://schemas.openxmlformats.org/presentationml/2006/main" xmlns:r="http://schemas.openxmlformats.org/officeDocument/2006/relationships">
+  <p:cSld>
+    <p:bg>
+      <p:bgPr>
+        <a:solidFill>
+          <a:srgbClr val="FFFFFF"/>
+        </a:solidFill>
+        <a:effectLst/>
+      </p:bgPr>
+    </p:bg>
+    <p:spTree>
+      <p:nvGrpSpPr>
+        <p:cNvPr id="1" name=""/>
+        <p:cNvGrpSpPr/>
+        <p:nvPr/>
+      </p:nvGrpSpPr>
+      <p:grpSpPr/>
+      <p:pic>
+        <p:nvPicPr>
+          <p:cNvPr id="2" name="Picture 1" descr="logo.png"/>
+          <p:cNvPicPr>
+            <a:picLocks noChangeAspect="1"/>
+          </p:cNvPicPr>
+          <p:nvPr/>
+        </p:nvPicPr>
+        <p:blipFill>
+          <a:blip r:embed="rId2"/>
+          <a:stretch>
+            <a:fillRect/>
+          </a:stretch>
+        </p:blipFill>
+        <p:spPr>
+          <a:xfrm>
+            <a:off x="9601200" y="228600"/>
+            <a:ext cx="2286000" cy="699304"/>
+          </a:xfrm>
+          <a:prstGeom prst="rect">
+            <a:avLst/>
+          </a:prstGeom>
+        </p:spPr>
+      </p:pic>
+      <p:sp>
+        <p:nvSpPr>
+          <p:cNvPr id="3" name="TextBox 2"/>
+          <p:cNvSpPr txBox="1"/>
+          <p:nvPr/>
+        </p:nvSpPr>
+        <p:spPr>
+          <a:xfrm>
+            <a:off x="731520" y="6400800"/>
+            <a:ext cx="10698480" cy="365760"/>
+          </a:xfrm>
+          <a:prstGeom prst="rect">
+            <a:avLst/>
+          </a:prstGeom>
+          <a:noFill/>
+        </p:spPr>
+        <p:txBody>
+          <a:bodyPr wrap="square" lIns="0" tIns="0" bIns="0" rIns="0">
+            <a:spAutoFit/>
+          </a:bodyPr>
+          <a:lstStyle/>
+          <a:p>
+            <a:pPr algn="ctr">
+              <a:defRPr sz="950">
+                <a:solidFill>
+                  <a:srgbClr val="6E6E73"/>
+                </a:solidFill>
+                <a:latin typeface="Arial"/>
+              </a:defRPr>
+            </a:pPr>
+            <a:r>
+              <a:t>Student Hub  |  Sapthagiri University  |  Keerthana GP (24SUUBECS0914)  |  Keerthana BS (23SUUBECS0909)  |  Kiran M Biradar (24SUUBECS0937)</a:t>
+            </a:r>
+          </a:p>
+        </p:txBody>
+      </p:sp>
+      <p:sp>
+        <p:nvSpPr>
+          <p:cNvPr id="4" name="TextBox 3"/>
+          <p:cNvSpPr txBox="1"/>
+          <p:nvPr/>
+        </p:nvSpPr>
+        <p:spPr>
+          <a:xfrm>
+            <a:off x="731520" y="365760"/>
+            <a:ext cx="8686800" cy="731520"/>
+          </a:xfrm>
+          <a:prstGeom prst="rect">
+            <a:avLst/>
+          </a:prstGeom>
+          <a:noFill/>
+        </p:spPr>
+        <p:txBody>
+          <a:bodyPr wrap="square" lIns="0" tIns="0" bIns="0" rIns="0">
+            <a:spAutoFit/>
+          </a:bodyPr>
+          <a:lstStyle/>
+          <a:p>
+            <a:pPr>
+              <a:defRPr sz="2800" b="1">
+                <a:solidFill>
+                  <a:srgbClr val="00317E"/>
+                </a:solidFill>
+                <a:latin typeface="Arial"/>
+              </a:defRPr>
+            </a:pPr>
+            <a:r>
+              <a:t>Registration Process: Steps 3 &amp; 4</a:t>
+            </a:r>
+          </a:p>
+        </p:txBody>
+      </p:sp>
+      <p:sp>
+        <p:nvSpPr>
+          <p:cNvPr id="5" name="Rectangle 4"/>
+          <p:cNvSpPr/>
+          <p:nvPr/>
+        </p:nvSpPr>
+        <p:spPr>
+          <a:xfrm>
+            <a:off x="731520" y="1051560"/>
+            <a:ext cx="10698480" cy="36576"/>
+          </a:xfrm>
+          <a:prstGeom prst="rect">
+            <a:avLst/>
+          </a:prstGeom>
+          <a:solidFill>
+            <a:srgbClr val="D4AF37"/>
+          </a:solidFill>
+          <a:ln>
+            <a:solidFill>
+              <a:srgbClr val="D4AF37"/>
+            </a:solidFill>
+          </a:ln>
+        </p:spPr>
+        <p:style>
+          <a:lnRef idx="1">
+            <a:schemeClr val="accent1"/>
+          </a:lnRef>
+          <a:fillRef idx="3">
+            <a:schemeClr val="accent1"/>
+          </a:fillRef>
+          <a:effectRef idx="2">
+            <a:schemeClr val="accent1"/>
+          </a:effectRef>
+          <a:fontRef idx="minor">
+            <a:schemeClr val="lt1"/>
+          </a:fontRef>
+        </p:style>
+        <p:txBody>
+          <a:bodyPr rtlCol="0" anchor="ctr"/>
+          <a:lstStyle/>
+          <a:p>
+            <a:pPr algn="ctr"/>
+          </a:p>
+        </p:txBody>
+      </p:sp>
+      <p:sp>
+        <p:nvSpPr>
+          <p:cNvPr id="6" name="Rectangle 5"/>
+          <p:cNvSpPr/>
+          <p:nvPr/>
+        </p:nvSpPr>
+        <p:spPr>
+          <a:xfrm>
+            <a:off x="731520" y="1371600"/>
+            <a:ext cx="10698480" cy="137160"/>
+          </a:xfrm>
+          <a:prstGeom prst="rect">
+            <a:avLst/>
+          </a:prstGeom>
+          <a:solidFill>
+            <a:srgbClr val="F2F2F7"/>
+          </a:solidFill>
+          <a:ln>
+            <a:noFill/>
+          </a:ln>
+        </p:spPr>
+        <p:style>
+          <a:lnRef idx="1">
+            <a:schemeClr val="accent1"/>
+          </a:lnRef>
+          <a:fillRef idx="3">
+            <a:schemeClr val="accent1"/>
+          </a:fillRef>
+          <a:effectRef idx="2">
+            <a:schemeClr val="accent1"/>
+          </a:effectRef>
+          <a:fontRef idx="minor">
+            <a:schemeClr val="lt1"/>
+          </a:fontRef>
+        </p:style>
+        <p:txBody>
+          <a:bodyPr rtlCol="0" anchor="ctr"/>
+          <a:lstStyle/>
+          <a:p>
+            <a:pPr algn="ctr"/>
+          </a:p>
+        </p:txBody>
+      </p:sp>
+      <p:sp>
+        <p:nvSpPr>
+          <p:cNvPr id="7" name="Rectangle 6"/>
+          <p:cNvSpPr/>
+          <p:nvPr/>
+        </p:nvSpPr>
+        <p:spPr>
+          <a:xfrm>
+            <a:off x="731520" y="1371600"/>
+            <a:ext cx="10698480" cy="137160"/>
+          </a:xfrm>
+          <a:prstGeom prst="rect">
+            <a:avLst/>
+          </a:prstGeom>
+          <a:solidFill>
+            <a:srgbClr val="D4AF37"/>
+          </a:solidFill>
+          <a:ln>
+            <a:noFill/>
+          </a:ln>
+        </p:spPr>
+        <p:style>
+          <a:lnRef idx="1">
+            <a:schemeClr val="accent1"/>
+          </a:lnRef>
+          <a:fillRef idx="3">
+            <a:schemeClr val="accent1"/>
+          </a:fillRef>
+          <a:effectRef idx="2">
+            <a:schemeClr val="accent1"/>
+          </a:effectRef>
+          <a:fontRef idx="minor">
+            <a:schemeClr val="lt1"/>
+          </a:fontRef>
+        </p:style>
+        <p:txBody>
+          <a:bodyPr rtlCol="0" anchor="ctr"/>
+          <a:lstStyle/>
+          <a:p>
+            <a:pPr algn="ctr"/>
+          </a:p>
+        </p:txBody>
+      </p:sp>
+      <p:sp>
+        <p:nvSpPr>
+          <p:cNvPr id="8" name="Rounded Rectangle 7"/>
+          <p:cNvSpPr/>
+          <p:nvPr/>
+        </p:nvSpPr>
+        <p:spPr>
+          <a:xfrm>
+            <a:off x="731520" y="1737360"/>
+            <a:ext cx="5120640" cy="4023360"/>
+          </a:xfrm>
+          <a:prstGeom prst="roundRect">
+            <a:avLst/>
+          </a:prstGeom>
+          <a:solidFill>
+            <a:srgbClr val="F2F2F7"/>
+          </a:solidFill>
+          <a:ln w="12700">
+            <a:solidFill>
+              <a:srgbClr val="00317E"/>
+            </a:solidFill>
+          </a:ln>
+        </p:spPr>
+        <p:style>
+          <a:lnRef idx="1">
+            <a:schemeClr val="accent1"/>
+          </a:lnRef>
+          <a:fillRef idx="3">
+            <a:schemeClr val="accent1"/>
+          </a:fillRef>
+          <a:effectRef idx="2">
+            <a:schemeClr val="accent1"/>
+          </a:effectRef>
+          <a:fontRef idx="minor">
+            <a:schemeClr val="lt1"/>
+          </a:fontRef>
+        </p:style>
+        <p:txBody>
+          <a:bodyPr rtlCol="0" anchor="ctr"/>
+          <a:lstStyle/>
+          <a:p>
+            <a:pPr algn="ctr"/>
+          </a:p>
+        </p:txBody>
+      </p:sp>
+      <p:sp>
+        <p:nvSpPr>
+          <p:cNvPr id="9" name="TextBox 8"/>
+          <p:cNvSpPr txBox="1"/>
+          <p:nvPr/>
+        </p:nvSpPr>
+        <p:spPr>
+          <a:xfrm>
+            <a:off x="914400" y="1920240"/>
+            <a:ext cx="4754880" cy="3657600"/>
+          </a:xfrm>
+          <a:prstGeom prst="rect">
+            <a:avLst/>
+          </a:prstGeom>
+          <a:noFill/>
+        </p:spPr>
+        <p:txBody>
+          <a:bodyPr wrap="square">
+            <a:spAutoFit/>
+          </a:bodyPr>
+          <a:lstStyle/>
+          <a:p>
+            <a:pPr>
+              <a:spcAft>
+                <a:spcPts val="1400"/>
+              </a:spcAft>
+              <a:defRPr sz="1800" b="1">
+                <a:solidFill>
+                  <a:srgbClr val="00317E"/>
+                </a:solidFill>
+                <a:latin typeface="Arial"/>
+              </a:defRPr>
+            </a:pPr>
+            <a:r>
+              <a:t>STEP 3: ACADEMIC DETAILS</a:t>
+            </a:r>
+          </a:p>
+          <a:p>
+            <a:pPr>
+              <a:spcBef>
+                <a:spcPts val="1000"/>
+              </a:spcBef>
+              <a:defRPr sz="1400">
+                <a:solidFill>
+                  <a:srgbClr val="1C1C1E"/>
+                </a:solidFill>
+                <a:latin typeface="Arial"/>
+              </a:defRPr>
+            </a:pPr>
+            <a:r>
+              <a:t>🎓 High School Reference: Logs previous educational history.</a:t>
+            </a:r>
+          </a:p>
+          <a:p>
+            <a:pPr>
+              <a:spcBef>
+                <a:spcPts val="1000"/>
+              </a:spcBef>
+              <a:defRPr sz="1400">
+                <a:solidFill>
+                  <a:srgbClr val="1C1C1E"/>
+                </a:solidFill>
+                <a:latin typeface="Arial"/>
+              </a:defRPr>
+            </a:pPr>
+            <a:r>
+              <a:t>📅 Graduation Year: Collects year details to enforce entry parameters.</a:t>
+            </a:r>
+          </a:p>
+          <a:p>
+            <a:pPr>
+              <a:spcBef>
+                <a:spcPts val="1000"/>
+              </a:spcBef>
+              <a:defRPr sz="1400">
+                <a:solidFill>
+                  <a:srgbClr val="1C1C1E"/>
+                </a:solidFill>
+                <a:latin typeface="Arial"/>
+              </a:defRPr>
+            </a:pPr>
+            <a:r>
+              <a:t>🔬 Selected Major: Drops down options (Computer Science, Data Science, etc.).</a:t>
+            </a:r>
+          </a:p>
+          <a:p>
+            <a:pPr>
+              <a:spcBef>
+                <a:spcPts val="1000"/>
+              </a:spcBef>
+              <a:defRPr sz="1400">
+                <a:solidFill>
+                  <a:srgbClr val="1C1C1E"/>
+                </a:solidFill>
+                <a:latin typeface="Arial"/>
+              </a:defRPr>
+            </a:pPr>
+            <a:r>
+              <a:t>🕒 Enrollment Type: Choice between Full-Time and Part-Time status.</a:t>
+            </a:r>
+          </a:p>
+        </p:txBody>
+      </p:sp>
+      <p:sp>
+        <p:nvSpPr>
+          <p:cNvPr id="10" name="Rounded Rectangle 9"/>
+          <p:cNvSpPr/>
+          <p:nvPr/>
+        </p:nvSpPr>
+        <p:spPr>
+          <a:xfrm>
+            <a:off x="6309360" y="1737360"/>
+            <a:ext cx="5120640" cy="4023360"/>
+          </a:xfrm>
+          <a:prstGeom prst="roundRect">
+            <a:avLst/>
+          </a:prstGeom>
+          <a:solidFill>
+            <a:srgbClr val="F2F2F7"/>
+          </a:solidFill>
+          <a:ln w="12700">
+            <a:solidFill>
+              <a:srgbClr val="00317E"/>
+            </a:solidFill>
+          </a:ln>
+        </p:spPr>
+        <p:style>
+          <a:lnRef idx="1">
+            <a:schemeClr val="accent1"/>
+          </a:lnRef>
+          <a:fillRef idx="3">
+            <a:schemeClr val="accent1"/>
+          </a:fillRef>
+          <a:effectRef idx="2">
+            <a:schemeClr val="accent1"/>
+          </a:effectRef>
+          <a:fontRef idx="minor">
+            <a:schemeClr val="lt1"/>
+          </a:fontRef>
+        </p:style>
+        <p:txBody>
+          <a:bodyPr rtlCol="0" anchor="ctr"/>
+          <a:lstStyle/>
+          <a:p>
+            <a:pPr algn="ctr"/>
+          </a:p>
+        </p:txBody>
+      </p:sp>
+      <p:sp>
+        <p:nvSpPr>
+          <p:cNvPr id="11" name="TextBox 10"/>
+          <p:cNvSpPr txBox="1"/>
+          <p:nvPr/>
+        </p:nvSpPr>
+        <p:spPr>
+          <a:xfrm>
+            <a:off x="6492240" y="1920240"/>
+            <a:ext cx="4754880" cy="3657600"/>
+          </a:xfrm>
+          <a:prstGeom prst="rect">
+            <a:avLst/>
+          </a:prstGeom>
+          <a:noFill/>
+        </p:spPr>
+        <p:txBody>
+          <a:bodyPr wrap="square">
+            <a:spAutoFit/>
+          </a:bodyPr>
+          <a:lstStyle/>
+          <a:p>
+            <a:pPr>
+              <a:spcAft>
+                <a:spcPts val="1400"/>
+              </a:spcAft>
+              <a:defRPr sz="1800" b="1">
+                <a:solidFill>
+                  <a:srgbClr val="00317E"/>
+                </a:solidFill>
+                <a:latin typeface="Arial"/>
+              </a:defRPr>
+            </a:pPr>
+            <a:r>
+              <a:t>STEP 4: ACCOUNT CREATION</a:t>
+            </a:r>
+          </a:p>
+          <a:p>
+            <a:pPr>
+              <a:spcBef>
+                <a:spcPts val="1000"/>
+              </a:spcBef>
+              <a:defRPr sz="1400">
+                <a:solidFill>
+                  <a:srgbClr val="1C1C1E"/>
+                </a:solidFill>
+                <a:latin typeface="Arial"/>
+              </a:defRPr>
+            </a:pPr>
+            <a:r>
+              <a:t>🔑 Password Constraints: Enforces 8+ characters, letters, and numbers.</a:t>
+            </a:r>
+          </a:p>
+          <a:p>
+            <a:pPr>
+              <a:spcBef>
+                <a:spcPts val="1000"/>
+              </a:spcBef>
+              <a:defRPr sz="1400">
+                <a:solidFill>
+                  <a:srgbClr val="1C1C1E"/>
+                </a:solidFill>
+                <a:latin typeface="Arial"/>
+              </a:defRPr>
+            </a:pPr>
+            <a:r>
+              <a:t>📈 Strength Meter Indicator: Visual meter displays password difficulty.</a:t>
+            </a:r>
+          </a:p>
+          <a:p>
+            <a:pPr>
+              <a:spcBef>
+                <a:spcPts val="1000"/>
+              </a:spcBef>
+              <a:defRPr sz="1400">
+                <a:solidFill>
+                  <a:srgbClr val="1C1C1E"/>
+                </a:solidFill>
+                <a:latin typeface="Arial"/>
+              </a:defRPr>
+            </a:pPr>
+            <a:r>
+              <a:t>📃 Terms Agreement check: Ensures compliance with terms and regulations.</a:t>
+            </a:r>
+          </a:p>
+          <a:p>
+            <a:pPr>
+              <a:spcBef>
+                <a:spcPts val="1000"/>
+              </a:spcBef>
+              <a:defRPr sz="1400">
+                <a:solidFill>
+                  <a:srgbClr val="1C1C1E"/>
+                </a:solidFill>
+                <a:latin typeface="Arial"/>
+              </a:defRPr>
+            </a:pPr>
+            <a:r>
+              <a:t>🎓 Dynamic ID Generation: Auto-generates registration key `STU-2026-XXXX`.</a:t>
+            </a:r>
+          </a:p>
+        </p:txBody>
+      </p:sp>
     </p:spTree>
   </p:cSld>
   <p:clrMapOvr>
@@ -6801,8 +8907,8 @@
         </p:blipFill>
         <p:spPr>
           <a:xfrm>
-            <a:off x="4114800" y="1371600"/>
-            <a:ext cx="3959352" cy="1211194"/>
+            <a:off x="9601200" y="228600"/>
+            <a:ext cx="2286000" cy="699304"/>
           </a:xfrm>
           <a:prstGeom prst="rect">
             <a:avLst/>
@@ -6817,8 +8923,273 @@
         </p:nvSpPr>
         <p:spPr>
           <a:xfrm>
-            <a:off x="731520" y="2926080"/>
-            <a:ext cx="10698480" cy="1645920"/>
+            <a:off x="731520" y="6400800"/>
+            <a:ext cx="10698480" cy="365760"/>
+          </a:xfrm>
+          <a:prstGeom prst="rect">
+            <a:avLst/>
+          </a:prstGeom>
+          <a:noFill/>
+        </p:spPr>
+        <p:txBody>
+          <a:bodyPr wrap="square" lIns="0" tIns="0" bIns="0" rIns="0">
+            <a:spAutoFit/>
+          </a:bodyPr>
+          <a:lstStyle/>
+          <a:p>
+            <a:pPr algn="ctr">
+              <a:defRPr sz="950">
+                <a:solidFill>
+                  <a:srgbClr val="6E6E73"/>
+                </a:solidFill>
+                <a:latin typeface="Arial"/>
+              </a:defRPr>
+            </a:pPr>
+            <a:r>
+              <a:t>Student Hub  |  Sapthagiri University  |  Keerthana GP (24SUUBECS0914)  |  Keerthana BS (23SUUBECS0909)  |  Kiran M Biradar (24SUUBECS0937)</a:t>
+            </a:r>
+          </a:p>
+        </p:txBody>
+      </p:sp>
+      <p:sp>
+        <p:nvSpPr>
+          <p:cNvPr id="4" name="TextBox 3"/>
+          <p:cNvSpPr txBox="1"/>
+          <p:nvPr/>
+        </p:nvSpPr>
+        <p:spPr>
+          <a:xfrm>
+            <a:off x="731520" y="365760"/>
+            <a:ext cx="8686800" cy="731520"/>
+          </a:xfrm>
+          <a:prstGeom prst="rect">
+            <a:avLst/>
+          </a:prstGeom>
+          <a:noFill/>
+        </p:spPr>
+        <p:txBody>
+          <a:bodyPr wrap="square" lIns="0" tIns="0" bIns="0" rIns="0">
+            <a:spAutoFit/>
+          </a:bodyPr>
+          <a:lstStyle/>
+          <a:p>
+            <a:pPr>
+              <a:defRPr sz="2800" b="1">
+                <a:solidFill>
+                  <a:srgbClr val="00317E"/>
+                </a:solidFill>
+                <a:latin typeface="Arial"/>
+              </a:defRPr>
+            </a:pPr>
+            <a:r>
+              <a:t>Student Dashboard &amp; User Experience</a:t>
+            </a:r>
+          </a:p>
+        </p:txBody>
+      </p:sp>
+      <p:sp>
+        <p:nvSpPr>
+          <p:cNvPr id="5" name="Rectangle 4"/>
+          <p:cNvSpPr/>
+          <p:nvPr/>
+        </p:nvSpPr>
+        <p:spPr>
+          <a:xfrm>
+            <a:off x="731520" y="1051560"/>
+            <a:ext cx="10698480" cy="36576"/>
+          </a:xfrm>
+          <a:prstGeom prst="rect">
+            <a:avLst/>
+          </a:prstGeom>
+          <a:solidFill>
+            <a:srgbClr val="D4AF37"/>
+          </a:solidFill>
+          <a:ln>
+            <a:solidFill>
+              <a:srgbClr val="D4AF37"/>
+            </a:solidFill>
+          </a:ln>
+        </p:spPr>
+        <p:style>
+          <a:lnRef idx="1">
+            <a:schemeClr val="accent1"/>
+          </a:lnRef>
+          <a:fillRef idx="3">
+            <a:schemeClr val="accent1"/>
+          </a:fillRef>
+          <a:effectRef idx="2">
+            <a:schemeClr val="accent1"/>
+          </a:effectRef>
+          <a:fontRef idx="minor">
+            <a:schemeClr val="lt1"/>
+          </a:fontRef>
+        </p:style>
+        <p:txBody>
+          <a:bodyPr rtlCol="0" anchor="ctr"/>
+          <a:lstStyle/>
+          <a:p>
+            <a:pPr algn="ctr"/>
+          </a:p>
+        </p:txBody>
+      </p:sp>
+      <p:sp>
+        <p:nvSpPr>
+          <p:cNvPr id="6" name="TextBox 5"/>
+          <p:cNvSpPr txBox="1"/>
+          <p:nvPr/>
+        </p:nvSpPr>
+        <p:spPr>
+          <a:xfrm>
+            <a:off x="731520" y="1463040"/>
+            <a:ext cx="6858000" cy="4389120"/>
+          </a:xfrm>
+          <a:prstGeom prst="rect">
+            <a:avLst/>
+          </a:prstGeom>
+          <a:noFill/>
+        </p:spPr>
+        <p:txBody>
+          <a:bodyPr wrap="square" lIns="0" tIns="0" bIns="0" rIns="0">
+            <a:spAutoFit/>
+          </a:bodyPr>
+          <a:lstStyle/>
+          <a:p>
+            <a:pPr>
+              <a:spcAft>
+                <a:spcPts val="1400"/>
+              </a:spcAft>
+              <a:defRPr sz="1800">
+                <a:solidFill>
+                  <a:srgbClr val="1C1C1E"/>
+                </a:solidFill>
+                <a:latin typeface="Arial"/>
+              </a:defRPr>
+            </a:pPr>
+            <a:r>
+              <a:t>Upon sign-in, students access a personalized portal designed to track their application status and manage their details.</a:t>
+            </a:r>
+          </a:p>
+          <a:p>
+            <a:pPr>
+              <a:spcBef>
+                <a:spcPts val="1000"/>
+              </a:spcBef>
+              <a:defRPr sz="1500">
+                <a:solidFill>
+                  <a:srgbClr val="1C1C1E"/>
+                </a:solidFill>
+                <a:latin typeface="Arial"/>
+              </a:defRPr>
+            </a:pPr>
+            <a:r>
+              <a:t>⭕ Profile Completion Ring: Dynamic SVG ring calculating completeness of inputs.</a:t>
+            </a:r>
+          </a:p>
+          <a:p>
+            <a:pPr>
+              <a:spcBef>
+                <a:spcPts val="1000"/>
+              </a:spcBef>
+              <a:defRPr sz="1500">
+                <a:solidFill>
+                  <a:srgbClr val="1C1C1E"/>
+                </a:solidFill>
+                <a:latin typeface="Arial"/>
+              </a:defRPr>
+            </a:pPr>
+            <a:r>
+              <a:t>🌓 Interactive Theme Selector: Dark and Light theme toggle, saving selection in `localStorage`.</a:t>
+            </a:r>
+          </a:p>
+          <a:p>
+            <a:pPr>
+              <a:spcBef>
+                <a:spcPts val="1000"/>
+              </a:spcBef>
+              <a:defRPr sz="1500">
+                <a:solidFill>
+                  <a:srgbClr val="1C1C1E"/>
+                </a:solidFill>
+                <a:latin typeface="Arial"/>
+              </a:defRPr>
+            </a:pPr>
+            <a:r>
+              <a:t>📚 Course Catalogs Search: Allows query lookup of available classes and code numbers.</a:t>
+            </a:r>
+          </a:p>
+          <a:p>
+            <a:pPr>
+              <a:spcBef>
+                <a:spcPts val="1000"/>
+              </a:spcBef>
+              <a:defRPr sz="1500">
+                <a:solidFill>
+                  <a:srgbClr val="1C1C1E"/>
+                </a:solidFill>
+                <a:latin typeface="Arial"/>
+              </a:defRPr>
+            </a:pPr>
+            <a:r>
+              <a:t>✏️ Direct Profile Updates: Edit address, phone, and enrollment options anytime.</a:t>
+            </a:r>
+          </a:p>
+        </p:txBody>
+      </p:sp>
+      <p:sp>
+        <p:nvSpPr>
+          <p:cNvPr id="7" name="Rounded Rectangle 6"/>
+          <p:cNvSpPr/>
+          <p:nvPr/>
+        </p:nvSpPr>
+        <p:spPr>
+          <a:xfrm>
+            <a:off x="8046720" y="1645920"/>
+            <a:ext cx="3383280" cy="4023360"/>
+          </a:xfrm>
+          <a:prstGeom prst="roundRect">
+            <a:avLst/>
+          </a:prstGeom>
+          <a:solidFill>
+            <a:srgbClr val="F2F2F7"/>
+          </a:solidFill>
+          <a:ln w="19050">
+            <a:solidFill>
+              <a:srgbClr val="D4AF37"/>
+            </a:solidFill>
+          </a:ln>
+        </p:spPr>
+        <p:style>
+          <a:lnRef idx="1">
+            <a:schemeClr val="accent1"/>
+          </a:lnRef>
+          <a:fillRef idx="3">
+            <a:schemeClr val="accent1"/>
+          </a:fillRef>
+          <a:effectRef idx="2">
+            <a:schemeClr val="accent1"/>
+          </a:effectRef>
+          <a:fontRef idx="minor">
+            <a:schemeClr val="lt1"/>
+          </a:fontRef>
+        </p:style>
+        <p:txBody>
+          <a:bodyPr rtlCol="0" anchor="ctr"/>
+          <a:lstStyle/>
+          <a:p>
+            <a:pPr algn="ctr"/>
+          </a:p>
+        </p:txBody>
+      </p:sp>
+      <p:sp>
+        <p:nvSpPr>
+          <p:cNvPr id="8" name="TextBox 7"/>
+          <p:cNvSpPr txBox="1"/>
+          <p:nvPr/>
+        </p:nvSpPr>
+        <p:spPr>
+          <a:xfrm>
+            <a:off x="8321040" y="1920240"/>
+            <a:ext cx="2834640" cy="3474720"/>
           </a:xfrm>
           <a:prstGeom prst="rect">
             <a:avLst/>
@@ -6831,32 +9202,192 @@
           </a:bodyPr>
           <a:lstStyle/>
           <a:p>
+            <a:pPr>
+              <a:spcAft>
+                <a:spcPts val="1600"/>
+              </a:spcAft>
+              <a:defRPr sz="1400" b="1">
+                <a:solidFill>
+                  <a:srgbClr val="00317E"/>
+                </a:solidFill>
+                <a:latin typeface="Arial"/>
+              </a:defRPr>
+            </a:pPr>
+            <a:r>
+              <a:t>UX INTERACTIONS</a:t>
+            </a:r>
+          </a:p>
+          <a:p>
+            <a:pPr>
+              <a:spcBef>
+                <a:spcPts val="600"/>
+              </a:spcBef>
+              <a:defRPr sz="1500" b="1">
+                <a:solidFill>
+                  <a:srgbClr val="D4AF37"/>
+                </a:solidFill>
+                <a:latin typeface="Arial"/>
+              </a:defRPr>
+            </a:pPr>
+            <a:r>
+              <a:t>✔ 🎉 Confetti Canvas</a:t>
+            </a:r>
+          </a:p>
+          <a:p>
+            <a:pPr>
+              <a:defRPr sz="1150">
+                <a:solidFill>
+                  <a:srgbClr val="1C1C1E"/>
+                </a:solidFill>
+                <a:latin typeface="Arial"/>
+              </a:defRPr>
+            </a:pPr>
+            <a:r>
+              <a:t>Sparks a celebratory canvas animation upon successful registration.</a:t>
+            </a:r>
+          </a:p>
+          <a:p>
+            <a:pPr>
+              <a:spcBef>
+                <a:spcPts val="600"/>
+              </a:spcBef>
+              <a:defRPr sz="1500" b="1">
+                <a:solidFill>
+                  <a:srgbClr val="D4AF37"/>
+                </a:solidFill>
+                <a:latin typeface="Arial"/>
+              </a:defRPr>
+            </a:pPr>
+            <a:r>
+              <a:t>✔ 📋 One-Click Copy</a:t>
+            </a:r>
+          </a:p>
+          <a:p>
+            <a:pPr>
+              <a:defRPr sz="1150">
+                <a:solidFill>
+                  <a:srgbClr val="1C1C1E"/>
+                </a:solidFill>
+                <a:latin typeface="Arial"/>
+              </a:defRPr>
+            </a:pPr>
+            <a:r>
+              <a:t>Copies the auto-generated student ID with dynamic status labels.</a:t>
+            </a:r>
+          </a:p>
+          <a:p>
+            <a:pPr>
+              <a:spcBef>
+                <a:spcPts val="600"/>
+              </a:spcBef>
+              <a:defRPr sz="1500" b="1">
+                <a:solidFill>
+                  <a:srgbClr val="D4AF37"/>
+                </a:solidFill>
+                <a:latin typeface="Arial"/>
+              </a:defRPr>
+            </a:pPr>
+            <a:r>
+              <a:t>✔ 🔔 Auto-Dismiss Alerts</a:t>
+            </a:r>
+          </a:p>
+          <a:p>
+            <a:pPr>
+              <a:defRPr sz="1150">
+                <a:solidFill>
+                  <a:srgbClr val="1C1C1E"/>
+                </a:solidFill>
+                <a:latin typeface="Arial"/>
+              </a:defRPr>
+            </a:pPr>
+            <a:r>
+              <a:t>Clean JavaScript toasts slides up and auto-fades in 5 seconds.</a:t>
+            </a:r>
+          </a:p>
+        </p:txBody>
+      </p:sp>
+    </p:spTree>
+  </p:cSld>
+  <p:clrMapOvr>
+    <a:masterClrMapping/>
+  </p:clrMapOvr>
+</p:sld>
+</file>
+
+<file path=ppt/slides/slide9.xml><?xml version="1.0" encoding="utf-8"?>
+<p:sld xmlns:a="http://schemas.openxmlformats.org/drawingml/2006/main" xmlns:p="http://schemas.openxmlformats.org/presentationml/2006/main" xmlns:r="http://schemas.openxmlformats.org/officeDocument/2006/relationships">
+  <p:cSld>
+    <p:bg>
+      <p:bgPr>
+        <a:solidFill>
+          <a:srgbClr val="FFFFFF"/>
+        </a:solidFill>
+        <a:effectLst/>
+      </p:bgPr>
+    </p:bg>
+    <p:spTree>
+      <p:nvGrpSpPr>
+        <p:cNvPr id="1" name=""/>
+        <p:cNvGrpSpPr/>
+        <p:nvPr/>
+      </p:nvGrpSpPr>
+      <p:grpSpPr/>
+      <p:pic>
+        <p:nvPicPr>
+          <p:cNvPr id="2" name="Picture 1" descr="logo.png"/>
+          <p:cNvPicPr>
+            <a:picLocks noChangeAspect="1"/>
+          </p:cNvPicPr>
+          <p:nvPr/>
+        </p:nvPicPr>
+        <p:blipFill>
+          <a:blip r:embed="rId2"/>
+          <a:stretch>
+            <a:fillRect/>
+          </a:stretch>
+        </p:blipFill>
+        <p:spPr>
+          <a:xfrm>
+            <a:off x="9601200" y="228600"/>
+            <a:ext cx="2286000" cy="699304"/>
+          </a:xfrm>
+          <a:prstGeom prst="rect">
+            <a:avLst/>
+          </a:prstGeom>
+        </p:spPr>
+      </p:pic>
+      <p:sp>
+        <p:nvSpPr>
+          <p:cNvPr id="3" name="TextBox 2"/>
+          <p:cNvSpPr txBox="1"/>
+          <p:nvPr/>
+        </p:nvSpPr>
+        <p:spPr>
+          <a:xfrm>
+            <a:off x="731520" y="6400800"/>
+            <a:ext cx="10698480" cy="365760"/>
+          </a:xfrm>
+          <a:prstGeom prst="rect">
+            <a:avLst/>
+          </a:prstGeom>
+          <a:noFill/>
+        </p:spPr>
+        <p:txBody>
+          <a:bodyPr wrap="square" lIns="0" tIns="0" bIns="0" rIns="0">
+            <a:spAutoFit/>
+          </a:bodyPr>
+          <a:lstStyle/>
+          <a:p>
             <a:pPr algn="ctr">
-              <a:spcAft>
-                <a:spcPts val="1000"/>
-              </a:spcAft>
-              <a:defRPr sz="4800" b="1">
-                <a:solidFill>
-                  <a:srgbClr val="00317E"/>
-                </a:solidFill>
-                <a:latin typeface="Arial"/>
-              </a:defRPr>
-            </a:pPr>
-            <a:r>
-              <a:t>Thank You!</a:t>
-            </a:r>
-          </a:p>
-          <a:p>
-            <a:pPr algn="ctr">
-              <a:defRPr sz="1800">
-                <a:solidFill>
-                  <a:srgbClr val="D4AF37"/>
-                </a:solidFill>
-                <a:latin typeface="Arial"/>
-              </a:defRPr>
-            </a:pPr>
-            <a:r>
-              <a:t>Questions? We are ready to present the live application demo.</a:t>
+              <a:defRPr sz="950">
+                <a:solidFill>
+                  <a:srgbClr val="6E6E73"/>
+                </a:solidFill>
+                <a:latin typeface="Arial"/>
+              </a:defRPr>
+            </a:pPr>
+            <a:r>
+              <a:t>Student Hub  |  Sapthagiri University  |  Keerthana GP (24SUUBECS0914)  |  Keerthana BS (23SUUBECS0909)  |  Kiran M Biradar (24SUUBECS0937)</a:t>
             </a:r>
           </a:p>
         </p:txBody>
@@ -6869,8 +9400,237 @@
         </p:nvSpPr>
         <p:spPr>
           <a:xfrm>
-            <a:off x="731520" y="4937760"/>
-            <a:ext cx="10698480" cy="1371600"/>
+            <a:off x="731520" y="365760"/>
+            <a:ext cx="8686800" cy="731520"/>
+          </a:xfrm>
+          <a:prstGeom prst="rect">
+            <a:avLst/>
+          </a:prstGeom>
+          <a:noFill/>
+        </p:spPr>
+        <p:txBody>
+          <a:bodyPr wrap="square" lIns="0" tIns="0" bIns="0" rIns="0">
+            <a:spAutoFit/>
+          </a:bodyPr>
+          <a:lstStyle/>
+          <a:p>
+            <a:pPr>
+              <a:defRPr sz="2800" b="1">
+                <a:solidFill>
+                  <a:srgbClr val="00317E"/>
+                </a:solidFill>
+                <a:latin typeface="Arial"/>
+              </a:defRPr>
+            </a:pPr>
+            <a:r>
+              <a:t>Admin Control Center</a:t>
+            </a:r>
+          </a:p>
+        </p:txBody>
+      </p:sp>
+      <p:sp>
+        <p:nvSpPr>
+          <p:cNvPr id="5" name="Rectangle 4"/>
+          <p:cNvSpPr/>
+          <p:nvPr/>
+        </p:nvSpPr>
+        <p:spPr>
+          <a:xfrm>
+            <a:off x="731520" y="1051560"/>
+            <a:ext cx="10698480" cy="36576"/>
+          </a:xfrm>
+          <a:prstGeom prst="rect">
+            <a:avLst/>
+          </a:prstGeom>
+          <a:solidFill>
+            <a:srgbClr val="D4AF37"/>
+          </a:solidFill>
+          <a:ln>
+            <a:solidFill>
+              <a:srgbClr val="D4AF37"/>
+            </a:solidFill>
+          </a:ln>
+        </p:spPr>
+        <p:style>
+          <a:lnRef idx="1">
+            <a:schemeClr val="accent1"/>
+          </a:lnRef>
+          <a:fillRef idx="3">
+            <a:schemeClr val="accent1"/>
+          </a:fillRef>
+          <a:effectRef idx="2">
+            <a:schemeClr val="accent1"/>
+          </a:effectRef>
+          <a:fontRef idx="minor">
+            <a:schemeClr val="lt1"/>
+          </a:fontRef>
+        </p:style>
+        <p:txBody>
+          <a:bodyPr rtlCol="0" anchor="ctr"/>
+          <a:lstStyle/>
+          <a:p>
+            <a:pPr algn="ctr"/>
+          </a:p>
+        </p:txBody>
+      </p:sp>
+      <p:sp>
+        <p:nvSpPr>
+          <p:cNvPr id="6" name="TextBox 5"/>
+          <p:cNvSpPr txBox="1"/>
+          <p:nvPr/>
+        </p:nvSpPr>
+        <p:spPr>
+          <a:xfrm>
+            <a:off x="731520" y="1463040"/>
+            <a:ext cx="6858000" cy="4389120"/>
+          </a:xfrm>
+          <a:prstGeom prst="rect">
+            <a:avLst/>
+          </a:prstGeom>
+          <a:noFill/>
+        </p:spPr>
+        <p:txBody>
+          <a:bodyPr wrap="square" lIns="0" tIns="0" bIns="0" rIns="0">
+            <a:spAutoFit/>
+          </a:bodyPr>
+          <a:lstStyle/>
+          <a:p>
+            <a:pPr>
+              <a:spcAft>
+                <a:spcPts val="1400"/>
+              </a:spcAft>
+              <a:defRPr sz="1800">
+                <a:solidFill>
+                  <a:srgbClr val="1C1C1E"/>
+                </a:solidFill>
+                <a:latin typeface="Arial"/>
+              </a:defRPr>
+            </a:pPr>
+            <a:r>
+              <a:t>The Administrative interface handles institutional workflows, candidate verification, and exports.</a:t>
+            </a:r>
+          </a:p>
+          <a:p>
+            <a:pPr>
+              <a:spcBef>
+                <a:spcPts val="1000"/>
+              </a:spcBef>
+              <a:defRPr sz="1500">
+                <a:solidFill>
+                  <a:srgbClr val="1C1C1E"/>
+                </a:solidFill>
+                <a:latin typeface="Arial"/>
+              </a:defRPr>
+            </a:pPr>
+            <a:r>
+              <a:t>🔍 Real-time Search: Instant server queries matching student names, emails, or IDs.</a:t>
+            </a:r>
+          </a:p>
+          <a:p>
+            <a:pPr>
+              <a:spcBef>
+                <a:spcPts val="1000"/>
+              </a:spcBef>
+              <a:defRPr sz="1500">
+                <a:solidFill>
+                  <a:srgbClr val="1C1C1E"/>
+                </a:solidFill>
+                <a:latin typeface="Arial"/>
+              </a:defRPr>
+            </a:pPr>
+            <a:r>
+              <a:t>🔢 Multi-Column Sorting: Sort dynamic tabular records by Date, Major, or ID.</a:t>
+            </a:r>
+          </a:p>
+          <a:p>
+            <a:pPr>
+              <a:spcBef>
+                <a:spcPts val="1000"/>
+              </a:spcBef>
+              <a:defRPr sz="1500">
+                <a:solidFill>
+                  <a:srgbClr val="1C1C1E"/>
+                </a:solidFill>
+                <a:latin typeface="Arial"/>
+              </a:defRPr>
+            </a:pPr>
+            <a:r>
+              <a:t>📝 Candidate Detail Editors: Override graduation details, enrollment status, or majors.</a:t>
+            </a:r>
+          </a:p>
+          <a:p>
+            <a:pPr>
+              <a:spcBef>
+                <a:spcPts val="1000"/>
+              </a:spcBef>
+              <a:defRPr sz="1500">
+                <a:solidFill>
+                  <a:srgbClr val="1C1C1E"/>
+                </a:solidFill>
+                <a:latin typeface="Arial"/>
+              </a:defRPr>
+            </a:pPr>
+            <a:r>
+              <a:t>📥 CSV Directory Exporter: One-click export download of the student roster.</a:t>
+            </a:r>
+          </a:p>
+        </p:txBody>
+      </p:sp>
+      <p:sp>
+        <p:nvSpPr>
+          <p:cNvPr id="7" name="Rounded Rectangle 6"/>
+          <p:cNvSpPr/>
+          <p:nvPr/>
+        </p:nvSpPr>
+        <p:spPr>
+          <a:xfrm>
+            <a:off x="8046720" y="1645920"/>
+            <a:ext cx="3383280" cy="4023360"/>
+          </a:xfrm>
+          <a:prstGeom prst="roundRect">
+            <a:avLst/>
+          </a:prstGeom>
+          <a:solidFill>
+            <a:srgbClr val="F2F2F7"/>
+          </a:solidFill>
+          <a:ln w="19050">
+            <a:solidFill>
+              <a:srgbClr val="00317E"/>
+            </a:solidFill>
+          </a:ln>
+        </p:spPr>
+        <p:style>
+          <a:lnRef idx="1">
+            <a:schemeClr val="accent1"/>
+          </a:lnRef>
+          <a:fillRef idx="3">
+            <a:schemeClr val="accent1"/>
+          </a:fillRef>
+          <a:effectRef idx="2">
+            <a:schemeClr val="accent1"/>
+          </a:effectRef>
+          <a:fontRef idx="minor">
+            <a:schemeClr val="lt1"/>
+          </a:fontRef>
+        </p:style>
+        <p:txBody>
+          <a:bodyPr rtlCol="0" anchor="ctr"/>
+          <a:lstStyle/>
+          <a:p>
+            <a:pPr algn="ctr"/>
+          </a:p>
+        </p:txBody>
+      </p:sp>
+      <p:sp>
+        <p:nvSpPr>
+          <p:cNvPr id="8" name="TextBox 7"/>
+          <p:cNvSpPr txBox="1"/>
+          <p:nvPr/>
+        </p:nvSpPr>
+        <p:spPr>
+          <a:xfrm>
+            <a:off x="8321040" y="1920240"/>
+            <a:ext cx="2834640" cy="3474720"/>
           </a:xfrm>
           <a:prstGeom prst="rect">
             <a:avLst/>
@@ -6883,16 +9643,135 @@
           </a:bodyPr>
           <a:lstStyle/>
           <a:p>
-            <a:pPr algn="ctr">
-              <a:defRPr sz="1100">
-                <a:solidFill>
-                  <a:srgbClr val="6E6E73"/>
-                </a:solidFill>
-                <a:latin typeface="Arial"/>
-              </a:defRPr>
-            </a:pPr>
-            <a:r>
-              <a:t>Student Hub Team:  Keerthana GP (24SUUBECS0914)  |  Keerthana BS (23SUUBECS0909)  |  Kiran M Biradar (24SUUBECS0937)</a:t>
+            <a:pPr>
+              <a:spcAft>
+                <a:spcPts val="1400"/>
+              </a:spcAft>
+              <a:defRPr sz="1400" b="1">
+                <a:solidFill>
+                  <a:srgbClr val="D4AF37"/>
+                </a:solidFill>
+                <a:latin typeface="Arial"/>
+              </a:defRPr>
+            </a:pPr>
+            <a:r>
+              <a:t>ADMIN PORTAL INFO</a:t>
+            </a:r>
+          </a:p>
+          <a:p>
+            <a:pPr>
+              <a:defRPr sz="1300" b="1">
+                <a:solidFill>
+                  <a:srgbClr val="00317E"/>
+                </a:solidFill>
+                <a:latin typeface="Arial"/>
+              </a:defRPr>
+            </a:pPr>
+            <a:r>
+              <a:t>• 🔒 Endpoint Location</a:t>
+            </a:r>
+          </a:p>
+          <a:p>
+            <a:pPr>
+              <a:spcAft>
+                <a:spcPts val="400"/>
+              </a:spcAft>
+              <a:defRPr sz="1150">
+                <a:solidFill>
+                  <a:srgbClr val="1C1C1E"/>
+                </a:solidFill>
+                <a:latin typeface="Courier New"/>
+              </a:defRPr>
+            </a:pPr>
+            <a:r>
+              <a:t>https://f0e3e2dbe03207.lhr.life/admin</a:t>
+            </a:r>
+          </a:p>
+          <a:p>
+            <a:pPr>
+              <a:defRPr sz="1300" b="1">
+                <a:solidFill>
+                  <a:srgbClr val="00317E"/>
+                </a:solidFill>
+                <a:latin typeface="Arial"/>
+              </a:defRPr>
+            </a:pPr>
+            <a:r>
+              <a:t>• 📧 Default Email</a:t>
+            </a:r>
+          </a:p>
+          <a:p>
+            <a:pPr>
+              <a:spcAft>
+                <a:spcPts val="400"/>
+              </a:spcAft>
+              <a:defRPr sz="1150">
+                <a:solidFill>
+                  <a:srgbClr val="1C1C1E"/>
+                </a:solidFill>
+                <a:latin typeface="Courier New"/>
+              </a:defRPr>
+            </a:pPr>
+            <a:r>
+              <a:t>admin@school.com</a:t>
+            </a:r>
+          </a:p>
+          <a:p>
+            <a:pPr>
+              <a:defRPr sz="1300" b="1">
+                <a:solidFill>
+                  <a:srgbClr val="00317E"/>
+                </a:solidFill>
+                <a:latin typeface="Arial"/>
+              </a:defRPr>
+            </a:pPr>
+            <a:r>
+              <a:t>• 🔑 Default Password</a:t>
+            </a:r>
+          </a:p>
+          <a:p>
+            <a:pPr>
+              <a:spcAft>
+                <a:spcPts val="400"/>
+              </a:spcAft>
+              <a:defRPr sz="1150">
+                <a:solidFill>
+                  <a:srgbClr val="1C1C1E"/>
+                </a:solidFill>
+                <a:latin typeface="Arial"/>
+              </a:defRPr>
+            </a:pPr>
+            <a:r>
+              <a:t>Admin123!</a:t>
+            </a:r>
+          </a:p>
+          <a:p>
+            <a:pPr>
+              <a:defRPr sz="1300" b="1">
+                <a:solidFill>
+                  <a:srgbClr val="00317E"/>
+                </a:solidFill>
+                <a:latin typeface="Arial"/>
+              </a:defRPr>
+            </a:pPr>
+            <a:r>
+              <a:t>• 🛡️ Session Lock</a:t>
+            </a:r>
+          </a:p>
+          <a:p>
+            <a:pPr>
+              <a:spcAft>
+                <a:spcPts val="400"/>
+              </a:spcAft>
+              <a:defRPr sz="1150">
+                <a:solidFill>
+                  <a:srgbClr val="1C1C1E"/>
+                </a:solidFill>
+                <a:latin typeface="Arial"/>
+              </a:defRPr>
+            </a:pPr>
+            <a:r>
+              <a:t>Flask Session Cookie: Lax + Secure</a:t>
             </a:r>
           </a:p>
         </p:txBody>

--- a/Student_Registration_Presentation.pptx
+++ b/Student_Registration_Presentation.pptx
@@ -19,6 +19,11 @@
     <p:sldId id="267" r:id="rId18"/>
     <p:sldId id="268" r:id="rId19"/>
     <p:sldId id="269" r:id="rId20"/>
+    <p:sldId id="270" r:id="rId21"/>
+    <p:sldId id="271" r:id="rId22"/>
+    <p:sldId id="272" r:id="rId23"/>
+    <p:sldId id="273" r:id="rId24"/>
+    <p:sldId id="274" r:id="rId25"/>
   </p:sldIdLst>
   <p:sldSz cx="12191695" cy="6858000" type="screen4x3"/>
   <p:notesSz cx="6858000" cy="9144000"/>
@@ -3180,7 +3185,7 @@
               </a:defRPr>
             </a:pPr>
             <a:r>
-              <a:t>Premium Online Student Registration System</a:t>
+              <a:t>Online Student Registration System</a:t>
             </a:r>
           </a:p>
         </p:txBody>
@@ -3188,6 +3193,42 @@
       <p:sp>
         <p:nvSpPr>
           <p:cNvPr id="4" name="TextBox 3"/>
+          <p:cNvSpPr txBox="1"/>
+          <p:nvPr/>
+        </p:nvSpPr>
+        <p:spPr>
+          <a:xfrm>
+            <a:off x="731520" y="4297680"/>
+            <a:ext cx="10698480" cy="365760"/>
+          </a:xfrm>
+          <a:prstGeom prst="rect">
+            <a:avLst/>
+          </a:prstGeom>
+          <a:noFill/>
+        </p:spPr>
+        <p:txBody>
+          <a:bodyPr wrap="square">
+            <a:spAutoFit/>
+          </a:bodyPr>
+          <a:lstStyle/>
+          <a:p>
+            <a:pPr algn="ctr">
+              <a:defRPr sz="1200" i="1">
+                <a:solidFill>
+                  <a:srgbClr val="00317E"/>
+                </a:solidFill>
+                <a:latin typeface="Arial"/>
+              </a:defRPr>
+            </a:pPr>
+            <a:r>
+              <a:t>Department of Computer Science &amp; Engineering (Dept. of CSE)</a:t>
+            </a:r>
+          </a:p>
+        </p:txBody>
+      </p:sp>
+      <p:sp>
+        <p:nvSpPr>
+          <p:cNvPr id="5" name="TextBox 4"/>
           <p:cNvSpPr txBox="1"/>
           <p:nvPr/>
         </p:nvSpPr>
@@ -3224,7 +3265,7 @@
               <a:spcBef>
                 <a:spcPts val="400"/>
               </a:spcBef>
-              <a:defRPr sz="1350" b="1">
+              <a:defRPr sz="1300" b="1">
                 <a:solidFill>
                   <a:srgbClr val="1C1C1E"/>
                 </a:solidFill>
@@ -3240,7 +3281,7 @@
               <a:spcBef>
                 <a:spcPts val="400"/>
               </a:spcBef>
-              <a:defRPr sz="1350" b="1">
+              <a:defRPr sz="1300" b="1">
                 <a:solidFill>
                   <a:srgbClr val="1C1C1E"/>
                 </a:solidFill>
@@ -3256,7 +3297,7 @@
               <a:spcBef>
                 <a:spcPts val="400"/>
               </a:spcBef>
-              <a:defRPr sz="1350" b="1">
+              <a:defRPr sz="1300" b="1">
                 <a:solidFill>
                   <a:srgbClr val="1C1C1E"/>
                 </a:solidFill>
@@ -3386,7 +3427,7 @@
               </a:defRPr>
             </a:pPr>
             <a:r>
-              <a:t>Admin Analytics &amp; KPI Cards</a:t>
+              <a:t>Frontend Design System</a:t>
             </a:r>
           </a:p>
         </p:txBody>
@@ -3470,7 +3511,7 @@
               </a:defRPr>
             </a:pPr>
             <a:r>
-              <a:t>Administrators gain access to a dedicated business intelligence layer, enabling visual insights into student admissions metrics.</a:t>
+              <a:t>The design system uses CSS variables to ensure brand consistency across light and dark modes.</a:t>
             </a:r>
           </a:p>
           <a:p>
@@ -3478,7 +3519,7 @@
               <a:spcBef>
                 <a:spcPts val="1000"/>
               </a:spcBef>
-              <a:defRPr sz="1500">
+              <a:defRPr sz="1450">
                 <a:solidFill>
                   <a:srgbClr val="1C1C1E"/>
                 </a:solidFill>
@@ -3486,7 +3527,7 @@
               </a:defRPr>
             </a:pPr>
             <a:r>
-              <a:t>📊 Dynamically Served KPIs: Displays Total Registrations, Majors distribution count, and active schedules.</a:t>
+              <a:t>🎨 Primary Branded Colorways: Navy Blue (`#00317e`) representing security and Gold (`#D4AF37`) representing academic achievement.</a:t>
             </a:r>
           </a:p>
           <a:p>
@@ -3494,7 +3535,7 @@
               <a:spcBef>
                 <a:spcPts val="1000"/>
               </a:spcBef>
-              <a:defRPr sz="1500">
+              <a:defRPr sz="1450">
                 <a:solidFill>
                   <a:srgbClr val="1C1C1E"/>
                 </a:solidFill>
@@ -3502,7 +3543,7 @@
               </a:defRPr>
             </a:pPr>
             <a:r>
-              <a:t>📡 Stats API Endpoint (/api/stats): Dynamic JSON route returning real-time student numbers to the landing page.</a:t>
+              <a:t>🌓 System-wide Dark Mode: Changes styles dynamically using `[data-theme='dark']` settings and saves user choice.</a:t>
             </a:r>
           </a:p>
           <a:p>
@@ -3510,7 +3551,7 @@
               <a:spcBef>
                 <a:spcPts val="1000"/>
               </a:spcBef>
-              <a:defRPr sz="1500">
+              <a:defRPr sz="1450">
                 <a:solidFill>
                   <a:srgbClr val="1C1C1E"/>
                 </a:solidFill>
@@ -3518,7 +3559,7 @@
               </a:defRPr>
             </a:pPr>
             <a:r>
-              <a:t>📈 Chart.js Charting Interface: Administrative screens render real-time majors breakdown graphs.</a:t>
+              <a:t>🖥️ Layout Elements: Premium glassmorphism cards, blur navigation bars, and rounded pill containers.</a:t>
             </a:r>
           </a:p>
           <a:p>
@@ -3526,7 +3567,7 @@
               <a:spcBef>
                 <a:spcPts val="1000"/>
               </a:spcBef>
-              <a:defRPr sz="1500">
+              <a:defRPr sz="1450">
                 <a:solidFill>
                   <a:srgbClr val="1C1C1E"/>
                 </a:solidFill>
@@ -3534,7 +3575,7 @@
               </a:defRPr>
             </a:pPr>
             <a:r>
-              <a:t>📉 Interactive Major Filtering: Click elements in Chart.js legends to filter candidate records.</a:t>
+              <a:t>📱 Variable Fonts Scales: System fonts (Inter, Public Sans) scale dynamically for clean readability.</a:t>
             </a:r>
           </a:p>
         </p:txBody>
@@ -3554,7 +3595,7 @@
             <a:avLst/>
           </a:prstGeom>
           <a:solidFill>
-            <a:srgbClr val="1C1C1E"/>
+            <a:srgbClr val="F2F2F7"/>
           </a:solidFill>
           <a:ln w="19050">
             <a:solidFill>
@@ -3592,8 +3633,8 @@
         </p:nvSpPr>
         <p:spPr>
           <a:xfrm>
-            <a:off x="8229600" y="1828800"/>
-            <a:ext cx="3017520" cy="3657600"/>
+            <a:off x="8321040" y="1920240"/>
+            <a:ext cx="2834640" cy="3474720"/>
           </a:xfrm>
           <a:prstGeom prst="rect">
             <a:avLst/>
@@ -3608,85 +3649,162 @@
           <a:p>
             <a:pPr>
               <a:spcAft>
-                <a:spcPts val="1000"/>
+                <a:spcPts val="1400"/>
               </a:spcAft>
-              <a:defRPr sz="1200" b="1">
+              <a:defRPr sz="1400" b="1">
+                <a:solidFill>
+                  <a:srgbClr val="00317E"/>
+                </a:solidFill>
+                <a:latin typeface="Arial"/>
+              </a:defRPr>
+            </a:pPr>
+            <a:r>
+              <a:t>CSS VARIABLE TOKENS</a:t>
+            </a:r>
+          </a:p>
+          <a:p>
+            <a:pPr>
+              <a:defRPr sz="1300" b="1">
                 <a:solidFill>
                   <a:srgbClr val="D4AF37"/>
                 </a:solidFill>
-                <a:latin typeface="Arial"/>
-              </a:defRPr>
-            </a:pPr>
-            <a:r>
-              <a:t>API JSON SAMPLE (/api/stats)</a:t>
-            </a:r>
-          </a:p>
-          <a:p>
-            <a:pPr>
-              <a:lnSpc>
-                <a:spcPct val="110000"/>
-              </a:lnSpc>
-              <a:defRPr sz="1100">
-                <a:solidFill>
-                  <a:srgbClr val="00FF00"/>
-                </a:solidFill>
                 <a:latin typeface="Courier New"/>
               </a:defRPr>
             </a:pPr>
             <a:r>
-              <a:t>{</a:t>
-            </a:r>
-            <a:br/>
-            <a:r>
-              <a:t>  "status": "success",</a:t>
-            </a:r>
-            <a:br/>
-            <a:r>
-              <a:t>  "total_students": 20,</a:t>
-            </a:r>
-            <a:br/>
-            <a:r>
-              <a:t>  "majors": {</a:t>
-            </a:r>
-            <a:br/>
-            <a:r>
-              <a:t>    "Computer Science": 8,</a:t>
-            </a:r>
-            <a:br/>
-            <a:r>
-              <a:t>    "Data Science": 5,</a:t>
-            </a:r>
-            <a:br/>
-            <a:r>
-              <a:t>    "Electrical": 4,</a:t>
-            </a:r>
-            <a:br/>
-            <a:r>
-              <a:t>    "Mechanical": 3</a:t>
-            </a:r>
-            <a:br/>
-            <a:r>
-              <a:t>  },</a:t>
-            </a:r>
-            <a:br/>
-            <a:r>
-              <a:t>  "types": {</a:t>
-            </a:r>
-            <a:br/>
-            <a:r>
-              <a:t>    "Full-Time": 14,</a:t>
-            </a:r>
-            <a:br/>
-            <a:r>
-              <a:t>    "Part-Time": 6</a:t>
-            </a:r>
-            <a:br/>
-            <a:r>
-              <a:t>  }</a:t>
-            </a:r>
-            <a:br/>
-            <a:r>
-              <a:t>}</a:t>
+              <a:t>--navy</a:t>
+            </a:r>
+          </a:p>
+          <a:p>
+            <a:pPr>
+              <a:spcAft>
+                <a:spcPts val="400"/>
+              </a:spcAft>
+              <a:defRPr sz="1150">
+                <a:solidFill>
+                  <a:srgbClr val="1C1C1E"/>
+                </a:solidFill>
+                <a:latin typeface="Arial"/>
+              </a:defRPr>
+            </a:pPr>
+            <a:r>
+              <a:t>#00317e (Brand primary)</a:t>
+            </a:r>
+          </a:p>
+          <a:p>
+            <a:pPr>
+              <a:defRPr sz="1300" b="1">
+                <a:solidFill>
+                  <a:srgbClr val="D4AF37"/>
+                </a:solidFill>
+                <a:latin typeface="Courier New"/>
+              </a:defRPr>
+            </a:pPr>
+            <a:r>
+              <a:t>--gold</a:t>
+            </a:r>
+          </a:p>
+          <a:p>
+            <a:pPr>
+              <a:spcAft>
+                <a:spcPts val="400"/>
+              </a:spcAft>
+              <a:defRPr sz="1150">
+                <a:solidFill>
+                  <a:srgbClr val="1C1C1E"/>
+                </a:solidFill>
+                <a:latin typeface="Arial"/>
+              </a:defRPr>
+            </a:pPr>
+            <a:r>
+              <a:t>#D4AF37 (Brand accent)</a:t>
+            </a:r>
+          </a:p>
+          <a:p>
+            <a:pPr>
+              <a:defRPr sz="1300" b="1">
+                <a:solidFill>
+                  <a:srgbClr val="D4AF37"/>
+                </a:solidFill>
+                <a:latin typeface="Courier New"/>
+              </a:defRPr>
+            </a:pPr>
+            <a:r>
+              <a:t>--card-bg</a:t>
+            </a:r>
+          </a:p>
+          <a:p>
+            <a:pPr>
+              <a:spcAft>
+                <a:spcPts val="400"/>
+              </a:spcAft>
+              <a:defRPr sz="1150">
+                <a:solidFill>
+                  <a:srgbClr val="1C1C1E"/>
+                </a:solidFill>
+                <a:latin typeface="Arial"/>
+              </a:defRPr>
+            </a:pPr>
+            <a:r>
+              <a:t>rgba(255,255,255,0.65)</a:t>
+            </a:r>
+          </a:p>
+          <a:p>
+            <a:pPr>
+              <a:defRPr sz="1300" b="1">
+                <a:solidFill>
+                  <a:srgbClr val="D4AF37"/>
+                </a:solidFill>
+                <a:latin typeface="Courier New"/>
+              </a:defRPr>
+            </a:pPr>
+            <a:r>
+              <a:t>--card-border</a:t>
+            </a:r>
+          </a:p>
+          <a:p>
+            <a:pPr>
+              <a:spcAft>
+                <a:spcPts val="400"/>
+              </a:spcAft>
+              <a:defRPr sz="1150">
+                <a:solidFill>
+                  <a:srgbClr val="1C1C1E"/>
+                </a:solidFill>
+                <a:latin typeface="Arial"/>
+              </a:defRPr>
+            </a:pPr>
+            <a:r>
+              <a:t>rgba(255,255,255,0.45)</a:t>
+            </a:r>
+          </a:p>
+          <a:p>
+            <a:pPr>
+              <a:defRPr sz="1300" b="1">
+                <a:solidFill>
+                  <a:srgbClr val="D4AF37"/>
+                </a:solidFill>
+                <a:latin typeface="Courier New"/>
+              </a:defRPr>
+            </a:pPr>
+            <a:r>
+              <a:t>--radius-xl</a:t>
+            </a:r>
+          </a:p>
+          <a:p>
+            <a:pPr>
+              <a:spcAft>
+                <a:spcPts val="400"/>
+              </a:spcAft>
+              <a:defRPr sz="1150">
+                <a:solidFill>
+                  <a:srgbClr val="1C1C1E"/>
+                </a:solidFill>
+                <a:latin typeface="Arial"/>
+              </a:defRPr>
+            </a:pPr>
+            <a:r>
+              <a:t>24px (Soft pill buttons)</a:t>
             </a:r>
           </a:p>
         </p:txBody>
@@ -3808,7 +3926,7 @@
               </a:defRPr>
             </a:pPr>
             <a:r>
-              <a:t>Production Security &amp; Compliance</a:t>
+              <a:t>The Interface Wizard Screens</a:t>
             </a:r>
           </a:p>
         </p:txBody>
@@ -3860,16 +3978,16 @@
       </p:sp>
       <p:sp>
         <p:nvSpPr>
-          <p:cNvPr id="6" name="Rectangle 5"/>
+          <p:cNvPr id="6" name="Rounded Rectangle 5"/>
           <p:cNvSpPr/>
           <p:nvPr/>
         </p:nvSpPr>
         <p:spPr>
           <a:xfrm>
             <a:off x="731520" y="1645920"/>
-            <a:ext cx="5212080" cy="1920240"/>
-          </a:xfrm>
-          <a:prstGeom prst="rect">
+            <a:ext cx="2514600" cy="3291840"/>
+          </a:xfrm>
+          <a:prstGeom prst="roundRect">
             <a:avLst/>
           </a:prstGeom>
           <a:solidFill>
@@ -3877,7 +3995,7 @@
           </a:solidFill>
           <a:ln w="12700">
             <a:solidFill>
-              <a:srgbClr val="D4AF37"/>
+              <a:srgbClr val="00317E"/>
             </a:solidFill>
           </a:ln>
         </p:spPr>
@@ -3911,8 +4029,8 @@
         </p:nvSpPr>
         <p:spPr>
           <a:xfrm>
-            <a:off x="914400" y="1783080"/>
-            <a:ext cx="4846320" cy="1645920"/>
+            <a:off x="822960" y="1828800"/>
+            <a:ext cx="2331720" cy="2926080"/>
           </a:xfrm>
           <a:prstGeom prst="rect">
             <a:avLst/>
@@ -3925,9 +4043,9 @@
           </a:bodyPr>
           <a:lstStyle/>
           <a:p>
-            <a:pPr>
+            <a:pPr algn="ctr">
               <a:spcAft>
-                <a:spcPts val="600"/>
+                <a:spcPts val="1200"/>
               </a:spcAft>
               <a:defRPr sz="1600" b="1">
                 <a:solidFill>
@@ -3937,12 +4055,12 @@
               </a:defRPr>
             </a:pPr>
             <a:r>
-              <a:t>🔐 Cryptographic Password Protection</a:t>
-            </a:r>
-          </a:p>
-          <a:p>
-            <a:pPr>
-              <a:defRPr sz="1250">
+              <a:t>Step 1: Identity</a:t>
+            </a:r>
+          </a:p>
+          <a:p>
+            <a:pPr algn="ctr">
+              <a:defRPr sz="1300">
                 <a:solidFill>
                   <a:srgbClr val="1C1C1E"/>
                 </a:solidFill>
@@ -3950,23 +4068,23 @@
               </a:defRPr>
             </a:pPr>
             <a:r>
-              <a:t>User passwords undergo hashing using the blowfish Bcrypt algorithm (work factor: 12) before database write.</a:t>
-            </a:r>
-          </a:p>
-        </p:txBody>
-      </p:sp>
-      <p:sp>
-        <p:nvSpPr>
-          <p:cNvPr id="8" name="Rectangle 7"/>
+              <a:t>Personal details inputs featuring regex email checks and phone formatting.</a:t>
+            </a:r>
+          </a:p>
+        </p:txBody>
+      </p:sp>
+      <p:sp>
+        <p:nvSpPr>
+          <p:cNvPr id="8" name="Rounded Rectangle 7"/>
           <p:cNvSpPr/>
           <p:nvPr/>
         </p:nvSpPr>
         <p:spPr>
           <a:xfrm>
-            <a:off x="6217920" y="1645920"/>
-            <a:ext cx="5212080" cy="1920240"/>
-          </a:xfrm>
-          <a:prstGeom prst="rect">
+            <a:off x="3474720" y="1645920"/>
+            <a:ext cx="2514600" cy="3291840"/>
+          </a:xfrm>
+          <a:prstGeom prst="roundRect">
             <a:avLst/>
           </a:prstGeom>
           <a:solidFill>
@@ -3974,7 +4092,7 @@
           </a:solidFill>
           <a:ln w="12700">
             <a:solidFill>
-              <a:srgbClr val="D4AF37"/>
+              <a:srgbClr val="00317E"/>
             </a:solidFill>
           </a:ln>
         </p:spPr>
@@ -4008,8 +4126,8 @@
         </p:nvSpPr>
         <p:spPr>
           <a:xfrm>
-            <a:off x="6400800" y="1783080"/>
-            <a:ext cx="4846320" cy="1645920"/>
+            <a:off x="3566160" y="1828800"/>
+            <a:ext cx="2331720" cy="2926080"/>
           </a:xfrm>
           <a:prstGeom prst="rect">
             <a:avLst/>
@@ -4022,9 +4140,9 @@
           </a:bodyPr>
           <a:lstStyle/>
           <a:p>
-            <a:pPr>
+            <a:pPr algn="ctr">
               <a:spcAft>
-                <a:spcPts val="600"/>
+                <a:spcPts val="1200"/>
               </a:spcAft>
               <a:defRPr sz="1600" b="1">
                 <a:solidFill>
@@ -4034,12 +4152,12 @@
               </a:defRPr>
             </a:pPr>
             <a:r>
-              <a:t>🛡️ Content Security Policy (CSP)</a:t>
-            </a:r>
-          </a:p>
-          <a:p>
-            <a:pPr>
-              <a:defRPr sz="1250">
+              <a:t>Step 2: Location</a:t>
+            </a:r>
+          </a:p>
+          <a:p>
+            <a:pPr algn="ctr">
+              <a:defRPr sz="1300">
                 <a:solidFill>
                   <a:srgbClr val="1C1C1E"/>
                 </a:solidFill>
@@ -4047,23 +4165,23 @@
               </a:defRPr>
             </a:pPr>
             <a:r>
-              <a:t>Rigid HTTP security policies restrict resource downloads exclusively to 'self' and approved endpoints, preventing injections.</a:t>
-            </a:r>
-          </a:p>
-        </p:txBody>
-      </p:sp>
-      <p:sp>
-        <p:nvSpPr>
-          <p:cNvPr id="10" name="Rectangle 9"/>
+              <a:t>Collects mailing coordinates and postal address details.</a:t>
+            </a:r>
+          </a:p>
+        </p:txBody>
+      </p:sp>
+      <p:sp>
+        <p:nvSpPr>
+          <p:cNvPr id="10" name="Rounded Rectangle 9"/>
           <p:cNvSpPr/>
           <p:nvPr/>
         </p:nvSpPr>
         <p:spPr>
           <a:xfrm>
-            <a:off x="731520" y="3931920"/>
-            <a:ext cx="5212080" cy="1920240"/>
-          </a:xfrm>
-          <a:prstGeom prst="rect">
+            <a:off x="6217920" y="1645920"/>
+            <a:ext cx="2514600" cy="3291840"/>
+          </a:xfrm>
+          <a:prstGeom prst="roundRect">
             <a:avLst/>
           </a:prstGeom>
           <a:solidFill>
@@ -4071,7 +4189,7 @@
           </a:solidFill>
           <a:ln w="12700">
             <a:solidFill>
-              <a:srgbClr val="D4AF37"/>
+              <a:srgbClr val="00317E"/>
             </a:solidFill>
           </a:ln>
         </p:spPr>
@@ -4105,8 +4223,8 @@
         </p:nvSpPr>
         <p:spPr>
           <a:xfrm>
-            <a:off x="914400" y="4069080"/>
-            <a:ext cx="4846320" cy="1645920"/>
+            <a:off x="6309360" y="1828800"/>
+            <a:ext cx="2331720" cy="2926080"/>
           </a:xfrm>
           <a:prstGeom prst="rect">
             <a:avLst/>
@@ -4119,9 +4237,9 @@
           </a:bodyPr>
           <a:lstStyle/>
           <a:p>
-            <a:pPr>
+            <a:pPr algn="ctr">
               <a:spcAft>
-                <a:spcPts val="600"/>
+                <a:spcPts val="1200"/>
               </a:spcAft>
               <a:defRPr sz="1600" b="1">
                 <a:solidFill>
@@ -4131,12 +4249,12 @@
               </a:defRPr>
             </a:pPr>
             <a:r>
-              <a:t>🚫 Rate-Limiter Interceptor</a:t>
-            </a:r>
-          </a:p>
-          <a:p>
-            <a:pPr>
-              <a:defRPr sz="1250">
+              <a:t>Step 3: Program</a:t>
+            </a:r>
+          </a:p>
+          <a:p>
+            <a:pPr algn="ctr">
+              <a:defRPr sz="1300">
                 <a:solidFill>
                   <a:srgbClr val="1C1C1E"/>
                 </a:solidFill>
@@ -4144,23 +4262,23 @@
               </a:defRPr>
             </a:pPr>
             <a:r>
-              <a:t>Protects authentication interfaces against dictionary attacks. Registers max 10 attempts/hour per IP.</a:t>
-            </a:r>
-          </a:p>
-        </p:txBody>
-      </p:sp>
-      <p:sp>
-        <p:nvSpPr>
-          <p:cNvPr id="12" name="Rectangle 11"/>
+              <a:t>Academic selection mapping candidates to specific program majors.</a:t>
+            </a:r>
+          </a:p>
+        </p:txBody>
+      </p:sp>
+      <p:sp>
+        <p:nvSpPr>
+          <p:cNvPr id="12" name="Rounded Rectangle 11"/>
           <p:cNvSpPr/>
           <p:nvPr/>
         </p:nvSpPr>
         <p:spPr>
           <a:xfrm>
-            <a:off x="6217920" y="3931920"/>
-            <a:ext cx="5212080" cy="1920240"/>
-          </a:xfrm>
-          <a:prstGeom prst="rect">
+            <a:off x="8961120" y="1645920"/>
+            <a:ext cx="2514600" cy="3291840"/>
+          </a:xfrm>
+          <a:prstGeom prst="roundRect">
             <a:avLst/>
           </a:prstGeom>
           <a:solidFill>
@@ -4168,7 +4286,7 @@
           </a:solidFill>
           <a:ln w="12700">
             <a:solidFill>
-              <a:srgbClr val="D4AF37"/>
+              <a:srgbClr val="00317E"/>
             </a:solidFill>
           </a:ln>
         </p:spPr>
@@ -4202,8 +4320,8 @@
         </p:nvSpPr>
         <p:spPr>
           <a:xfrm>
-            <a:off x="6400800" y="4069080"/>
-            <a:ext cx="4846320" cy="1645920"/>
+            <a:off x="9052560" y="1828800"/>
+            <a:ext cx="2331720" cy="2926080"/>
           </a:xfrm>
           <a:prstGeom prst="rect">
             <a:avLst/>
@@ -4216,9 +4334,9 @@
           </a:bodyPr>
           <a:lstStyle/>
           <a:p>
-            <a:pPr>
+            <a:pPr algn="ctr">
               <a:spcAft>
-                <a:spcPts val="600"/>
+                <a:spcPts val="1200"/>
               </a:spcAft>
               <a:defRPr sz="1600" b="1">
                 <a:solidFill>
@@ -4228,12 +4346,12 @@
               </a:defRPr>
             </a:pPr>
             <a:r>
-              <a:t>📜 Cross-Site Request Forgery (CSRF)</a:t>
-            </a:r>
-          </a:p>
-          <a:p>
-            <a:pPr>
-              <a:defRPr sz="1250">
+              <a:t>Step 4: Account</a:t>
+            </a:r>
+          </a:p>
+          <a:p>
+            <a:pPr algn="ctr">
+              <a:defRPr sz="1300">
                 <a:solidFill>
                   <a:srgbClr val="1C1C1E"/>
                 </a:solidFill>
@@ -4241,7 +4359,63 @@
               </a:defRPr>
             </a:pPr>
             <a:r>
-              <a:t>Flask-WTForms forces cryptographic signature checks on every POST payload, neutralizing CSRF attacks.</a:t>
+              <a:t>Password meter validation and dynamic registration code generation.</a:t>
+            </a:r>
+          </a:p>
+        </p:txBody>
+      </p:sp>
+      <p:sp>
+        <p:nvSpPr>
+          <p:cNvPr id="14" name="TextBox 13"/>
+          <p:cNvSpPr txBox="1"/>
+          <p:nvPr/>
+        </p:nvSpPr>
+        <p:spPr>
+          <a:xfrm>
+            <a:off x="731520" y="5120640"/>
+            <a:ext cx="10698480" cy="1097280"/>
+          </a:xfrm>
+          <a:prstGeom prst="rect">
+            <a:avLst/>
+          </a:prstGeom>
+          <a:noFill/>
+        </p:spPr>
+        <p:txBody>
+          <a:bodyPr wrap="square" lIns="0" tIns="0" bIns="0" rIns="0">
+            <a:spAutoFit/>
+          </a:bodyPr>
+          <a:lstStyle/>
+          <a:p>
+            <a:pPr>
+              <a:spcAft>
+                <a:spcPts val="400"/>
+              </a:spcAft>
+              <a:defRPr b="1" sz="1400">
+                <a:solidFill>
+                  <a:srgbClr val="00317E"/>
+                </a:solidFill>
+                <a:latin typeface="Arial"/>
+              </a:defRPr>
+            </a:pPr>
+            <a:r>
+              <a:t>💡 **User Experience Features:**</a:t>
+            </a:r>
+          </a:p>
+          <a:p>
+            <a:pPr>
+              <a:defRPr sz="1350">
+                <a:solidFill>
+                  <a:srgbClr val="1C1C1E"/>
+                </a:solidFill>
+                <a:latin typeface="Arial"/>
+              </a:defRPr>
+            </a:pPr>
+            <a:r>
+              <a:t>• Seamless Navigation: Next/Previous controls maintain filled states, reducing user input frustration.</a:t>
+            </a:r>
+            <a:br/>
+            <a:r>
+              <a:t>• Form Validation Feedback: Immediate visual alerts are triggered before form submission to ensure database clean writes.</a:t>
             </a:r>
           </a:p>
         </p:txBody>
@@ -4363,7 +4537,7 @@
               </a:defRPr>
             </a:pPr>
             <a:r>
-              <a:t>Audit Logging &amp; Middleware</a:t>
+              <a:t>Innovation: Local Asset Self-Hosting</a:t>
             </a:r>
           </a:p>
         </p:txBody>
@@ -4437,7 +4611,7 @@
           <a:p>
             <a:pPr>
               <a:spcAft>
-                <a:spcPts val="1400"/>
+                <a:spcPts val="2000"/>
               </a:spcAft>
               <a:defRPr sz="1800">
                 <a:solidFill>
@@ -4447,13 +4621,13 @@
               </a:defRPr>
             </a:pPr>
             <a:r>
-              <a:t>Student Hub logs every critical operation in the server logs (audit.py) to meet corporate compliance standards.</a:t>
+              <a:t>A core security innovation in Student Hub is the elimination of external content delivery networks (CDNs) for key UI icons.</a:t>
             </a:r>
           </a:p>
           <a:p>
             <a:pPr>
               <a:spcBef>
-                <a:spcPts val="1000"/>
+                <a:spcPts val="1200"/>
               </a:spcBef>
               <a:defRPr sz="1500">
                 <a:solidFill>
@@ -4463,13 +4637,13 @@
               </a:defRPr>
             </a:pPr>
             <a:r>
-              <a:t>📋 Session Isolation: Keeps Administrator and Student credentials separated at the controller layer.</a:t>
+              <a:t>🔒 Asset Isolation: Serves the Material Symbols font file (`.ttf`) directly from local `/static/fonts` folders.</a:t>
             </a:r>
           </a:p>
           <a:p>
             <a:pPr>
               <a:spcBef>
-                <a:spcPts val="1000"/>
+                <a:spcPts val="1200"/>
               </a:spcBef>
               <a:defRPr sz="1500">
                 <a:solidFill>
@@ -4479,13 +4653,13 @@
               </a:defRPr>
             </a:pPr>
             <a:r>
-              <a:t>🖥️ Audit Logs: Writes time, operation context, client IP, and target candidate IDs for all admin edits.</a:t>
+              <a:t>🛡️ Content Security Policy compliance: Prevents security blocks on external CDN domains by referencing assets from `'self'`.</a:t>
             </a:r>
           </a:p>
           <a:p>
             <a:pPr>
               <a:spcBef>
-                <a:spcPts val="1000"/>
+                <a:spcPts val="1200"/>
               </a:spcBef>
               <a:defRPr sz="1500">
                 <a:solidFill>
@@ -4495,13 +4669,13 @@
               </a:defRPr>
             </a:pPr>
             <a:r>
-              <a:t>🧹 Input Sanitizer: Filter classes inspect all inbound strings to wipe out SQL injections and HTML tags.</a:t>
+              <a:t>🔌 Network Independence: The application loads fast in offline local dev, removing the risk of CDN outages.</a:t>
             </a:r>
           </a:p>
           <a:p>
             <a:pPr>
               <a:spcBef>
-                <a:spcPts val="1000"/>
+                <a:spcPts val="1200"/>
               </a:spcBef>
               <a:defRPr sz="1500">
                 <a:solidFill>
@@ -4511,7 +4685,7 @@
               </a:defRPr>
             </a:pPr>
             <a:r>
-              <a:t>🔓 JWT Authentication: Endpoint controller decorator `@token_required` validates student API sessions.</a:t>
+              <a:t>🧩 Dynamic Font Rendering: Retains variable axis settings (optical sizes, fill axis, weights) through pure local CSS rules.</a:t>
             </a:r>
           </a:p>
         </p:txBody>
@@ -4531,7 +4705,7 @@
             <a:avLst/>
           </a:prstGeom>
           <a:solidFill>
-            <a:srgbClr val="1C1C1E"/>
+            <a:srgbClr val="F2F2F7"/>
           </a:solidFill>
           <a:ln w="19050">
             <a:solidFill>
@@ -4569,8 +4743,8 @@
         </p:nvSpPr>
         <p:spPr>
           <a:xfrm>
-            <a:off x="8229600" y="1828800"/>
-            <a:ext cx="3017520" cy="3657600"/>
+            <a:off x="8321040" y="1920240"/>
+            <a:ext cx="2834640" cy="3474720"/>
           </a:xfrm>
           <a:prstGeom prst="rect">
             <a:avLst/>
@@ -4585,9 +4759,25 @@
           <a:p>
             <a:pPr>
               <a:spcAft>
-                <a:spcPts val="1000"/>
+                <a:spcPts val="1600"/>
               </a:spcAft>
-              <a:defRPr sz="1200" b="1">
+              <a:defRPr sz="1400" b="1">
+                <a:solidFill>
+                  <a:srgbClr val="00317E"/>
+                </a:solidFill>
+                <a:latin typeface="Arial"/>
+              </a:defRPr>
+            </a:pPr>
+            <a:r>
+              <a:t>LOCAL ASSET SETUP</a:t>
+            </a:r>
+          </a:p>
+          <a:p>
+            <a:pPr>
+              <a:spcBef>
+                <a:spcPts val="800"/>
+              </a:spcBef>
+              <a:defRPr sz="1400" b="1">
                 <a:solidFill>
                   <a:srgbClr val="D4AF37"/>
                 </a:solidFill>
@@ -4595,67 +4785,78 @@
               </a:defRPr>
             </a:pPr>
             <a:r>
-              <a:t>LOG FORMAT SAMPLE</a:t>
-            </a:r>
-          </a:p>
-          <a:p>
-            <a:pPr>
-              <a:lnSpc>
-                <a:spcPct val="110000"/>
-              </a:lnSpc>
-              <a:defRPr sz="1050">
-                <a:solidFill>
-                  <a:srgbClr val="00FFFF"/>
-                </a:solidFill>
-                <a:latin typeface="Courier New"/>
-              </a:defRPr>
-            </a:pPr>
-            <a:r>
-              <a:t>2026-05-24 10:45:01 [INFO]</a:t>
-            </a:r>
-            <a:br/>
-            <a:r>
-              <a:t>AuditLog: {</a:t>
-            </a:r>
-            <a:br/>
-            <a:r>
-              <a:t>  "request_id": "8a32-9b2f",</a:t>
-            </a:r>
-            <a:br/>
-            <a:r>
-              <a:t>  "user_id": 14,</a:t>
-            </a:r>
-            <a:br/>
-            <a:r>
-              <a:t>  "action": "UPDATE_PROFILE",</a:t>
-            </a:r>
-            <a:br/>
-            <a:r>
-              <a:t>  "ip": "127.0.0.1",</a:t>
-            </a:r>
-            <a:br/>
-            <a:r>
-              <a:t>  "timestamp": "10:45:01",</a:t>
-            </a:r>
-            <a:br/>
-            <a:r>
-              <a:t>  "details": {</a:t>
-            </a:r>
-            <a:br/>
-            <a:r>
-              <a:t>    "student_id": "STU-2026-A3",</a:t>
-            </a:r>
-            <a:br/>
-            <a:r>
-              <a:t>    "status": "active"</a:t>
-            </a:r>
-            <a:br/>
-            <a:r>
-              <a:t>  }</a:t>
-            </a:r>
-            <a:br/>
-            <a:r>
-              <a:t>}</a:t>
+              <a:t>✔ Download Binary</a:t>
+            </a:r>
+          </a:p>
+          <a:p>
+            <a:pPr>
+              <a:defRPr sz="1150">
+                <a:solidFill>
+                  <a:srgbClr val="1C1C1E"/>
+                </a:solidFill>
+                <a:latin typeface="Arial"/>
+              </a:defRPr>
+            </a:pPr>
+            <a:r>
+              <a:t>Pulled Google's official variable font file to project disk folders.</a:t>
+            </a:r>
+          </a:p>
+          <a:p>
+            <a:pPr>
+              <a:spcBef>
+                <a:spcPts val="800"/>
+              </a:spcBef>
+              <a:defRPr sz="1400" b="1">
+                <a:solidFill>
+                  <a:srgbClr val="D4AF37"/>
+                </a:solidFill>
+                <a:latin typeface="Arial"/>
+              </a:defRPr>
+            </a:pPr>
+            <a:r>
+              <a:t>✔ CSS Mapping</a:t>
+            </a:r>
+          </a:p>
+          <a:p>
+            <a:pPr>
+              <a:defRPr sz="1150">
+                <a:solidFill>
+                  <a:srgbClr val="1C1C1E"/>
+                </a:solidFill>
+                <a:latin typeface="Arial"/>
+              </a:defRPr>
+            </a:pPr>
+            <a:r>
+              <a:t>Added @font-face rules mapping families to '/static/fonts/' urls.</a:t>
+            </a:r>
+          </a:p>
+          <a:p>
+            <a:pPr>
+              <a:spcBef>
+                <a:spcPts val="800"/>
+              </a:spcBef>
+              <a:defRPr sz="1400" b="1">
+                <a:solidFill>
+                  <a:srgbClr val="D4AF37"/>
+                </a:solidFill>
+                <a:latin typeface="Arial"/>
+              </a:defRPr>
+            </a:pPr>
+            <a:r>
+              <a:t>✔ Strict CSP settings</a:t>
+            </a:r>
+          </a:p>
+          <a:p>
+            <a:pPr>
+              <a:defRPr sz="1150">
+                <a:solidFill>
+                  <a:srgbClr val="1C1C1E"/>
+                </a:solidFill>
+                <a:latin typeface="Arial"/>
+              </a:defRPr>
+            </a:pPr>
+            <a:r>
+              <a:t>Wiped out external font-src domains, whitelisting 'self' only.</a:t>
             </a:r>
           </a:p>
         </p:txBody>
@@ -4777,7 +4978,7 @@
               </a:defRPr>
             </a:pPr>
             <a:r>
-              <a:t>The Technology Stack</a:t>
+              <a:t>Innovation: Session Protection &amp; Audit Logs</a:t>
             </a:r>
           </a:p>
         </p:txBody>
@@ -4827,530 +5028,249 @@
           </a:p>
         </p:txBody>
       </p:sp>
-      <p:graphicFrame>
-        <p:nvGraphicFramePr>
-          <p:cNvPr id="6" name="Table 5"/>
-          <p:cNvGraphicFramePr>
-            <a:graphicFrameLocks noGrp="1"/>
-          </p:cNvGraphicFramePr>
-          <p:nvPr/>
-        </p:nvGraphicFramePr>
-        <p:xfrm>
-          <a:off x="731520" y="1645920"/>
-          <a:ext cx="10698480" cy="4114800"/>
-        </p:xfrm>
-        <a:graphic>
-          <a:graphicData uri="http://schemas.openxmlformats.org/drawingml/2006/table">
-            <a:tbl>
-              <a:tblPr firstRow="1" bandRow="1">
-                <a:tableStyleId>{5C22544A-7EE6-4342-B048-85BDC9FD1C3A}</a:tableStyleId>
-              </a:tblPr>
-              <a:tblGrid>
-                <a:gridCol w="2011680"/>
-                <a:gridCol w="3474720"/>
-                <a:gridCol w="5212080"/>
-              </a:tblGrid>
-              <a:tr h="587828">
-                <a:tc>
-                  <a:txBody>
-                    <a:bodyPr/>
-                    <a:lstStyle/>
-                    <a:p>
-                      <a:pPr algn="ctr">
-                        <a:defRPr b="1" sz="1500">
-                          <a:solidFill>
-                            <a:srgbClr val="D4AF37"/>
-                          </a:solidFill>
-                        </a:defRPr>
-                      </a:pPr>
-                      <a:r>
-                        <a:t>Layer</a:t>
-                      </a:r>
-                    </a:p>
-                  </a:txBody>
-                  <a:tcPr>
-                    <a:solidFill>
-                      <a:srgbClr val="00317E"/>
-                    </a:solidFill>
-                  </a:tcPr>
-                </a:tc>
-                <a:tc>
-                  <a:txBody>
-                    <a:bodyPr/>
-                    <a:lstStyle/>
-                    <a:p>
-                      <a:pPr algn="ctr">
-                        <a:defRPr b="1" sz="1500">
-                          <a:solidFill>
-                            <a:srgbClr val="D4AF37"/>
-                          </a:solidFill>
-                        </a:defRPr>
-                      </a:pPr>
-                      <a:r>
-                        <a:t>Technology Used</a:t>
-                      </a:r>
-                    </a:p>
-                  </a:txBody>
-                  <a:tcPr>
-                    <a:solidFill>
-                      <a:srgbClr val="00317E"/>
-                    </a:solidFill>
-                  </a:tcPr>
-                </a:tc>
-                <a:tc>
-                  <a:txBody>
-                    <a:bodyPr/>
-                    <a:lstStyle/>
-                    <a:p>
-                      <a:pPr algn="ctr">
-                        <a:defRPr b="1" sz="1500">
-                          <a:solidFill>
-                            <a:srgbClr val="D4AF37"/>
-                          </a:solidFill>
-                        </a:defRPr>
-                      </a:pPr>
-                      <a:r>
-                        <a:t>Role in Student Hub</a:t>
-                      </a:r>
-                    </a:p>
-                  </a:txBody>
-                  <a:tcPr>
-                    <a:solidFill>
-                      <a:srgbClr val="00317E"/>
-                    </a:solidFill>
-                  </a:tcPr>
-                </a:tc>
-              </a:tr>
-              <a:tr h="587828">
-                <a:tc>
-                  <a:txBody>
-                    <a:bodyPr/>
-                    <a:lstStyle/>
-                    <a:p>
-                      <a:pPr algn="ctr">
-                        <a:defRPr sz="1300" b="1">
-                          <a:solidFill>
-                            <a:srgbClr val="1C1C1E"/>
-                          </a:solidFill>
-                        </a:defRPr>
-                      </a:pPr>
-                      <a:r>
-                        <a:t>Backend logic</a:t>
-                      </a:r>
-                    </a:p>
-                  </a:txBody>
-                  <a:tcPr>
-                    <a:solidFill>
-                      <a:srgbClr val="FFFFFF"/>
-                    </a:solidFill>
-                  </a:tcPr>
-                </a:tc>
-                <a:tc>
-                  <a:txBody>
-                    <a:bodyPr/>
-                    <a:lstStyle/>
-                    <a:p>
-                      <a:pPr algn="ctr">
-                        <a:defRPr sz="1300" b="0">
-                          <a:solidFill>
-                            <a:srgbClr val="1C1C1E"/>
-                          </a:solidFill>
-                        </a:defRPr>
-                      </a:pPr>
-                      <a:r>
-                        <a:t>Python / Flask 3.0</a:t>
-                      </a:r>
-                    </a:p>
-                  </a:txBody>
-                  <a:tcPr>
-                    <a:solidFill>
-                      <a:srgbClr val="FFFFFF"/>
-                    </a:solidFill>
-                  </a:tcPr>
-                </a:tc>
-                <a:tc>
-                  <a:txBody>
-                    <a:bodyPr/>
-                    <a:lstStyle/>
-                    <a:p>
-                      <a:pPr>
-                        <a:defRPr sz="1300">
-                          <a:solidFill>
-                            <a:srgbClr val="1C1C1E"/>
-                          </a:solidFill>
-                        </a:defRPr>
-                      </a:pPr>
-                      <a:r>
-                        <a:t>Handles HTTP endpoints, controller mapping, and route lifecycle.</a:t>
-                      </a:r>
-                    </a:p>
-                  </a:txBody>
-                  <a:tcPr>
-                    <a:solidFill>
-                      <a:srgbClr val="FFFFFF"/>
-                    </a:solidFill>
-                  </a:tcPr>
-                </a:tc>
-              </a:tr>
-              <a:tr h="587828">
-                <a:tc>
-                  <a:txBody>
-                    <a:bodyPr/>
-                    <a:lstStyle/>
-                    <a:p>
-                      <a:pPr algn="ctr">
-                        <a:defRPr sz="1300" b="1">
-                          <a:solidFill>
-                            <a:srgbClr val="1C1C1E"/>
-                          </a:solidFill>
-                        </a:defRPr>
-                      </a:pPr>
-                      <a:r>
-                        <a:t>ORM / Database</a:t>
-                      </a:r>
-                    </a:p>
-                  </a:txBody>
-                  <a:tcPr>
-                    <a:solidFill>
-                      <a:srgbClr val="F2F2F7"/>
-                    </a:solidFill>
-                  </a:tcPr>
-                </a:tc>
-                <a:tc>
-                  <a:txBody>
-                    <a:bodyPr/>
-                    <a:lstStyle/>
-                    <a:p>
-                      <a:pPr algn="ctr">
-                        <a:defRPr sz="1300" b="0">
-                          <a:solidFill>
-                            <a:srgbClr val="1C1C1E"/>
-                          </a:solidFill>
-                        </a:defRPr>
-                      </a:pPr>
-                      <a:r>
-                        <a:t>SQLAlchemy 2.0 / SQLite &amp; MySQL</a:t>
-                      </a:r>
-                    </a:p>
-                  </a:txBody>
-                  <a:tcPr>
-                    <a:solidFill>
-                      <a:srgbClr val="F2F2F7"/>
-                    </a:solidFill>
-                  </a:tcPr>
-                </a:tc>
-                <a:tc>
-                  <a:txBody>
-                    <a:bodyPr/>
-                    <a:lstStyle/>
-                    <a:p>
-                      <a:pPr>
-                        <a:defRPr sz="1300">
-                          <a:solidFill>
-                            <a:srgbClr val="1C1C1E"/>
-                          </a:solidFill>
-                        </a:defRPr>
-                      </a:pPr>
-                      <a:r>
-                        <a:t>Relational database models mapping. Dev fallback utilizes SQLite.</a:t>
-                      </a:r>
-                    </a:p>
-                  </a:txBody>
-                  <a:tcPr>
-                    <a:solidFill>
-                      <a:srgbClr val="F2F2F7"/>
-                    </a:solidFill>
-                  </a:tcPr>
-                </a:tc>
-              </a:tr>
-              <a:tr h="587828">
-                <a:tc>
-                  <a:txBody>
-                    <a:bodyPr/>
-                    <a:lstStyle/>
-                    <a:p>
-                      <a:pPr algn="ctr">
-                        <a:defRPr sz="1300" b="1">
-                          <a:solidFill>
-                            <a:srgbClr val="1C1C1E"/>
-                          </a:solidFill>
-                        </a:defRPr>
-                      </a:pPr>
-                      <a:r>
-                        <a:t>UI Styling</a:t>
-                      </a:r>
-                    </a:p>
-                  </a:txBody>
-                  <a:tcPr>
-                    <a:solidFill>
-                      <a:srgbClr val="FFFFFF"/>
-                    </a:solidFill>
-                  </a:tcPr>
-                </a:tc>
-                <a:tc>
-                  <a:txBody>
-                    <a:bodyPr/>
-                    <a:lstStyle/>
-                    <a:p>
-                      <a:pPr algn="ctr">
-                        <a:defRPr sz="1300" b="0">
-                          <a:solidFill>
-                            <a:srgbClr val="1C1C1E"/>
-                          </a:solidFill>
-                        </a:defRPr>
-                      </a:pPr>
-                      <a:r>
-                        <a:t>CSS3 / Custom Variable Design</a:t>
-                      </a:r>
-                    </a:p>
-                  </a:txBody>
-                  <a:tcPr>
-                    <a:solidFill>
-                      <a:srgbClr val="FFFFFF"/>
-                    </a:solidFill>
-                  </a:tcPr>
-                </a:tc>
-                <a:tc>
-                  <a:txBody>
-                    <a:bodyPr/>
-                    <a:lstStyle/>
-                    <a:p>
-                      <a:pPr>
-                        <a:defRPr sz="1300">
-                          <a:solidFill>
-                            <a:srgbClr val="1C1C1E"/>
-                          </a:solidFill>
-                        </a:defRPr>
-                      </a:pPr>
-                      <a:r>
-                        <a:t>Apple-inspired styling, glassmorphism cards, and Dark/Light templates.</a:t>
-                      </a:r>
-                    </a:p>
-                  </a:txBody>
-                  <a:tcPr>
-                    <a:solidFill>
-                      <a:srgbClr val="FFFFFF"/>
-                    </a:solidFill>
-                  </a:tcPr>
-                </a:tc>
-              </a:tr>
-              <a:tr h="587828">
-                <a:tc>
-                  <a:txBody>
-                    <a:bodyPr/>
-                    <a:lstStyle/>
-                    <a:p>
-                      <a:pPr algn="ctr">
-                        <a:defRPr sz="1300" b="1">
-                          <a:solidFill>
-                            <a:srgbClr val="1C1C1E"/>
-                          </a:solidFill>
-                        </a:defRPr>
-                      </a:pPr>
-                      <a:r>
-                        <a:t>Fonts &amp; Icons</a:t>
-                      </a:r>
-                    </a:p>
-                  </a:txBody>
-                  <a:tcPr>
-                    <a:solidFill>
-                      <a:srgbClr val="F2F2F7"/>
-                    </a:solidFill>
-                  </a:tcPr>
-                </a:tc>
-                <a:tc>
-                  <a:txBody>
-                    <a:bodyPr/>
-                    <a:lstStyle/>
-                    <a:p>
-                      <a:pPr algn="ctr">
-                        <a:defRPr sz="1300" b="0">
-                          <a:solidFill>
-                            <a:srgbClr val="1C1C1E"/>
-                          </a:solidFill>
-                        </a:defRPr>
-                      </a:pPr>
-                      <a:r>
-                        <a:t>Self-Hosted Material Symbols Outlined</a:t>
-                      </a:r>
-                    </a:p>
-                  </a:txBody>
-                  <a:tcPr>
-                    <a:solidFill>
-                      <a:srgbClr val="F2F2F7"/>
-                    </a:solidFill>
-                  </a:tcPr>
-                </a:tc>
-                <a:tc>
-                  <a:txBody>
-                    <a:bodyPr/>
-                    <a:lstStyle/>
-                    <a:p>
-                      <a:pPr>
-                        <a:defRPr sz="1300">
-                          <a:solidFill>
-                            <a:srgbClr val="1C1C1E"/>
-                          </a:solidFill>
-                        </a:defRPr>
-                      </a:pPr>
-                      <a:r>
-                        <a:t>Local .ttf font files serve vectors securely, bypassing CDN blocks.</a:t>
-                      </a:r>
-                    </a:p>
-                  </a:txBody>
-                  <a:tcPr>
-                    <a:solidFill>
-                      <a:srgbClr val="F2F2F7"/>
-                    </a:solidFill>
-                  </a:tcPr>
-                </a:tc>
-              </a:tr>
-              <a:tr h="587828">
-                <a:tc>
-                  <a:txBody>
-                    <a:bodyPr/>
-                    <a:lstStyle/>
-                    <a:p>
-                      <a:pPr algn="ctr">
-                        <a:defRPr sz="1300" b="1">
-                          <a:solidFill>
-                            <a:srgbClr val="1C1C1E"/>
-                          </a:solidFill>
-                        </a:defRPr>
-                      </a:pPr>
-                      <a:r>
-                        <a:t>Authentication</a:t>
-                      </a:r>
-                    </a:p>
-                  </a:txBody>
-                  <a:tcPr>
-                    <a:solidFill>
-                      <a:srgbClr val="FFFFFF"/>
-                    </a:solidFill>
-                  </a:tcPr>
-                </a:tc>
-                <a:tc>
-                  <a:txBody>
-                    <a:bodyPr/>
-                    <a:lstStyle/>
-                    <a:p>
-                      <a:pPr algn="ctr">
-                        <a:defRPr sz="1300" b="0">
-                          <a:solidFill>
-                            <a:srgbClr val="1C1C1E"/>
-                          </a:solidFill>
-                        </a:defRPr>
-                      </a:pPr>
-                      <a:r>
-                        <a:t>Flask-Login &amp; JWT Tokens</a:t>
-                      </a:r>
-                    </a:p>
-                  </a:txBody>
-                  <a:tcPr>
-                    <a:solidFill>
-                      <a:srgbClr val="FFFFFF"/>
-                    </a:solidFill>
-                  </a:tcPr>
-                </a:tc>
-                <a:tc>
-                  <a:txBody>
-                    <a:bodyPr/>
-                    <a:lstStyle/>
-                    <a:p>
-                      <a:pPr>
-                        <a:defRPr sz="1300">
-                          <a:solidFill>
-                            <a:srgbClr val="1C1C1E"/>
-                          </a:solidFill>
-                        </a:defRPr>
-                      </a:pPr>
-                      <a:r>
-                        <a:t>Manages student session states and API authorization headers.</a:t>
-                      </a:r>
-                    </a:p>
-                  </a:txBody>
-                  <a:tcPr>
-                    <a:solidFill>
-                      <a:srgbClr val="FFFFFF"/>
-                    </a:solidFill>
-                  </a:tcPr>
-                </a:tc>
-              </a:tr>
-              <a:tr h="587832">
-                <a:tc>
-                  <a:txBody>
-                    <a:bodyPr/>
-                    <a:lstStyle/>
-                    <a:p>
-                      <a:pPr algn="ctr">
-                        <a:defRPr sz="1300" b="1">
-                          <a:solidFill>
-                            <a:srgbClr val="1C1C1E"/>
-                          </a:solidFill>
-                        </a:defRPr>
-                      </a:pPr>
-                      <a:r>
-                        <a:t>Enterprise Safety</a:t>
-                      </a:r>
-                    </a:p>
-                  </a:txBody>
-                  <a:tcPr>
-                    <a:solidFill>
-                      <a:srgbClr val="F2F2F7"/>
-                    </a:solidFill>
-                  </a:tcPr>
-                </a:tc>
-                <a:tc>
-                  <a:txBody>
-                    <a:bodyPr/>
-                    <a:lstStyle/>
-                    <a:p>
-                      <a:pPr algn="ctr">
-                        <a:defRPr sz="1300" b="0">
-                          <a:solidFill>
-                            <a:srgbClr val="1C1C1E"/>
-                          </a:solidFill>
-                        </a:defRPr>
-                      </a:pPr>
-                      <a:r>
-                        <a:t>Flask-Limiter / Bcrypt / WTForms</a:t>
-                      </a:r>
-                    </a:p>
-                  </a:txBody>
-                  <a:tcPr>
-                    <a:solidFill>
-                      <a:srgbClr val="F2F2F7"/>
-                    </a:solidFill>
-                  </a:tcPr>
-                </a:tc>
-                <a:tc>
-                  <a:txBody>
-                    <a:bodyPr/>
-                    <a:lstStyle/>
-                    <a:p>
-                      <a:pPr>
-                        <a:defRPr sz="1300">
-                          <a:solidFill>
-                            <a:srgbClr val="1C1C1E"/>
-                          </a:solidFill>
-                        </a:defRPr>
-                      </a:pPr>
-                      <a:r>
-                        <a:t>Halts brute-force attacks, hashes user passwords, and prevents CSRF.</a:t>
-                      </a:r>
-                    </a:p>
-                  </a:txBody>
-                  <a:tcPr>
-                    <a:solidFill>
-                      <a:srgbClr val="F2F2F7"/>
-                    </a:solidFill>
-                  </a:tcPr>
-                </a:tc>
-              </a:tr>
-            </a:tbl>
-          </a:graphicData>
-        </a:graphic>
-      </p:graphicFrame>
+      <p:sp>
+        <p:nvSpPr>
+          <p:cNvPr id="6" name="TextBox 5"/>
+          <p:cNvSpPr txBox="1"/>
+          <p:nvPr/>
+        </p:nvSpPr>
+        <p:spPr>
+          <a:xfrm>
+            <a:off x="731520" y="1463040"/>
+            <a:ext cx="6858000" cy="4389120"/>
+          </a:xfrm>
+          <a:prstGeom prst="rect">
+            <a:avLst/>
+          </a:prstGeom>
+          <a:noFill/>
+        </p:spPr>
+        <p:txBody>
+          <a:bodyPr wrap="square" lIns="0" tIns="0" bIns="0" rIns="0">
+            <a:spAutoFit/>
+          </a:bodyPr>
+          <a:lstStyle/>
+          <a:p>
+            <a:pPr>
+              <a:spcAft>
+                <a:spcPts val="2000"/>
+              </a:spcAft>
+              <a:defRPr sz="1800">
+                <a:solidFill>
+                  <a:srgbClr val="1C1C1E"/>
+                </a:solidFill>
+                <a:latin typeface="Arial"/>
+              </a:defRPr>
+            </a:pPr>
+            <a:r>
+              <a:t>Student Hub implements strict backend audit tracking to secure administrative actions and session states.</a:t>
+            </a:r>
+          </a:p>
+          <a:p>
+            <a:pPr>
+              <a:spcBef>
+                <a:spcPts val="1200"/>
+              </a:spcBef>
+              <a:defRPr sz="1500">
+                <a:solidFill>
+                  <a:srgbClr val="1C1C1E"/>
+                </a:solidFill>
+                <a:latin typeface="Arial"/>
+              </a:defRPr>
+            </a:pPr>
+            <a:r>
+              <a:t>🛡️ Separated Session Managers: Employs different authentication flows for Students and Admins, preventing privilege escalation.</a:t>
+            </a:r>
+          </a:p>
+          <a:p>
+            <a:pPr>
+              <a:spcBef>
+                <a:spcPts val="1200"/>
+              </a:spcBef>
+              <a:defRPr sz="1500">
+                <a:solidFill>
+                  <a:srgbClr val="1C1C1E"/>
+                </a:solidFill>
+                <a:latin typeface="Arial"/>
+              </a:defRPr>
+            </a:pPr>
+            <a:r>
+              <a:t>📜 Operational Audit Logging: Writes JSON logs (`audit.py`) tracking actions, user context, client IP, and target candidate IDs.</a:t>
+            </a:r>
+          </a:p>
+          <a:p>
+            <a:pPr>
+              <a:spcBef>
+                <a:spcPts val="1200"/>
+              </a:spcBef>
+              <a:defRPr sz="1500">
+                <a:solidFill>
+                  <a:srgbClr val="1C1C1E"/>
+                </a:solidFill>
+                <a:latin typeface="Arial"/>
+              </a:defRPr>
+            </a:pPr>
+            <a:r>
+              <a:t>🧹 Input Sanitizer Middleware: Cleans inbound inputs before they reach the DB to block SQL injections and XSS attempts.</a:t>
+            </a:r>
+          </a:p>
+          <a:p>
+            <a:pPr>
+              <a:spcBef>
+                <a:spcPts val="1200"/>
+              </a:spcBef>
+              <a:defRPr sz="1500">
+                <a:solidFill>
+                  <a:srgbClr val="1C1C1E"/>
+                </a:solidFill>
+                <a:latin typeface="Arial"/>
+              </a:defRPr>
+            </a:pPr>
+            <a:r>
+              <a:t>🔑 Endpoint Token Protections: Protects backend APIs with JWT verification decorators (`@token_required`).</a:t>
+            </a:r>
+          </a:p>
+        </p:txBody>
+      </p:sp>
+      <p:sp>
+        <p:nvSpPr>
+          <p:cNvPr id="7" name="Rounded Rectangle 6"/>
+          <p:cNvSpPr/>
+          <p:nvPr/>
+        </p:nvSpPr>
+        <p:spPr>
+          <a:xfrm>
+            <a:off x="8046720" y="1645920"/>
+            <a:ext cx="3383280" cy="4023360"/>
+          </a:xfrm>
+          <a:prstGeom prst="roundRect">
+            <a:avLst/>
+          </a:prstGeom>
+          <a:solidFill>
+            <a:srgbClr val="1C1C1E"/>
+          </a:solidFill>
+          <a:ln w="19050">
+            <a:solidFill>
+              <a:srgbClr val="D4AF37"/>
+            </a:solidFill>
+          </a:ln>
+        </p:spPr>
+        <p:style>
+          <a:lnRef idx="1">
+            <a:schemeClr val="accent1"/>
+          </a:lnRef>
+          <a:fillRef idx="3">
+            <a:schemeClr val="accent1"/>
+          </a:fillRef>
+          <a:effectRef idx="2">
+            <a:schemeClr val="accent1"/>
+          </a:effectRef>
+          <a:fontRef idx="minor">
+            <a:schemeClr val="lt1"/>
+          </a:fontRef>
+        </p:style>
+        <p:txBody>
+          <a:bodyPr rtlCol="0" anchor="ctr"/>
+          <a:lstStyle/>
+          <a:p>
+            <a:pPr algn="ctr"/>
+          </a:p>
+        </p:txBody>
+      </p:sp>
+      <p:sp>
+        <p:nvSpPr>
+          <p:cNvPr id="8" name="TextBox 7"/>
+          <p:cNvSpPr txBox="1"/>
+          <p:nvPr/>
+        </p:nvSpPr>
+        <p:spPr>
+          <a:xfrm>
+            <a:off x="8229600" y="1828800"/>
+            <a:ext cx="3017520" cy="3657600"/>
+          </a:xfrm>
+          <a:prstGeom prst="rect">
+            <a:avLst/>
+          </a:prstGeom>
+          <a:noFill/>
+        </p:spPr>
+        <p:txBody>
+          <a:bodyPr wrap="square">
+            <a:spAutoFit/>
+          </a:bodyPr>
+          <a:lstStyle/>
+          <a:p>
+            <a:pPr>
+              <a:spcAft>
+                <a:spcPts val="1200"/>
+              </a:spcAft>
+              <a:defRPr sz="1200" b="1">
+                <a:solidFill>
+                  <a:srgbClr val="D4AF37"/>
+                </a:solidFill>
+                <a:latin typeface="Arial"/>
+              </a:defRPr>
+            </a:pPr>
+            <a:r>
+              <a:t>AUDIT LOGGER LOG SAMPLE</a:t>
+            </a:r>
+          </a:p>
+          <a:p>
+            <a:pPr>
+              <a:lnSpc>
+                <a:spcPct val="115000"/>
+              </a:lnSpc>
+              <a:defRPr sz="1050">
+                <a:solidFill>
+                  <a:srgbClr val="00FFFF"/>
+                </a:solidFill>
+                <a:latin typeface="Courier New"/>
+              </a:defRPr>
+            </a:pPr>
+            <a:r>
+              <a:t>2026-05-24 10:45:01 [INFO]</a:t>
+            </a:r>
+            <a:br/>
+            <a:r>
+              <a:t>AuditLog: {</a:t>
+            </a:r>
+            <a:br/>
+            <a:r>
+              <a:t>  "request_id": "8a32-9b2f",</a:t>
+            </a:r>
+            <a:br/>
+            <a:r>
+              <a:t>  "user_id": 14,</a:t>
+            </a:r>
+            <a:br/>
+            <a:r>
+              <a:t>  "action": "UPDATE_PROFILE",</a:t>
+            </a:r>
+            <a:br/>
+            <a:r>
+              <a:t>  "ip": "127.0.0.1",</a:t>
+            </a:r>
+            <a:br/>
+            <a:r>
+              <a:t>  "details": {</a:t>
+            </a:r>
+            <a:br/>
+            <a:r>
+              <a:t>    "student_id": "STU-2026-A3",</a:t>
+            </a:r>
+            <a:br/>
+            <a:r>
+              <a:t>    "status": "active"</a:t>
+            </a:r>
+            <a:br/>
+            <a:r>
+              <a:t>  }</a:t>
+            </a:r>
+            <a:br/>
+            <a:r>
+              <a:t>}</a:t>
+            </a:r>
+          </a:p>
+        </p:txBody>
+      </p:sp>
     </p:spTree>
   </p:cSld>
   <p:clrMapOvr>
@@ -5393,8 +5313,8 @@
         </p:blipFill>
         <p:spPr>
           <a:xfrm>
-            <a:off x="4114800" y="1371600"/>
-            <a:ext cx="3959352" cy="1211194"/>
+            <a:off x="9601200" y="228600"/>
+            <a:ext cx="2286000" cy="699304"/>
           </a:xfrm>
           <a:prstGeom prst="rect">
             <a:avLst/>
@@ -5409,8 +5329,170 @@
         </p:nvSpPr>
         <p:spPr>
           <a:xfrm>
-            <a:off x="731520" y="2834640"/>
-            <a:ext cx="10698480" cy="1645920"/>
+            <a:off x="731520" y="6400800"/>
+            <a:ext cx="10698480" cy="365760"/>
+          </a:xfrm>
+          <a:prstGeom prst="rect">
+            <a:avLst/>
+          </a:prstGeom>
+          <a:noFill/>
+        </p:spPr>
+        <p:txBody>
+          <a:bodyPr wrap="square" lIns="0" tIns="0" bIns="0" rIns="0">
+            <a:spAutoFit/>
+          </a:bodyPr>
+          <a:lstStyle/>
+          <a:p>
+            <a:pPr algn="ctr">
+              <a:defRPr sz="950">
+                <a:solidFill>
+                  <a:srgbClr val="6E6E73"/>
+                </a:solidFill>
+                <a:latin typeface="Arial"/>
+              </a:defRPr>
+            </a:pPr>
+            <a:r>
+              <a:t>Student Hub  |  Sapthagiri University  |  Keerthana GP (24SUUBECS0914)  |  Keerthana BS (23SUUBECS0909)  |  Kiran M Biradar (24SUUBECS0937)</a:t>
+            </a:r>
+          </a:p>
+        </p:txBody>
+      </p:sp>
+      <p:sp>
+        <p:nvSpPr>
+          <p:cNvPr id="4" name="TextBox 3"/>
+          <p:cNvSpPr txBox="1"/>
+          <p:nvPr/>
+        </p:nvSpPr>
+        <p:spPr>
+          <a:xfrm>
+            <a:off x="731520" y="365760"/>
+            <a:ext cx="8686800" cy="731520"/>
+          </a:xfrm>
+          <a:prstGeom prst="rect">
+            <a:avLst/>
+          </a:prstGeom>
+          <a:noFill/>
+        </p:spPr>
+        <p:txBody>
+          <a:bodyPr wrap="square" lIns="0" tIns="0" bIns="0" rIns="0">
+            <a:spAutoFit/>
+          </a:bodyPr>
+          <a:lstStyle/>
+          <a:p>
+            <a:pPr>
+              <a:defRPr sz="2800" b="1">
+                <a:solidFill>
+                  <a:srgbClr val="00317E"/>
+                </a:solidFill>
+                <a:latin typeface="Arial"/>
+              </a:defRPr>
+            </a:pPr>
+            <a:r>
+              <a:t>Output Screens: Student Experience</a:t>
+            </a:r>
+          </a:p>
+        </p:txBody>
+      </p:sp>
+      <p:sp>
+        <p:nvSpPr>
+          <p:cNvPr id="5" name="Rectangle 4"/>
+          <p:cNvSpPr/>
+          <p:nvPr/>
+        </p:nvSpPr>
+        <p:spPr>
+          <a:xfrm>
+            <a:off x="731520" y="1051560"/>
+            <a:ext cx="10698480" cy="36576"/>
+          </a:xfrm>
+          <a:prstGeom prst="rect">
+            <a:avLst/>
+          </a:prstGeom>
+          <a:solidFill>
+            <a:srgbClr val="D4AF37"/>
+          </a:solidFill>
+          <a:ln>
+            <a:solidFill>
+              <a:srgbClr val="D4AF37"/>
+            </a:solidFill>
+          </a:ln>
+        </p:spPr>
+        <p:style>
+          <a:lnRef idx="1">
+            <a:schemeClr val="accent1"/>
+          </a:lnRef>
+          <a:fillRef idx="3">
+            <a:schemeClr val="accent1"/>
+          </a:fillRef>
+          <a:effectRef idx="2">
+            <a:schemeClr val="accent1"/>
+          </a:effectRef>
+          <a:fontRef idx="minor">
+            <a:schemeClr val="lt1"/>
+          </a:fontRef>
+        </p:style>
+        <p:txBody>
+          <a:bodyPr rtlCol="0" anchor="ctr"/>
+          <a:lstStyle/>
+          <a:p>
+            <a:pPr algn="ctr"/>
+          </a:p>
+        </p:txBody>
+      </p:sp>
+      <p:sp>
+        <p:nvSpPr>
+          <p:cNvPr id="6" name="Rectangle 5"/>
+          <p:cNvSpPr/>
+          <p:nvPr/>
+        </p:nvSpPr>
+        <p:spPr>
+          <a:xfrm>
+            <a:off x="731520" y="1645920"/>
+            <a:ext cx="5212080" cy="1920240"/>
+          </a:xfrm>
+          <a:prstGeom prst="rect">
+            <a:avLst/>
+          </a:prstGeom>
+          <a:solidFill>
+            <a:srgbClr val="F2F2F7"/>
+          </a:solidFill>
+          <a:ln>
+            <a:solidFill>
+              <a:srgbClr val="F2F2F7"/>
+            </a:solidFill>
+          </a:ln>
+        </p:spPr>
+        <p:style>
+          <a:lnRef idx="1">
+            <a:schemeClr val="accent1"/>
+          </a:lnRef>
+          <a:fillRef idx="3">
+            <a:schemeClr val="accent1"/>
+          </a:fillRef>
+          <a:effectRef idx="2">
+            <a:schemeClr val="accent1"/>
+          </a:effectRef>
+          <a:fontRef idx="minor">
+            <a:schemeClr val="lt1"/>
+          </a:fontRef>
+        </p:style>
+        <p:txBody>
+          <a:bodyPr rtlCol="0" anchor="ctr"/>
+          <a:lstStyle/>
+          <a:p>
+            <a:pPr algn="ctr"/>
+          </a:p>
+        </p:txBody>
+      </p:sp>
+      <p:sp>
+        <p:nvSpPr>
+          <p:cNvPr id="7" name="TextBox 6"/>
+          <p:cNvSpPr txBox="1"/>
+          <p:nvPr/>
+        </p:nvSpPr>
+        <p:spPr>
+          <a:xfrm>
+            <a:off x="914400" y="1783080"/>
+            <a:ext cx="4846320" cy="1645920"/>
           </a:xfrm>
           <a:prstGeom prst="rect">
             <a:avLst/>
@@ -5423,11 +5505,11 @@
           </a:bodyPr>
           <a:lstStyle/>
           <a:p>
-            <a:pPr algn="ctr">
+            <a:pPr>
               <a:spcAft>
-                <a:spcPts val="1000"/>
+                <a:spcPts val="600"/>
               </a:spcAft>
-              <a:defRPr sz="4800" b="1">
+              <a:defRPr sz="1600" b="1">
                 <a:solidFill>
                   <a:srgbClr val="00317E"/>
                 </a:solidFill>
@@ -5435,34 +5517,79 @@
               </a:defRPr>
             </a:pPr>
             <a:r>
-              <a:t>Thank You!</a:t>
-            </a:r>
-          </a:p>
-          <a:p>
-            <a:pPr algn="ctr">
-              <a:defRPr sz="1800" b="1">
-                <a:solidFill>
-                  <a:srgbClr val="D4AF37"/>
-                </a:solidFill>
-                <a:latin typeface="Arial"/>
-              </a:defRPr>
-            </a:pPr>
-            <a:r>
-              <a:t>Student Hub: Streamlined, Secure, and Ready for Enterprise Enrollment.</a:t>
-            </a:r>
-          </a:p>
-        </p:txBody>
-      </p:sp>
-      <p:sp>
-        <p:nvSpPr>
-          <p:cNvPr id="4" name="TextBox 3"/>
+              <a:t>✨ Hero Canvas Particle Effects</a:t>
+            </a:r>
+          </a:p>
+          <a:p>
+            <a:pPr>
+              <a:defRPr sz="1250">
+                <a:solidFill>
+                  <a:srgbClr val="1C1C1E"/>
+                </a:solidFill>
+                <a:latin typeface="Arial"/>
+              </a:defRPr>
+            </a:pPr>
+            <a:r>
+              <a:t>The index landing page features a custom floating canvas particle background that animates smoothly.</a:t>
+            </a:r>
+          </a:p>
+        </p:txBody>
+      </p:sp>
+      <p:sp>
+        <p:nvSpPr>
+          <p:cNvPr id="8" name="Rectangle 7"/>
+          <p:cNvSpPr/>
+          <p:nvPr/>
+        </p:nvSpPr>
+        <p:spPr>
+          <a:xfrm>
+            <a:off x="6217920" y="1645920"/>
+            <a:ext cx="5212080" cy="1920240"/>
+          </a:xfrm>
+          <a:prstGeom prst="rect">
+            <a:avLst/>
+          </a:prstGeom>
+          <a:solidFill>
+            <a:srgbClr val="F2F2F7"/>
+          </a:solidFill>
+          <a:ln>
+            <a:solidFill>
+              <a:srgbClr val="F2F2F7"/>
+            </a:solidFill>
+          </a:ln>
+        </p:spPr>
+        <p:style>
+          <a:lnRef idx="1">
+            <a:schemeClr val="accent1"/>
+          </a:lnRef>
+          <a:fillRef idx="3">
+            <a:schemeClr val="accent1"/>
+          </a:fillRef>
+          <a:effectRef idx="2">
+            <a:schemeClr val="accent1"/>
+          </a:effectRef>
+          <a:fontRef idx="minor">
+            <a:schemeClr val="lt1"/>
+          </a:fontRef>
+        </p:style>
+        <p:txBody>
+          <a:bodyPr rtlCol="0" anchor="ctr"/>
+          <a:lstStyle/>
+          <a:p>
+            <a:pPr algn="ctr"/>
+          </a:p>
+        </p:txBody>
+      </p:sp>
+      <p:sp>
+        <p:nvSpPr>
+          <p:cNvPr id="9" name="TextBox 8"/>
           <p:cNvSpPr txBox="1"/>
           <p:nvPr/>
         </p:nvSpPr>
         <p:spPr>
           <a:xfrm>
-            <a:off x="731520" y="4937760"/>
-            <a:ext cx="10698480" cy="1371600"/>
+            <a:off x="6400800" y="1783080"/>
+            <a:ext cx="4846320" cy="1645920"/>
           </a:xfrm>
           <a:prstGeom prst="rect">
             <a:avLst/>
@@ -5475,8 +5602,304 @@
           </a:bodyPr>
           <a:lstStyle/>
           <a:p>
+            <a:pPr>
+              <a:spcAft>
+                <a:spcPts val="600"/>
+              </a:spcAft>
+              <a:defRPr sz="1600" b="1">
+                <a:solidFill>
+                  <a:srgbClr val="00317E"/>
+                </a:solidFill>
+                <a:latin typeface="Arial"/>
+              </a:defRPr>
+            </a:pPr>
+            <a:r>
+              <a:t>⭕ Circular Progress Indicator</a:t>
+            </a:r>
+          </a:p>
+          <a:p>
+            <a:pPr>
+              <a:defRPr sz="1250">
+                <a:solidFill>
+                  <a:srgbClr val="1C1C1E"/>
+                </a:solidFill>
+                <a:latin typeface="Arial"/>
+              </a:defRPr>
+            </a:pPr>
+            <a:r>
+              <a:t>The student dashboard features a dynamic SVG completion ring that updates based on profile fields filled.</a:t>
+            </a:r>
+          </a:p>
+        </p:txBody>
+      </p:sp>
+      <p:sp>
+        <p:nvSpPr>
+          <p:cNvPr id="10" name="Rectangle 9"/>
+          <p:cNvSpPr/>
+          <p:nvPr/>
+        </p:nvSpPr>
+        <p:spPr>
+          <a:xfrm>
+            <a:off x="731520" y="3931920"/>
+            <a:ext cx="5212080" cy="1920240"/>
+          </a:xfrm>
+          <a:prstGeom prst="rect">
+            <a:avLst/>
+          </a:prstGeom>
+          <a:solidFill>
+            <a:srgbClr val="F2F2F7"/>
+          </a:solidFill>
+          <a:ln>
+            <a:solidFill>
+              <a:srgbClr val="F2F2F7"/>
+            </a:solidFill>
+          </a:ln>
+        </p:spPr>
+        <p:style>
+          <a:lnRef idx="1">
+            <a:schemeClr val="accent1"/>
+          </a:lnRef>
+          <a:fillRef idx="3">
+            <a:schemeClr val="accent1"/>
+          </a:fillRef>
+          <a:effectRef idx="2">
+            <a:schemeClr val="accent1"/>
+          </a:effectRef>
+          <a:fontRef idx="minor">
+            <a:schemeClr val="lt1"/>
+          </a:fontRef>
+        </p:style>
+        <p:txBody>
+          <a:bodyPr rtlCol="0" anchor="ctr"/>
+          <a:lstStyle/>
+          <a:p>
+            <a:pPr algn="ctr"/>
+          </a:p>
+        </p:txBody>
+      </p:sp>
+      <p:sp>
+        <p:nvSpPr>
+          <p:cNvPr id="11" name="TextBox 10"/>
+          <p:cNvSpPr txBox="1"/>
+          <p:nvPr/>
+        </p:nvSpPr>
+        <p:spPr>
+          <a:xfrm>
+            <a:off x="914400" y="4069080"/>
+            <a:ext cx="4846320" cy="1645920"/>
+          </a:xfrm>
+          <a:prstGeom prst="rect">
+            <a:avLst/>
+          </a:prstGeom>
+          <a:noFill/>
+        </p:spPr>
+        <p:txBody>
+          <a:bodyPr wrap="square">
+            <a:spAutoFit/>
+          </a:bodyPr>
+          <a:lstStyle/>
+          <a:p>
+            <a:pPr>
+              <a:spcAft>
+                <a:spcPts val="600"/>
+              </a:spcAft>
+              <a:defRPr sz="1600" b="1">
+                <a:solidFill>
+                  <a:srgbClr val="00317E"/>
+                </a:solidFill>
+                <a:latin typeface="Arial"/>
+              </a:defRPr>
+            </a:pPr>
+            <a:r>
+              <a:t>🎉 Confetti Overlay Celebration</a:t>
+            </a:r>
+          </a:p>
+          <a:p>
+            <a:pPr>
+              <a:defRPr sz="1250">
+                <a:solidFill>
+                  <a:srgbClr val="1C1C1E"/>
+                </a:solidFill>
+                <a:latin typeface="Arial"/>
+              </a:defRPr>
+            </a:pPr>
+            <a:r>
+              <a:t>When registration finishes, the confirmation screen triggers a confetti celebration to welcome the user.</a:t>
+            </a:r>
+          </a:p>
+        </p:txBody>
+      </p:sp>
+      <p:sp>
+        <p:nvSpPr>
+          <p:cNvPr id="12" name="Rectangle 11"/>
+          <p:cNvSpPr/>
+          <p:nvPr/>
+        </p:nvSpPr>
+        <p:spPr>
+          <a:xfrm>
+            <a:off x="6217920" y="3931920"/>
+            <a:ext cx="5212080" cy="1920240"/>
+          </a:xfrm>
+          <a:prstGeom prst="rect">
+            <a:avLst/>
+          </a:prstGeom>
+          <a:solidFill>
+            <a:srgbClr val="F2F2F7"/>
+          </a:solidFill>
+          <a:ln>
+            <a:solidFill>
+              <a:srgbClr val="F2F2F7"/>
+            </a:solidFill>
+          </a:ln>
+        </p:spPr>
+        <p:style>
+          <a:lnRef idx="1">
+            <a:schemeClr val="accent1"/>
+          </a:lnRef>
+          <a:fillRef idx="3">
+            <a:schemeClr val="accent1"/>
+          </a:fillRef>
+          <a:effectRef idx="2">
+            <a:schemeClr val="accent1"/>
+          </a:effectRef>
+          <a:fontRef idx="minor">
+            <a:schemeClr val="lt1"/>
+          </a:fontRef>
+        </p:style>
+        <p:txBody>
+          <a:bodyPr rtlCol="0" anchor="ctr"/>
+          <a:lstStyle/>
+          <a:p>
+            <a:pPr algn="ctr"/>
+          </a:p>
+        </p:txBody>
+      </p:sp>
+      <p:sp>
+        <p:nvSpPr>
+          <p:cNvPr id="13" name="TextBox 12"/>
+          <p:cNvSpPr txBox="1"/>
+          <p:nvPr/>
+        </p:nvSpPr>
+        <p:spPr>
+          <a:xfrm>
+            <a:off x="6400800" y="4069080"/>
+            <a:ext cx="4846320" cy="1645920"/>
+          </a:xfrm>
+          <a:prstGeom prst="rect">
+            <a:avLst/>
+          </a:prstGeom>
+          <a:noFill/>
+        </p:spPr>
+        <p:txBody>
+          <a:bodyPr wrap="square">
+            <a:spAutoFit/>
+          </a:bodyPr>
+          <a:lstStyle/>
+          <a:p>
+            <a:pPr>
+              <a:spcAft>
+                <a:spcPts val="600"/>
+              </a:spcAft>
+              <a:defRPr sz="1600" b="1">
+                <a:solidFill>
+                  <a:srgbClr val="00317E"/>
+                </a:solidFill>
+                <a:latin typeface="Arial"/>
+              </a:defRPr>
+            </a:pPr>
+            <a:r>
+              <a:t>🌓 Dark &amp; Light Modes Visuals</a:t>
+            </a:r>
+          </a:p>
+          <a:p>
+            <a:pPr>
+              <a:defRPr sz="1250">
+                <a:solidFill>
+                  <a:srgbClr val="1C1C1E"/>
+                </a:solidFill>
+                <a:latin typeface="Arial"/>
+              </a:defRPr>
+            </a:pPr>
+            <a:r>
+              <a:t>Responsive navigation and card templates change theme immediately without page reloads.</a:t>
+            </a:r>
+          </a:p>
+        </p:txBody>
+      </p:sp>
+    </p:spTree>
+  </p:cSld>
+  <p:clrMapOvr>
+    <a:masterClrMapping/>
+  </p:clrMapOvr>
+</p:sld>
+</file>
+
+<file path=ppt/slides/slide15.xml><?xml version="1.0" encoding="utf-8"?>
+<p:sld xmlns:a="http://schemas.openxmlformats.org/drawingml/2006/main" xmlns:p="http://schemas.openxmlformats.org/presentationml/2006/main" xmlns:r="http://schemas.openxmlformats.org/officeDocument/2006/relationships">
+  <p:cSld>
+    <p:bg>
+      <p:bgPr>
+        <a:solidFill>
+          <a:srgbClr val="FFFFFF"/>
+        </a:solidFill>
+        <a:effectLst/>
+      </p:bgPr>
+    </p:bg>
+    <p:spTree>
+      <p:nvGrpSpPr>
+        <p:cNvPr id="1" name=""/>
+        <p:cNvGrpSpPr/>
+        <p:nvPr/>
+      </p:nvGrpSpPr>
+      <p:grpSpPr/>
+      <p:pic>
+        <p:nvPicPr>
+          <p:cNvPr id="2" name="Picture 1" descr="logo.png"/>
+          <p:cNvPicPr>
+            <a:picLocks noChangeAspect="1"/>
+          </p:cNvPicPr>
+          <p:nvPr/>
+        </p:nvPicPr>
+        <p:blipFill>
+          <a:blip r:embed="rId2"/>
+          <a:stretch>
+            <a:fillRect/>
+          </a:stretch>
+        </p:blipFill>
+        <p:spPr>
+          <a:xfrm>
+            <a:off x="9601200" y="228600"/>
+            <a:ext cx="2286000" cy="699304"/>
+          </a:xfrm>
+          <a:prstGeom prst="rect">
+            <a:avLst/>
+          </a:prstGeom>
+        </p:spPr>
+      </p:pic>
+      <p:sp>
+        <p:nvSpPr>
+          <p:cNvPr id="3" name="TextBox 2"/>
+          <p:cNvSpPr txBox="1"/>
+          <p:nvPr/>
+        </p:nvSpPr>
+        <p:spPr>
+          <a:xfrm>
+            <a:off x="731520" y="6400800"/>
+            <a:ext cx="10698480" cy="365760"/>
+          </a:xfrm>
+          <a:prstGeom prst="rect">
+            <a:avLst/>
+          </a:prstGeom>
+          <a:noFill/>
+        </p:spPr>
+        <p:txBody>
+          <a:bodyPr wrap="square" lIns="0" tIns="0" bIns="0" rIns="0">
+            <a:spAutoFit/>
+          </a:bodyPr>
+          <a:lstStyle/>
+          <a:p>
             <a:pPr algn="ctr">
-              <a:defRPr sz="1100">
+              <a:defRPr sz="950">
                 <a:solidFill>
                   <a:srgbClr val="6E6E73"/>
                 </a:solidFill>
@@ -5484,7 +5907,2009 @@
               </a:defRPr>
             </a:pPr>
             <a:r>
-              <a:t>Student Hub Development Team:  Keerthana GP (24SUUBECS0914)  |  Keerthana BS (23SUUBECS0909)  |  Kiran M Biradar (24SUUBECS0937)</a:t>
+              <a:t>Student Hub  |  Sapthagiri University  |  Keerthana GP (24SUUBECS0914)  |  Keerthana BS (23SUUBECS0909)  |  Kiran M Biradar (24SUUBECS0937)</a:t>
+            </a:r>
+          </a:p>
+        </p:txBody>
+      </p:sp>
+      <p:sp>
+        <p:nvSpPr>
+          <p:cNvPr id="4" name="TextBox 3"/>
+          <p:cNvSpPr txBox="1"/>
+          <p:nvPr/>
+        </p:nvSpPr>
+        <p:spPr>
+          <a:xfrm>
+            <a:off x="731520" y="365760"/>
+            <a:ext cx="8686800" cy="731520"/>
+          </a:xfrm>
+          <a:prstGeom prst="rect">
+            <a:avLst/>
+          </a:prstGeom>
+          <a:noFill/>
+        </p:spPr>
+        <p:txBody>
+          <a:bodyPr wrap="square" lIns="0" tIns="0" bIns="0" rIns="0">
+            <a:spAutoFit/>
+          </a:bodyPr>
+          <a:lstStyle/>
+          <a:p>
+            <a:pPr>
+              <a:defRPr sz="2800" b="1">
+                <a:solidFill>
+                  <a:srgbClr val="00317E"/>
+                </a:solidFill>
+                <a:latin typeface="Arial"/>
+              </a:defRPr>
+            </a:pPr>
+            <a:r>
+              <a:t>Output Screens: Admin Console &amp; KPI Charts</a:t>
+            </a:r>
+          </a:p>
+        </p:txBody>
+      </p:sp>
+      <p:sp>
+        <p:nvSpPr>
+          <p:cNvPr id="5" name="Rectangle 4"/>
+          <p:cNvSpPr/>
+          <p:nvPr/>
+        </p:nvSpPr>
+        <p:spPr>
+          <a:xfrm>
+            <a:off x="731520" y="1051560"/>
+            <a:ext cx="10698480" cy="36576"/>
+          </a:xfrm>
+          <a:prstGeom prst="rect">
+            <a:avLst/>
+          </a:prstGeom>
+          <a:solidFill>
+            <a:srgbClr val="D4AF37"/>
+          </a:solidFill>
+          <a:ln>
+            <a:solidFill>
+              <a:srgbClr val="D4AF37"/>
+            </a:solidFill>
+          </a:ln>
+        </p:spPr>
+        <p:style>
+          <a:lnRef idx="1">
+            <a:schemeClr val="accent1"/>
+          </a:lnRef>
+          <a:fillRef idx="3">
+            <a:schemeClr val="accent1"/>
+          </a:fillRef>
+          <a:effectRef idx="2">
+            <a:schemeClr val="accent1"/>
+          </a:effectRef>
+          <a:fontRef idx="minor">
+            <a:schemeClr val="lt1"/>
+          </a:fontRef>
+        </p:style>
+        <p:txBody>
+          <a:bodyPr rtlCol="0" anchor="ctr"/>
+          <a:lstStyle/>
+          <a:p>
+            <a:pPr algn="ctr"/>
+          </a:p>
+        </p:txBody>
+      </p:sp>
+      <p:sp>
+        <p:nvSpPr>
+          <p:cNvPr id="6" name="TextBox 5"/>
+          <p:cNvSpPr txBox="1"/>
+          <p:nvPr/>
+        </p:nvSpPr>
+        <p:spPr>
+          <a:xfrm>
+            <a:off x="731520" y="1463040"/>
+            <a:ext cx="6858000" cy="4389120"/>
+          </a:xfrm>
+          <a:prstGeom prst="rect">
+            <a:avLst/>
+          </a:prstGeom>
+          <a:noFill/>
+        </p:spPr>
+        <p:txBody>
+          <a:bodyPr wrap="square" lIns="0" tIns="0" bIns="0" rIns="0">
+            <a:spAutoFit/>
+          </a:bodyPr>
+          <a:lstStyle/>
+          <a:p>
+            <a:pPr>
+              <a:spcAft>
+                <a:spcPts val="1400"/>
+              </a:spcAft>
+              <a:defRPr sz="1800">
+                <a:solidFill>
+                  <a:srgbClr val="1C1C1E"/>
+                </a:solidFill>
+                <a:latin typeface="Arial"/>
+              </a:defRPr>
+            </a:pPr>
+            <a:r>
+              <a:t>The Admin Console displays key performance metrics and enrollment breakdown visualizations.</a:t>
+            </a:r>
+          </a:p>
+          <a:p>
+            <a:pPr>
+              <a:spcBef>
+                <a:spcPts val="1000"/>
+              </a:spcBef>
+              <a:defRPr sz="1500">
+                <a:solidFill>
+                  <a:srgbClr val="1C1C1E"/>
+                </a:solidFill>
+                <a:latin typeface="Arial"/>
+              </a:defRPr>
+            </a:pPr>
+            <a:r>
+              <a:t>📊 KPI Overview Panels: Quick-view cards display totals, course catalogs, and registration types.</a:t>
+            </a:r>
+          </a:p>
+          <a:p>
+            <a:pPr>
+              <a:spcBef>
+                <a:spcPts val="1000"/>
+              </a:spcBef>
+              <a:defRPr sz="1500">
+                <a:solidFill>
+                  <a:srgbClr val="1C1C1E"/>
+                </a:solidFill>
+                <a:latin typeface="Arial"/>
+              </a:defRPr>
+            </a:pPr>
+            <a:r>
+              <a:t>📈 Visual Major Charts: Rendered dynamically via Chart.js from real-time database counts.</a:t>
+            </a:r>
+          </a:p>
+          <a:p>
+            <a:pPr>
+              <a:spcBef>
+                <a:spcPts val="1000"/>
+              </a:spcBef>
+              <a:defRPr sz="1500">
+                <a:solidFill>
+                  <a:srgbClr val="1C1C1E"/>
+                </a:solidFill>
+                <a:latin typeface="Arial"/>
+              </a:defRPr>
+            </a:pPr>
+            <a:r>
+              <a:t>👥 Searchable Candidate Table: Sorts, filters, and searches entries by Name, ID, or Major.</a:t>
+            </a:r>
+          </a:p>
+          <a:p>
+            <a:pPr>
+              <a:spcBef>
+                <a:spcPts val="1000"/>
+              </a:spcBef>
+              <a:defRPr sz="1500">
+                <a:solidFill>
+                  <a:srgbClr val="1C1C1E"/>
+                </a:solidFill>
+                <a:latin typeface="Arial"/>
+              </a:defRPr>
+            </a:pPr>
+            <a:r>
+              <a:t>📥 Dynamic CSV Downloader: One-click export download of the student roster.</a:t>
+            </a:r>
+          </a:p>
+        </p:txBody>
+      </p:sp>
+      <p:sp>
+        <p:nvSpPr>
+          <p:cNvPr id="7" name="Rounded Rectangle 6"/>
+          <p:cNvSpPr/>
+          <p:nvPr/>
+        </p:nvSpPr>
+        <p:spPr>
+          <a:xfrm>
+            <a:off x="8046720" y="1645920"/>
+            <a:ext cx="3383280" cy="4023360"/>
+          </a:xfrm>
+          <a:prstGeom prst="roundRect">
+            <a:avLst/>
+          </a:prstGeom>
+          <a:solidFill>
+            <a:srgbClr val="F2F2F7"/>
+          </a:solidFill>
+          <a:ln w="19050">
+            <a:solidFill>
+              <a:srgbClr val="D4AF37"/>
+            </a:solidFill>
+          </a:ln>
+        </p:spPr>
+        <p:style>
+          <a:lnRef idx="1">
+            <a:schemeClr val="accent1"/>
+          </a:lnRef>
+          <a:fillRef idx="3">
+            <a:schemeClr val="accent1"/>
+          </a:fillRef>
+          <a:effectRef idx="2">
+            <a:schemeClr val="accent1"/>
+          </a:effectRef>
+          <a:fontRef idx="minor">
+            <a:schemeClr val="lt1"/>
+          </a:fontRef>
+        </p:style>
+        <p:txBody>
+          <a:bodyPr rtlCol="0" anchor="ctr"/>
+          <a:lstStyle/>
+          <a:p>
+            <a:pPr algn="ctr"/>
+          </a:p>
+        </p:txBody>
+      </p:sp>
+      <p:sp>
+        <p:nvSpPr>
+          <p:cNvPr id="8" name="TextBox 7"/>
+          <p:cNvSpPr txBox="1"/>
+          <p:nvPr/>
+        </p:nvSpPr>
+        <p:spPr>
+          <a:xfrm>
+            <a:off x="8321040" y="1920240"/>
+            <a:ext cx="2834640" cy="3474720"/>
+          </a:xfrm>
+          <a:prstGeom prst="rect">
+            <a:avLst/>
+          </a:prstGeom>
+          <a:noFill/>
+        </p:spPr>
+        <p:txBody>
+          <a:bodyPr wrap="square">
+            <a:spAutoFit/>
+          </a:bodyPr>
+          <a:lstStyle/>
+          <a:p>
+            <a:pPr>
+              <a:spcAft>
+                <a:spcPts val="1600"/>
+              </a:spcAft>
+              <a:defRPr sz="1400" b="1">
+                <a:solidFill>
+                  <a:srgbClr val="00317E"/>
+                </a:solidFill>
+                <a:latin typeface="Arial"/>
+              </a:defRPr>
+            </a:pPr>
+            <a:r>
+              <a:t>ADMIN VIEWS</a:t>
+            </a:r>
+          </a:p>
+          <a:p>
+            <a:pPr>
+              <a:spcBef>
+                <a:spcPts val="800"/>
+              </a:spcBef>
+              <a:defRPr sz="1450" b="1">
+                <a:solidFill>
+                  <a:srgbClr val="D4AF37"/>
+                </a:solidFill>
+                <a:latin typeface="Arial"/>
+              </a:defRPr>
+            </a:pPr>
+            <a:r>
+              <a:t>✔ Enrollment Stats</a:t>
+            </a:r>
+          </a:p>
+          <a:p>
+            <a:pPr>
+              <a:defRPr sz="1150">
+                <a:solidFill>
+                  <a:srgbClr val="1C1C1E"/>
+                </a:solidFill>
+                <a:latin typeface="Arial"/>
+              </a:defRPr>
+            </a:pPr>
+            <a:r>
+              <a:t>Real-time count of total students enrolled and majors breakdown.</a:t>
+            </a:r>
+          </a:p>
+          <a:p>
+            <a:pPr>
+              <a:spcBef>
+                <a:spcPts val="800"/>
+              </a:spcBef>
+              <a:defRPr sz="1450" b="1">
+                <a:solidFill>
+                  <a:srgbClr val="D4AF37"/>
+                </a:solidFill>
+                <a:latin typeface="Arial"/>
+              </a:defRPr>
+            </a:pPr>
+            <a:r>
+              <a:t>✔ Search / Sort Table</a:t>
+            </a:r>
+          </a:p>
+          <a:p>
+            <a:pPr>
+              <a:defRPr sz="1150">
+                <a:solidFill>
+                  <a:srgbClr val="1C1C1E"/>
+                </a:solidFill>
+                <a:latin typeface="Arial"/>
+              </a:defRPr>
+            </a:pPr>
+            <a:r>
+              <a:t>Tabular display with multi-column sorting and filtering options.</a:t>
+            </a:r>
+          </a:p>
+          <a:p>
+            <a:pPr>
+              <a:spcBef>
+                <a:spcPts val="800"/>
+              </a:spcBef>
+              <a:defRPr sz="1450" b="1">
+                <a:solidFill>
+                  <a:srgbClr val="D4AF37"/>
+                </a:solidFill>
+                <a:latin typeface="Arial"/>
+              </a:defRPr>
+            </a:pPr>
+            <a:r>
+              <a:t>✔ CSV Directory Export</a:t>
+            </a:r>
+          </a:p>
+          <a:p>
+            <a:pPr>
+              <a:defRPr sz="1150">
+                <a:solidFill>
+                  <a:srgbClr val="1C1C1E"/>
+                </a:solidFill>
+                <a:latin typeface="Arial"/>
+              </a:defRPr>
+            </a:pPr>
+            <a:r>
+              <a:t>Generates and triggers download of student records in CSV format.</a:t>
+            </a:r>
+          </a:p>
+        </p:txBody>
+      </p:sp>
+    </p:spTree>
+  </p:cSld>
+  <p:clrMapOvr>
+    <a:masterClrMapping/>
+  </p:clrMapOvr>
+</p:sld>
+</file>
+
+<file path=ppt/slides/slide16.xml><?xml version="1.0" encoding="utf-8"?>
+<p:sld xmlns:a="http://schemas.openxmlformats.org/drawingml/2006/main" xmlns:p="http://schemas.openxmlformats.org/presentationml/2006/main" xmlns:r="http://schemas.openxmlformats.org/officeDocument/2006/relationships">
+  <p:cSld>
+    <p:bg>
+      <p:bgPr>
+        <a:solidFill>
+          <a:srgbClr val="FFFFFF"/>
+        </a:solidFill>
+        <a:effectLst/>
+      </p:bgPr>
+    </p:bg>
+    <p:spTree>
+      <p:nvGrpSpPr>
+        <p:cNvPr id="1" name=""/>
+        <p:cNvGrpSpPr/>
+        <p:nvPr/>
+      </p:nvGrpSpPr>
+      <p:grpSpPr/>
+      <p:pic>
+        <p:nvPicPr>
+          <p:cNvPr id="2" name="Picture 1" descr="logo.png"/>
+          <p:cNvPicPr>
+            <a:picLocks noChangeAspect="1"/>
+          </p:cNvPicPr>
+          <p:nvPr/>
+        </p:nvPicPr>
+        <p:blipFill>
+          <a:blip r:embed="rId2"/>
+          <a:stretch>
+            <a:fillRect/>
+          </a:stretch>
+        </p:blipFill>
+        <p:spPr>
+          <a:xfrm>
+            <a:off x="9601200" y="228600"/>
+            <a:ext cx="2286000" cy="699304"/>
+          </a:xfrm>
+          <a:prstGeom prst="rect">
+            <a:avLst/>
+          </a:prstGeom>
+        </p:spPr>
+      </p:pic>
+      <p:sp>
+        <p:nvSpPr>
+          <p:cNvPr id="3" name="TextBox 2"/>
+          <p:cNvSpPr txBox="1"/>
+          <p:nvPr/>
+        </p:nvSpPr>
+        <p:spPr>
+          <a:xfrm>
+            <a:off x="731520" y="6400800"/>
+            <a:ext cx="10698480" cy="365760"/>
+          </a:xfrm>
+          <a:prstGeom prst="rect">
+            <a:avLst/>
+          </a:prstGeom>
+          <a:noFill/>
+        </p:spPr>
+        <p:txBody>
+          <a:bodyPr wrap="square" lIns="0" tIns="0" bIns="0" rIns="0">
+            <a:spAutoFit/>
+          </a:bodyPr>
+          <a:lstStyle/>
+          <a:p>
+            <a:pPr algn="ctr">
+              <a:defRPr sz="950">
+                <a:solidFill>
+                  <a:srgbClr val="6E6E73"/>
+                </a:solidFill>
+                <a:latin typeface="Arial"/>
+              </a:defRPr>
+            </a:pPr>
+            <a:r>
+              <a:t>Student Hub  |  Sapthagiri University  |  Keerthana GP (24SUUBECS0914)  |  Keerthana BS (23SUUBECS0909)  |  Kiran M Biradar (24SUUBECS0937)</a:t>
+            </a:r>
+          </a:p>
+        </p:txBody>
+      </p:sp>
+      <p:sp>
+        <p:nvSpPr>
+          <p:cNvPr id="4" name="TextBox 3"/>
+          <p:cNvSpPr txBox="1"/>
+          <p:nvPr/>
+        </p:nvSpPr>
+        <p:spPr>
+          <a:xfrm>
+            <a:off x="731520" y="365760"/>
+            <a:ext cx="8686800" cy="731520"/>
+          </a:xfrm>
+          <a:prstGeom prst="rect">
+            <a:avLst/>
+          </a:prstGeom>
+          <a:noFill/>
+        </p:spPr>
+        <p:txBody>
+          <a:bodyPr wrap="square" lIns="0" tIns="0" bIns="0" rIns="0">
+            <a:spAutoFit/>
+          </a:bodyPr>
+          <a:lstStyle/>
+          <a:p>
+            <a:pPr>
+              <a:defRPr sz="2800" b="1">
+                <a:solidFill>
+                  <a:srgbClr val="00317E"/>
+                </a:solidFill>
+                <a:latin typeface="Arial"/>
+              </a:defRPr>
+            </a:pPr>
+            <a:r>
+              <a:t>Advantages &amp; Limitations</a:t>
+            </a:r>
+          </a:p>
+        </p:txBody>
+      </p:sp>
+      <p:sp>
+        <p:nvSpPr>
+          <p:cNvPr id="5" name="Rectangle 4"/>
+          <p:cNvSpPr/>
+          <p:nvPr/>
+        </p:nvSpPr>
+        <p:spPr>
+          <a:xfrm>
+            <a:off x="731520" y="1051560"/>
+            <a:ext cx="10698480" cy="36576"/>
+          </a:xfrm>
+          <a:prstGeom prst="rect">
+            <a:avLst/>
+          </a:prstGeom>
+          <a:solidFill>
+            <a:srgbClr val="D4AF37"/>
+          </a:solidFill>
+          <a:ln>
+            <a:solidFill>
+              <a:srgbClr val="D4AF37"/>
+            </a:solidFill>
+          </a:ln>
+        </p:spPr>
+        <p:style>
+          <a:lnRef idx="1">
+            <a:schemeClr val="accent1"/>
+          </a:lnRef>
+          <a:fillRef idx="3">
+            <a:schemeClr val="accent1"/>
+          </a:fillRef>
+          <a:effectRef idx="2">
+            <a:schemeClr val="accent1"/>
+          </a:effectRef>
+          <a:fontRef idx="minor">
+            <a:schemeClr val="lt1"/>
+          </a:fontRef>
+        </p:style>
+        <p:txBody>
+          <a:bodyPr rtlCol="0" anchor="ctr"/>
+          <a:lstStyle/>
+          <a:p>
+            <a:pPr algn="ctr"/>
+          </a:p>
+        </p:txBody>
+      </p:sp>
+      <p:sp>
+        <p:nvSpPr>
+          <p:cNvPr id="6" name="Rounded Rectangle 5"/>
+          <p:cNvSpPr/>
+          <p:nvPr/>
+        </p:nvSpPr>
+        <p:spPr>
+          <a:xfrm>
+            <a:off x="731520" y="1645920"/>
+            <a:ext cx="5120640" cy="4023360"/>
+          </a:xfrm>
+          <a:prstGeom prst="roundRect">
+            <a:avLst/>
+          </a:prstGeom>
+          <a:solidFill>
+            <a:srgbClr val="F2F2F7"/>
+          </a:solidFill>
+          <a:ln w="19050">
+            <a:solidFill>
+              <a:srgbClr val="10B981"/>
+            </a:solidFill>
+          </a:ln>
+        </p:spPr>
+        <p:style>
+          <a:lnRef idx="1">
+            <a:schemeClr val="accent1"/>
+          </a:lnRef>
+          <a:fillRef idx="3">
+            <a:schemeClr val="accent1"/>
+          </a:fillRef>
+          <a:effectRef idx="2">
+            <a:schemeClr val="accent1"/>
+          </a:effectRef>
+          <a:fontRef idx="minor">
+            <a:schemeClr val="lt1"/>
+          </a:fontRef>
+        </p:style>
+        <p:txBody>
+          <a:bodyPr rtlCol="0" anchor="ctr"/>
+          <a:lstStyle/>
+          <a:p>
+            <a:pPr algn="ctr"/>
+          </a:p>
+        </p:txBody>
+      </p:sp>
+      <p:sp>
+        <p:nvSpPr>
+          <p:cNvPr id="7" name="TextBox 6"/>
+          <p:cNvSpPr txBox="1"/>
+          <p:nvPr/>
+        </p:nvSpPr>
+        <p:spPr>
+          <a:xfrm>
+            <a:off x="914400" y="1920240"/>
+            <a:ext cx="4754880" cy="3657600"/>
+          </a:xfrm>
+          <a:prstGeom prst="rect">
+            <a:avLst/>
+          </a:prstGeom>
+          <a:noFill/>
+        </p:spPr>
+        <p:txBody>
+          <a:bodyPr wrap="square">
+            <a:spAutoFit/>
+          </a:bodyPr>
+          <a:lstStyle/>
+          <a:p>
+            <a:pPr>
+              <a:spcAft>
+                <a:spcPts val="1400"/>
+              </a:spcAft>
+              <a:defRPr sz="1800" b="1">
+                <a:solidFill>
+                  <a:srgbClr val="00317E"/>
+                </a:solidFill>
+                <a:latin typeface="Arial"/>
+              </a:defRPr>
+            </a:pPr>
+            <a:r>
+              <a:t>ADVANTAGES</a:t>
+            </a:r>
+          </a:p>
+          <a:p>
+            <a:pPr>
+              <a:spcBef>
+                <a:spcPts val="1000"/>
+              </a:spcBef>
+              <a:defRPr sz="1400">
+                <a:solidFill>
+                  <a:srgbClr val="1C1C1E"/>
+                </a:solidFill>
+                <a:latin typeface="Arial"/>
+              </a:defRPr>
+            </a:pPr>
+            <a:r>
+              <a:t>⭐ Clean User Interface: Multi-step layout reduces user input cognitive fatigue.</a:t>
+            </a:r>
+          </a:p>
+          <a:p>
+            <a:pPr>
+              <a:spcBef>
+                <a:spcPts val="1000"/>
+              </a:spcBef>
+              <a:defRPr sz="1400">
+                <a:solidFill>
+                  <a:srgbClr val="1C1C1E"/>
+                </a:solidFill>
+                <a:latin typeface="Arial"/>
+              </a:defRPr>
+            </a:pPr>
+            <a:r>
+              <a:t>⭐ Local Resource Assets: Bypassing external CDN calls improves speed and CSP safety.</a:t>
+            </a:r>
+          </a:p>
+          <a:p>
+            <a:pPr>
+              <a:spcBef>
+                <a:spcPts val="1000"/>
+              </a:spcBef>
+              <a:defRPr sz="1400">
+                <a:solidFill>
+                  <a:srgbClr val="1C1C1E"/>
+                </a:solidFill>
+                <a:latin typeface="Arial"/>
+              </a:defRPr>
+            </a:pPr>
+            <a:r>
+              <a:t>⭐ Comprehensive Security: Integrates Bcrypt, CSRF tokens, rate limiters, and CSP.</a:t>
+            </a:r>
+          </a:p>
+          <a:p>
+            <a:pPr>
+              <a:spcBef>
+                <a:spcPts val="1000"/>
+              </a:spcBef>
+              <a:defRPr sz="1400">
+                <a:solidFill>
+                  <a:srgbClr val="1C1C1E"/>
+                </a:solidFill>
+                <a:latin typeface="Arial"/>
+              </a:defRPr>
+            </a:pPr>
+            <a:r>
+              <a:t>⭐ Centralized Roster Controls: Allows easy student directory updates and CSV exports.</a:t>
+            </a:r>
+          </a:p>
+        </p:txBody>
+      </p:sp>
+      <p:sp>
+        <p:nvSpPr>
+          <p:cNvPr id="8" name="Rounded Rectangle 7"/>
+          <p:cNvSpPr/>
+          <p:nvPr/>
+        </p:nvSpPr>
+        <p:spPr>
+          <a:xfrm>
+            <a:off x="6309360" y="1645920"/>
+            <a:ext cx="5120640" cy="4023360"/>
+          </a:xfrm>
+          <a:prstGeom prst="roundRect">
+            <a:avLst/>
+          </a:prstGeom>
+          <a:solidFill>
+            <a:srgbClr val="F2F2F7"/>
+          </a:solidFill>
+          <a:ln w="19050">
+            <a:solidFill>
+              <a:srgbClr val="EF4444"/>
+            </a:solidFill>
+          </a:ln>
+        </p:spPr>
+        <p:style>
+          <a:lnRef idx="1">
+            <a:schemeClr val="accent1"/>
+          </a:lnRef>
+          <a:fillRef idx="3">
+            <a:schemeClr val="accent1"/>
+          </a:fillRef>
+          <a:effectRef idx="2">
+            <a:schemeClr val="accent1"/>
+          </a:effectRef>
+          <a:fontRef idx="minor">
+            <a:schemeClr val="lt1"/>
+          </a:fontRef>
+        </p:style>
+        <p:txBody>
+          <a:bodyPr rtlCol="0" anchor="ctr"/>
+          <a:lstStyle/>
+          <a:p>
+            <a:pPr algn="ctr"/>
+          </a:p>
+        </p:txBody>
+      </p:sp>
+      <p:sp>
+        <p:nvSpPr>
+          <p:cNvPr id="9" name="TextBox 8"/>
+          <p:cNvSpPr txBox="1"/>
+          <p:nvPr/>
+        </p:nvSpPr>
+        <p:spPr>
+          <a:xfrm>
+            <a:off x="6492240" y="1920240"/>
+            <a:ext cx="4754880" cy="3657600"/>
+          </a:xfrm>
+          <a:prstGeom prst="rect">
+            <a:avLst/>
+          </a:prstGeom>
+          <a:noFill/>
+        </p:spPr>
+        <p:txBody>
+          <a:bodyPr wrap="square">
+            <a:spAutoFit/>
+          </a:bodyPr>
+          <a:lstStyle/>
+          <a:p>
+            <a:pPr>
+              <a:spcAft>
+                <a:spcPts val="1400"/>
+              </a:spcAft>
+              <a:defRPr sz="1800" b="1">
+                <a:solidFill>
+                  <a:srgbClr val="00317E"/>
+                </a:solidFill>
+                <a:latin typeface="Arial"/>
+              </a:defRPr>
+            </a:pPr>
+            <a:r>
+              <a:t>LIMITATIONS</a:t>
+            </a:r>
+          </a:p>
+          <a:p>
+            <a:pPr>
+              <a:spcBef>
+                <a:spcPts val="1000"/>
+              </a:spcBef>
+              <a:defRPr sz="1400">
+                <a:solidFill>
+                  <a:srgbClr val="1C1C1E"/>
+                </a:solidFill>
+                <a:latin typeface="Arial"/>
+              </a:defRPr>
+            </a:pPr>
+            <a:r>
+              <a:t>⚠️ Session Cookies: Relies on HTTP-only session cookies; session state is lost on browser logout.</a:t>
+            </a:r>
+          </a:p>
+          <a:p>
+            <a:pPr>
+              <a:spcBef>
+                <a:spcPts val="1000"/>
+              </a:spcBef>
+              <a:defRPr sz="1400">
+                <a:solidFill>
+                  <a:srgbClr val="1C1C1E"/>
+                </a:solidFill>
+                <a:latin typeface="Arial"/>
+              </a:defRPr>
+            </a:pPr>
+            <a:r>
+              <a:t>⚠️ JS Dependent: Visual animations and transitions require JavaScript support to render properly.</a:t>
+            </a:r>
+          </a:p>
+          <a:p>
+            <a:pPr>
+              <a:spcBef>
+                <a:spcPts val="1000"/>
+              </a:spcBef>
+              <a:defRPr sz="1400">
+                <a:solidFill>
+                  <a:srgbClr val="1C1C1E"/>
+                </a:solidFill>
+                <a:latin typeface="Arial"/>
+              </a:defRPr>
+            </a:pPr>
+            <a:r>
+              <a:t>⚠️ Local Server Testing: SQLite configurations are designed for local developer environments.</a:t>
+            </a:r>
+          </a:p>
+          <a:p>
+            <a:pPr>
+              <a:spcBef>
+                <a:spcPts val="1000"/>
+              </a:spcBef>
+              <a:defRPr sz="1400">
+                <a:solidFill>
+                  <a:srgbClr val="1C1C1E"/>
+                </a:solidFill>
+                <a:latin typeface="Arial"/>
+              </a:defRPr>
+            </a:pPr>
+            <a:r>
+              <a:t>⚠️ Administrative Authority: Lacks advanced multi-tier admin role permission trees.</a:t>
+            </a:r>
+          </a:p>
+        </p:txBody>
+      </p:sp>
+    </p:spTree>
+  </p:cSld>
+  <p:clrMapOvr>
+    <a:masterClrMapping/>
+  </p:clrMapOvr>
+</p:sld>
+</file>
+
+<file path=ppt/slides/slide17.xml><?xml version="1.0" encoding="utf-8"?>
+<p:sld xmlns:a="http://schemas.openxmlformats.org/drawingml/2006/main" xmlns:p="http://schemas.openxmlformats.org/presentationml/2006/main" xmlns:r="http://schemas.openxmlformats.org/officeDocument/2006/relationships">
+  <p:cSld>
+    <p:bg>
+      <p:bgPr>
+        <a:solidFill>
+          <a:srgbClr val="FFFFFF"/>
+        </a:solidFill>
+        <a:effectLst/>
+      </p:bgPr>
+    </p:bg>
+    <p:spTree>
+      <p:nvGrpSpPr>
+        <p:cNvPr id="1" name=""/>
+        <p:cNvGrpSpPr/>
+        <p:nvPr/>
+      </p:nvGrpSpPr>
+      <p:grpSpPr/>
+      <p:pic>
+        <p:nvPicPr>
+          <p:cNvPr id="2" name="Picture 1" descr="logo.png"/>
+          <p:cNvPicPr>
+            <a:picLocks noChangeAspect="1"/>
+          </p:cNvPicPr>
+          <p:nvPr/>
+        </p:nvPicPr>
+        <p:blipFill>
+          <a:blip r:embed="rId2"/>
+          <a:stretch>
+            <a:fillRect/>
+          </a:stretch>
+        </p:blipFill>
+        <p:spPr>
+          <a:xfrm>
+            <a:off x="9601200" y="228600"/>
+            <a:ext cx="2286000" cy="699304"/>
+          </a:xfrm>
+          <a:prstGeom prst="rect">
+            <a:avLst/>
+          </a:prstGeom>
+        </p:spPr>
+      </p:pic>
+      <p:sp>
+        <p:nvSpPr>
+          <p:cNvPr id="3" name="TextBox 2"/>
+          <p:cNvSpPr txBox="1"/>
+          <p:nvPr/>
+        </p:nvSpPr>
+        <p:spPr>
+          <a:xfrm>
+            <a:off x="731520" y="6400800"/>
+            <a:ext cx="10698480" cy="365760"/>
+          </a:xfrm>
+          <a:prstGeom prst="rect">
+            <a:avLst/>
+          </a:prstGeom>
+          <a:noFill/>
+        </p:spPr>
+        <p:txBody>
+          <a:bodyPr wrap="square" lIns="0" tIns="0" bIns="0" rIns="0">
+            <a:spAutoFit/>
+          </a:bodyPr>
+          <a:lstStyle/>
+          <a:p>
+            <a:pPr algn="ctr">
+              <a:defRPr sz="950">
+                <a:solidFill>
+                  <a:srgbClr val="6E6E73"/>
+                </a:solidFill>
+                <a:latin typeface="Arial"/>
+              </a:defRPr>
+            </a:pPr>
+            <a:r>
+              <a:t>Student Hub  |  Sapthagiri University  |  Keerthana GP (24SUUBECS0914)  |  Keerthana BS (23SUUBECS0909)  |  Kiran M Biradar (24SUUBECS0937)</a:t>
+            </a:r>
+          </a:p>
+        </p:txBody>
+      </p:sp>
+      <p:sp>
+        <p:nvSpPr>
+          <p:cNvPr id="4" name="TextBox 3"/>
+          <p:cNvSpPr txBox="1"/>
+          <p:nvPr/>
+        </p:nvSpPr>
+        <p:spPr>
+          <a:xfrm>
+            <a:off x="731520" y="365760"/>
+            <a:ext cx="8686800" cy="731520"/>
+          </a:xfrm>
+          <a:prstGeom prst="rect">
+            <a:avLst/>
+          </a:prstGeom>
+          <a:noFill/>
+        </p:spPr>
+        <p:txBody>
+          <a:bodyPr wrap="square" lIns="0" tIns="0" bIns="0" rIns="0">
+            <a:spAutoFit/>
+          </a:bodyPr>
+          <a:lstStyle/>
+          <a:p>
+            <a:pPr>
+              <a:defRPr sz="2800" b="1">
+                <a:solidFill>
+                  <a:srgbClr val="00317E"/>
+                </a:solidFill>
+                <a:latin typeface="Arial"/>
+              </a:defRPr>
+            </a:pPr>
+            <a:r>
+              <a:t>Conclusion</a:t>
+            </a:r>
+          </a:p>
+        </p:txBody>
+      </p:sp>
+      <p:sp>
+        <p:nvSpPr>
+          <p:cNvPr id="5" name="Rectangle 4"/>
+          <p:cNvSpPr/>
+          <p:nvPr/>
+        </p:nvSpPr>
+        <p:spPr>
+          <a:xfrm>
+            <a:off x="731520" y="1051560"/>
+            <a:ext cx="10698480" cy="36576"/>
+          </a:xfrm>
+          <a:prstGeom prst="rect">
+            <a:avLst/>
+          </a:prstGeom>
+          <a:solidFill>
+            <a:srgbClr val="D4AF37"/>
+          </a:solidFill>
+          <a:ln>
+            <a:solidFill>
+              <a:srgbClr val="D4AF37"/>
+            </a:solidFill>
+          </a:ln>
+        </p:spPr>
+        <p:style>
+          <a:lnRef idx="1">
+            <a:schemeClr val="accent1"/>
+          </a:lnRef>
+          <a:fillRef idx="3">
+            <a:schemeClr val="accent1"/>
+          </a:fillRef>
+          <a:effectRef idx="2">
+            <a:schemeClr val="accent1"/>
+          </a:effectRef>
+          <a:fontRef idx="minor">
+            <a:schemeClr val="lt1"/>
+          </a:fontRef>
+        </p:style>
+        <p:txBody>
+          <a:bodyPr rtlCol="0" anchor="ctr"/>
+          <a:lstStyle/>
+          <a:p>
+            <a:pPr algn="ctr"/>
+          </a:p>
+        </p:txBody>
+      </p:sp>
+      <p:sp>
+        <p:nvSpPr>
+          <p:cNvPr id="6" name="TextBox 5"/>
+          <p:cNvSpPr txBox="1"/>
+          <p:nvPr/>
+        </p:nvSpPr>
+        <p:spPr>
+          <a:xfrm>
+            <a:off x="731520" y="1463040"/>
+            <a:ext cx="6858000" cy="4389120"/>
+          </a:xfrm>
+          <a:prstGeom prst="rect">
+            <a:avLst/>
+          </a:prstGeom>
+          <a:noFill/>
+        </p:spPr>
+        <p:txBody>
+          <a:bodyPr wrap="square" lIns="0" tIns="0" bIns="0" rIns="0">
+            <a:spAutoFit/>
+          </a:bodyPr>
+          <a:lstStyle/>
+          <a:p>
+            <a:pPr>
+              <a:spcAft>
+                <a:spcPts val="2000"/>
+              </a:spcAft>
+              <a:defRPr sz="1800">
+                <a:solidFill>
+                  <a:srgbClr val="1C1C1E"/>
+                </a:solidFill>
+                <a:latin typeface="Arial"/>
+              </a:defRPr>
+            </a:pPr>
+            <a:r>
+              <a:t>Student Hub successfully digitizes university admission processes, delivering a fast, highly secure, and user-friendly experience.</a:t>
+            </a:r>
+          </a:p>
+          <a:p>
+            <a:pPr>
+              <a:spcBef>
+                <a:spcPts val="1200"/>
+              </a:spcBef>
+              <a:defRPr sz="1500">
+                <a:solidFill>
+                  <a:srgbClr val="1C1C1E"/>
+                </a:solidFill>
+                <a:latin typeface="Arial"/>
+              </a:defRPr>
+            </a:pPr>
+            <a:r>
+              <a:t>🏆 Automated Registration: Speeds up file compilation and enrollment tracking.</a:t>
+            </a:r>
+          </a:p>
+          <a:p>
+            <a:pPr>
+              <a:spcBef>
+                <a:spcPts val="1200"/>
+              </a:spcBef>
+              <a:defRPr sz="1500">
+                <a:solidFill>
+                  <a:srgbClr val="1C1C1E"/>
+                </a:solidFill>
+                <a:latin typeface="Arial"/>
+              </a:defRPr>
+            </a:pPr>
+            <a:r>
+              <a:t>🔒 Secure Design: Implements rigid headers (CSP/HSTS) and password encryption hashes (Bcrypt).</a:t>
+            </a:r>
+          </a:p>
+          <a:p>
+            <a:pPr>
+              <a:spcBef>
+                <a:spcPts val="1200"/>
+              </a:spcBef>
+              <a:defRPr sz="1500">
+                <a:solidFill>
+                  <a:srgbClr val="1C1C1E"/>
+                </a:solidFill>
+                <a:latin typeface="Arial"/>
+              </a:defRPr>
+            </a:pPr>
+            <a:r>
+              <a:t>🎨 Interface Aesthetics: Clean Navy/Gold design system optimized for mobile viewports.</a:t>
+            </a:r>
+          </a:p>
+          <a:p>
+            <a:pPr>
+              <a:spcBef>
+                <a:spcPts val="1200"/>
+              </a:spcBef>
+              <a:defRPr sz="1500">
+                <a:solidFill>
+                  <a:srgbClr val="1C1C1E"/>
+                </a:solidFill>
+                <a:latin typeface="Arial"/>
+              </a:defRPr>
+            </a:pPr>
+            <a:r>
+              <a:t>⚙️ Robust Architecture: Successfully tested with local SQLite and staging MySQL environments.</a:t>
+            </a:r>
+          </a:p>
+        </p:txBody>
+      </p:sp>
+      <p:sp>
+        <p:nvSpPr>
+          <p:cNvPr id="7" name="Rounded Rectangle 6"/>
+          <p:cNvSpPr/>
+          <p:nvPr/>
+        </p:nvSpPr>
+        <p:spPr>
+          <a:xfrm>
+            <a:off x="8046720" y="1645920"/>
+            <a:ext cx="3383280" cy="4023360"/>
+          </a:xfrm>
+          <a:prstGeom prst="roundRect">
+            <a:avLst/>
+          </a:prstGeom>
+          <a:solidFill>
+            <a:srgbClr val="F2F2F7"/>
+          </a:solidFill>
+          <a:ln w="19050">
+            <a:solidFill>
+              <a:srgbClr val="D4AF37"/>
+            </a:solidFill>
+          </a:ln>
+        </p:spPr>
+        <p:style>
+          <a:lnRef idx="1">
+            <a:schemeClr val="accent1"/>
+          </a:lnRef>
+          <a:fillRef idx="3">
+            <a:schemeClr val="accent1"/>
+          </a:fillRef>
+          <a:effectRef idx="2">
+            <a:schemeClr val="accent1"/>
+          </a:effectRef>
+          <a:fontRef idx="minor">
+            <a:schemeClr val="lt1"/>
+          </a:fontRef>
+        </p:style>
+        <p:txBody>
+          <a:bodyPr rtlCol="0" anchor="ctr"/>
+          <a:lstStyle/>
+          <a:p>
+            <a:pPr algn="ctr"/>
+          </a:p>
+        </p:txBody>
+      </p:sp>
+      <p:sp>
+        <p:nvSpPr>
+          <p:cNvPr id="8" name="TextBox 7"/>
+          <p:cNvSpPr txBox="1"/>
+          <p:nvPr/>
+        </p:nvSpPr>
+        <p:spPr>
+          <a:xfrm>
+            <a:off x="8321040" y="1920240"/>
+            <a:ext cx="2834640" cy="3474720"/>
+          </a:xfrm>
+          <a:prstGeom prst="rect">
+            <a:avLst/>
+          </a:prstGeom>
+          <a:noFill/>
+        </p:spPr>
+        <p:txBody>
+          <a:bodyPr wrap="square">
+            <a:spAutoFit/>
+          </a:bodyPr>
+          <a:lstStyle/>
+          <a:p>
+            <a:pPr>
+              <a:spcAft>
+                <a:spcPts val="2000"/>
+              </a:spcAft>
+              <a:defRPr sz="1400" b="1">
+                <a:solidFill>
+                  <a:srgbClr val="00317E"/>
+                </a:solidFill>
+                <a:latin typeface="Arial"/>
+              </a:defRPr>
+            </a:pPr>
+            <a:r>
+              <a:t>KEY TAKEAWAYS</a:t>
+            </a:r>
+          </a:p>
+          <a:p>
+            <a:pPr>
+              <a:spcBef>
+                <a:spcPts val="800"/>
+              </a:spcBef>
+              <a:defRPr sz="1500" b="1">
+                <a:solidFill>
+                  <a:srgbClr val="D4AF37"/>
+                </a:solidFill>
+                <a:latin typeface="Arial"/>
+              </a:defRPr>
+            </a:pPr>
+            <a:r>
+              <a:t>✔ Easy Deploy</a:t>
+            </a:r>
+          </a:p>
+          <a:p>
+            <a:pPr>
+              <a:defRPr sz="1150">
+                <a:solidFill>
+                  <a:srgbClr val="1C1C1E"/>
+                </a:solidFill>
+                <a:latin typeface="Arial"/>
+              </a:defRPr>
+            </a:pPr>
+            <a:r>
+              <a:t>Containerizable code structure ready for production server setups.</a:t>
+            </a:r>
+          </a:p>
+          <a:p>
+            <a:pPr>
+              <a:spcBef>
+                <a:spcPts val="800"/>
+              </a:spcBef>
+              <a:defRPr sz="1500" b="1">
+                <a:solidFill>
+                  <a:srgbClr val="D4AF37"/>
+                </a:solidFill>
+                <a:latin typeface="Arial"/>
+              </a:defRPr>
+            </a:pPr>
+            <a:r>
+              <a:t>✔ Self-Hosted</a:t>
+            </a:r>
+          </a:p>
+          <a:p>
+            <a:pPr>
+              <a:defRPr sz="1150">
+                <a:solidFill>
+                  <a:srgbClr val="1C1C1E"/>
+                </a:solidFill>
+                <a:latin typeface="Arial"/>
+              </a:defRPr>
+            </a:pPr>
+            <a:r>
+              <a:t>Local assets remove CDN risks and keep pages fully secure.</a:t>
+            </a:r>
+          </a:p>
+          <a:p>
+            <a:pPr>
+              <a:spcBef>
+                <a:spcPts val="800"/>
+              </a:spcBef>
+              <a:defRPr sz="1500" b="1">
+                <a:solidFill>
+                  <a:srgbClr val="D4AF37"/>
+                </a:solidFill>
+                <a:latin typeface="Arial"/>
+              </a:defRPr>
+            </a:pPr>
+            <a:r>
+              <a:t>✔ Compliance Logs</a:t>
+            </a:r>
+          </a:p>
+          <a:p>
+            <a:pPr>
+              <a:defRPr sz="1150">
+                <a:solidFill>
+                  <a:srgbClr val="1C1C1E"/>
+                </a:solidFill>
+                <a:latin typeface="Arial"/>
+              </a:defRPr>
+            </a:pPr>
+            <a:r>
+              <a:t>Requests tracking helps audit operations and sessions.</a:t>
+            </a:r>
+          </a:p>
+        </p:txBody>
+      </p:sp>
+    </p:spTree>
+  </p:cSld>
+  <p:clrMapOvr>
+    <a:masterClrMapping/>
+  </p:clrMapOvr>
+</p:sld>
+</file>
+
+<file path=ppt/slides/slide18.xml><?xml version="1.0" encoding="utf-8"?>
+<p:sld xmlns:a="http://schemas.openxmlformats.org/drawingml/2006/main" xmlns:p="http://schemas.openxmlformats.org/presentationml/2006/main" xmlns:r="http://schemas.openxmlformats.org/officeDocument/2006/relationships">
+  <p:cSld>
+    <p:bg>
+      <p:bgPr>
+        <a:solidFill>
+          <a:srgbClr val="FFFFFF"/>
+        </a:solidFill>
+        <a:effectLst/>
+      </p:bgPr>
+    </p:bg>
+    <p:spTree>
+      <p:nvGrpSpPr>
+        <p:cNvPr id="1" name=""/>
+        <p:cNvGrpSpPr/>
+        <p:nvPr/>
+      </p:nvGrpSpPr>
+      <p:grpSpPr/>
+      <p:pic>
+        <p:nvPicPr>
+          <p:cNvPr id="2" name="Picture 1" descr="logo.png"/>
+          <p:cNvPicPr>
+            <a:picLocks noChangeAspect="1"/>
+          </p:cNvPicPr>
+          <p:nvPr/>
+        </p:nvPicPr>
+        <p:blipFill>
+          <a:blip r:embed="rId2"/>
+          <a:stretch>
+            <a:fillRect/>
+          </a:stretch>
+        </p:blipFill>
+        <p:spPr>
+          <a:xfrm>
+            <a:off x="9601200" y="228600"/>
+            <a:ext cx="2286000" cy="699304"/>
+          </a:xfrm>
+          <a:prstGeom prst="rect">
+            <a:avLst/>
+          </a:prstGeom>
+        </p:spPr>
+      </p:pic>
+      <p:sp>
+        <p:nvSpPr>
+          <p:cNvPr id="3" name="TextBox 2"/>
+          <p:cNvSpPr txBox="1"/>
+          <p:nvPr/>
+        </p:nvSpPr>
+        <p:spPr>
+          <a:xfrm>
+            <a:off x="731520" y="6400800"/>
+            <a:ext cx="10698480" cy="365760"/>
+          </a:xfrm>
+          <a:prstGeom prst="rect">
+            <a:avLst/>
+          </a:prstGeom>
+          <a:noFill/>
+        </p:spPr>
+        <p:txBody>
+          <a:bodyPr wrap="square" lIns="0" tIns="0" bIns="0" rIns="0">
+            <a:spAutoFit/>
+          </a:bodyPr>
+          <a:lstStyle/>
+          <a:p>
+            <a:pPr algn="ctr">
+              <a:defRPr sz="950">
+                <a:solidFill>
+                  <a:srgbClr val="6E6E73"/>
+                </a:solidFill>
+                <a:latin typeface="Arial"/>
+              </a:defRPr>
+            </a:pPr>
+            <a:r>
+              <a:t>Student Hub  |  Sapthagiri University  |  Keerthana GP (24SUUBECS0914)  |  Keerthana BS (23SUUBECS0909)  |  Kiran M Biradar (24SUUBECS0937)</a:t>
+            </a:r>
+          </a:p>
+        </p:txBody>
+      </p:sp>
+      <p:sp>
+        <p:nvSpPr>
+          <p:cNvPr id="4" name="TextBox 3"/>
+          <p:cNvSpPr txBox="1"/>
+          <p:nvPr/>
+        </p:nvSpPr>
+        <p:spPr>
+          <a:xfrm>
+            <a:off x="731520" y="365760"/>
+            <a:ext cx="8686800" cy="731520"/>
+          </a:xfrm>
+          <a:prstGeom prst="rect">
+            <a:avLst/>
+          </a:prstGeom>
+          <a:noFill/>
+        </p:spPr>
+        <p:txBody>
+          <a:bodyPr wrap="square" lIns="0" tIns="0" bIns="0" rIns="0">
+            <a:spAutoFit/>
+          </a:bodyPr>
+          <a:lstStyle/>
+          <a:p>
+            <a:pPr>
+              <a:defRPr sz="2800" b="1">
+                <a:solidFill>
+                  <a:srgbClr val="00317E"/>
+                </a:solidFill>
+                <a:latin typeface="Arial"/>
+              </a:defRPr>
+            </a:pPr>
+            <a:r>
+              <a:t>Future Scope</a:t>
+            </a:r>
+          </a:p>
+        </p:txBody>
+      </p:sp>
+      <p:sp>
+        <p:nvSpPr>
+          <p:cNvPr id="5" name="Rectangle 4"/>
+          <p:cNvSpPr/>
+          <p:nvPr/>
+        </p:nvSpPr>
+        <p:spPr>
+          <a:xfrm>
+            <a:off x="731520" y="1051560"/>
+            <a:ext cx="10698480" cy="36576"/>
+          </a:xfrm>
+          <a:prstGeom prst="rect">
+            <a:avLst/>
+          </a:prstGeom>
+          <a:solidFill>
+            <a:srgbClr val="D4AF37"/>
+          </a:solidFill>
+          <a:ln>
+            <a:solidFill>
+              <a:srgbClr val="D4AF37"/>
+            </a:solidFill>
+          </a:ln>
+        </p:spPr>
+        <p:style>
+          <a:lnRef idx="1">
+            <a:schemeClr val="accent1"/>
+          </a:lnRef>
+          <a:fillRef idx="3">
+            <a:schemeClr val="accent1"/>
+          </a:fillRef>
+          <a:effectRef idx="2">
+            <a:schemeClr val="accent1"/>
+          </a:effectRef>
+          <a:fontRef idx="minor">
+            <a:schemeClr val="lt1"/>
+          </a:fontRef>
+        </p:style>
+        <p:txBody>
+          <a:bodyPr rtlCol="0" anchor="ctr"/>
+          <a:lstStyle/>
+          <a:p>
+            <a:pPr algn="ctr"/>
+          </a:p>
+        </p:txBody>
+      </p:sp>
+      <p:sp>
+        <p:nvSpPr>
+          <p:cNvPr id="6" name="TextBox 5"/>
+          <p:cNvSpPr txBox="1"/>
+          <p:nvPr/>
+        </p:nvSpPr>
+        <p:spPr>
+          <a:xfrm>
+            <a:off x="731520" y="1463040"/>
+            <a:ext cx="6858000" cy="4389120"/>
+          </a:xfrm>
+          <a:prstGeom prst="rect">
+            <a:avLst/>
+          </a:prstGeom>
+          <a:noFill/>
+        </p:spPr>
+        <p:txBody>
+          <a:bodyPr wrap="square" lIns="0" tIns="0" bIns="0" rIns="0">
+            <a:spAutoFit/>
+          </a:bodyPr>
+          <a:lstStyle/>
+          <a:p>
+            <a:pPr>
+              <a:spcAft>
+                <a:spcPts val="2000"/>
+              </a:spcAft>
+              <a:defRPr sz="1800">
+                <a:solidFill>
+                  <a:srgbClr val="1C1C1E"/>
+                </a:solidFill>
+                <a:latin typeface="Arial"/>
+              </a:defRPr>
+            </a:pPr>
+            <a:r>
+              <a:t>While Student Hub delivers a solid foundation, several extensions are planned for future iterations.</a:t>
+            </a:r>
+          </a:p>
+          <a:p>
+            <a:pPr>
+              <a:spcBef>
+                <a:spcPts val="1200"/>
+              </a:spcBef>
+              <a:defRPr sz="1500">
+                <a:solidFill>
+                  <a:srgbClr val="1C1C1E"/>
+                </a:solidFill>
+                <a:latin typeface="Arial"/>
+              </a:defRPr>
+            </a:pPr>
+            <a:r>
+              <a:t>💳 Integrated Payment Portals: Connects payment gateways (Razorpay, Stripe) to collect registration and library fees.</a:t>
+            </a:r>
+          </a:p>
+          <a:p>
+            <a:pPr>
+              <a:spcBef>
+                <a:spcPts val="1200"/>
+              </a:spcBef>
+              <a:defRPr sz="1500">
+                <a:solidFill>
+                  <a:srgbClr val="1C1C1E"/>
+                </a:solidFill>
+                <a:latin typeface="Arial"/>
+              </a:defRPr>
+            </a:pPr>
+            <a:r>
+              <a:t>✉️ Automated Notifications: Triggers SMS updates and email dispatches for status changes.</a:t>
+            </a:r>
+          </a:p>
+          <a:p>
+            <a:pPr>
+              <a:spcBef>
+                <a:spcPts val="1200"/>
+              </a:spcBef>
+              <a:defRPr sz="1500">
+                <a:solidFill>
+                  <a:srgbClr val="1C1C1E"/>
+                </a:solidFill>
+                <a:latin typeface="Arial"/>
+              </a:defRPr>
+            </a:pPr>
+            <a:r>
+              <a:t>🔐 Advanced Authentication: Adds two-factor verification (2FA) and multi-tier admin roles.</a:t>
+            </a:r>
+          </a:p>
+          <a:p>
+            <a:pPr>
+              <a:spcBef>
+                <a:spcPts val="1200"/>
+              </a:spcBef>
+              <a:defRPr sz="1500">
+                <a:solidFill>
+                  <a:srgbClr val="1C1C1E"/>
+                </a:solidFill>
+                <a:latin typeface="Arial"/>
+              </a:defRPr>
+            </a:pPr>
+            <a:r>
+              <a:t>📱 Mobile App Wrappers: Packages the layout as a native Android/iOS application.</a:t>
+            </a:r>
+          </a:p>
+        </p:txBody>
+      </p:sp>
+      <p:sp>
+        <p:nvSpPr>
+          <p:cNvPr id="7" name="Rounded Rectangle 6"/>
+          <p:cNvSpPr/>
+          <p:nvPr/>
+        </p:nvSpPr>
+        <p:spPr>
+          <a:xfrm>
+            <a:off x="8046720" y="1645920"/>
+            <a:ext cx="3383280" cy="4023360"/>
+          </a:xfrm>
+          <a:prstGeom prst="roundRect">
+            <a:avLst/>
+          </a:prstGeom>
+          <a:solidFill>
+            <a:srgbClr val="F2F2F7"/>
+          </a:solidFill>
+          <a:ln w="19050">
+            <a:solidFill>
+              <a:srgbClr val="D4AF37"/>
+            </a:solidFill>
+          </a:ln>
+        </p:spPr>
+        <p:style>
+          <a:lnRef idx="1">
+            <a:schemeClr val="accent1"/>
+          </a:lnRef>
+          <a:fillRef idx="3">
+            <a:schemeClr val="accent1"/>
+          </a:fillRef>
+          <a:effectRef idx="2">
+            <a:schemeClr val="accent1"/>
+          </a:effectRef>
+          <a:fontRef idx="minor">
+            <a:schemeClr val="lt1"/>
+          </a:fontRef>
+        </p:style>
+        <p:txBody>
+          <a:bodyPr rtlCol="0" anchor="ctr"/>
+          <a:lstStyle/>
+          <a:p>
+            <a:pPr algn="ctr"/>
+          </a:p>
+        </p:txBody>
+      </p:sp>
+      <p:sp>
+        <p:nvSpPr>
+          <p:cNvPr id="8" name="TextBox 7"/>
+          <p:cNvSpPr txBox="1"/>
+          <p:nvPr/>
+        </p:nvSpPr>
+        <p:spPr>
+          <a:xfrm>
+            <a:off x="8321040" y="1920240"/>
+            <a:ext cx="2834640" cy="3474720"/>
+          </a:xfrm>
+          <a:prstGeom prst="rect">
+            <a:avLst/>
+          </a:prstGeom>
+          <a:noFill/>
+        </p:spPr>
+        <p:txBody>
+          <a:bodyPr wrap="square">
+            <a:spAutoFit/>
+          </a:bodyPr>
+          <a:lstStyle/>
+          <a:p>
+            <a:pPr>
+              <a:spcAft>
+                <a:spcPts val="2000"/>
+              </a:spcAft>
+              <a:defRPr sz="1400" b="1">
+                <a:solidFill>
+                  <a:srgbClr val="00317E"/>
+                </a:solidFill>
+                <a:latin typeface="Arial"/>
+              </a:defRPr>
+            </a:pPr>
+            <a:r>
+              <a:t>ROADMAP MILESTONES</a:t>
+            </a:r>
+          </a:p>
+          <a:p>
+            <a:pPr>
+              <a:spcBef>
+                <a:spcPts val="800"/>
+              </a:spcBef>
+              <a:defRPr sz="1500" b="1">
+                <a:solidFill>
+                  <a:srgbClr val="D4AF37"/>
+                </a:solidFill>
+                <a:latin typeface="Arial"/>
+              </a:defRPr>
+            </a:pPr>
+            <a:r>
+              <a:t>• Phase 1: Gateway</a:t>
+            </a:r>
+          </a:p>
+          <a:p>
+            <a:pPr>
+              <a:defRPr sz="1150">
+                <a:solidFill>
+                  <a:srgbClr val="1C1C1E"/>
+                </a:solidFill>
+                <a:latin typeface="Arial"/>
+              </a:defRPr>
+            </a:pPr>
+            <a:r>
+              <a:t>Integrate online fee payment API checkout routines.</a:t>
+            </a:r>
+          </a:p>
+          <a:p>
+            <a:pPr>
+              <a:spcBef>
+                <a:spcPts val="800"/>
+              </a:spcBef>
+              <a:defRPr sz="1500" b="1">
+                <a:solidFill>
+                  <a:srgbClr val="D4AF37"/>
+                </a:solidFill>
+                <a:latin typeface="Arial"/>
+              </a:defRPr>
+            </a:pPr>
+            <a:r>
+              <a:t>• Phase 2: Alert System</a:t>
+            </a:r>
+          </a:p>
+          <a:p>
+            <a:pPr>
+              <a:defRPr sz="1150">
+                <a:solidFill>
+                  <a:srgbClr val="1C1C1E"/>
+                </a:solidFill>
+                <a:latin typeface="Arial"/>
+              </a:defRPr>
+            </a:pPr>
+            <a:r>
+              <a:t>Build notification triggers for confirmations.</a:t>
+            </a:r>
+          </a:p>
+          <a:p>
+            <a:pPr>
+              <a:spcBef>
+                <a:spcPts val="800"/>
+              </a:spcBef>
+              <a:defRPr sz="1500" b="1">
+                <a:solidFill>
+                  <a:srgbClr val="D4AF37"/>
+                </a:solidFill>
+                <a:latin typeface="Arial"/>
+              </a:defRPr>
+            </a:pPr>
+            <a:r>
+              <a:t>• Phase 3: Native Wrapper</a:t>
+            </a:r>
+          </a:p>
+          <a:p>
+            <a:pPr>
+              <a:defRPr sz="1150">
+                <a:solidFill>
+                  <a:srgbClr val="1C1C1E"/>
+                </a:solidFill>
+                <a:latin typeface="Arial"/>
+              </a:defRPr>
+            </a:pPr>
+            <a:r>
+              <a:t>Publish Android/iOS application wrapper containers.</a:t>
+            </a:r>
+          </a:p>
+        </p:txBody>
+      </p:sp>
+    </p:spTree>
+  </p:cSld>
+  <p:clrMapOvr>
+    <a:masterClrMapping/>
+  </p:clrMapOvr>
+</p:sld>
+</file>
+
+<file path=ppt/slides/slide19.xml><?xml version="1.0" encoding="utf-8"?>
+<p:sld xmlns:a="http://schemas.openxmlformats.org/drawingml/2006/main" xmlns:p="http://schemas.openxmlformats.org/presentationml/2006/main" xmlns:r="http://schemas.openxmlformats.org/officeDocument/2006/relationships">
+  <p:cSld>
+    <p:bg>
+      <p:bgPr>
+        <a:solidFill>
+          <a:srgbClr val="FFFFFF"/>
+        </a:solidFill>
+        <a:effectLst/>
+      </p:bgPr>
+    </p:bg>
+    <p:spTree>
+      <p:nvGrpSpPr>
+        <p:cNvPr id="1" name=""/>
+        <p:cNvGrpSpPr/>
+        <p:nvPr/>
+      </p:nvGrpSpPr>
+      <p:grpSpPr/>
+      <p:pic>
+        <p:nvPicPr>
+          <p:cNvPr id="2" name="Picture 1" descr="logo.png"/>
+          <p:cNvPicPr>
+            <a:picLocks noChangeAspect="1"/>
+          </p:cNvPicPr>
+          <p:nvPr/>
+        </p:nvPicPr>
+        <p:blipFill>
+          <a:blip r:embed="rId2"/>
+          <a:stretch>
+            <a:fillRect/>
+          </a:stretch>
+        </p:blipFill>
+        <p:spPr>
+          <a:xfrm>
+            <a:off x="9601200" y="228600"/>
+            <a:ext cx="2286000" cy="699304"/>
+          </a:xfrm>
+          <a:prstGeom prst="rect">
+            <a:avLst/>
+          </a:prstGeom>
+        </p:spPr>
+      </p:pic>
+      <p:sp>
+        <p:nvSpPr>
+          <p:cNvPr id="3" name="TextBox 2"/>
+          <p:cNvSpPr txBox="1"/>
+          <p:nvPr/>
+        </p:nvSpPr>
+        <p:spPr>
+          <a:xfrm>
+            <a:off x="731520" y="6400800"/>
+            <a:ext cx="10698480" cy="365760"/>
+          </a:xfrm>
+          <a:prstGeom prst="rect">
+            <a:avLst/>
+          </a:prstGeom>
+          <a:noFill/>
+        </p:spPr>
+        <p:txBody>
+          <a:bodyPr wrap="square" lIns="0" tIns="0" bIns="0" rIns="0">
+            <a:spAutoFit/>
+          </a:bodyPr>
+          <a:lstStyle/>
+          <a:p>
+            <a:pPr algn="ctr">
+              <a:defRPr sz="950">
+                <a:solidFill>
+                  <a:srgbClr val="6E6E73"/>
+                </a:solidFill>
+                <a:latin typeface="Arial"/>
+              </a:defRPr>
+            </a:pPr>
+            <a:r>
+              <a:t>Student Hub  |  Sapthagiri University  |  Keerthana GP (24SUUBECS0914)  |  Keerthana BS (23SUUBECS0909)  |  Kiran M Biradar (24SUUBECS0937)</a:t>
+            </a:r>
+          </a:p>
+        </p:txBody>
+      </p:sp>
+      <p:sp>
+        <p:nvSpPr>
+          <p:cNvPr id="4" name="TextBox 3"/>
+          <p:cNvSpPr txBox="1"/>
+          <p:nvPr/>
+        </p:nvSpPr>
+        <p:spPr>
+          <a:xfrm>
+            <a:off x="731520" y="365760"/>
+            <a:ext cx="8686800" cy="731520"/>
+          </a:xfrm>
+          <a:prstGeom prst="rect">
+            <a:avLst/>
+          </a:prstGeom>
+          <a:noFill/>
+        </p:spPr>
+        <p:txBody>
+          <a:bodyPr wrap="square" lIns="0" tIns="0" bIns="0" rIns="0">
+            <a:spAutoFit/>
+          </a:bodyPr>
+          <a:lstStyle/>
+          <a:p>
+            <a:pPr>
+              <a:defRPr sz="2800" b="1">
+                <a:solidFill>
+                  <a:srgbClr val="00317E"/>
+                </a:solidFill>
+                <a:latin typeface="Arial"/>
+              </a:defRPr>
+            </a:pPr>
+            <a:r>
+              <a:t>References</a:t>
+            </a:r>
+          </a:p>
+        </p:txBody>
+      </p:sp>
+      <p:sp>
+        <p:nvSpPr>
+          <p:cNvPr id="5" name="Rectangle 4"/>
+          <p:cNvSpPr/>
+          <p:nvPr/>
+        </p:nvSpPr>
+        <p:spPr>
+          <a:xfrm>
+            <a:off x="731520" y="1051560"/>
+            <a:ext cx="10698480" cy="36576"/>
+          </a:xfrm>
+          <a:prstGeom prst="rect">
+            <a:avLst/>
+          </a:prstGeom>
+          <a:solidFill>
+            <a:srgbClr val="D4AF37"/>
+          </a:solidFill>
+          <a:ln>
+            <a:solidFill>
+              <a:srgbClr val="D4AF37"/>
+            </a:solidFill>
+          </a:ln>
+        </p:spPr>
+        <p:style>
+          <a:lnRef idx="1">
+            <a:schemeClr val="accent1"/>
+          </a:lnRef>
+          <a:fillRef idx="3">
+            <a:schemeClr val="accent1"/>
+          </a:fillRef>
+          <a:effectRef idx="2">
+            <a:schemeClr val="accent1"/>
+          </a:effectRef>
+          <a:fontRef idx="minor">
+            <a:schemeClr val="lt1"/>
+          </a:fontRef>
+        </p:style>
+        <p:txBody>
+          <a:bodyPr rtlCol="0" anchor="ctr"/>
+          <a:lstStyle/>
+          <a:p>
+            <a:pPr algn="ctr"/>
+          </a:p>
+        </p:txBody>
+      </p:sp>
+      <p:sp>
+        <p:nvSpPr>
+          <p:cNvPr id="6" name="TextBox 5"/>
+          <p:cNvSpPr txBox="1"/>
+          <p:nvPr/>
+        </p:nvSpPr>
+        <p:spPr>
+          <a:xfrm>
+            <a:off x="731520" y="1463040"/>
+            <a:ext cx="10698480" cy="4389120"/>
+          </a:xfrm>
+          <a:prstGeom prst="rect">
+            <a:avLst/>
+          </a:prstGeom>
+          <a:noFill/>
+        </p:spPr>
+        <p:txBody>
+          <a:bodyPr wrap="square" lIns="0" tIns="0" bIns="0" rIns="0">
+            <a:spAutoFit/>
+          </a:bodyPr>
+          <a:lstStyle/>
+          <a:p>
+            <a:pPr>
+              <a:spcAft>
+                <a:spcPts val="2000"/>
+              </a:spcAft>
+              <a:defRPr sz="1800">
+                <a:solidFill>
+                  <a:srgbClr val="1C1C1E"/>
+                </a:solidFill>
+                <a:latin typeface="Arial"/>
+              </a:defRPr>
+            </a:pPr>
+            <a:r>
+              <a:t>The development and security compliance of Student Hub references the following standards and frameworks:</a:t>
+            </a:r>
+          </a:p>
+          <a:p>
+            <a:pPr>
+              <a:spcBef>
+                <a:spcPts val="1200"/>
+              </a:spcBef>
+              <a:defRPr sz="1550">
+                <a:solidFill>
+                  <a:srgbClr val="1C1C1E"/>
+                </a:solidFill>
+                <a:latin typeface="Arial"/>
+              </a:defRPr>
+            </a:pPr>
+            <a:r>
+              <a:t>📚 **Flask 3.0 Documentation**: [https://flask.palletsprojects.com](https://flask.palletsprojects.com)</a:t>
+            </a:r>
+          </a:p>
+          <a:p>
+            <a:pPr>
+              <a:spcBef>
+                <a:spcPts val="1200"/>
+              </a:spcBef>
+              <a:defRPr sz="1550">
+                <a:solidFill>
+                  <a:srgbClr val="1C1C1E"/>
+                </a:solidFill>
+                <a:latin typeface="Arial"/>
+              </a:defRPr>
+            </a:pPr>
+            <a:r>
+              <a:t>🗄️ **SQLAlchemy 2.0 Specifications**: [https://www.sqlalchemy.org](https://www.sqlalchemy.org)</a:t>
+            </a:r>
+          </a:p>
+          <a:p>
+            <a:pPr>
+              <a:spcBef>
+                <a:spcPts val="1200"/>
+              </a:spcBef>
+              <a:defRPr sz="1550">
+                <a:solidFill>
+                  <a:srgbClr val="1C1C1E"/>
+                </a:solidFill>
+                <a:latin typeface="Arial"/>
+              </a:defRPr>
+            </a:pPr>
+            <a:r>
+              <a:t>🎨 **Apple Human Interface Guidelines (HIG)**: [https://developer.apple.com/design/human-interface-guidelines](https://developer.apple.com/design/human-interface-guidelines)</a:t>
+            </a:r>
+          </a:p>
+          <a:p>
+            <a:pPr>
+              <a:spcBef>
+                <a:spcPts val="1200"/>
+              </a:spcBef>
+              <a:defRPr sz="1550">
+                <a:solidFill>
+                  <a:srgbClr val="1C1C1E"/>
+                </a:solidFill>
+                <a:latin typeface="Arial"/>
+              </a:defRPr>
+            </a:pPr>
+            <a:r>
+              <a:t>🎨 **Google Material Design 3 Documentation**: [https://m3.material.io](https://m3.material.io)</a:t>
+            </a:r>
+          </a:p>
+          <a:p>
+            <a:pPr>
+              <a:spcBef>
+                <a:spcPts val="1200"/>
+              </a:spcBef>
+              <a:defRPr sz="1550">
+                <a:solidFill>
+                  <a:srgbClr val="1C1C1E"/>
+                </a:solidFill>
+                <a:latin typeface="Arial"/>
+              </a:defRPr>
+            </a:pPr>
+            <a:r>
+              <a:t>🛡️ **OWASP Top 10 Security Risks &amp; Controls**: [https://owasp.org/www-project-top-ten](https://owasp.org/www-project-top-ten)</a:t>
+            </a:r>
+          </a:p>
+          <a:p>
+            <a:pPr>
+              <a:spcBef>
+                <a:spcPts val="1200"/>
+              </a:spcBef>
+              <a:defRPr sz="1550">
+                <a:solidFill>
+                  <a:srgbClr val="1C1C1E"/>
+                </a:solidFill>
+                <a:latin typeface="Arial"/>
+              </a:defRPr>
+            </a:pPr>
+            <a:r>
+              <a:t>💻 **Werkzeug WSGI Web Utilities**: [https://werkzeug.palletsprojects.com](https://werkzeug.palletsprojects.com)</a:t>
             </a:r>
           </a:p>
         </p:txBody>
@@ -5606,7 +8031,7 @@
               </a:defRPr>
             </a:pPr>
             <a:r>
-              <a:t>Executive Summary</a:t>
+              <a:t>Introduction &amp; Overview</a:t>
             </a:r>
           </a:p>
         </p:txBody>
@@ -5690,7 +8115,7 @@
               </a:defRPr>
             </a:pPr>
             <a:r>
-              <a:t>The modern higher education landscape demands automated, paperless, and secure administration systems. Student Hub provides a production-ready solution.</a:t>
+              <a:t>Student Hub is a full-stack digital enrollment environment built to modernize the traditional, paper-intensive college registration routines.</a:t>
             </a:r>
           </a:p>
           <a:p>
@@ -5706,7 +8131,7 @@
               </a:defRPr>
             </a:pPr>
             <a:r>
-              <a:t>🌐 Digital Transformation: Replaces manual, physical registry routines with secure online registration.</a:t>
+              <a:t>🌐 Digitalization Target: Transforms slow manual registration steps into a fast, 3-minute paperless flow.</a:t>
             </a:r>
           </a:p>
           <a:p>
@@ -5722,7 +8147,7 @@
               </a:defRPr>
             </a:pPr>
             <a:r>
-              <a:t>🔒 Self-Contained Assets: Standardized local asset hosting (fonts, styles) guarantees CSP security compliance.</a:t>
+              <a:t>📱 Access &amp; Control: Offers interactive interfaces for student profiles, course checks, and admin analytics.</a:t>
             </a:r>
           </a:p>
           <a:p>
@@ -5738,7 +8163,7 @@
               </a:defRPr>
             </a:pPr>
             <a:r>
-              <a:t>⚡ Integrated Workflow: Merges registration, dashboard trackers, dynamic courses search, and admin charts.</a:t>
+              <a:t>⚡ Modular Structure: Standardized MVC design system connecting Flask controllers, SQLAlchemy models, and variable CSS.</a:t>
             </a:r>
           </a:p>
           <a:p>
@@ -5754,7 +8179,7 @@
               </a:defRPr>
             </a:pPr>
             <a:r>
-              <a:t>📊 Dynamic Database Adapters: Runs SQLite in development environments and transitions easily to production-ready MySQL.</a:t>
+              <a:t>⚙️ Database Adaptability: Uses local SQLite files for fast testing and scales easily to enterprise MySQL instances.</a:t>
             </a:r>
           </a:p>
         </p:txBody>
@@ -5828,7 +8253,7 @@
           <a:p>
             <a:pPr>
               <a:spcAft>
-                <a:spcPts val="1600"/>
+                <a:spcPts val="2000"/>
               </a:spcAft>
               <a:defRPr sz="1400" b="1">
                 <a:solidFill>
@@ -5838,7 +8263,7 @@
               </a:defRPr>
             </a:pPr>
             <a:r>
-              <a:t>PROJECT MISSION</a:t>
+              <a:t>CORE PILLARS</a:t>
             </a:r>
           </a:p>
           <a:p>
@@ -5854,12 +8279,12 @@
               </a:defRPr>
             </a:pPr>
             <a:r>
-              <a:t>✔ Speed</a:t>
-            </a:r>
-          </a:p>
-          <a:p>
-            <a:pPr>
-              <a:defRPr sz="1150">
+              <a:t>✔ Automated Roster</a:t>
+            </a:r>
+          </a:p>
+          <a:p>
+            <a:pPr>
+              <a:defRPr sz="1200">
                 <a:solidFill>
                   <a:srgbClr val="1C1C1E"/>
                 </a:solidFill>
@@ -5867,7 +8292,7 @@
               </a:defRPr>
             </a:pPr>
             <a:r>
-              <a:t>Optimize client forms to complete in under 3 minutes.</a:t>
+              <a:t>Instantly generates identifiers and registers students in real-time.</a:t>
             </a:r>
           </a:p>
           <a:p>
@@ -5883,12 +8308,12 @@
               </a:defRPr>
             </a:pPr>
             <a:r>
-              <a:t>✔ Security</a:t>
-            </a:r>
-          </a:p>
-          <a:p>
-            <a:pPr>
-              <a:defRPr sz="1150">
+              <a:t>✔ Design Harmony</a:t>
+            </a:r>
+          </a:p>
+          <a:p>
+            <a:pPr>
+              <a:defRPr sz="1200">
                 <a:solidFill>
                   <a:srgbClr val="1C1C1E"/>
                 </a:solidFill>
@@ -5896,7 +8321,7 @@
               </a:defRPr>
             </a:pPr>
             <a:r>
-              <a:t>Implement strict CSP and Bcrypt encryptions.</a:t>
+              <a:t>Apple-inspired variable CSS with dynamic Dark/Light modes.</a:t>
             </a:r>
           </a:p>
           <a:p>
@@ -5912,12 +8337,12 @@
               </a:defRPr>
             </a:pPr>
             <a:r>
-              <a:t>✔ Compliance</a:t>
-            </a:r>
-          </a:p>
-          <a:p>
-            <a:pPr>
-              <a:defRPr sz="1150">
+              <a:t>✔ Offline Security</a:t>
+            </a:r>
+          </a:p>
+          <a:p>
+            <a:pPr>
+              <a:defRPr sz="1200">
                 <a:solidFill>
                   <a:srgbClr val="1C1C1E"/>
                 </a:solidFill>
@@ -5925,36 +8350,7 @@
               </a:defRPr>
             </a:pPr>
             <a:r>
-              <a:t>Create transparent request audit logging trails.</a:t>
-            </a:r>
-          </a:p>
-          <a:p>
-            <a:pPr>
-              <a:spcBef>
-                <a:spcPts val="800"/>
-              </a:spcBef>
-              <a:defRPr sz="1500" b="1">
-                <a:solidFill>
-                  <a:srgbClr val="D4AF37"/>
-                </a:solidFill>
-                <a:latin typeface="Arial"/>
-              </a:defRPr>
-            </a:pPr>
-            <a:r>
-              <a:t>✔ Adaptability</a:t>
-            </a:r>
-          </a:p>
-          <a:p>
-            <a:pPr>
-              <a:defRPr sz="1150">
-                <a:solidFill>
-                  <a:srgbClr val="1C1C1E"/>
-                </a:solidFill>
-                <a:latin typeface="Arial"/>
-              </a:defRPr>
-            </a:pPr>
-            <a:r>
-              <a:t>Design database-agnostic backend models.</a:t>
+              <a:t>Local assets (Material Symbols Outlined) bypasses CSP problems.</a:t>
             </a:r>
           </a:p>
         </p:txBody>
@@ -6076,7 +8472,7 @@
               </a:defRPr>
             </a:pPr>
             <a:r>
-              <a:t>The Problem Statement</a:t>
+              <a:t>Problem Definition</a:t>
             </a:r>
           </a:p>
         </p:txBody>
@@ -6205,7 +8601,7 @@
               </a:defRPr>
             </a:pPr>
             <a:r>
-              <a:t>📁 Heavy Paperwork &amp; Admin Overload</a:t>
+              <a:t>📁 Administrative Overload</a:t>
             </a:r>
           </a:p>
           <a:p>
@@ -6218,7 +8614,7 @@
               </a:defRPr>
             </a:pPr>
             <a:r>
-              <a:t>Manual, paper-based student registrations cause massive administrative workloads and high processing delays.</a:t>
+              <a:t>Handling manual paperwork results in huge processing queues, candidate dropouts, and catalog errors.</a:t>
             </a:r>
           </a:p>
         </p:txBody>
@@ -6302,7 +8698,7 @@
               </a:defRPr>
             </a:pPr>
             <a:r>
-              <a:t>🛑 CSRF &amp; Session Vulnerabilities</a:t>
+              <a:t>🔑 Credential &amp; Session Risks</a:t>
             </a:r>
           </a:p>
           <a:p>
@@ -6315,7 +8711,7 @@
               </a:defRPr>
             </a:pPr>
             <a:r>
-              <a:t>Insecure registration web applications risk session hijacking, credential leaks, and data breaches.</a:t>
+              <a:t>Legacy forms lack security defenses like CSRF verification, rate limiting, and password strength checks.</a:t>
             </a:r>
           </a:p>
         </p:txBody>
@@ -6399,7 +8795,7 @@
               </a:defRPr>
             </a:pPr>
             <a:r>
-              <a:t>⚡ High User Friction &amp; Dropouts</a:t>
+              <a:t>⚡ High User Friction</a:t>
             </a:r>
           </a:p>
           <a:p>
@@ -6412,7 +8808,7 @@
               </a:defRPr>
             </a:pPr>
             <a:r>
-              <a:t>Complex, single-page application forms without real-time validations result in validation failures and high dropout rates.</a:t>
+              <a:t>Single-page layouts containing hundreds of unorganized inputs confuse candidates, leading to incomplete applications.</a:t>
             </a:r>
           </a:p>
         </p:txBody>
@@ -6496,7 +8892,7 @@
               </a:defRPr>
             </a:pPr>
             <a:r>
-              <a:t>🔌 Third-Party Assets Dependency</a:t>
+              <a:t>🔌 Third-Party Asset Dependency</a:t>
             </a:r>
           </a:p>
           <a:p>
@@ -6509,7 +8905,7 @@
               </a:defRPr>
             </a:pPr>
             <a:r>
-              <a:t>Loading UI symbols/fonts via public CDNs leaves portals open to CSP failures, tracking, and offline loading crashes.</a:t>
+              <a:t>Depending on remote CDNs to fetch fonts and icons violates strict local CSP rules and causes page rendering failures.</a:t>
             </a:r>
           </a:p>
         </p:txBody>
@@ -6631,7 +9027,7 @@
               </a:defRPr>
             </a:pPr>
             <a:r>
-              <a:t>The Proposed Solution: Student Hub</a:t>
+              <a:t>Database Design: ER Model concepts</a:t>
             </a:r>
           </a:p>
         </p:txBody>
@@ -6683,14 +9079,117 @@
       </p:sp>
       <p:sp>
         <p:nvSpPr>
-          <p:cNvPr id="6" name="Rounded Rectangle 5"/>
+          <p:cNvPr id="6" name="TextBox 5"/>
+          <p:cNvSpPr txBox="1"/>
+          <p:nvPr/>
+        </p:nvSpPr>
+        <p:spPr>
+          <a:xfrm>
+            <a:off x="731520" y="1463040"/>
+            <a:ext cx="6858000" cy="4389120"/>
+          </a:xfrm>
+          <a:prstGeom prst="rect">
+            <a:avLst/>
+          </a:prstGeom>
+          <a:noFill/>
+        </p:spPr>
+        <p:txBody>
+          <a:bodyPr wrap="square" lIns="0" tIns="0" bIns="0" rIns="0">
+            <a:spAutoFit/>
+          </a:bodyPr>
+          <a:lstStyle/>
+          <a:p>
+            <a:pPr>
+              <a:spcAft>
+                <a:spcPts val="2000"/>
+              </a:spcAft>
+              <a:defRPr sz="1800">
+                <a:solidFill>
+                  <a:srgbClr val="1C1C1E"/>
+                </a:solidFill>
+                <a:latin typeface="Arial"/>
+              </a:defRPr>
+            </a:pPr>
+            <a:r>
+              <a:t>The Entity-Relationship (ER) model organizes candidates, administrative settings, and course records within an integrated structure.</a:t>
+            </a:r>
+          </a:p>
+          <a:p>
+            <a:pPr>
+              <a:spcBef>
+                <a:spcPts val="1200"/>
+              </a:spcBef>
+              <a:defRPr sz="1500">
+                <a:solidFill>
+                  <a:srgbClr val="1C1C1E"/>
+                </a:solidFill>
+                <a:latin typeface="Arial"/>
+              </a:defRPr>
+            </a:pPr>
+            <a:r>
+              <a:t>👤 Students Entity: Represents the applicant profile, storing personal, address, academic, and security fields.</a:t>
+            </a:r>
+          </a:p>
+          <a:p>
+            <a:pPr>
+              <a:spcBef>
+                <a:spcPts val="1200"/>
+              </a:spcBef>
+              <a:defRPr sz="1500">
+                <a:solidFill>
+                  <a:srgbClr val="1C1C1E"/>
+                </a:solidFill>
+                <a:latin typeface="Arial"/>
+              </a:defRPr>
+            </a:pPr>
+            <a:r>
+              <a:t>🛡️ Admins Entity: Represents the staff credentials, holding unique keys and authorization hashes.</a:t>
+            </a:r>
+          </a:p>
+          <a:p>
+            <a:pPr>
+              <a:spcBef>
+                <a:spcPts val="1200"/>
+              </a:spcBef>
+              <a:defRPr sz="1500">
+                <a:solidFill>
+                  <a:srgbClr val="1C1C1E"/>
+                </a:solidFill>
+                <a:latin typeface="Arial"/>
+              </a:defRPr>
+            </a:pPr>
+            <a:r>
+              <a:t>📊 Relational Constraints: Enforces uniqueness constraints on fields like email and student_id.</a:t>
+            </a:r>
+          </a:p>
+          <a:p>
+            <a:pPr>
+              <a:spcBef>
+                <a:spcPts val="1200"/>
+              </a:spcBef>
+              <a:defRPr sz="1500">
+                <a:solidFill>
+                  <a:srgbClr val="1C1C1E"/>
+                </a:solidFill>
+                <a:latin typeface="Arial"/>
+              </a:defRPr>
+            </a:pPr>
+            <a:r>
+              <a:t>📑 Indices Mapping: Indexes email and student_id keys on database level to speed up search lookups.</a:t>
+            </a:r>
+          </a:p>
+        </p:txBody>
+      </p:sp>
+      <p:sp>
+        <p:nvSpPr>
+          <p:cNvPr id="7" name="Rounded Rectangle 6"/>
           <p:cNvSpPr/>
           <p:nvPr/>
         </p:nvSpPr>
         <p:spPr>
           <a:xfrm>
-            <a:off x="731520" y="1645920"/>
-            <a:ext cx="5212080" cy="1920240"/>
+            <a:off x="8046720" y="1645920"/>
+            <a:ext cx="3383280" cy="4023360"/>
           </a:xfrm>
           <a:prstGeom prst="roundRect">
             <a:avLst/>
@@ -6698,9 +9197,9 @@
           <a:solidFill>
             <a:srgbClr val="F2F2F7"/>
           </a:solidFill>
-          <a:ln w="12700">
+          <a:ln w="19050">
             <a:solidFill>
-              <a:srgbClr val="10B981"/>
+              <a:srgbClr val="D4AF37"/>
             </a:solidFill>
           </a:ln>
         </p:spPr>
@@ -6728,14 +9227,14 @@
       </p:sp>
       <p:sp>
         <p:nvSpPr>
-          <p:cNvPr id="7" name="TextBox 6"/>
+          <p:cNvPr id="8" name="TextBox 7"/>
           <p:cNvSpPr txBox="1"/>
           <p:nvPr/>
         </p:nvSpPr>
         <p:spPr>
           <a:xfrm>
-            <a:off x="914400" y="1783080"/>
-            <a:ext cx="4846320" cy="1645920"/>
+            <a:off x="8321040" y="1920240"/>
+            <a:ext cx="2834640" cy="3474720"/>
           </a:xfrm>
           <a:prstGeom prst="rect">
             <a:avLst/>
@@ -6750,9 +9249,9 @@
           <a:p>
             <a:pPr>
               <a:spcAft>
-                <a:spcPts val="600"/>
+                <a:spcPts val="1600"/>
               </a:spcAft>
-              <a:defRPr sz="1600" b="1">
+              <a:defRPr sz="1400" b="1">
                 <a:solidFill>
                   <a:srgbClr val="00317E"/>
                 </a:solidFill>
@@ -6760,12 +9259,28 @@
               </a:defRPr>
             </a:pPr>
             <a:r>
-              <a:t>⚡ Streamlined 4-Step Form</a:t>
-            </a:r>
-          </a:p>
-          <a:p>
-            <a:pPr>
-              <a:defRPr sz="1300">
+              <a:t>DATABASE ENTITIES</a:t>
+            </a:r>
+          </a:p>
+          <a:p>
+            <a:pPr>
+              <a:spcBef>
+                <a:spcPts val="800"/>
+              </a:spcBef>
+              <a:defRPr sz="1500" b="1">
+                <a:solidFill>
+                  <a:srgbClr val="D4AF37"/>
+                </a:solidFill>
+                <a:latin typeface="Arial"/>
+              </a:defRPr>
+            </a:pPr>
+            <a:r>
+              <a:t>• Students</a:t>
+            </a:r>
+          </a:p>
+          <a:p>
+            <a:pPr>
+              <a:defRPr sz="1150">
                 <a:solidFill>
                   <a:srgbClr val="1C1C1E"/>
                 </a:solidFill>
@@ -6773,96 +9288,28 @@
               </a:defRPr>
             </a:pPr>
             <a:r>
-              <a:t>Replaces complex inputs with a clean wizard interface, keeping cognitive load low and completing files in 3 mins.</a:t>
-            </a:r>
-          </a:p>
-        </p:txBody>
-      </p:sp>
-      <p:sp>
-        <p:nvSpPr>
-          <p:cNvPr id="8" name="Rounded Rectangle 7"/>
-          <p:cNvSpPr/>
-          <p:nvPr/>
-        </p:nvSpPr>
-        <p:spPr>
-          <a:xfrm>
-            <a:off x="6217920" y="1645920"/>
-            <a:ext cx="5212080" cy="1920240"/>
-          </a:xfrm>
-          <a:prstGeom prst="roundRect">
-            <a:avLst/>
-          </a:prstGeom>
-          <a:solidFill>
-            <a:srgbClr val="F2F2F7"/>
-          </a:solidFill>
-          <a:ln w="12700">
-            <a:solidFill>
-              <a:srgbClr val="10B981"/>
-            </a:solidFill>
-          </a:ln>
-        </p:spPr>
-        <p:style>
-          <a:lnRef idx="1">
-            <a:schemeClr val="accent1"/>
-          </a:lnRef>
-          <a:fillRef idx="3">
-            <a:schemeClr val="accent1"/>
-          </a:fillRef>
-          <a:effectRef idx="2">
-            <a:schemeClr val="accent1"/>
-          </a:effectRef>
-          <a:fontRef idx="minor">
-            <a:schemeClr val="lt1"/>
-          </a:fontRef>
-        </p:style>
-        <p:txBody>
-          <a:bodyPr rtlCol="0" anchor="ctr"/>
-          <a:lstStyle/>
-          <a:p>
-            <a:pPr algn="ctr"/>
-          </a:p>
-        </p:txBody>
-      </p:sp>
-      <p:sp>
-        <p:nvSpPr>
-          <p:cNvPr id="9" name="TextBox 8"/>
-          <p:cNvSpPr txBox="1"/>
-          <p:nvPr/>
-        </p:nvSpPr>
-        <p:spPr>
-          <a:xfrm>
-            <a:off x="6400800" y="1783080"/>
-            <a:ext cx="4846320" cy="1645920"/>
-          </a:xfrm>
-          <a:prstGeom prst="rect">
-            <a:avLst/>
-          </a:prstGeom>
-          <a:noFill/>
-        </p:spPr>
-        <p:txBody>
-          <a:bodyPr wrap="square">
-            <a:spAutoFit/>
-          </a:bodyPr>
-          <a:lstStyle/>
-          <a:p>
-            <a:pPr>
-              <a:spcAft>
-                <a:spcPts val="600"/>
-              </a:spcAft>
-              <a:defRPr sz="1600" b="1">
-                <a:solidFill>
-                  <a:srgbClr val="00317E"/>
-                </a:solidFill>
-                <a:latin typeface="Arial"/>
-              </a:defRPr>
-            </a:pPr>
-            <a:r>
-              <a:t>🔒 Multi-Layered Cryptography</a:t>
-            </a:r>
-          </a:p>
-          <a:p>
-            <a:pPr>
-              <a:defRPr sz="1300">
+              <a:t>1-to-1 mapping with accounts. Stores all validation records.</a:t>
+            </a:r>
+          </a:p>
+          <a:p>
+            <a:pPr>
+              <a:spcBef>
+                <a:spcPts val="800"/>
+              </a:spcBef>
+              <a:defRPr sz="1500" b="1">
+                <a:solidFill>
+                  <a:srgbClr val="D4AF37"/>
+                </a:solidFill>
+                <a:latin typeface="Arial"/>
+              </a:defRPr>
+            </a:pPr>
+            <a:r>
+              <a:t>• Admins</a:t>
+            </a:r>
+          </a:p>
+          <a:p>
+            <a:pPr>
+              <a:defRPr sz="1150">
                 <a:solidFill>
                   <a:srgbClr val="1C1C1E"/>
                 </a:solidFill>
@@ -6870,96 +9317,28 @@
               </a:defRPr>
             </a:pPr>
             <a:r>
-              <a:t>Implements Bcrypt hashes, WTForms CSRF validation, Separate session managers, and custom JWT tokens.</a:t>
-            </a:r>
-          </a:p>
-        </p:txBody>
-      </p:sp>
-      <p:sp>
-        <p:nvSpPr>
-          <p:cNvPr id="10" name="Rounded Rectangle 9"/>
-          <p:cNvSpPr/>
-          <p:nvPr/>
-        </p:nvSpPr>
-        <p:spPr>
-          <a:xfrm>
-            <a:off x="731520" y="3931920"/>
-            <a:ext cx="5212080" cy="1920240"/>
-          </a:xfrm>
-          <a:prstGeom prst="roundRect">
-            <a:avLst/>
-          </a:prstGeom>
-          <a:solidFill>
-            <a:srgbClr val="F2F2F7"/>
-          </a:solidFill>
-          <a:ln w="12700">
-            <a:solidFill>
-              <a:srgbClr val="10B981"/>
-            </a:solidFill>
-          </a:ln>
-        </p:spPr>
-        <p:style>
-          <a:lnRef idx="1">
-            <a:schemeClr val="accent1"/>
-          </a:lnRef>
-          <a:fillRef idx="3">
-            <a:schemeClr val="accent1"/>
-          </a:fillRef>
-          <a:effectRef idx="2">
-            <a:schemeClr val="accent1"/>
-          </a:effectRef>
-          <a:fontRef idx="minor">
-            <a:schemeClr val="lt1"/>
-          </a:fontRef>
-        </p:style>
-        <p:txBody>
-          <a:bodyPr rtlCol="0" anchor="ctr"/>
-          <a:lstStyle/>
-          <a:p>
-            <a:pPr algn="ctr"/>
-          </a:p>
-        </p:txBody>
-      </p:sp>
-      <p:sp>
-        <p:nvSpPr>
-          <p:cNvPr id="11" name="TextBox 10"/>
-          <p:cNvSpPr txBox="1"/>
-          <p:nvPr/>
-        </p:nvSpPr>
-        <p:spPr>
-          <a:xfrm>
-            <a:off x="914400" y="4069080"/>
-            <a:ext cx="4846320" cy="1645920"/>
-          </a:xfrm>
-          <a:prstGeom prst="rect">
-            <a:avLst/>
-          </a:prstGeom>
-          <a:noFill/>
-        </p:spPr>
-        <p:txBody>
-          <a:bodyPr wrap="square">
-            <a:spAutoFit/>
-          </a:bodyPr>
-          <a:lstStyle/>
-          <a:p>
-            <a:pPr>
-              <a:spcAft>
-                <a:spcPts val="600"/>
-              </a:spcAft>
-              <a:defRPr sz="1600" b="1">
-                <a:solidFill>
-                  <a:srgbClr val="00317E"/>
-                </a:solidFill>
-                <a:latin typeface="Arial"/>
-              </a:defRPr>
-            </a:pPr>
-            <a:r>
-              <a:t>🌐 100% Local CSP Integration</a:t>
-            </a:r>
-          </a:p>
-          <a:p>
-            <a:pPr>
-              <a:defRPr sz="1300">
+              <a:t>Central controls. Authorization checks protect administrative queries.</a:t>
+            </a:r>
+          </a:p>
+          <a:p>
+            <a:pPr>
+              <a:spcBef>
+                <a:spcPts val="800"/>
+              </a:spcBef>
+              <a:defRPr sz="1500" b="1">
+                <a:solidFill>
+                  <a:srgbClr val="D4AF37"/>
+                </a:solidFill>
+                <a:latin typeface="Arial"/>
+              </a:defRPr>
+            </a:pPr>
+            <a:r>
+              <a:t>• Index Rules</a:t>
+            </a:r>
+          </a:p>
+          <a:p>
+            <a:pPr>
+              <a:defRPr sz="1150">
                 <a:solidFill>
                   <a:srgbClr val="1C1C1E"/>
                 </a:solidFill>
@@ -6967,104 +9346,7 @@
               </a:defRPr>
             </a:pPr>
             <a:r>
-              <a:t>Assets like the Material Symbols font file are self-hosted inside static folders, removing external dependencies.</a:t>
-            </a:r>
-          </a:p>
-        </p:txBody>
-      </p:sp>
-      <p:sp>
-        <p:nvSpPr>
-          <p:cNvPr id="12" name="Rounded Rectangle 11"/>
-          <p:cNvSpPr/>
-          <p:nvPr/>
-        </p:nvSpPr>
-        <p:spPr>
-          <a:xfrm>
-            <a:off x="6217920" y="3931920"/>
-            <a:ext cx="5212080" cy="1920240"/>
-          </a:xfrm>
-          <a:prstGeom prst="roundRect">
-            <a:avLst/>
-          </a:prstGeom>
-          <a:solidFill>
-            <a:srgbClr val="F2F2F7"/>
-          </a:solidFill>
-          <a:ln w="12700">
-            <a:solidFill>
-              <a:srgbClr val="10B981"/>
-            </a:solidFill>
-          </a:ln>
-        </p:spPr>
-        <p:style>
-          <a:lnRef idx="1">
-            <a:schemeClr val="accent1"/>
-          </a:lnRef>
-          <a:fillRef idx="3">
-            <a:schemeClr val="accent1"/>
-          </a:fillRef>
-          <a:effectRef idx="2">
-            <a:schemeClr val="accent1"/>
-          </a:effectRef>
-          <a:fontRef idx="minor">
-            <a:schemeClr val="lt1"/>
-          </a:fontRef>
-        </p:style>
-        <p:txBody>
-          <a:bodyPr rtlCol="0" anchor="ctr"/>
-          <a:lstStyle/>
-          <a:p>
-            <a:pPr algn="ctr"/>
-          </a:p>
-        </p:txBody>
-      </p:sp>
-      <p:sp>
-        <p:nvSpPr>
-          <p:cNvPr id="13" name="TextBox 12"/>
-          <p:cNvSpPr txBox="1"/>
-          <p:nvPr/>
-        </p:nvSpPr>
-        <p:spPr>
-          <a:xfrm>
-            <a:off x="6400800" y="4069080"/>
-            <a:ext cx="4846320" cy="1645920"/>
-          </a:xfrm>
-          <a:prstGeom prst="rect">
-            <a:avLst/>
-          </a:prstGeom>
-          <a:noFill/>
-        </p:spPr>
-        <p:txBody>
-          <a:bodyPr wrap="square">
-            <a:spAutoFit/>
-          </a:bodyPr>
-          <a:lstStyle/>
-          <a:p>
-            <a:pPr>
-              <a:spcAft>
-                <a:spcPts val="600"/>
-              </a:spcAft>
-              <a:defRPr sz="1600" b="1">
-                <a:solidFill>
-                  <a:srgbClr val="00317E"/>
-                </a:solidFill>
-                <a:latin typeface="Arial"/>
-              </a:defRPr>
-            </a:pPr>
-            <a:r>
-              <a:t>📈 Centralized Admin Dashboard</a:t>
-            </a:r>
-          </a:p>
-          <a:p>
-            <a:pPr>
-              <a:defRPr sz="1300">
-                <a:solidFill>
-                  <a:srgbClr val="1C1C1E"/>
-                </a:solidFill>
-                <a:latin typeface="Arial"/>
-              </a:defRPr>
-            </a:pPr>
-            <a:r>
-              <a:t>Provides administrators with real-time sortable tables, candidate editors, CSV exports, and dynamic stats.</a:t>
+              <a:t>Speed-optimizes index lookups on email &amp; student_id.</a:t>
             </a:r>
           </a:p>
         </p:txBody>
@@ -7186,7 +9468,7 @@
               </a:defRPr>
             </a:pPr>
             <a:r>
-              <a:t>System Architecture</a:t>
+              <a:t>Database Schema Architecture</a:t>
             </a:r>
           </a:p>
         </p:txBody>
@@ -7238,22 +9520,125 @@
       </p:sp>
       <p:sp>
         <p:nvSpPr>
-          <p:cNvPr id="6" name="Rectangle 5"/>
+          <p:cNvPr id="6" name="TextBox 5"/>
+          <p:cNvSpPr txBox="1"/>
+          <p:nvPr/>
+        </p:nvSpPr>
+        <p:spPr>
+          <a:xfrm>
+            <a:off x="731520" y="1463040"/>
+            <a:ext cx="5943600" cy="4389120"/>
+          </a:xfrm>
+          <a:prstGeom prst="rect">
+            <a:avLst/>
+          </a:prstGeom>
+          <a:noFill/>
+        </p:spPr>
+        <p:txBody>
+          <a:bodyPr wrap="square" lIns="0" tIns="0" bIns="0" rIns="0">
+            <a:spAutoFit/>
+          </a:bodyPr>
+          <a:lstStyle/>
+          <a:p>
+            <a:pPr>
+              <a:spcAft>
+                <a:spcPts val="1400"/>
+              </a:spcAft>
+              <a:defRPr sz="1800">
+                <a:solidFill>
+                  <a:srgbClr val="1C1C1E"/>
+                </a:solidFill>
+                <a:latin typeface="Arial"/>
+              </a:defRPr>
+            </a:pPr>
+            <a:r>
+              <a:t>The schema implementation maps objects dynamically using Python's SQLAlchemy ORM, ensuring database engine independence.</a:t>
+            </a:r>
+          </a:p>
+          <a:p>
+            <a:pPr>
+              <a:spcBef>
+                <a:spcPts val="1200"/>
+              </a:spcBef>
+              <a:defRPr sz="1450">
+                <a:solidFill>
+                  <a:srgbClr val="1C1C1E"/>
+                </a:solidFill>
+                <a:latin typeface="Arial"/>
+              </a:defRPr>
+            </a:pPr>
+            <a:r>
+              <a:t>🗄️ Dev Database: Runs on SQLite locally via `student_hub.db` file for fast zero-configuration testing.</a:t>
+            </a:r>
+          </a:p>
+          <a:p>
+            <a:pPr>
+              <a:spcBef>
+                <a:spcPts val="1200"/>
+              </a:spcBef>
+              <a:defRPr sz="1450">
+                <a:solidFill>
+                  <a:srgbClr val="1C1C1E"/>
+                </a:solidFill>
+                <a:latin typeface="Arial"/>
+              </a:defRPr>
+            </a:pPr>
+            <a:r>
+              <a:t>🌐 Prod Database: Connects to MySQL 8+ for enterprise workloads with transactions.</a:t>
+            </a:r>
+          </a:p>
+          <a:p>
+            <a:pPr>
+              <a:spcBef>
+                <a:spcPts val="1200"/>
+              </a:spcBef>
+              <a:defRPr sz="1450">
+                <a:solidFill>
+                  <a:srgbClr val="1C1C1E"/>
+                </a:solidFill>
+                <a:latin typeface="Arial"/>
+              </a:defRPr>
+            </a:pPr>
+            <a:r>
+              <a:t>📊 Index Optimization: Adds database B-Tree index constraints: `idx_email` and `idx_student_id` for fast administrative lookup queries.</a:t>
+            </a:r>
+          </a:p>
+          <a:p>
+            <a:pPr>
+              <a:spcBef>
+                <a:spcPts val="1200"/>
+              </a:spcBef>
+              <a:defRPr sz="1450">
+                <a:solidFill>
+                  <a:srgbClr val="1C1C1E"/>
+                </a:solidFill>
+                <a:latin typeface="Arial"/>
+              </a:defRPr>
+            </a:pPr>
+            <a:r>
+              <a:t>⚡ DB Engines: Utilizes MySQL InnoDB engine to ensure foreign key integrity and transactional stability.</a:t>
+            </a:r>
+          </a:p>
+        </p:txBody>
+      </p:sp>
+      <p:sp>
+        <p:nvSpPr>
+          <p:cNvPr id="7" name="Rounded Rectangle 6"/>
           <p:cNvSpPr/>
           <p:nvPr/>
         </p:nvSpPr>
         <p:spPr>
           <a:xfrm>
-            <a:off x="731520" y="1645920"/>
-            <a:ext cx="3429000" cy="4023360"/>
-          </a:xfrm>
-          <a:prstGeom prst="rect">
+            <a:off x="7132320" y="1645920"/>
+            <a:ext cx="4297680" cy="4023360"/>
+          </a:xfrm>
+          <a:prstGeom prst="roundRect">
             <a:avLst/>
           </a:prstGeom>
           <a:solidFill>
-            <a:srgbClr val="F2F2F7"/>
+            <a:srgbClr val="1C1C1E"/>
           </a:solidFill>
-          <a:ln w="19050">
+          <a:ln w="12700">
             <a:solidFill>
               <a:srgbClr val="D4AF37"/>
             </a:solidFill>
@@ -7283,14 +9668,14 @@
       </p:sp>
       <p:sp>
         <p:nvSpPr>
-          <p:cNvPr id="7" name="TextBox 6"/>
+          <p:cNvPr id="8" name="TextBox 7"/>
           <p:cNvSpPr txBox="1"/>
           <p:nvPr/>
         </p:nvSpPr>
         <p:spPr>
           <a:xfrm>
-            <a:off x="868680" y="1828800"/>
-            <a:ext cx="3154680" cy="3657600"/>
+            <a:off x="7269480" y="1828800"/>
+            <a:ext cx="4023360" cy="3657600"/>
           </a:xfrm>
           <a:prstGeom prst="rect">
             <a:avLst/>
@@ -7304,23 +9689,10 @@
           <a:lstStyle/>
           <a:p>
             <a:pPr>
-              <a:defRPr sz="1600" b="1">
-                <a:solidFill>
-                  <a:srgbClr val="00317E"/>
-                </a:solidFill>
-                <a:latin typeface="Arial"/>
-              </a:defRPr>
-            </a:pPr>
-            <a:r>
-              <a:t>📂 VISUAL LAYER</a:t>
-            </a:r>
-          </a:p>
-          <a:p>
-            <a:pPr>
               <a:spcAft>
-                <a:spcPts val="1400"/>
+                <a:spcPts val="1200"/>
               </a:spcAft>
-              <a:defRPr sz="1200" i="1">
+              <a:defRPr sz="1200" b="1">
                 <a:solidFill>
                   <a:srgbClr val="D4AF37"/>
                 </a:solidFill>
@@ -7328,441 +9700,64 @@
               </a:defRPr>
             </a:pPr>
             <a:r>
-              <a:t>Client-Side</a:t>
-            </a:r>
-          </a:p>
-          <a:p>
-            <a:pPr>
-              <a:spcBef>
-                <a:spcPts val="800"/>
-              </a:spcBef>
-              <a:defRPr sz="1300">
-                <a:solidFill>
-                  <a:srgbClr val="1C1C1E"/>
-                </a:solidFill>
-                <a:latin typeface="Arial"/>
-              </a:defRPr>
-            </a:pPr>
-            <a:r>
-              <a:t>• HTML5 semantic structures</a:t>
-            </a:r>
-          </a:p>
-          <a:p>
-            <a:pPr>
-              <a:spcBef>
-                <a:spcPts val="800"/>
-              </a:spcBef>
-              <a:defRPr sz="1300">
-                <a:solidFill>
-                  <a:srgbClr val="1C1C1E"/>
-                </a:solidFill>
-                <a:latin typeface="Arial"/>
-              </a:defRPr>
-            </a:pPr>
-            <a:r>
-              <a:t>• CSS3 custom variables theme</a:t>
-            </a:r>
-          </a:p>
-          <a:p>
-            <a:pPr>
-              <a:spcBef>
-                <a:spcPts val="800"/>
-              </a:spcBef>
-              <a:defRPr sz="1300">
-                <a:solidFill>
-                  <a:srgbClr val="1C1C1E"/>
-                </a:solidFill>
-                <a:latin typeface="Arial"/>
-              </a:defRPr>
-            </a:pPr>
-            <a:r>
-              <a:t>• Vanilla JS state engine</a:t>
-            </a:r>
-          </a:p>
-          <a:p>
-            <a:pPr>
-              <a:spcBef>
-                <a:spcPts val="800"/>
-              </a:spcBef>
-              <a:defRPr sz="1300">
-                <a:solidFill>
-                  <a:srgbClr val="1C1C1E"/>
-                </a:solidFill>
-                <a:latin typeface="Arial"/>
-              </a:defRPr>
-            </a:pPr>
-            <a:r>
-              <a:t>• Local Material Symbols font</a:t>
-            </a:r>
-          </a:p>
-          <a:p>
-            <a:pPr>
-              <a:spcBef>
-                <a:spcPts val="800"/>
-              </a:spcBef>
-              <a:defRPr sz="1300">
-                <a:solidFill>
-                  <a:srgbClr val="1C1C1E"/>
-                </a:solidFill>
-                <a:latin typeface="Arial"/>
-              </a:defRPr>
-            </a:pPr>
-            <a:r>
-              <a:t>• Responsive viewport adapter</a:t>
-            </a:r>
-          </a:p>
-        </p:txBody>
-      </p:sp>
-      <p:sp>
-        <p:nvSpPr>
-          <p:cNvPr id="8" name="Rectangle 7"/>
-          <p:cNvSpPr/>
-          <p:nvPr/>
-        </p:nvSpPr>
-        <p:spPr>
-          <a:xfrm>
-            <a:off x="4389120" y="1645920"/>
-            <a:ext cx="3429000" cy="4023360"/>
-          </a:xfrm>
-          <a:prstGeom prst="rect">
-            <a:avLst/>
-          </a:prstGeom>
-          <a:solidFill>
-            <a:srgbClr val="F2F2F7"/>
-          </a:solidFill>
-          <a:ln w="19050">
-            <a:solidFill>
-              <a:srgbClr val="D4AF37"/>
-            </a:solidFill>
-          </a:ln>
-        </p:spPr>
-        <p:style>
-          <a:lnRef idx="1">
-            <a:schemeClr val="accent1"/>
-          </a:lnRef>
-          <a:fillRef idx="3">
-            <a:schemeClr val="accent1"/>
-          </a:fillRef>
-          <a:effectRef idx="2">
-            <a:schemeClr val="accent1"/>
-          </a:effectRef>
-          <a:fontRef idx="minor">
-            <a:schemeClr val="lt1"/>
-          </a:fontRef>
-        </p:style>
-        <p:txBody>
-          <a:bodyPr rtlCol="0" anchor="ctr"/>
-          <a:lstStyle/>
-          <a:p>
-            <a:pPr algn="ctr"/>
-          </a:p>
-        </p:txBody>
-      </p:sp>
-      <p:sp>
-        <p:nvSpPr>
-          <p:cNvPr id="9" name="TextBox 8"/>
-          <p:cNvSpPr txBox="1"/>
-          <p:nvPr/>
-        </p:nvSpPr>
-        <p:spPr>
-          <a:xfrm>
-            <a:off x="4526280" y="1828800"/>
-            <a:ext cx="3154680" cy="3657600"/>
-          </a:xfrm>
-          <a:prstGeom prst="rect">
-            <a:avLst/>
-          </a:prstGeom>
-          <a:noFill/>
-        </p:spPr>
-        <p:txBody>
-          <a:bodyPr wrap="square">
-            <a:spAutoFit/>
-          </a:bodyPr>
-          <a:lstStyle/>
-          <a:p>
-            <a:pPr>
-              <a:defRPr sz="1600" b="1">
-                <a:solidFill>
-                  <a:srgbClr val="00317E"/>
-                </a:solidFill>
-                <a:latin typeface="Arial"/>
-              </a:defRPr>
-            </a:pPr>
-            <a:r>
-              <a:t>⚙️ LOGIC LAYER</a:t>
-            </a:r>
-          </a:p>
-          <a:p>
-            <a:pPr>
-              <a:spcAft>
-                <a:spcPts val="1400"/>
-              </a:spcAft>
-              <a:defRPr sz="1200" i="1">
-                <a:solidFill>
-                  <a:srgbClr val="D4AF37"/>
-                </a:solidFill>
-                <a:latin typeface="Arial"/>
-              </a:defRPr>
-            </a:pPr>
-            <a:r>
-              <a:t>Server-Side</a:t>
-            </a:r>
-          </a:p>
-          <a:p>
-            <a:pPr>
-              <a:spcBef>
-                <a:spcPts val="800"/>
-              </a:spcBef>
-              <a:defRPr sz="1300">
-                <a:solidFill>
-                  <a:srgbClr val="1C1C1E"/>
-                </a:solidFill>
-                <a:latin typeface="Arial"/>
-              </a:defRPr>
-            </a:pPr>
-            <a:r>
-              <a:t>• Flask 3.0 controller routing</a:t>
-            </a:r>
-          </a:p>
-          <a:p>
-            <a:pPr>
-              <a:spcBef>
-                <a:spcPts val="800"/>
-              </a:spcBef>
-              <a:defRPr sz="1300">
-                <a:solidFill>
-                  <a:srgbClr val="1C1C1E"/>
-                </a:solidFill>
-                <a:latin typeface="Arial"/>
-              </a:defRPr>
-            </a:pPr>
-            <a:r>
-              <a:t>• SQLAlchemy ORM adapter</a:t>
-            </a:r>
-          </a:p>
-          <a:p>
-            <a:pPr>
-              <a:spcBef>
-                <a:spcPts val="800"/>
-              </a:spcBef>
-              <a:defRPr sz="1300">
-                <a:solidFill>
-                  <a:srgbClr val="1C1C1E"/>
-                </a:solidFill>
-                <a:latin typeface="Arial"/>
-              </a:defRPr>
-            </a:pPr>
-            <a:r>
-              <a:t>• Bcrypt passwords generator</a:t>
-            </a:r>
-          </a:p>
-          <a:p>
-            <a:pPr>
-              <a:spcBef>
-                <a:spcPts val="800"/>
-              </a:spcBef>
-              <a:defRPr sz="1300">
-                <a:solidFill>
-                  <a:srgbClr val="1C1C1E"/>
-                </a:solidFill>
-                <a:latin typeface="Arial"/>
-              </a:defRPr>
-            </a:pPr>
-            <a:r>
-              <a:t>• JWT secure API tokens</a:t>
-            </a:r>
-          </a:p>
-          <a:p>
-            <a:pPr>
-              <a:spcBef>
-                <a:spcPts val="800"/>
-              </a:spcBef>
-              <a:defRPr sz="1300">
-                <a:solidFill>
-                  <a:srgbClr val="1C1C1E"/>
-                </a:solidFill>
-                <a:latin typeface="Arial"/>
-              </a:defRPr>
-            </a:pPr>
-            <a:r>
-              <a:t>• Request Audit Logging (audit.py)</a:t>
-            </a:r>
-          </a:p>
-        </p:txBody>
-      </p:sp>
-      <p:sp>
-        <p:nvSpPr>
-          <p:cNvPr id="10" name="Rectangle 9"/>
-          <p:cNvSpPr/>
-          <p:nvPr/>
-        </p:nvSpPr>
-        <p:spPr>
-          <a:xfrm>
-            <a:off x="8046720" y="1645920"/>
-            <a:ext cx="3429000" cy="4023360"/>
-          </a:xfrm>
-          <a:prstGeom prst="rect">
-            <a:avLst/>
-          </a:prstGeom>
-          <a:solidFill>
-            <a:srgbClr val="F2F2F7"/>
-          </a:solidFill>
-          <a:ln w="19050">
-            <a:solidFill>
-              <a:srgbClr val="D4AF37"/>
-            </a:solidFill>
-          </a:ln>
-        </p:spPr>
-        <p:style>
-          <a:lnRef idx="1">
-            <a:schemeClr val="accent1"/>
-          </a:lnRef>
-          <a:fillRef idx="3">
-            <a:schemeClr val="accent1"/>
-          </a:fillRef>
-          <a:effectRef idx="2">
-            <a:schemeClr val="accent1"/>
-          </a:effectRef>
-          <a:fontRef idx="minor">
-            <a:schemeClr val="lt1"/>
-          </a:fontRef>
-        </p:style>
-        <p:txBody>
-          <a:bodyPr rtlCol="0" anchor="ctr"/>
-          <a:lstStyle/>
-          <a:p>
-            <a:pPr algn="ctr"/>
-          </a:p>
-        </p:txBody>
-      </p:sp>
-      <p:sp>
-        <p:nvSpPr>
-          <p:cNvPr id="11" name="TextBox 10"/>
-          <p:cNvSpPr txBox="1"/>
-          <p:nvPr/>
-        </p:nvSpPr>
-        <p:spPr>
-          <a:xfrm>
-            <a:off x="8183880" y="1828800"/>
-            <a:ext cx="3154680" cy="3657600"/>
-          </a:xfrm>
-          <a:prstGeom prst="rect">
-            <a:avLst/>
-          </a:prstGeom>
-          <a:noFill/>
-        </p:spPr>
-        <p:txBody>
-          <a:bodyPr wrap="square">
-            <a:spAutoFit/>
-          </a:bodyPr>
-          <a:lstStyle/>
-          <a:p>
-            <a:pPr>
-              <a:defRPr sz="1600" b="1">
-                <a:solidFill>
-                  <a:srgbClr val="00317E"/>
-                </a:solidFill>
-                <a:latin typeface="Arial"/>
-              </a:defRPr>
-            </a:pPr>
-            <a:r>
-              <a:t>🗄️ STORAGE LAYER</a:t>
-            </a:r>
-          </a:p>
-          <a:p>
-            <a:pPr>
-              <a:spcAft>
-                <a:spcPts val="1400"/>
-              </a:spcAft>
-              <a:defRPr sz="1200" i="1">
-                <a:solidFill>
-                  <a:srgbClr val="D4AF37"/>
-                </a:solidFill>
-                <a:latin typeface="Arial"/>
-              </a:defRPr>
-            </a:pPr>
-            <a:r>
-              <a:t>Database Engine</a:t>
-            </a:r>
-          </a:p>
-          <a:p>
-            <a:pPr>
-              <a:spcBef>
-                <a:spcPts val="800"/>
-              </a:spcBef>
-              <a:defRPr sz="1300">
-                <a:solidFill>
-                  <a:srgbClr val="1C1C1E"/>
-                </a:solidFill>
-                <a:latin typeface="Arial"/>
-              </a:defRPr>
-            </a:pPr>
-            <a:r>
-              <a:t>• SQLite for local testing</a:t>
-            </a:r>
-          </a:p>
-          <a:p>
-            <a:pPr>
-              <a:spcBef>
-                <a:spcPts val="800"/>
-              </a:spcBef>
-              <a:defRPr sz="1300">
-                <a:solidFill>
-                  <a:srgbClr val="1C1C1E"/>
-                </a:solidFill>
-                <a:latin typeface="Arial"/>
-              </a:defRPr>
-            </a:pPr>
-            <a:r>
-              <a:t>• MySQL 8+ for production setup</a:t>
-            </a:r>
-          </a:p>
-          <a:p>
-            <a:pPr>
-              <a:spcBef>
-                <a:spcPts val="800"/>
-              </a:spcBef>
-              <a:defRPr sz="1300">
-                <a:solidFill>
-                  <a:srgbClr val="1C1C1E"/>
-                </a:solidFill>
-                <a:latin typeface="Arial"/>
-              </a:defRPr>
-            </a:pPr>
-            <a:r>
-              <a:t>• Candidate/Admin schemas</a:t>
-            </a:r>
-          </a:p>
-          <a:p>
-            <a:pPr>
-              <a:spcBef>
-                <a:spcPts val="800"/>
-              </a:spcBef>
-              <a:defRPr sz="1300">
-                <a:solidFill>
-                  <a:srgbClr val="1C1C1E"/>
-                </a:solidFill>
-                <a:latin typeface="Arial"/>
-              </a:defRPr>
-            </a:pPr>
-            <a:r>
-              <a:t>• Uniqueness indexes on DB</a:t>
-            </a:r>
-          </a:p>
-          <a:p>
-            <a:pPr>
-              <a:spcBef>
-                <a:spcPts val="800"/>
-              </a:spcBef>
-              <a:defRPr sz="1300">
-                <a:solidFill>
-                  <a:srgbClr val="1C1C1E"/>
-                </a:solidFill>
-                <a:latin typeface="Arial"/>
-              </a:defRPr>
-            </a:pPr>
-            <a:r>
-              <a:t>• Relational catalog tables</a:t>
+              <a:t>RAW SCHEMA SQL SNIPPET</a:t>
+            </a:r>
+          </a:p>
+          <a:p>
+            <a:pPr>
+              <a:lnSpc>
+                <a:spcPct val="115000"/>
+              </a:lnSpc>
+              <a:defRPr sz="950">
+                <a:solidFill>
+                  <a:srgbClr val="10B981"/>
+                </a:solidFill>
+                <a:latin typeface="Courier New"/>
+              </a:defRPr>
+            </a:pPr>
+            <a:r>
+              <a:t>CREATE DATABASE IF NOT EXISTS student_registration;</a:t>
+            </a:r>
+            <a:br/>
+            <a:r>
+              <a:t>USE student_registration;</a:t>
+            </a:r>
+            <a:br/>
+            <a:br/>
+            <a:r>
+              <a:t>CREATE TABLE students (</a:t>
+            </a:r>
+            <a:br/>
+            <a:r>
+              <a:t>  id INT AUTO_INCREMENT PRIMARY KEY,</a:t>
+            </a:r>
+            <a:br/>
+            <a:r>
+              <a:t>  student_id VARCHAR(20) NOT NULL UNIQUE,</a:t>
+            </a:r>
+            <a:br/>
+            <a:r>
+              <a:t>  email VARCHAR(120) NOT NULL UNIQUE,</a:t>
+            </a:r>
+            <a:br/>
+            <a:r>
+              <a:t>  major VARCHAR(100) NOT NULL,</a:t>
+            </a:r>
+            <a:br/>
+            <a:r>
+              <a:t>  password_hash VARCHAR(255) NOT NULL,</a:t>
+            </a:r>
+            <a:br/>
+            <a:r>
+              <a:t>  INDEX idx_email (email),</a:t>
+            </a:r>
+            <a:br/>
+            <a:r>
+              <a:t>  INDEX idx_student_id (student_id)</a:t>
+            </a:r>
+            <a:br/>
+            <a:r>
+              <a:t>) ENGINE=InnoDB DEFAULT CHARSET=utf8mb4;</a:t>
             </a:r>
           </a:p>
         </p:txBody>
@@ -7884,7 +9879,7 @@
               </a:defRPr>
             </a:pPr>
             <a:r>
-              <a:t>Registration Process: Steps 1 &amp; 2</a:t>
+              <a:t>Tables &amp; Relationships: Students Table</a:t>
             </a:r>
           </a:p>
         </p:txBody>
@@ -7934,388 +9929,530 @@
           </a:p>
         </p:txBody>
       </p:sp>
-      <p:sp>
-        <p:nvSpPr>
-          <p:cNvPr id="6" name="Rectangle 5"/>
-          <p:cNvSpPr/>
-          <p:nvPr/>
-        </p:nvSpPr>
-        <p:spPr>
-          <a:xfrm>
-            <a:off x="731520" y="1371600"/>
-            <a:ext cx="10698480" cy="137160"/>
-          </a:xfrm>
-          <a:prstGeom prst="rect">
-            <a:avLst/>
-          </a:prstGeom>
-          <a:solidFill>
-            <a:srgbClr val="F2F2F7"/>
-          </a:solidFill>
-          <a:ln>
-            <a:noFill/>
-          </a:ln>
-        </p:spPr>
-        <p:style>
-          <a:lnRef idx="1">
-            <a:schemeClr val="accent1"/>
-          </a:lnRef>
-          <a:fillRef idx="3">
-            <a:schemeClr val="accent1"/>
-          </a:fillRef>
-          <a:effectRef idx="2">
-            <a:schemeClr val="accent1"/>
-          </a:effectRef>
-          <a:fontRef idx="minor">
-            <a:schemeClr val="lt1"/>
-          </a:fontRef>
-        </p:style>
-        <p:txBody>
-          <a:bodyPr rtlCol="0" anchor="ctr"/>
-          <a:lstStyle/>
-          <a:p>
-            <a:pPr algn="ctr"/>
-          </a:p>
-        </p:txBody>
-      </p:sp>
-      <p:sp>
-        <p:nvSpPr>
-          <p:cNvPr id="7" name="Rectangle 6"/>
-          <p:cNvSpPr/>
-          <p:nvPr/>
-        </p:nvSpPr>
-        <p:spPr>
-          <a:xfrm>
-            <a:off x="731520" y="1371600"/>
-            <a:ext cx="5349240" cy="137160"/>
-          </a:xfrm>
-          <a:prstGeom prst="rect">
-            <a:avLst/>
-          </a:prstGeom>
-          <a:solidFill>
-            <a:srgbClr val="D4AF37"/>
-          </a:solidFill>
-          <a:ln>
-            <a:noFill/>
-          </a:ln>
-        </p:spPr>
-        <p:style>
-          <a:lnRef idx="1">
-            <a:schemeClr val="accent1"/>
-          </a:lnRef>
-          <a:fillRef idx="3">
-            <a:schemeClr val="accent1"/>
-          </a:fillRef>
-          <a:effectRef idx="2">
-            <a:schemeClr val="accent1"/>
-          </a:effectRef>
-          <a:fontRef idx="minor">
-            <a:schemeClr val="lt1"/>
-          </a:fontRef>
-        </p:style>
-        <p:txBody>
-          <a:bodyPr rtlCol="0" anchor="ctr"/>
-          <a:lstStyle/>
-          <a:p>
-            <a:pPr algn="ctr"/>
-          </a:p>
-        </p:txBody>
-      </p:sp>
-      <p:sp>
-        <p:nvSpPr>
-          <p:cNvPr id="8" name="Rounded Rectangle 7"/>
-          <p:cNvSpPr/>
-          <p:nvPr/>
-        </p:nvSpPr>
-        <p:spPr>
-          <a:xfrm>
-            <a:off x="731520" y="1737360"/>
-            <a:ext cx="5120640" cy="4023360"/>
-          </a:xfrm>
-          <a:prstGeom prst="roundRect">
-            <a:avLst/>
-          </a:prstGeom>
-          <a:solidFill>
-            <a:srgbClr val="F2F2F7"/>
-          </a:solidFill>
-          <a:ln w="12700">
-            <a:solidFill>
-              <a:srgbClr val="00317E"/>
-            </a:solidFill>
-          </a:ln>
-        </p:spPr>
-        <p:style>
-          <a:lnRef idx="1">
-            <a:schemeClr val="accent1"/>
-          </a:lnRef>
-          <a:fillRef idx="3">
-            <a:schemeClr val="accent1"/>
-          </a:fillRef>
-          <a:effectRef idx="2">
-            <a:schemeClr val="accent1"/>
-          </a:effectRef>
-          <a:fontRef idx="minor">
-            <a:schemeClr val="lt1"/>
-          </a:fontRef>
-        </p:style>
-        <p:txBody>
-          <a:bodyPr rtlCol="0" anchor="ctr"/>
-          <a:lstStyle/>
-          <a:p>
-            <a:pPr algn="ctr"/>
-          </a:p>
-        </p:txBody>
-      </p:sp>
-      <p:sp>
-        <p:nvSpPr>
-          <p:cNvPr id="9" name="TextBox 8"/>
-          <p:cNvSpPr txBox="1"/>
-          <p:nvPr/>
-        </p:nvSpPr>
-        <p:spPr>
-          <a:xfrm>
-            <a:off x="914400" y="1920240"/>
-            <a:ext cx="4754880" cy="3657600"/>
-          </a:xfrm>
-          <a:prstGeom prst="rect">
-            <a:avLst/>
-          </a:prstGeom>
-          <a:noFill/>
-        </p:spPr>
-        <p:txBody>
-          <a:bodyPr wrap="square">
-            <a:spAutoFit/>
-          </a:bodyPr>
-          <a:lstStyle/>
-          <a:p>
-            <a:pPr>
-              <a:spcAft>
-                <a:spcPts val="1400"/>
-              </a:spcAft>
-              <a:defRPr sz="1800" b="1">
-                <a:solidFill>
-                  <a:srgbClr val="00317E"/>
-                </a:solidFill>
-                <a:latin typeface="Arial"/>
-              </a:defRPr>
-            </a:pPr>
-            <a:r>
-              <a:t>STEP 1: PERSONAL INFORMATION</a:t>
-            </a:r>
-          </a:p>
-          <a:p>
-            <a:pPr>
-              <a:spcBef>
-                <a:spcPts val="1000"/>
-              </a:spcBef>
-              <a:defRPr sz="1400">
-                <a:solidFill>
-                  <a:srgbClr val="1C1C1E"/>
-                </a:solidFill>
-                <a:latin typeface="Arial"/>
-              </a:defRPr>
-            </a:pPr>
-            <a:r>
-              <a:t>👥 Full Identity Fields: First and Last Name entries.</a:t>
-            </a:r>
-          </a:p>
-          <a:p>
-            <a:pPr>
-              <a:spcBef>
-                <a:spcPts val="1000"/>
-              </a:spcBef>
-              <a:defRPr sz="1400">
-                <a:solidFill>
-                  <a:srgbClr val="1C1C1E"/>
-                </a:solidFill>
-                <a:latin typeface="Arial"/>
-              </a:defRPr>
-            </a:pPr>
-            <a:r>
-              <a:t>📅 Date of Birth Validation: Enforces appropriate age validations.</a:t>
-            </a:r>
-          </a:p>
-          <a:p>
-            <a:pPr>
-              <a:spcBef>
-                <a:spcPts val="1000"/>
-              </a:spcBef>
-              <a:defRPr sz="1400">
-                <a:solidFill>
-                  <a:srgbClr val="1C1C1E"/>
-                </a:solidFill>
-                <a:latin typeface="Arial"/>
-              </a:defRPr>
-            </a:pPr>
-            <a:r>
-              <a:t>✉️ Email Verification: Validates format on form focus and checks uniqueness on the DB.</a:t>
-            </a:r>
-          </a:p>
-          <a:p>
-            <a:pPr>
-              <a:spcBef>
-                <a:spcPts val="1000"/>
-              </a:spcBef>
-              <a:defRPr sz="1400">
-                <a:solidFill>
-                  <a:srgbClr val="1C1C1E"/>
-                </a:solidFill>
-                <a:latin typeface="Arial"/>
-              </a:defRPr>
-            </a:pPr>
-            <a:r>
-              <a:t>📞 Phone Formatter: Enforces correct local phone number formatting patterns.</a:t>
-            </a:r>
-          </a:p>
-        </p:txBody>
-      </p:sp>
-      <p:sp>
-        <p:nvSpPr>
-          <p:cNvPr id="10" name="Rounded Rectangle 9"/>
-          <p:cNvSpPr/>
-          <p:nvPr/>
-        </p:nvSpPr>
-        <p:spPr>
-          <a:xfrm>
-            <a:off x="6309360" y="1737360"/>
-            <a:ext cx="5120640" cy="4023360"/>
-          </a:xfrm>
-          <a:prstGeom prst="roundRect">
-            <a:avLst/>
-          </a:prstGeom>
-          <a:solidFill>
-            <a:srgbClr val="F2F2F7"/>
-          </a:solidFill>
-          <a:ln w="12700">
-            <a:solidFill>
-              <a:srgbClr val="00317E"/>
-            </a:solidFill>
-          </a:ln>
-        </p:spPr>
-        <p:style>
-          <a:lnRef idx="1">
-            <a:schemeClr val="accent1"/>
-          </a:lnRef>
-          <a:fillRef idx="3">
-            <a:schemeClr val="accent1"/>
-          </a:fillRef>
-          <a:effectRef idx="2">
-            <a:schemeClr val="accent1"/>
-          </a:effectRef>
-          <a:fontRef idx="minor">
-            <a:schemeClr val="lt1"/>
-          </a:fontRef>
-        </p:style>
-        <p:txBody>
-          <a:bodyPr rtlCol="0" anchor="ctr"/>
-          <a:lstStyle/>
-          <a:p>
-            <a:pPr algn="ctr"/>
-          </a:p>
-        </p:txBody>
-      </p:sp>
-      <p:sp>
-        <p:nvSpPr>
-          <p:cNvPr id="11" name="TextBox 10"/>
-          <p:cNvSpPr txBox="1"/>
-          <p:nvPr/>
-        </p:nvSpPr>
-        <p:spPr>
-          <a:xfrm>
-            <a:off x="6492240" y="1920240"/>
-            <a:ext cx="4754880" cy="3657600"/>
-          </a:xfrm>
-          <a:prstGeom prst="rect">
-            <a:avLst/>
-          </a:prstGeom>
-          <a:noFill/>
-        </p:spPr>
-        <p:txBody>
-          <a:bodyPr wrap="square">
-            <a:spAutoFit/>
-          </a:bodyPr>
-          <a:lstStyle/>
-          <a:p>
-            <a:pPr>
-              <a:spcAft>
-                <a:spcPts val="1400"/>
-              </a:spcAft>
-              <a:defRPr sz="1800" b="1">
-                <a:solidFill>
-                  <a:srgbClr val="00317E"/>
-                </a:solidFill>
-                <a:latin typeface="Arial"/>
-              </a:defRPr>
-            </a:pPr>
-            <a:r>
-              <a:t>STEP 2: MAILING ADDRESS</a:t>
-            </a:r>
-          </a:p>
-          <a:p>
-            <a:pPr>
-              <a:spcBef>
-                <a:spcPts val="1000"/>
-              </a:spcBef>
-              <a:defRPr sz="1400">
-                <a:solidFill>
-                  <a:srgbClr val="1C1C1E"/>
-                </a:solidFill>
-                <a:latin typeface="Arial"/>
-              </a:defRPr>
-            </a:pPr>
-            <a:r>
-              <a:t>🏠 Street Address: Simple, auto-completable single line field.</a:t>
-            </a:r>
-          </a:p>
-          <a:p>
-            <a:pPr>
-              <a:spcBef>
-                <a:spcPts val="1000"/>
-              </a:spcBef>
-              <a:defRPr sz="1400">
-                <a:solidFill>
-                  <a:srgbClr val="1C1C1E"/>
-                </a:solidFill>
-                <a:latin typeface="Arial"/>
-              </a:defRPr>
-            </a:pPr>
-            <a:r>
-              <a:t>🏙️ City &amp; State Inputs: Splits local municipal registry areas.</a:t>
-            </a:r>
-          </a:p>
-          <a:p>
-            <a:pPr>
-              <a:spcBef>
-                <a:spcPts val="1000"/>
-              </a:spcBef>
-              <a:defRPr sz="1400">
-                <a:solidFill>
-                  <a:srgbClr val="1C1C1E"/>
-                </a:solidFill>
-                <a:latin typeface="Arial"/>
-              </a:defRPr>
-            </a:pPr>
-            <a:r>
-              <a:t>🔢 ZIP / Postal Code Match: Ensures correct numeric zip codes (regex check).</a:t>
-            </a:r>
-          </a:p>
-          <a:p>
-            <a:pPr>
-              <a:spcBef>
-                <a:spcPts val="1000"/>
-              </a:spcBef>
-              <a:defRPr sz="1400">
-                <a:solidFill>
-                  <a:srgbClr val="1C1C1E"/>
-                </a:solidFill>
-                <a:latin typeface="Arial"/>
-              </a:defRPr>
-            </a:pPr>
-            <a:r>
-              <a:t>🌐 Country Selection: Standardized drop-down listing for foreign admissions.</a:t>
-            </a:r>
-          </a:p>
-        </p:txBody>
-      </p:sp>
+      <p:graphicFrame>
+        <p:nvGraphicFramePr>
+          <p:cNvPr id="6" name="Table 5"/>
+          <p:cNvGraphicFramePr>
+            <a:graphicFrameLocks noGrp="1"/>
+          </p:cNvGraphicFramePr>
+          <p:nvPr/>
+        </p:nvGraphicFramePr>
+        <p:xfrm>
+          <a:off x="731520" y="1645920"/>
+          <a:ext cx="10698480" cy="4114800"/>
+        </p:xfrm>
+        <a:graphic>
+          <a:graphicData uri="http://schemas.openxmlformats.org/drawingml/2006/table">
+            <a:tbl>
+              <a:tblPr firstRow="1" bandRow="1">
+                <a:tableStyleId>{5C22544A-7EE6-4342-B048-85BDC9FD1C3A}</a:tableStyleId>
+              </a:tblPr>
+              <a:tblGrid>
+                <a:gridCol w="2286000"/>
+                <a:gridCol w="2560320"/>
+                <a:gridCol w="5852160"/>
+              </a:tblGrid>
+              <a:tr h="587828">
+                <a:tc>
+                  <a:txBody>
+                    <a:bodyPr/>
+                    <a:lstStyle/>
+                    <a:p>
+                      <a:pPr algn="ctr">
+                        <a:defRPr b="1" sz="1500">
+                          <a:solidFill>
+                            <a:srgbClr val="D4AF37"/>
+                          </a:solidFill>
+                        </a:defRPr>
+                      </a:pPr>
+                      <a:r>
+                        <a:t>Column Name</a:t>
+                      </a:r>
+                    </a:p>
+                  </a:txBody>
+                  <a:tcPr>
+                    <a:solidFill>
+                      <a:srgbClr val="00317E"/>
+                    </a:solidFill>
+                  </a:tcPr>
+                </a:tc>
+                <a:tc>
+                  <a:txBody>
+                    <a:bodyPr/>
+                    <a:lstStyle/>
+                    <a:p>
+                      <a:pPr algn="ctr">
+                        <a:defRPr b="1" sz="1500">
+                          <a:solidFill>
+                            <a:srgbClr val="D4AF37"/>
+                          </a:solidFill>
+                        </a:defRPr>
+                      </a:pPr>
+                      <a:r>
+                        <a:t>Data Type &amp; Constraints</a:t>
+                      </a:r>
+                    </a:p>
+                  </a:txBody>
+                  <a:tcPr>
+                    <a:solidFill>
+                      <a:srgbClr val="00317E"/>
+                    </a:solidFill>
+                  </a:tcPr>
+                </a:tc>
+                <a:tc>
+                  <a:txBody>
+                    <a:bodyPr/>
+                    <a:lstStyle/>
+                    <a:p>
+                      <a:pPr algn="ctr">
+                        <a:defRPr b="1" sz="1500">
+                          <a:solidFill>
+                            <a:srgbClr val="D4AF37"/>
+                          </a:solidFill>
+                        </a:defRPr>
+                      </a:pPr>
+                      <a:r>
+                        <a:t>Description / Constraints</a:t>
+                      </a:r>
+                    </a:p>
+                  </a:txBody>
+                  <a:tcPr>
+                    <a:solidFill>
+                      <a:srgbClr val="00317E"/>
+                    </a:solidFill>
+                  </a:tcPr>
+                </a:tc>
+              </a:tr>
+              <a:tr h="587828">
+                <a:tc>
+                  <a:txBody>
+                    <a:bodyPr/>
+                    <a:lstStyle/>
+                    <a:p>
+                      <a:pPr algn="ctr">
+                        <a:defRPr sz="1300" b="1">
+                          <a:solidFill>
+                            <a:srgbClr val="1C1C1E"/>
+                          </a:solidFill>
+                        </a:defRPr>
+                      </a:pPr>
+                      <a:r>
+                        <a:t>id</a:t>
+                      </a:r>
+                    </a:p>
+                  </a:txBody>
+                  <a:tcPr>
+                    <a:solidFill>
+                      <a:srgbClr val="FFFFFF"/>
+                    </a:solidFill>
+                  </a:tcPr>
+                </a:tc>
+                <a:tc>
+                  <a:txBody>
+                    <a:bodyPr/>
+                    <a:lstStyle/>
+                    <a:p>
+                      <a:pPr algn="ctr">
+                        <a:defRPr sz="1300" b="0">
+                          <a:solidFill>
+                            <a:srgbClr val="1C1C1E"/>
+                          </a:solidFill>
+                        </a:defRPr>
+                      </a:pPr>
+                      <a:r>
+                        <a:t>INT AUTO_INCREMENT PRIMARY KEY</a:t>
+                      </a:r>
+                    </a:p>
+                  </a:txBody>
+                  <a:tcPr>
+                    <a:solidFill>
+                      <a:srgbClr val="FFFFFF"/>
+                    </a:solidFill>
+                  </a:tcPr>
+                </a:tc>
+                <a:tc>
+                  <a:txBody>
+                    <a:bodyPr/>
+                    <a:lstStyle/>
+                    <a:p>
+                      <a:pPr>
+                        <a:defRPr sz="1300">
+                          <a:solidFill>
+                            <a:srgbClr val="1C1C1E"/>
+                          </a:solidFill>
+                        </a:defRPr>
+                      </a:pPr>
+                      <a:r>
+                        <a:t>Unique auto-incremented database key.</a:t>
+                      </a:r>
+                    </a:p>
+                  </a:txBody>
+                  <a:tcPr>
+                    <a:solidFill>
+                      <a:srgbClr val="FFFFFF"/>
+                    </a:solidFill>
+                  </a:tcPr>
+                </a:tc>
+              </a:tr>
+              <a:tr h="587828">
+                <a:tc>
+                  <a:txBody>
+                    <a:bodyPr/>
+                    <a:lstStyle/>
+                    <a:p>
+                      <a:pPr algn="ctr">
+                        <a:defRPr sz="1300" b="1">
+                          <a:solidFill>
+                            <a:srgbClr val="1C1C1E"/>
+                          </a:solidFill>
+                        </a:defRPr>
+                      </a:pPr>
+                      <a:r>
+                        <a:t>student_id</a:t>
+                      </a:r>
+                    </a:p>
+                  </a:txBody>
+                  <a:tcPr>
+                    <a:solidFill>
+                      <a:srgbClr val="F2F2F7"/>
+                    </a:solidFill>
+                  </a:tcPr>
+                </a:tc>
+                <a:tc>
+                  <a:txBody>
+                    <a:bodyPr/>
+                    <a:lstStyle/>
+                    <a:p>
+                      <a:pPr algn="ctr">
+                        <a:defRPr sz="1300" b="0">
+                          <a:solidFill>
+                            <a:srgbClr val="1C1C1E"/>
+                          </a:solidFill>
+                        </a:defRPr>
+                      </a:pPr>
+                      <a:r>
+                        <a:t>VARCHAR(20) NOT NULL UNIQUE</a:t>
+                      </a:r>
+                    </a:p>
+                  </a:txBody>
+                  <a:tcPr>
+                    <a:solidFill>
+                      <a:srgbClr val="F2F2F7"/>
+                    </a:solidFill>
+                  </a:tcPr>
+                </a:tc>
+                <a:tc>
+                  <a:txBody>
+                    <a:bodyPr/>
+                    <a:lstStyle/>
+                    <a:p>
+                      <a:pPr>
+                        <a:defRPr sz="1300">
+                          <a:solidFill>
+                            <a:srgbClr val="1C1C1E"/>
+                          </a:solidFill>
+                        </a:defRPr>
+                      </a:pPr>
+                      <a:r>
+                        <a:t>Unique generated registration ID key (STU-YYYY-XXXX).</a:t>
+                      </a:r>
+                    </a:p>
+                  </a:txBody>
+                  <a:tcPr>
+                    <a:solidFill>
+                      <a:srgbClr val="F2F2F7"/>
+                    </a:solidFill>
+                  </a:tcPr>
+                </a:tc>
+              </a:tr>
+              <a:tr h="587828">
+                <a:tc>
+                  <a:txBody>
+                    <a:bodyPr/>
+                    <a:lstStyle/>
+                    <a:p>
+                      <a:pPr algn="ctr">
+                        <a:defRPr sz="1300" b="1">
+                          <a:solidFill>
+                            <a:srgbClr val="1C1C1E"/>
+                          </a:solidFill>
+                        </a:defRPr>
+                      </a:pPr>
+                      <a:r>
+                        <a:t>email</a:t>
+                      </a:r>
+                    </a:p>
+                  </a:txBody>
+                  <a:tcPr>
+                    <a:solidFill>
+                      <a:srgbClr val="FFFFFF"/>
+                    </a:solidFill>
+                  </a:tcPr>
+                </a:tc>
+                <a:tc>
+                  <a:txBody>
+                    <a:bodyPr/>
+                    <a:lstStyle/>
+                    <a:p>
+                      <a:pPr algn="ctr">
+                        <a:defRPr sz="1300" b="0">
+                          <a:solidFill>
+                            <a:srgbClr val="1C1C1E"/>
+                          </a:solidFill>
+                        </a:defRPr>
+                      </a:pPr>
+                      <a:r>
+                        <a:t>VARCHAR(120) NOT NULL UNIQUE</a:t>
+                      </a:r>
+                    </a:p>
+                  </a:txBody>
+                  <a:tcPr>
+                    <a:solidFill>
+                      <a:srgbClr val="FFFFFF"/>
+                    </a:solidFill>
+                  </a:tcPr>
+                </a:tc>
+                <a:tc>
+                  <a:txBody>
+                    <a:bodyPr/>
+                    <a:lstStyle/>
+                    <a:p>
+                      <a:pPr>
+                        <a:defRPr sz="1300">
+                          <a:solidFill>
+                            <a:srgbClr val="1C1C1E"/>
+                          </a:solidFill>
+                        </a:defRPr>
+                      </a:pPr>
+                      <a:r>
+                        <a:t>Candidate email address (indexes speed up sign-in lookup).</a:t>
+                      </a:r>
+                    </a:p>
+                  </a:txBody>
+                  <a:tcPr>
+                    <a:solidFill>
+                      <a:srgbClr val="FFFFFF"/>
+                    </a:solidFill>
+                  </a:tcPr>
+                </a:tc>
+              </a:tr>
+              <a:tr h="587828">
+                <a:tc>
+                  <a:txBody>
+                    <a:bodyPr/>
+                    <a:lstStyle/>
+                    <a:p>
+                      <a:pPr algn="ctr">
+                        <a:defRPr sz="1300" b="1">
+                          <a:solidFill>
+                            <a:srgbClr val="1C1C1E"/>
+                          </a:solidFill>
+                        </a:defRPr>
+                      </a:pPr>
+                      <a:r>
+                        <a:t>major</a:t>
+                      </a:r>
+                    </a:p>
+                  </a:txBody>
+                  <a:tcPr>
+                    <a:solidFill>
+                      <a:srgbClr val="F2F2F7"/>
+                    </a:solidFill>
+                  </a:tcPr>
+                </a:tc>
+                <a:tc>
+                  <a:txBody>
+                    <a:bodyPr/>
+                    <a:lstStyle/>
+                    <a:p>
+                      <a:pPr algn="ctr">
+                        <a:defRPr sz="1300" b="0">
+                          <a:solidFill>
+                            <a:srgbClr val="1C1C1E"/>
+                          </a:solidFill>
+                        </a:defRPr>
+                      </a:pPr>
+                      <a:r>
+                        <a:t>VARCHAR(100) NOT NULL</a:t>
+                      </a:r>
+                    </a:p>
+                  </a:txBody>
+                  <a:tcPr>
+                    <a:solidFill>
+                      <a:srgbClr val="F2F2F7"/>
+                    </a:solidFill>
+                  </a:tcPr>
+                </a:tc>
+                <a:tc>
+                  <a:txBody>
+                    <a:bodyPr/>
+                    <a:lstStyle/>
+                    <a:p>
+                      <a:pPr>
+                        <a:defRPr sz="1300">
+                          <a:solidFill>
+                            <a:srgbClr val="1C1C1E"/>
+                          </a:solidFill>
+                        </a:defRPr>
+                      </a:pPr>
+                      <a:r>
+                        <a:t>Selected major (e.g. Computer Science, Data Science, etc.).</a:t>
+                      </a:r>
+                    </a:p>
+                  </a:txBody>
+                  <a:tcPr>
+                    <a:solidFill>
+                      <a:srgbClr val="F2F2F7"/>
+                    </a:solidFill>
+                  </a:tcPr>
+                </a:tc>
+              </a:tr>
+              <a:tr h="587828">
+                <a:tc>
+                  <a:txBody>
+                    <a:bodyPr/>
+                    <a:lstStyle/>
+                    <a:p>
+                      <a:pPr algn="ctr">
+                        <a:defRPr sz="1300" b="1">
+                          <a:solidFill>
+                            <a:srgbClr val="1C1C1E"/>
+                          </a:solidFill>
+                        </a:defRPr>
+                      </a:pPr>
+                      <a:r>
+                        <a:t>password_hash</a:t>
+                      </a:r>
+                    </a:p>
+                  </a:txBody>
+                  <a:tcPr>
+                    <a:solidFill>
+                      <a:srgbClr val="FFFFFF"/>
+                    </a:solidFill>
+                  </a:tcPr>
+                </a:tc>
+                <a:tc>
+                  <a:txBody>
+                    <a:bodyPr/>
+                    <a:lstStyle/>
+                    <a:p>
+                      <a:pPr algn="ctr">
+                        <a:defRPr sz="1300" b="0">
+                          <a:solidFill>
+                            <a:srgbClr val="1C1C1E"/>
+                          </a:solidFill>
+                        </a:defRPr>
+                      </a:pPr>
+                      <a:r>
+                        <a:t>VARCHAR(255) NOT NULL</a:t>
+                      </a:r>
+                    </a:p>
+                  </a:txBody>
+                  <a:tcPr>
+                    <a:solidFill>
+                      <a:srgbClr val="FFFFFF"/>
+                    </a:solidFill>
+                  </a:tcPr>
+                </a:tc>
+                <a:tc>
+                  <a:txBody>
+                    <a:bodyPr/>
+                    <a:lstStyle/>
+                    <a:p>
+                      <a:pPr>
+                        <a:defRPr sz="1300">
+                          <a:solidFill>
+                            <a:srgbClr val="1C1C1E"/>
+                          </a:solidFill>
+                        </a:defRPr>
+                      </a:pPr>
+                      <a:r>
+                        <a:t>Encrypted password string computed via Bcrypt algorithm.</a:t>
+                      </a:r>
+                    </a:p>
+                  </a:txBody>
+                  <a:tcPr>
+                    <a:solidFill>
+                      <a:srgbClr val="FFFFFF"/>
+                    </a:solidFill>
+                  </a:tcPr>
+                </a:tc>
+              </a:tr>
+              <a:tr h="587832">
+                <a:tc>
+                  <a:txBody>
+                    <a:bodyPr/>
+                    <a:lstStyle/>
+                    <a:p>
+                      <a:pPr algn="ctr">
+                        <a:defRPr sz="1300" b="1">
+                          <a:solidFill>
+                            <a:srgbClr val="1C1C1E"/>
+                          </a:solidFill>
+                        </a:defRPr>
+                      </a:pPr>
+                      <a:r>
+                        <a:t>registration_date</a:t>
+                      </a:r>
+                    </a:p>
+                  </a:txBody>
+                  <a:tcPr>
+                    <a:solidFill>
+                      <a:srgbClr val="F2F2F7"/>
+                    </a:solidFill>
+                  </a:tcPr>
+                </a:tc>
+                <a:tc>
+                  <a:txBody>
+                    <a:bodyPr/>
+                    <a:lstStyle/>
+                    <a:p>
+                      <a:pPr algn="ctr">
+                        <a:defRPr sz="1300" b="0">
+                          <a:solidFill>
+                            <a:srgbClr val="1C1C1E"/>
+                          </a:solidFill>
+                        </a:defRPr>
+                      </a:pPr>
+                      <a:r>
+                        <a:t>DATETIME NOT NULL</a:t>
+                      </a:r>
+                    </a:p>
+                  </a:txBody>
+                  <a:tcPr>
+                    <a:solidFill>
+                      <a:srgbClr val="F2F2F7"/>
+                    </a:solidFill>
+                  </a:tcPr>
+                </a:tc>
+                <a:tc>
+                  <a:txBody>
+                    <a:bodyPr/>
+                    <a:lstStyle/>
+                    <a:p>
+                      <a:pPr>
+                        <a:defRPr sz="1300">
+                          <a:solidFill>
+                            <a:srgbClr val="1C1C1E"/>
+                          </a:solidFill>
+                        </a:defRPr>
+                      </a:pPr>
+                      <a:r>
+                        <a:t>Candidate creation timestamp (Defaults to CURRENT_TIMESTAMP).</a:t>
+                      </a:r>
+                    </a:p>
+                  </a:txBody>
+                  <a:tcPr>
+                    <a:solidFill>
+                      <a:srgbClr val="F2F2F7"/>
+                    </a:solidFill>
+                  </a:tcPr>
+                </a:tc>
+              </a:tr>
+            </a:tbl>
+          </a:graphicData>
+        </a:graphic>
+      </p:graphicFrame>
     </p:spTree>
   </p:cSld>
   <p:clrMapOvr>
@@ -8433,7 +10570,7 @@
               </a:defRPr>
             </a:pPr>
             <a:r>
-              <a:t>Registration Process: Steps 3 &amp; 4</a:t>
+              <a:t>Tables &amp; Relationships: System Tables</a:t>
             </a:r>
           </a:p>
         </p:txBody>
@@ -8485,293 +10622,431 @@
       </p:sp>
       <p:sp>
         <p:nvSpPr>
-          <p:cNvPr id="6" name="Rectangle 5"/>
-          <p:cNvSpPr/>
-          <p:nvPr/>
-        </p:nvSpPr>
-        <p:spPr>
-          <a:xfrm>
-            <a:off x="731520" y="1371600"/>
-            <a:ext cx="10698480" cy="137160"/>
+          <p:cNvPr id="6" name="TextBox 5"/>
+          <p:cNvSpPr txBox="1"/>
+          <p:nvPr/>
+        </p:nvSpPr>
+        <p:spPr>
+          <a:xfrm>
+            <a:off x="731520" y="1463040"/>
+            <a:ext cx="5120640" cy="365760"/>
           </a:xfrm>
           <a:prstGeom prst="rect">
             <a:avLst/>
           </a:prstGeom>
-          <a:solidFill>
-            <a:srgbClr val="F2F2F7"/>
-          </a:solidFill>
-          <a:ln>
-            <a:noFill/>
-          </a:ln>
-        </p:spPr>
-        <p:style>
-          <a:lnRef idx="1">
-            <a:schemeClr val="accent1"/>
-          </a:lnRef>
-          <a:fillRef idx="3">
-            <a:schemeClr val="accent1"/>
-          </a:fillRef>
-          <a:effectRef idx="2">
-            <a:schemeClr val="accent1"/>
-          </a:effectRef>
-          <a:fontRef idx="minor">
-            <a:schemeClr val="lt1"/>
-          </a:fontRef>
-        </p:style>
-        <p:txBody>
-          <a:bodyPr rtlCol="0" anchor="ctr"/>
-          <a:lstStyle/>
-          <a:p>
-            <a:pPr algn="ctr"/>
-          </a:p>
-        </p:txBody>
-      </p:sp>
-      <p:sp>
-        <p:nvSpPr>
-          <p:cNvPr id="7" name="Rectangle 6"/>
-          <p:cNvSpPr/>
-          <p:nvPr/>
-        </p:nvSpPr>
-        <p:spPr>
-          <a:xfrm>
-            <a:off x="731520" y="1371600"/>
-            <a:ext cx="10698480" cy="137160"/>
-          </a:xfrm>
-          <a:prstGeom prst="rect">
-            <a:avLst/>
-          </a:prstGeom>
-          <a:solidFill>
-            <a:srgbClr val="D4AF37"/>
-          </a:solidFill>
-          <a:ln>
-            <a:noFill/>
-          </a:ln>
-        </p:spPr>
-        <p:style>
-          <a:lnRef idx="1">
-            <a:schemeClr val="accent1"/>
-          </a:lnRef>
-          <a:fillRef idx="3">
-            <a:schemeClr val="accent1"/>
-          </a:fillRef>
-          <a:effectRef idx="2">
-            <a:schemeClr val="accent1"/>
-          </a:effectRef>
-          <a:fontRef idx="minor">
-            <a:schemeClr val="lt1"/>
-          </a:fontRef>
-        </p:style>
-        <p:txBody>
-          <a:bodyPr rtlCol="0" anchor="ctr"/>
-          <a:lstStyle/>
-          <a:p>
-            <a:pPr algn="ctr"/>
-          </a:p>
-        </p:txBody>
-      </p:sp>
-      <p:sp>
-        <p:nvSpPr>
-          <p:cNvPr id="8" name="Rounded Rectangle 7"/>
-          <p:cNvSpPr/>
-          <p:nvPr/>
-        </p:nvSpPr>
-        <p:spPr>
-          <a:xfrm>
-            <a:off x="731520" y="1737360"/>
-            <a:ext cx="5120640" cy="4023360"/>
-          </a:xfrm>
-          <a:prstGeom prst="roundRect">
-            <a:avLst/>
-          </a:prstGeom>
-          <a:solidFill>
-            <a:srgbClr val="F2F2F7"/>
-          </a:solidFill>
-          <a:ln w="12700">
-            <a:solidFill>
-              <a:srgbClr val="00317E"/>
-            </a:solidFill>
-          </a:ln>
-        </p:spPr>
-        <p:style>
-          <a:lnRef idx="1">
-            <a:schemeClr val="accent1"/>
-          </a:lnRef>
-          <a:fillRef idx="3">
-            <a:schemeClr val="accent1"/>
-          </a:fillRef>
-          <a:effectRef idx="2">
-            <a:schemeClr val="accent1"/>
-          </a:effectRef>
-          <a:fontRef idx="minor">
-            <a:schemeClr val="lt1"/>
-          </a:fontRef>
-        </p:style>
-        <p:txBody>
-          <a:bodyPr rtlCol="0" anchor="ctr"/>
-          <a:lstStyle/>
-          <a:p>
-            <a:pPr algn="ctr"/>
-          </a:p>
-        </p:txBody>
-      </p:sp>
-      <p:sp>
-        <p:nvSpPr>
-          <p:cNvPr id="9" name="TextBox 8"/>
-          <p:cNvSpPr txBox="1"/>
-          <p:nvPr/>
-        </p:nvSpPr>
-        <p:spPr>
-          <a:xfrm>
-            <a:off x="914400" y="1920240"/>
-            <a:ext cx="4754880" cy="3657600"/>
-          </a:xfrm>
-          <a:prstGeom prst="rect">
-            <a:avLst/>
-          </a:prstGeom>
           <a:noFill/>
         </p:spPr>
         <p:txBody>
-          <a:bodyPr wrap="square">
+          <a:bodyPr wrap="none">
             <a:spAutoFit/>
           </a:bodyPr>
           <a:lstStyle/>
           <a:p>
             <a:pPr>
-              <a:spcAft>
-                <a:spcPts val="1400"/>
-              </a:spcAft>
               <a:defRPr sz="1800" b="1">
                 <a:solidFill>
                   <a:srgbClr val="00317E"/>
                 </a:solidFill>
-                <a:latin typeface="Arial"/>
-              </a:defRPr>
-            </a:pPr>
-            <a:r>
-              <a:t>STEP 3: ACADEMIC DETAILS</a:t>
-            </a:r>
-          </a:p>
-          <a:p>
-            <a:pPr>
-              <a:spcBef>
-                <a:spcPts val="1000"/>
-              </a:spcBef>
-              <a:defRPr sz="1400">
-                <a:solidFill>
-                  <a:srgbClr val="1C1C1E"/>
-                </a:solidFill>
-                <a:latin typeface="Arial"/>
-              </a:defRPr>
-            </a:pPr>
-            <a:r>
-              <a:t>🎓 High School Reference: Logs previous educational history.</a:t>
-            </a:r>
-          </a:p>
-          <a:p>
-            <a:pPr>
-              <a:spcBef>
-                <a:spcPts val="1000"/>
-              </a:spcBef>
-              <a:defRPr sz="1400">
-                <a:solidFill>
-                  <a:srgbClr val="1C1C1E"/>
-                </a:solidFill>
-                <a:latin typeface="Arial"/>
-              </a:defRPr>
-            </a:pPr>
-            <a:r>
-              <a:t>📅 Graduation Year: Collects year details to enforce entry parameters.</a:t>
-            </a:r>
-          </a:p>
-          <a:p>
-            <a:pPr>
-              <a:spcBef>
-                <a:spcPts val="1000"/>
-              </a:spcBef>
-              <a:defRPr sz="1400">
-                <a:solidFill>
-                  <a:srgbClr val="1C1C1E"/>
-                </a:solidFill>
-                <a:latin typeface="Arial"/>
-              </a:defRPr>
-            </a:pPr>
-            <a:r>
-              <a:t>🔬 Selected Major: Drops down options (Computer Science, Data Science, etc.).</a:t>
-            </a:r>
-          </a:p>
-          <a:p>
-            <a:pPr>
-              <a:spcBef>
-                <a:spcPts val="1000"/>
-              </a:spcBef>
-              <a:defRPr sz="1400">
-                <a:solidFill>
-                  <a:srgbClr val="1C1C1E"/>
-                </a:solidFill>
-                <a:latin typeface="Arial"/>
-              </a:defRPr>
-            </a:pPr>
-            <a:r>
-              <a:t>🕒 Enrollment Type: Choice between Full-Time and Part-Time status.</a:t>
-            </a:r>
-          </a:p>
-        </p:txBody>
-      </p:sp>
-      <p:sp>
-        <p:nvSpPr>
-          <p:cNvPr id="10" name="Rounded Rectangle 9"/>
-          <p:cNvSpPr/>
-          <p:nvPr/>
-        </p:nvSpPr>
-        <p:spPr>
-          <a:xfrm>
-            <a:off x="6309360" y="1737360"/>
-            <a:ext cx="5120640" cy="4023360"/>
-          </a:xfrm>
-          <a:prstGeom prst="roundRect">
-            <a:avLst/>
-          </a:prstGeom>
-          <a:solidFill>
-            <a:srgbClr val="F2F2F7"/>
-          </a:solidFill>
-          <a:ln w="12700">
-            <a:solidFill>
-              <a:srgbClr val="00317E"/>
-            </a:solidFill>
-          </a:ln>
-        </p:spPr>
-        <p:style>
-          <a:lnRef idx="1">
-            <a:schemeClr val="accent1"/>
-          </a:lnRef>
-          <a:fillRef idx="3">
-            <a:schemeClr val="accent1"/>
-          </a:fillRef>
-          <a:effectRef idx="2">
-            <a:schemeClr val="accent1"/>
-          </a:effectRef>
-          <a:fontRef idx="minor">
-            <a:schemeClr val="lt1"/>
-          </a:fontRef>
-        </p:style>
-        <p:txBody>
-          <a:bodyPr rtlCol="0" anchor="ctr"/>
-          <a:lstStyle/>
-          <a:p>
-            <a:pPr algn="ctr"/>
-          </a:p>
-        </p:txBody>
-      </p:sp>
-      <p:sp>
-        <p:nvSpPr>
-          <p:cNvPr id="11" name="TextBox 10"/>
+              </a:defRPr>
+            </a:pPr>
+            <a:r>
+              <a:t>Admins Table Schema</a:t>
+            </a:r>
+          </a:p>
+        </p:txBody>
+      </p:sp>
+      <p:graphicFrame>
+        <p:nvGraphicFramePr>
+          <p:cNvPr id="7" name="Table 6"/>
+          <p:cNvGraphicFramePr>
+            <a:graphicFrameLocks noGrp="1"/>
+          </p:cNvGraphicFramePr>
+          <p:nvPr/>
+        </p:nvGraphicFramePr>
+        <p:xfrm>
+          <a:off x="731520" y="1920240"/>
+          <a:ext cx="5120640" cy="2560320"/>
+        </p:xfrm>
+        <a:graphic>
+          <a:graphicData uri="http://schemas.openxmlformats.org/drawingml/2006/table">
+            <a:tbl>
+              <a:tblPr firstRow="1" bandRow="1">
+                <a:tableStyleId>{5C22544A-7EE6-4342-B048-85BDC9FD1C3A}</a:tableStyleId>
+              </a:tblPr>
+              <a:tblGrid>
+                <a:gridCol w="1371600"/>
+                <a:gridCol w="1645920"/>
+                <a:gridCol w="2103120"/>
+              </a:tblGrid>
+              <a:tr h="512064">
+                <a:tc>
+                  <a:txBody>
+                    <a:bodyPr/>
+                    <a:lstStyle/>
+                    <a:p>
+                      <a:pPr algn="ctr">
+                        <a:defRPr b="1" sz="1300">
+                          <a:solidFill>
+                            <a:srgbClr val="D4AF37"/>
+                          </a:solidFill>
+                        </a:defRPr>
+                      </a:pPr>
+                      <a:r>
+                        <a:t>Column</a:t>
+                      </a:r>
+                    </a:p>
+                  </a:txBody>
+                  <a:tcPr>
+                    <a:solidFill>
+                      <a:srgbClr val="00317E"/>
+                    </a:solidFill>
+                  </a:tcPr>
+                </a:tc>
+                <a:tc>
+                  <a:txBody>
+                    <a:bodyPr/>
+                    <a:lstStyle/>
+                    <a:p>
+                      <a:pPr algn="ctr">
+                        <a:defRPr b="1" sz="1300">
+                          <a:solidFill>
+                            <a:srgbClr val="D4AF37"/>
+                          </a:solidFill>
+                        </a:defRPr>
+                      </a:pPr>
+                      <a:r>
+                        <a:t>Type</a:t>
+                      </a:r>
+                    </a:p>
+                  </a:txBody>
+                  <a:tcPr>
+                    <a:solidFill>
+                      <a:srgbClr val="00317E"/>
+                    </a:solidFill>
+                  </a:tcPr>
+                </a:tc>
+                <a:tc>
+                  <a:txBody>
+                    <a:bodyPr/>
+                    <a:lstStyle/>
+                    <a:p>
+                      <a:pPr algn="ctr">
+                        <a:defRPr b="1" sz="1300">
+                          <a:solidFill>
+                            <a:srgbClr val="D4AF37"/>
+                          </a:solidFill>
+                        </a:defRPr>
+                      </a:pPr>
+                      <a:r>
+                        <a:t>Details</a:t>
+                      </a:r>
+                    </a:p>
+                  </a:txBody>
+                  <a:tcPr>
+                    <a:solidFill>
+                      <a:srgbClr val="00317E"/>
+                    </a:solidFill>
+                  </a:tcPr>
+                </a:tc>
+              </a:tr>
+              <a:tr h="512064">
+                <a:tc>
+                  <a:txBody>
+                    <a:bodyPr/>
+                    <a:lstStyle/>
+                    <a:p>
+                      <a:pPr>
+                        <a:defRPr sz="1100">
+                          <a:solidFill>
+                            <a:srgbClr val="1C1C1E"/>
+                          </a:solidFill>
+                        </a:defRPr>
+                      </a:pPr>
+                      <a:r>
+                        <a:t>id</a:t>
+                      </a:r>
+                    </a:p>
+                  </a:txBody>
+                  <a:tcPr>
+                    <a:solidFill>
+                      <a:srgbClr val="FFFFFF"/>
+                    </a:solidFill>
+                  </a:tcPr>
+                </a:tc>
+                <a:tc>
+                  <a:txBody>
+                    <a:bodyPr/>
+                    <a:lstStyle/>
+                    <a:p>
+                      <a:pPr>
+                        <a:defRPr sz="1100">
+                          <a:solidFill>
+                            <a:srgbClr val="1C1C1E"/>
+                          </a:solidFill>
+                        </a:defRPr>
+                      </a:pPr>
+                      <a:r>
+                        <a:t>INT PRIMARY KEY</a:t>
+                      </a:r>
+                    </a:p>
+                  </a:txBody>
+                  <a:tcPr>
+                    <a:solidFill>
+                      <a:srgbClr val="FFFFFF"/>
+                    </a:solidFill>
+                  </a:tcPr>
+                </a:tc>
+                <a:tc>
+                  <a:txBody>
+                    <a:bodyPr/>
+                    <a:lstStyle/>
+                    <a:p>
+                      <a:pPr>
+                        <a:defRPr sz="1100">
+                          <a:solidFill>
+                            <a:srgbClr val="1C1C1E"/>
+                          </a:solidFill>
+                        </a:defRPr>
+                      </a:pPr>
+                      <a:r>
+                        <a:t>PK auto-key</a:t>
+                      </a:r>
+                    </a:p>
+                  </a:txBody>
+                  <a:tcPr>
+                    <a:solidFill>
+                      <a:srgbClr val="FFFFFF"/>
+                    </a:solidFill>
+                  </a:tcPr>
+                </a:tc>
+              </a:tr>
+              <a:tr h="512064">
+                <a:tc>
+                  <a:txBody>
+                    <a:bodyPr/>
+                    <a:lstStyle/>
+                    <a:p>
+                      <a:pPr>
+                        <a:defRPr sz="1100">
+                          <a:solidFill>
+                            <a:srgbClr val="1C1C1E"/>
+                          </a:solidFill>
+                        </a:defRPr>
+                      </a:pPr>
+                      <a:r>
+                        <a:t>username</a:t>
+                      </a:r>
+                    </a:p>
+                  </a:txBody>
+                  <a:tcPr>
+                    <a:solidFill>
+                      <a:srgbClr val="F2F2F7"/>
+                    </a:solidFill>
+                  </a:tcPr>
+                </a:tc>
+                <a:tc>
+                  <a:txBody>
+                    <a:bodyPr/>
+                    <a:lstStyle/>
+                    <a:p>
+                      <a:pPr>
+                        <a:defRPr sz="1100">
+                          <a:solidFill>
+                            <a:srgbClr val="1C1C1E"/>
+                          </a:solidFill>
+                        </a:defRPr>
+                      </a:pPr>
+                      <a:r>
+                        <a:t>VARCHAR(80) UNIQUE</a:t>
+                      </a:r>
+                    </a:p>
+                  </a:txBody>
+                  <a:tcPr>
+                    <a:solidFill>
+                      <a:srgbClr val="F2F2F7"/>
+                    </a:solidFill>
+                  </a:tcPr>
+                </a:tc>
+                <a:tc>
+                  <a:txBody>
+                    <a:bodyPr/>
+                    <a:lstStyle/>
+                    <a:p>
+                      <a:pPr>
+                        <a:defRPr sz="1100">
+                          <a:solidFill>
+                            <a:srgbClr val="1C1C1E"/>
+                          </a:solidFill>
+                        </a:defRPr>
+                      </a:pPr>
+                      <a:r>
+                        <a:t>Unique login ID</a:t>
+                      </a:r>
+                    </a:p>
+                  </a:txBody>
+                  <a:tcPr>
+                    <a:solidFill>
+                      <a:srgbClr val="F2F2F7"/>
+                    </a:solidFill>
+                  </a:tcPr>
+                </a:tc>
+              </a:tr>
+              <a:tr h="512064">
+                <a:tc>
+                  <a:txBody>
+                    <a:bodyPr/>
+                    <a:lstStyle/>
+                    <a:p>
+                      <a:pPr>
+                        <a:defRPr sz="1100">
+                          <a:solidFill>
+                            <a:srgbClr val="1C1C1E"/>
+                          </a:solidFill>
+                        </a:defRPr>
+                      </a:pPr>
+                      <a:r>
+                        <a:t>email</a:t>
+                      </a:r>
+                    </a:p>
+                  </a:txBody>
+                  <a:tcPr>
+                    <a:solidFill>
+                      <a:srgbClr val="FFFFFF"/>
+                    </a:solidFill>
+                  </a:tcPr>
+                </a:tc>
+                <a:tc>
+                  <a:txBody>
+                    <a:bodyPr/>
+                    <a:lstStyle/>
+                    <a:p>
+                      <a:pPr>
+                        <a:defRPr sz="1100">
+                          <a:solidFill>
+                            <a:srgbClr val="1C1C1E"/>
+                          </a:solidFill>
+                        </a:defRPr>
+                      </a:pPr>
+                      <a:r>
+                        <a:t>VARCHAR(120) UNIQUE</a:t>
+                      </a:r>
+                    </a:p>
+                  </a:txBody>
+                  <a:tcPr>
+                    <a:solidFill>
+                      <a:srgbClr val="FFFFFF"/>
+                    </a:solidFill>
+                  </a:tcPr>
+                </a:tc>
+                <a:tc>
+                  <a:txBody>
+                    <a:bodyPr/>
+                    <a:lstStyle/>
+                    <a:p>
+                      <a:pPr>
+                        <a:defRPr sz="1100">
+                          <a:solidFill>
+                            <a:srgbClr val="1C1C1E"/>
+                          </a:solidFill>
+                        </a:defRPr>
+                      </a:pPr>
+                      <a:r>
+                        <a:t>Unique contact</a:t>
+                      </a:r>
+                    </a:p>
+                  </a:txBody>
+                  <a:tcPr>
+                    <a:solidFill>
+                      <a:srgbClr val="FFFFFF"/>
+                    </a:solidFill>
+                  </a:tcPr>
+                </a:tc>
+              </a:tr>
+              <a:tr h="512064">
+                <a:tc>
+                  <a:txBody>
+                    <a:bodyPr/>
+                    <a:lstStyle/>
+                    <a:p>
+                      <a:pPr>
+                        <a:defRPr sz="1100">
+                          <a:solidFill>
+                            <a:srgbClr val="1C1C1E"/>
+                          </a:solidFill>
+                        </a:defRPr>
+                      </a:pPr>
+                      <a:r>
+                        <a:t>password_hash</a:t>
+                      </a:r>
+                    </a:p>
+                  </a:txBody>
+                  <a:tcPr>
+                    <a:solidFill>
+                      <a:srgbClr val="F2F2F7"/>
+                    </a:solidFill>
+                  </a:tcPr>
+                </a:tc>
+                <a:tc>
+                  <a:txBody>
+                    <a:bodyPr/>
+                    <a:lstStyle/>
+                    <a:p>
+                      <a:pPr>
+                        <a:defRPr sz="1100">
+                          <a:solidFill>
+                            <a:srgbClr val="1C1C1E"/>
+                          </a:solidFill>
+                        </a:defRPr>
+                      </a:pPr>
+                      <a:r>
+                        <a:t>VARCHAR(255)</a:t>
+                      </a:r>
+                    </a:p>
+                  </a:txBody>
+                  <a:tcPr>
+                    <a:solidFill>
+                      <a:srgbClr val="F2F2F7"/>
+                    </a:solidFill>
+                  </a:tcPr>
+                </a:tc>
+                <a:tc>
+                  <a:txBody>
+                    <a:bodyPr/>
+                    <a:lstStyle/>
+                    <a:p>
+                      <a:pPr>
+                        <a:defRPr sz="1100">
+                          <a:solidFill>
+                            <a:srgbClr val="1C1C1E"/>
+                          </a:solidFill>
+                        </a:defRPr>
+                      </a:pPr>
+                      <a:r>
+                        <a:t>Bcrypt signature</a:t>
+                      </a:r>
+                    </a:p>
+                  </a:txBody>
+                  <a:tcPr>
+                    <a:solidFill>
+                      <a:srgbClr val="F2F2F7"/>
+                    </a:solidFill>
+                  </a:tcPr>
+                </a:tc>
+              </a:tr>
+            </a:tbl>
+          </a:graphicData>
+        </a:graphic>
+      </p:graphicFrame>
+      <p:sp>
+        <p:nvSpPr>
+          <p:cNvPr id="8" name="TextBox 7"/>
           <p:cNvSpPr txBox="1"/>
           <p:nvPr/>
         </p:nvSpPr>
         <p:spPr>
           <a:xfrm>
-            <a:off x="6492240" y="1920240"/>
-            <a:ext cx="4754880" cy="3657600"/>
+            <a:off x="6309360" y="1463040"/>
+            <a:ext cx="5120640" cy="365760"/>
           </a:xfrm>
           <a:prstGeom prst="rect">
             <a:avLst/>
@@ -8779,16 +11054,433 @@
           <a:noFill/>
         </p:spPr>
         <p:txBody>
-          <a:bodyPr wrap="square">
+          <a:bodyPr wrap="none">
             <a:spAutoFit/>
           </a:bodyPr>
           <a:lstStyle/>
           <a:p>
             <a:pPr>
+              <a:defRPr sz="1800" b="1">
+                <a:solidFill>
+                  <a:srgbClr val="00317E"/>
+                </a:solidFill>
+              </a:defRPr>
+            </a:pPr>
+            <a:r>
+              <a:t>System Relationships Overview</a:t>
+            </a:r>
+          </a:p>
+        </p:txBody>
+      </p:sp>
+      <p:graphicFrame>
+        <p:nvGraphicFramePr>
+          <p:cNvPr id="9" name="Table 8"/>
+          <p:cNvGraphicFramePr>
+            <a:graphicFrameLocks noGrp="1"/>
+          </p:cNvGraphicFramePr>
+          <p:nvPr/>
+        </p:nvGraphicFramePr>
+        <p:xfrm>
+          <a:off x="6309360" y="1920240"/>
+          <a:ext cx="5120640" cy="2560320"/>
+        </p:xfrm>
+        <a:graphic>
+          <a:graphicData uri="http://schemas.openxmlformats.org/drawingml/2006/table">
+            <a:tbl>
+              <a:tblPr firstRow="1" bandRow="1">
+                <a:tableStyleId>{5C22544A-7EE6-4342-B048-85BDC9FD1C3A}</a:tableStyleId>
+              </a:tblPr>
+              <a:tblGrid>
+                <a:gridCol w="1463040"/>
+                <a:gridCol w="1554480"/>
+                <a:gridCol w="2103120"/>
+              </a:tblGrid>
+              <a:tr h="512064">
+                <a:tc>
+                  <a:txBody>
+                    <a:bodyPr/>
+                    <a:lstStyle/>
+                    <a:p>
+                      <a:pPr algn="ctr">
+                        <a:defRPr b="1" sz="1300">
+                          <a:solidFill>
+                            <a:srgbClr val="D4AF37"/>
+                          </a:solidFill>
+                        </a:defRPr>
+                      </a:pPr>
+                      <a:r>
+                        <a:t>Concept</a:t>
+                      </a:r>
+                    </a:p>
+                  </a:txBody>
+                  <a:tcPr>
+                    <a:solidFill>
+                      <a:srgbClr val="00317E"/>
+                    </a:solidFill>
+                  </a:tcPr>
+                </a:tc>
+                <a:tc>
+                  <a:txBody>
+                    <a:bodyPr/>
+                    <a:lstStyle/>
+                    <a:p>
+                      <a:pPr algn="ctr">
+                        <a:defRPr b="1" sz="1300">
+                          <a:solidFill>
+                            <a:srgbClr val="D4AF37"/>
+                          </a:solidFill>
+                        </a:defRPr>
+                      </a:pPr>
+                      <a:r>
+                        <a:t>Security Level</a:t>
+                      </a:r>
+                    </a:p>
+                  </a:txBody>
+                  <a:tcPr>
+                    <a:solidFill>
+                      <a:srgbClr val="00317E"/>
+                    </a:solidFill>
+                  </a:tcPr>
+                </a:tc>
+                <a:tc>
+                  <a:txBody>
+                    <a:bodyPr/>
+                    <a:lstStyle/>
+                    <a:p>
+                      <a:pPr algn="ctr">
+                        <a:defRPr b="1" sz="1300">
+                          <a:solidFill>
+                            <a:srgbClr val="D4AF37"/>
+                          </a:solidFill>
+                        </a:defRPr>
+                      </a:pPr>
+                      <a:r>
+                        <a:t>Description</a:t>
+                      </a:r>
+                    </a:p>
+                  </a:txBody>
+                  <a:tcPr>
+                    <a:solidFill>
+                      <a:srgbClr val="00317E"/>
+                    </a:solidFill>
+                  </a:tcPr>
+                </a:tc>
+              </a:tr>
+              <a:tr h="512064">
+                <a:tc>
+                  <a:txBody>
+                    <a:bodyPr/>
+                    <a:lstStyle/>
+                    <a:p>
+                      <a:pPr>
+                        <a:defRPr sz="1100">
+                          <a:solidFill>
+                            <a:srgbClr val="1C1C1E"/>
+                          </a:solidFill>
+                        </a:defRPr>
+                      </a:pPr>
+                      <a:r>
+                        <a:t>Student -&gt; Session</a:t>
+                      </a:r>
+                    </a:p>
+                  </a:txBody>
+                  <a:tcPr>
+                    <a:solidFill>
+                      <a:srgbClr val="FFFFFF"/>
+                    </a:solidFill>
+                  </a:tcPr>
+                </a:tc>
+                <a:tc>
+                  <a:txBody>
+                    <a:bodyPr/>
+                    <a:lstStyle/>
+                    <a:p>
+                      <a:pPr>
+                        <a:defRPr sz="1100">
+                          <a:solidFill>
+                            <a:srgbClr val="1C1C1E"/>
+                          </a:solidFill>
+                        </a:defRPr>
+                      </a:pPr>
+                      <a:r>
+                        <a:t>Student Cookies</a:t>
+                      </a:r>
+                    </a:p>
+                  </a:txBody>
+                  <a:tcPr>
+                    <a:solidFill>
+                      <a:srgbClr val="FFFFFF"/>
+                    </a:solidFill>
+                  </a:tcPr>
+                </a:tc>
+                <a:tc>
+                  <a:txBody>
+                    <a:bodyPr/>
+                    <a:lstStyle/>
+                    <a:p>
+                      <a:pPr>
+                        <a:defRPr sz="1100">
+                          <a:solidFill>
+                            <a:srgbClr val="1C1C1E"/>
+                          </a:solidFill>
+                        </a:defRPr>
+                      </a:pPr>
+                      <a:r>
+                        <a:t>Isolated cookies protect student credentials.</a:t>
+                      </a:r>
+                    </a:p>
+                  </a:txBody>
+                  <a:tcPr>
+                    <a:solidFill>
+                      <a:srgbClr val="FFFFFF"/>
+                    </a:solidFill>
+                  </a:tcPr>
+                </a:tc>
+              </a:tr>
+              <a:tr h="512064">
+                <a:tc>
+                  <a:txBody>
+                    <a:bodyPr/>
+                    <a:lstStyle/>
+                    <a:p>
+                      <a:pPr>
+                        <a:defRPr sz="1100">
+                          <a:solidFill>
+                            <a:srgbClr val="1C1C1E"/>
+                          </a:solidFill>
+                        </a:defRPr>
+                      </a:pPr>
+                      <a:r>
+                        <a:t>Admin -&gt; Session</a:t>
+                      </a:r>
+                    </a:p>
+                  </a:txBody>
+                  <a:tcPr>
+                    <a:solidFill>
+                      <a:srgbClr val="F2F2F7"/>
+                    </a:solidFill>
+                  </a:tcPr>
+                </a:tc>
+                <a:tc>
+                  <a:txBody>
+                    <a:bodyPr/>
+                    <a:lstStyle/>
+                    <a:p>
+                      <a:pPr>
+                        <a:defRPr sz="1100">
+                          <a:solidFill>
+                            <a:srgbClr val="1C1C1E"/>
+                          </a:solidFill>
+                        </a:defRPr>
+                      </a:pPr>
+                      <a:r>
+                        <a:t>Admin Cookie check</a:t>
+                      </a:r>
+                    </a:p>
+                  </a:txBody>
+                  <a:tcPr>
+                    <a:solidFill>
+                      <a:srgbClr val="F2F2F7"/>
+                    </a:solidFill>
+                  </a:tcPr>
+                </a:tc>
+                <a:tc>
+                  <a:txBody>
+                    <a:bodyPr/>
+                    <a:lstStyle/>
+                    <a:p>
+                      <a:pPr>
+                        <a:defRPr sz="1100">
+                          <a:solidFill>
+                            <a:srgbClr val="1C1C1E"/>
+                          </a:solidFill>
+                        </a:defRPr>
+                      </a:pPr>
+                      <a:r>
+                        <a:t>Enforces access blocks on endpoints.</a:t>
+                      </a:r>
+                    </a:p>
+                  </a:txBody>
+                  <a:tcPr>
+                    <a:solidFill>
+                      <a:srgbClr val="F2F2F7"/>
+                    </a:solidFill>
+                  </a:tcPr>
+                </a:tc>
+              </a:tr>
+              <a:tr h="512064">
+                <a:tc>
+                  <a:txBody>
+                    <a:bodyPr/>
+                    <a:lstStyle/>
+                    <a:p>
+                      <a:pPr>
+                        <a:defRPr sz="1100">
+                          <a:solidFill>
+                            <a:srgbClr val="1C1C1E"/>
+                          </a:solidFill>
+                        </a:defRPr>
+                      </a:pPr>
+                      <a:r>
+                        <a:t>Audit -&gt; Operations</a:t>
+                      </a:r>
+                    </a:p>
+                  </a:txBody>
+                  <a:tcPr>
+                    <a:solidFill>
+                      <a:srgbClr val="FFFFFF"/>
+                    </a:solidFill>
+                  </a:tcPr>
+                </a:tc>
+                <a:tc>
+                  <a:txBody>
+                    <a:bodyPr/>
+                    <a:lstStyle/>
+                    <a:p>
+                      <a:pPr>
+                        <a:defRPr sz="1100">
+                          <a:solidFill>
+                            <a:srgbClr val="1C1C1E"/>
+                          </a:solidFill>
+                        </a:defRPr>
+                      </a:pPr>
+                      <a:r>
+                        <a:t>Backend log file</a:t>
+                      </a:r>
+                    </a:p>
+                  </a:txBody>
+                  <a:tcPr>
+                    <a:solidFill>
+                      <a:srgbClr val="FFFFFF"/>
+                    </a:solidFill>
+                  </a:tcPr>
+                </a:tc>
+                <a:tc>
+                  <a:txBody>
+                    <a:bodyPr/>
+                    <a:lstStyle/>
+                    <a:p>
+                      <a:pPr>
+                        <a:defRPr sz="1100">
+                          <a:solidFill>
+                            <a:srgbClr val="1C1C1E"/>
+                          </a:solidFill>
+                        </a:defRPr>
+                      </a:pPr>
+                      <a:r>
+                        <a:t>Records administrative changes.</a:t>
+                      </a:r>
+                    </a:p>
+                  </a:txBody>
+                  <a:tcPr>
+                    <a:solidFill>
+                      <a:srgbClr val="FFFFFF"/>
+                    </a:solidFill>
+                  </a:tcPr>
+                </a:tc>
+              </a:tr>
+              <a:tr h="512064">
+                <a:tc>
+                  <a:txBody>
+                    <a:bodyPr/>
+                    <a:lstStyle/>
+                    <a:p>
+                      <a:pPr>
+                        <a:defRPr sz="1100">
+                          <a:solidFill>
+                            <a:srgbClr val="1C1C1E"/>
+                          </a:solidFill>
+                        </a:defRPr>
+                      </a:pPr>
+                      <a:r>
+                        <a:t>JWT -&gt; API Stats</a:t>
+                      </a:r>
+                    </a:p>
+                  </a:txBody>
+                  <a:tcPr>
+                    <a:solidFill>
+                      <a:srgbClr val="F2F2F7"/>
+                    </a:solidFill>
+                  </a:tcPr>
+                </a:tc>
+                <a:tc>
+                  <a:txBody>
+                    <a:bodyPr/>
+                    <a:lstStyle/>
+                    <a:p>
+                      <a:pPr>
+                        <a:defRPr sz="1100">
+                          <a:solidFill>
+                            <a:srgbClr val="1C1C1E"/>
+                          </a:solidFill>
+                        </a:defRPr>
+                      </a:pPr>
+                      <a:r>
+                        <a:t>Crypto signature</a:t>
+                      </a:r>
+                    </a:p>
+                  </a:txBody>
+                  <a:tcPr>
+                    <a:solidFill>
+                      <a:srgbClr val="F2F2F7"/>
+                    </a:solidFill>
+                  </a:tcPr>
+                </a:tc>
+                <a:tc>
+                  <a:txBody>
+                    <a:bodyPr/>
+                    <a:lstStyle/>
+                    <a:p>
+                      <a:pPr>
+                        <a:defRPr sz="1100">
+                          <a:solidFill>
+                            <a:srgbClr val="1C1C1E"/>
+                          </a:solidFill>
+                        </a:defRPr>
+                      </a:pPr>
+                      <a:r>
+                        <a:t>Secures analytics lookups.</a:t>
+                      </a:r>
+                    </a:p>
+                  </a:txBody>
+                  <a:tcPr>
+                    <a:solidFill>
+                      <a:srgbClr val="F2F2F7"/>
+                    </a:solidFill>
+                  </a:tcPr>
+                </a:tc>
+              </a:tr>
+            </a:tbl>
+          </a:graphicData>
+        </a:graphic>
+      </p:graphicFrame>
+      <p:sp>
+        <p:nvSpPr>
+          <p:cNvPr id="10" name="TextBox 9"/>
+          <p:cNvSpPr txBox="1"/>
+          <p:nvPr/>
+        </p:nvSpPr>
+        <p:spPr>
+          <a:xfrm>
+            <a:off x="731520" y="4663440"/>
+            <a:ext cx="10698480" cy="1371600"/>
+          </a:xfrm>
+          <a:prstGeom prst="rect">
+            <a:avLst/>
+          </a:prstGeom>
+          <a:noFill/>
+        </p:spPr>
+        <p:txBody>
+          <a:bodyPr wrap="square" lIns="0" tIns="0" bIns="0" rIns="0">
+            <a:spAutoFit/>
+          </a:bodyPr>
+          <a:lstStyle/>
+          <a:p>
+            <a:pPr>
               <a:spcAft>
-                <a:spcPts val="1400"/>
+                <a:spcPts val="400"/>
               </a:spcAft>
-              <a:defRPr sz="1800" b="1">
+              <a:defRPr b="1" sz="1400">
                 <a:solidFill>
                   <a:srgbClr val="00317E"/>
                 </a:solidFill>
@@ -8796,15 +11488,12 @@
               </a:defRPr>
             </a:pPr>
             <a:r>
-              <a:t>STEP 4: ACCOUNT CREATION</a:t>
-            </a:r>
-          </a:p>
-          <a:p>
-            <a:pPr>
-              <a:spcBef>
-                <a:spcPts val="1000"/>
-              </a:spcBef>
-              <a:defRPr sz="1400">
+              <a:t>💡 **Schema Integrity Rules:**</a:t>
+            </a:r>
+          </a:p>
+          <a:p>
+            <a:pPr>
+              <a:defRPr sz="1350">
                 <a:solidFill>
                   <a:srgbClr val="1C1C1E"/>
                 </a:solidFill>
@@ -8812,55 +11501,11 @@
               </a:defRPr>
             </a:pPr>
             <a:r>
-              <a:t>🔑 Password Constraints: Enforces 8+ characters, letters, and numbers.</a:t>
-            </a:r>
-          </a:p>
-          <a:p>
-            <a:pPr>
-              <a:spcBef>
-                <a:spcPts val="1000"/>
-              </a:spcBef>
-              <a:defRPr sz="1400">
-                <a:solidFill>
-                  <a:srgbClr val="1C1C1E"/>
-                </a:solidFill>
-                <a:latin typeface="Arial"/>
-              </a:defRPr>
-            </a:pPr>
-            <a:r>
-              <a:t>📈 Strength Meter Indicator: Visual meter displays password difficulty.</a:t>
-            </a:r>
-          </a:p>
-          <a:p>
-            <a:pPr>
-              <a:spcBef>
-                <a:spcPts val="1000"/>
-              </a:spcBef>
-              <a:defRPr sz="1400">
-                <a:solidFill>
-                  <a:srgbClr val="1C1C1E"/>
-                </a:solidFill>
-                <a:latin typeface="Arial"/>
-              </a:defRPr>
-            </a:pPr>
-            <a:r>
-              <a:t>📃 Terms Agreement check: Ensures compliance with terms and regulations.</a:t>
-            </a:r>
-          </a:p>
-          <a:p>
-            <a:pPr>
-              <a:spcBef>
-                <a:spcPts val="1000"/>
-              </a:spcBef>
-              <a:defRPr sz="1400">
-                <a:solidFill>
-                  <a:srgbClr val="1C1C1E"/>
-                </a:solidFill>
-                <a:latin typeface="Arial"/>
-              </a:defRPr>
-            </a:pPr>
-            <a:r>
-              <a:t>🎓 Dynamic ID Generation: Auto-generates registration key `STU-2026-XXXX`.</a:t>
+              <a:t>• Unique constraints are evaluated by Flask validators before DB operations are attempted.</a:t>
+            </a:r>
+            <a:br/>
+            <a:r>
+              <a:t>• Administrator credentials and regular student credentials are kept separated via dedicated Flask session identifiers, preventing privilege escalation.</a:t>
             </a:r>
           </a:p>
         </p:txBody>
@@ -8982,7 +11627,7 @@
               </a:defRPr>
             </a:pPr>
             <a:r>
-              <a:t>Student Dashboard &amp; User Experience</a:t>
+              <a:t>SQL CRUD Operations: Write Actions</a:t>
             </a:r>
           </a:p>
         </p:txBody>
@@ -9041,7 +11686,7 @@
         <p:spPr>
           <a:xfrm>
             <a:off x="731520" y="1463040"/>
-            <a:ext cx="6858000" cy="4389120"/>
+            <a:ext cx="5486400" cy="4389120"/>
           </a:xfrm>
           <a:prstGeom prst="rect">
             <a:avLst/>
@@ -9066,15 +11711,15 @@
               </a:defRPr>
             </a:pPr>
             <a:r>
-              <a:t>Upon sign-in, students access a personalized portal designed to track their application status and manage their details.</a:t>
+              <a:t>The registration pipeline validates inputs and runs SQL write commands (inserts/updates) through SQLAlchemy transactions.</a:t>
             </a:r>
           </a:p>
           <a:p>
             <a:pPr>
               <a:spcBef>
-                <a:spcPts val="1000"/>
+                <a:spcPts val="1200"/>
               </a:spcBef>
-              <a:defRPr sz="1500">
+              <a:defRPr sz="1450">
                 <a:solidFill>
                   <a:srgbClr val="1C1C1E"/>
                 </a:solidFill>
@@ -9082,15 +11727,15 @@
               </a:defRPr>
             </a:pPr>
             <a:r>
-              <a:t>⭕ Profile Completion Ring: Dynamic SVG ring calculating completeness of inputs.</a:t>
+              <a:t>📥 Candidate Registration: Generates a unique index ID and writes full personal, address, and academic records.</a:t>
             </a:r>
           </a:p>
           <a:p>
             <a:pPr>
               <a:spcBef>
-                <a:spcPts val="1000"/>
+                <a:spcPts val="1200"/>
               </a:spcBef>
-              <a:defRPr sz="1500">
+              <a:defRPr sz="1450">
                 <a:solidFill>
                   <a:srgbClr val="1C1C1E"/>
                 </a:solidFill>
@@ -9098,15 +11743,15 @@
               </a:defRPr>
             </a:pPr>
             <a:r>
-              <a:t>🌓 Interactive Theme Selector: Dark and Light theme toggle, saving selection in `localStorage`.</a:t>
+              <a:t>🔒 Encrypted Write: Computes secure password hashes using Blowfish-based Bcrypt and stores the signature.</a:t>
             </a:r>
           </a:p>
           <a:p>
             <a:pPr>
               <a:spcBef>
-                <a:spcPts val="1000"/>
+                <a:spcPts val="1200"/>
               </a:spcBef>
-              <a:defRPr sz="1500">
+              <a:defRPr sz="1450">
                 <a:solidFill>
                   <a:srgbClr val="1C1C1E"/>
                 </a:solidFill>
@@ -9114,23 +11759,7 @@
               </a:defRPr>
             </a:pPr>
             <a:r>
-              <a:t>📚 Course Catalogs Search: Allows query lookup of available classes and code numbers.</a:t>
-            </a:r>
-          </a:p>
-          <a:p>
-            <a:pPr>
-              <a:spcBef>
-                <a:spcPts val="1000"/>
-              </a:spcBef>
-              <a:defRPr sz="1500">
-                <a:solidFill>
-                  <a:srgbClr val="1C1C1E"/>
-                </a:solidFill>
-                <a:latin typeface="Arial"/>
-              </a:defRPr>
-            </a:pPr>
-            <a:r>
-              <a:t>✏️ Direct Profile Updates: Edit address, phone, and enrollment options anytime.</a:t>
+              <a:t>📝 Candidate Edits: Translates form changes into dynamic SQL update queries.</a:t>
             </a:r>
           </a:p>
         </p:txBody>
@@ -9143,16 +11772,16 @@
         </p:nvSpPr>
         <p:spPr>
           <a:xfrm>
-            <a:off x="8046720" y="1645920"/>
-            <a:ext cx="3383280" cy="4023360"/>
+            <a:off x="6583680" y="1645920"/>
+            <a:ext cx="4846320" cy="4023360"/>
           </a:xfrm>
           <a:prstGeom prst="roundRect">
             <a:avLst/>
           </a:prstGeom>
           <a:solidFill>
-            <a:srgbClr val="F2F2F7"/>
+            <a:srgbClr val="1C1C1E"/>
           </a:solidFill>
-          <a:ln w="19050">
+          <a:ln w="12700">
             <a:solidFill>
               <a:srgbClr val="D4AF37"/>
             </a:solidFill>
@@ -9188,8 +11817,8 @@
         </p:nvSpPr>
         <p:spPr>
           <a:xfrm>
-            <a:off x="8321040" y="1920240"/>
-            <a:ext cx="2834640" cy="3474720"/>
+            <a:off x="6720840" y="1828800"/>
+            <a:ext cx="4572000" cy="3657600"/>
           </a:xfrm>
           <a:prstGeom prst="rect">
             <a:avLst/>
@@ -9204,25 +11833,9 @@
           <a:p>
             <a:pPr>
               <a:spcAft>
-                <a:spcPts val="1600"/>
+                <a:spcPts val="1200"/>
               </a:spcAft>
-              <a:defRPr sz="1400" b="1">
-                <a:solidFill>
-                  <a:srgbClr val="00317E"/>
-                </a:solidFill>
-                <a:latin typeface="Arial"/>
-              </a:defRPr>
-            </a:pPr>
-            <a:r>
-              <a:t>UX INTERACTIONS</a:t>
-            </a:r>
-          </a:p>
-          <a:p>
-            <a:pPr>
-              <a:spcBef>
-                <a:spcPts val="600"/>
-              </a:spcBef>
-              <a:defRPr sz="1500" b="1">
+              <a:defRPr sz="1200" b="1">
                 <a:solidFill>
                   <a:srgbClr val="D4AF37"/>
                 </a:solidFill>
@@ -9230,78 +11843,72 @@
               </a:defRPr>
             </a:pPr>
             <a:r>
-              <a:t>✔ 🎉 Confetti Canvas</a:t>
-            </a:r>
-          </a:p>
-          <a:p>
-            <a:pPr>
-              <a:defRPr sz="1150">
-                <a:solidFill>
-                  <a:srgbClr val="1C1C1E"/>
-                </a:solidFill>
-                <a:latin typeface="Arial"/>
-              </a:defRPr>
-            </a:pPr>
-            <a:r>
-              <a:t>Sparks a celebratory canvas animation upon successful registration.</a:t>
-            </a:r>
-          </a:p>
-          <a:p>
-            <a:pPr>
-              <a:spcBef>
-                <a:spcPts val="600"/>
-              </a:spcBef>
-              <a:defRPr sz="1500" b="1">
-                <a:solidFill>
-                  <a:srgbClr val="D4AF37"/>
-                </a:solidFill>
-                <a:latin typeface="Arial"/>
-              </a:defRPr>
-            </a:pPr>
-            <a:r>
-              <a:t>✔ 📋 One-Click Copy</a:t>
-            </a:r>
-          </a:p>
-          <a:p>
-            <a:pPr>
-              <a:defRPr sz="1150">
-                <a:solidFill>
-                  <a:srgbClr val="1C1C1E"/>
-                </a:solidFill>
-                <a:latin typeface="Arial"/>
-              </a:defRPr>
-            </a:pPr>
-            <a:r>
-              <a:t>Copies the auto-generated student ID with dynamic status labels.</a:t>
-            </a:r>
-          </a:p>
-          <a:p>
-            <a:pPr>
-              <a:spcBef>
-                <a:spcPts val="600"/>
-              </a:spcBef>
-              <a:defRPr sz="1500" b="1">
-                <a:solidFill>
-                  <a:srgbClr val="D4AF37"/>
-                </a:solidFill>
-                <a:latin typeface="Arial"/>
-              </a:defRPr>
-            </a:pPr>
-            <a:r>
-              <a:t>✔ 🔔 Auto-Dismiss Alerts</a:t>
-            </a:r>
-          </a:p>
-          <a:p>
-            <a:pPr>
-              <a:defRPr sz="1150">
-                <a:solidFill>
-                  <a:srgbClr val="1C1C1E"/>
-                </a:solidFill>
-                <a:latin typeface="Arial"/>
-              </a:defRPr>
-            </a:pPr>
-            <a:r>
-              <a:t>Clean JavaScript toasts slides up and auto-fades in 5 seconds.</a:t>
+              <a:t>SQL WRITE STATEMENT SAMPLES</a:t>
+            </a:r>
+          </a:p>
+          <a:p>
+            <a:pPr>
+              <a:lnSpc>
+                <a:spcPct val="115000"/>
+              </a:lnSpc>
+              <a:defRPr sz="950">
+                <a:solidFill>
+                  <a:srgbClr val="10B981"/>
+                </a:solidFill>
+                <a:latin typeface="Courier New"/>
+              </a:defRPr>
+            </a:pPr>
+            <a:r>
+              <a:t>-- Insert a new student record</a:t>
+            </a:r>
+            <a:br/>
+            <a:r>
+              <a:t>INSERT INTO students (</a:t>
+            </a:r>
+            <a:br/>
+            <a:r>
+              <a:t>  student_id, first_name, last_name, email, </a:t>
+            </a:r>
+            <a:br/>
+            <a:r>
+              <a:t>  major, enrollment_type, password_hash</a:t>
+            </a:r>
+            <a:br/>
+            <a:r>
+              <a:t>) VALUES (</a:t>
+            </a:r>
+            <a:br/>
+            <a:r>
+              <a:t>  'STU-2026-A3F9', 'John', 'Doe', 'john.doe@email.com',</a:t>
+            </a:r>
+            <a:br/>
+            <a:r>
+              <a:t>  'Computer Science', 'Full-Time', '$2b$12$R9...'</a:t>
+            </a:r>
+            <a:br/>
+            <a:r>
+              <a:t>);</a:t>
+            </a:r>
+            <a:br/>
+            <a:br/>
+            <a:r>
+              <a:t>-- Update student record</a:t>
+            </a:r>
+            <a:br/>
+            <a:r>
+              <a:t>UPDATE students SET </a:t>
+            </a:r>
+            <a:br/>
+            <a:r>
+              <a:t>  phone = '+1 555-0199',</a:t>
+            </a:r>
+            <a:br/>
+            <a:r>
+              <a:t>  street = '456 Oak Road'</a:t>
+            </a:r>
+            <a:br/>
+            <a:r>
+              <a:t>WHERE student_id = 'STU-2026-A3F9';</a:t>
             </a:r>
           </a:p>
         </p:txBody>
@@ -9423,7 +12030,7 @@
               </a:defRPr>
             </a:pPr>
             <a:r>
-              <a:t>Admin Control Center</a:t>
+              <a:t>SQL CRUD Operations: Read &amp; Analytics</a:t>
             </a:r>
           </a:p>
         </p:txBody>
@@ -9482,7 +12089,7 @@
         <p:spPr>
           <a:xfrm>
             <a:off x="731520" y="1463040"/>
-            <a:ext cx="6858000" cy="4389120"/>
+            <a:ext cx="5486400" cy="4389120"/>
           </a:xfrm>
           <a:prstGeom prst="rect">
             <a:avLst/>
@@ -9507,15 +12114,15 @@
               </a:defRPr>
             </a:pPr>
             <a:r>
-              <a:t>The Administrative interface handles institutional workflows, candidate verification, and exports.</a:t>
+              <a:t>Administrative pages run SQL queries to search records, filter results, and generate analytics.</a:t>
             </a:r>
           </a:p>
           <a:p>
             <a:pPr>
               <a:spcBef>
-                <a:spcPts val="1000"/>
+                <a:spcPts val="1200"/>
               </a:spcBef>
-              <a:defRPr sz="1500">
+              <a:defRPr sz="1450">
                 <a:solidFill>
                   <a:srgbClr val="1C1C1E"/>
                 </a:solidFill>
@@ -9523,15 +12130,15 @@
               </a:defRPr>
             </a:pPr>
             <a:r>
-              <a:t>🔍 Real-time Search: Instant server queries matching student names, emails, or IDs.</a:t>
+              <a:t>🔍 Roster Search Query: Matches search queries against candidate names, email formats, and unique IDs.</a:t>
             </a:r>
           </a:p>
           <a:p>
             <a:pPr>
               <a:spcBef>
-                <a:spcPts val="1000"/>
+                <a:spcPts val="1200"/>
               </a:spcBef>
-              <a:defRPr sz="1500">
+              <a:defRPr sz="1450">
                 <a:solidFill>
                   <a:srgbClr val="1C1C1E"/>
                 </a:solidFill>
@@ -9539,15 +12146,15 @@
               </a:defRPr>
             </a:pPr>
             <a:r>
-              <a:t>🔢 Multi-Column Sorting: Sort dynamic tabular records by Date, Major, or ID.</a:t>
+              <a:t>📊 Dynamic Aggregations: Computes enrollment totals and groups records by academic major.</a:t>
             </a:r>
           </a:p>
           <a:p>
             <a:pPr>
               <a:spcBef>
-                <a:spcPts val="1000"/>
+                <a:spcPts val="1200"/>
               </a:spcBef>
-              <a:defRPr sz="1500">
+              <a:defRPr sz="1450">
                 <a:solidFill>
                   <a:srgbClr val="1C1C1E"/>
                 </a:solidFill>
@@ -9555,23 +12162,7 @@
               </a:defRPr>
             </a:pPr>
             <a:r>
-              <a:t>📝 Candidate Detail Editors: Override graduation details, enrollment status, or majors.</a:t>
-            </a:r>
-          </a:p>
-          <a:p>
-            <a:pPr>
-              <a:spcBef>
-                <a:spcPts val="1000"/>
-              </a:spcBef>
-              <a:defRPr sz="1500">
-                <a:solidFill>
-                  <a:srgbClr val="1C1C1E"/>
-                </a:solidFill>
-                <a:latin typeface="Arial"/>
-              </a:defRPr>
-            </a:pPr>
-            <a:r>
-              <a:t>📥 CSV Directory Exporter: One-click export download of the student roster.</a:t>
+              <a:t>🔐 Token Credentials Verification: Validates account passwords and matches Bcrypt hashes during login.</a:t>
             </a:r>
           </a:p>
         </p:txBody>
@@ -9584,18 +12175,18 @@
         </p:nvSpPr>
         <p:spPr>
           <a:xfrm>
-            <a:off x="8046720" y="1645920"/>
-            <a:ext cx="3383280" cy="4023360"/>
+            <a:off x="6583680" y="1645920"/>
+            <a:ext cx="4846320" cy="4023360"/>
           </a:xfrm>
           <a:prstGeom prst="roundRect">
             <a:avLst/>
           </a:prstGeom>
           <a:solidFill>
-            <a:srgbClr val="F2F2F7"/>
+            <a:srgbClr val="1C1C1E"/>
           </a:solidFill>
-          <a:ln w="19050">
+          <a:ln w="12700">
             <a:solidFill>
-              <a:srgbClr val="00317E"/>
+              <a:srgbClr val="D4AF37"/>
             </a:solidFill>
           </a:ln>
         </p:spPr>
@@ -9629,8 +12220,8 @@
         </p:nvSpPr>
         <p:spPr>
           <a:xfrm>
-            <a:off x="8321040" y="1920240"/>
-            <a:ext cx="2834640" cy="3474720"/>
+            <a:off x="6720840" y="1828800"/>
+            <a:ext cx="4572000" cy="3657600"/>
           </a:xfrm>
           <a:prstGeom prst="rect">
             <a:avLst/>
@@ -9645,9 +12236,9 @@
           <a:p>
             <a:pPr>
               <a:spcAft>
-                <a:spcPts val="1400"/>
+                <a:spcPts val="1200"/>
               </a:spcAft>
-              <a:defRPr sz="1400" b="1">
+              <a:defRPr sz="1200" b="1">
                 <a:solidFill>
                   <a:srgbClr val="D4AF37"/>
                 </a:solidFill>
@@ -9655,124 +12246,62 @@
               </a:defRPr>
             </a:pPr>
             <a:r>
-              <a:t>ADMIN PORTAL INFO</a:t>
-            </a:r>
-          </a:p>
-          <a:p>
-            <a:pPr>
-              <a:defRPr sz="1300" b="1">
-                <a:solidFill>
-                  <a:srgbClr val="00317E"/>
-                </a:solidFill>
-                <a:latin typeface="Arial"/>
-              </a:defRPr>
-            </a:pPr>
-            <a:r>
-              <a:t>• 🔒 Endpoint Location</a:t>
-            </a:r>
-          </a:p>
-          <a:p>
-            <a:pPr>
-              <a:spcAft>
-                <a:spcPts val="400"/>
-              </a:spcAft>
-              <a:defRPr sz="1150">
-                <a:solidFill>
-                  <a:srgbClr val="1C1C1E"/>
+              <a:t>SQL READ &amp; ANALYTICS SAMPLES</a:t>
+            </a:r>
+          </a:p>
+          <a:p>
+            <a:pPr>
+              <a:lnSpc>
+                <a:spcPct val="115000"/>
+              </a:lnSpc>
+              <a:defRPr sz="950">
+                <a:solidFill>
+                  <a:srgbClr val="10B981"/>
                 </a:solidFill>
                 <a:latin typeface="Courier New"/>
               </a:defRPr>
             </a:pPr>
             <a:r>
-              <a:t>https://f0e3e2dbe03207.lhr.life/admin</a:t>
-            </a:r>
-          </a:p>
-          <a:p>
-            <a:pPr>
-              <a:defRPr sz="1300" b="1">
-                <a:solidFill>
-                  <a:srgbClr val="00317E"/>
-                </a:solidFill>
-                <a:latin typeface="Arial"/>
-              </a:defRPr>
-            </a:pPr>
-            <a:r>
-              <a:t>• 📧 Default Email</a:t>
-            </a:r>
-          </a:p>
-          <a:p>
-            <a:pPr>
-              <a:spcAft>
-                <a:spcPts val="400"/>
-              </a:spcAft>
-              <a:defRPr sz="1150">
-                <a:solidFill>
-                  <a:srgbClr val="1C1C1E"/>
-                </a:solidFill>
-                <a:latin typeface="Courier New"/>
-              </a:defRPr>
-            </a:pPr>
-            <a:r>
-              <a:t>admin@school.com</a:t>
-            </a:r>
-          </a:p>
-          <a:p>
-            <a:pPr>
-              <a:defRPr sz="1300" b="1">
-                <a:solidFill>
-                  <a:srgbClr val="00317E"/>
-                </a:solidFill>
-                <a:latin typeface="Arial"/>
-              </a:defRPr>
-            </a:pPr>
-            <a:r>
-              <a:t>• 🔑 Default Password</a:t>
-            </a:r>
-          </a:p>
-          <a:p>
-            <a:pPr>
-              <a:spcAft>
-                <a:spcPts val="400"/>
-              </a:spcAft>
-              <a:defRPr sz="1150">
-                <a:solidFill>
-                  <a:srgbClr val="1C1C1E"/>
-                </a:solidFill>
-                <a:latin typeface="Arial"/>
-              </a:defRPr>
-            </a:pPr>
-            <a:r>
-              <a:t>Admin123!</a:t>
-            </a:r>
-          </a:p>
-          <a:p>
-            <a:pPr>
-              <a:defRPr sz="1300" b="1">
-                <a:solidFill>
-                  <a:srgbClr val="00317E"/>
-                </a:solidFill>
-                <a:latin typeface="Arial"/>
-              </a:defRPr>
-            </a:pPr>
-            <a:r>
-              <a:t>• 🛡️ Session Lock</a:t>
-            </a:r>
-          </a:p>
-          <a:p>
-            <a:pPr>
-              <a:spcAft>
-                <a:spcPts val="400"/>
-              </a:spcAft>
-              <a:defRPr sz="1150">
-                <a:solidFill>
-                  <a:srgbClr val="1C1C1E"/>
-                </a:solidFill>
-                <a:latin typeface="Arial"/>
-              </a:defRPr>
-            </a:pPr>
-            <a:r>
-              <a:t>Flask Session Cookie: Lax + Secure</a:t>
-            </a:r>
+              <a:t>-- Administrative dynamic search &amp; sort</a:t>
+            </a:r>
+            <a:br/>
+            <a:r>
+              <a:t>SELECT * FROM students </a:t>
+            </a:r>
+            <a:br/>
+            <a:r>
+              <a:t>WHERE (first_name LIKE '%John%' </a:t>
+            </a:r>
+            <a:br/>
+            <a:r>
+              <a:t>   OR email LIKE '%John%'</a:t>
+            </a:r>
+            <a:br/>
+            <a:r>
+              <a:t>   OR student_id = 'John')</a:t>
+            </a:r>
+            <a:br/>
+            <a:r>
+              <a:t>ORDER BY registration_date DESC;</a:t>
+            </a:r>
+            <a:br/>
+            <a:br/>
+            <a:r>
+              <a:t>-- Major breakdown aggregation query</a:t>
+            </a:r>
+            <a:br/>
+            <a:r>
+              <a:t>SELECT major, COUNT(*) AS enrollments </a:t>
+            </a:r>
+            <a:br/>
+            <a:r>
+              <a:t>FROM students </a:t>
+            </a:r>
+            <a:br/>
+            <a:r>
+              <a:t>GROUP BY major;</a:t>
+            </a:r>
+            <a:br/>
           </a:p>
         </p:txBody>
       </p:sp>

--- a/Student_Registration_Presentation.pptx
+++ b/Student_Registration_Presentation.pptx
@@ -3427,7 +3427,7 @@
               </a:defRPr>
             </a:pPr>
             <a:r>
-              <a:t>Frontend Design System</a:t>
+              <a:t>Frontend UI: Design System &amp; Styling</a:t>
             </a:r>
           </a:p>
         </p:txBody>
@@ -3511,7 +3511,7 @@
               </a:defRPr>
             </a:pPr>
             <a:r>
-              <a:t>The design system uses CSS variables to ensure brand consistency across light and dark modes.</a:t>
+              <a:t>Student Hub features a premium, responsive frontend design system inspired by the Apple Human Interface Guidelines.</a:t>
             </a:r>
           </a:p>
           <a:p>
@@ -3527,7 +3527,7 @@
               </a:defRPr>
             </a:pPr>
             <a:r>
-              <a:t>🎨 Primary Branded Colorways: Navy Blue (`#00317e`) representing security and Gold (`#D4AF37`) representing academic achievement.</a:t>
+              <a:t>🎨 Color Palette: Navy Blue (`#00317e`) representing authority and Gold (`#D4AF37`) representing academic excellence.</a:t>
             </a:r>
           </a:p>
           <a:p>
@@ -3543,7 +3543,7 @@
               </a:defRPr>
             </a:pPr>
             <a:r>
-              <a:t>🌓 System-wide Dark Mode: Changes styles dynamically using `[data-theme='dark']` settings and saves user choice.</a:t>
+              <a:t>🌓 Seamless Dark Mode: Implements dynamic dark styles via `[data-theme='dark']` and saves preference in `localStorage`.</a:t>
             </a:r>
           </a:p>
           <a:p>
@@ -3559,7 +3559,7 @@
               </a:defRPr>
             </a:pPr>
             <a:r>
-              <a:t>🖥️ Layout Elements: Premium glassmorphism cards, blur navigation bars, and rounded pill containers.</a:t>
+              <a:t>📱 Modern CSS Layouts: Fluid typography clamping, flexbox layouts, glassmorphism cards, and responsive viewports.</a:t>
             </a:r>
           </a:p>
           <a:p>
@@ -3575,7 +3575,7 @@
               </a:defRPr>
             </a:pPr>
             <a:r>
-              <a:t>📱 Variable Fonts Scales: System fonts (Inter, Public Sans) scale dynamically for clean readability.</a:t>
+              <a:t>♿ Accessibility Touch Targets: Minimum `44px x 44px` targets throughout for easy mobile tap interactions.</a:t>
             </a:r>
           </a:p>
         </p:txBody>
@@ -3926,7 +3926,7 @@
               </a:defRPr>
             </a:pPr>
             <a:r>
-              <a:t>The Interface Wizard Screens</a:t>
+              <a:t>Frontend UI: Multi-Step Registration Wizard</a:t>
             </a:r>
           </a:p>
         </p:txBody>
@@ -4055,7 +4055,7 @@
               </a:defRPr>
             </a:pPr>
             <a:r>
-              <a:t>Step 1: Identity</a:t>
+              <a:t>Step 1: Personal Info</a:t>
             </a:r>
           </a:p>
           <a:p>
@@ -4068,7 +4068,7 @@
               </a:defRPr>
             </a:pPr>
             <a:r>
-              <a:t>Personal details inputs featuring regex email checks and phone formatting.</a:t>
+              <a:t>First/Last Name, Date of Birth, Gender, Email checks, and formatted Phone inputs.</a:t>
             </a:r>
           </a:p>
         </p:txBody>
@@ -4152,7 +4152,7 @@
               </a:defRPr>
             </a:pPr>
             <a:r>
-              <a:t>Step 2: Location</a:t>
+              <a:t>Step 2: Mailing Address</a:t>
             </a:r>
           </a:p>
           <a:p>
@@ -4165,7 +4165,7 @@
               </a:defRPr>
             </a:pPr>
             <a:r>
-              <a:t>Collects mailing coordinates and postal address details.</a:t>
+              <a:t>Street address, City, State, ZIP code, and Country drop-down configurations.</a:t>
             </a:r>
           </a:p>
         </p:txBody>
@@ -4249,7 +4249,7 @@
               </a:defRPr>
             </a:pPr>
             <a:r>
-              <a:t>Step 3: Program</a:t>
+              <a:t>Step 3: Academic Details</a:t>
             </a:r>
           </a:p>
           <a:p>
@@ -4262,7 +4262,7 @@
               </a:defRPr>
             </a:pPr>
             <a:r>
-              <a:t>Academic selection mapping candidates to specific program majors.</a:t>
+              <a:t>High school name, Graduation year, Major selection, and Enrollment status.</a:t>
             </a:r>
           </a:p>
         </p:txBody>
@@ -4346,7 +4346,7 @@
               </a:defRPr>
             </a:pPr>
             <a:r>
-              <a:t>Step 4: Account</a:t>
+              <a:t>Step 4: Create Account</a:t>
             </a:r>
           </a:p>
           <a:p>
@@ -4359,7 +4359,7 @@
               </a:defRPr>
             </a:pPr>
             <a:r>
-              <a:t>Password meter validation and dynamic registration code generation.</a:t>
+              <a:t>Password inputs with a real-time strength checker and terms acceptance checkboxes.</a:t>
             </a:r>
           </a:p>
         </p:txBody>
@@ -4390,7 +4390,7 @@
               <a:spcAft>
                 <a:spcPts val="400"/>
               </a:spcAft>
-              <a:defRPr b="1" sz="1400">
+              <a:defRPr b="1">
                 <a:solidFill>
                   <a:srgbClr val="00317E"/>
                 </a:solidFill>
@@ -4398,7 +4398,7 @@
               </a:defRPr>
             </a:pPr>
             <a:r>
-              <a:t>💡 **User Experience Features:**</a:t>
+              <a:t>💡 **User Experience Logic:**</a:t>
             </a:r>
           </a:p>
           <a:p>
@@ -4411,11 +4411,11 @@
               </a:defRPr>
             </a:pPr>
             <a:r>
-              <a:t>• Seamless Navigation: Next/Previous controls maintain filled states, reducing user input frustration.</a:t>
+              <a:t>• Multi-Step controller: Uses vanilla ES6 JS state controls to hide/show panels without page refreshes.</a:t>
             </a:r>
             <a:br/>
             <a:r>
-              <a:t>• Form Validation Feedback: Immediate visual alerts are triggered before form submission to ensure database clean writes.</a:t>
+              <a:t>• Smart Error Redirects: If registration validation fails, the script identifies error panels and auto-scrolls to the first error field.</a:t>
             </a:r>
           </a:p>
         </p:txBody>
@@ -4621,7 +4621,7 @@
               </a:defRPr>
             </a:pPr>
             <a:r>
-              <a:t>A core security innovation in Student Hub is the elimination of external content delivery networks (CDNs) for key UI icons.</a:t>
+              <a:t>To eliminate third-party CDN security leaks and support offline deployments, the system self-hosts all design vectors.</a:t>
             </a:r>
           </a:p>
           <a:p>
@@ -4637,7 +4637,7 @@
               </a:defRPr>
             </a:pPr>
             <a:r>
-              <a:t>🔒 Asset Isolation: Serves the Material Symbols font file (`.ttf`) directly from local `/static/fonts` folders.</a:t>
+              <a:t>🔒 Asset Isolation: Stores the `Material Symbols Outlined` variable font (`.ttf`) directly inside `/static/fonts` directories.</a:t>
             </a:r>
           </a:p>
           <a:p>
@@ -4653,7 +4653,7 @@
               </a:defRPr>
             </a:pPr>
             <a:r>
-              <a:t>🛡️ Content Security Policy compliance: Prevents security blocks on external CDN domains by referencing assets from `'self'`.</a:t>
+              <a:t>🛡️ CSP Optimization: Satisfies restrictive Content Security Policies, whitelisting `'self'` for font loads instead of public CDN urls.</a:t>
             </a:r>
           </a:p>
           <a:p>
@@ -4669,7 +4669,7 @@
               </a:defRPr>
             </a:pPr>
             <a:r>
-              <a:t>🔌 Network Independence: The application loads fast in offline local dev, removing the risk of CDN outages.</a:t>
+              <a:t>🔌 Network Autonomy: Guarantees pages render properly and load instantly even when offline.</a:t>
             </a:r>
           </a:p>
           <a:p>
@@ -4685,7 +4685,7 @@
               </a:defRPr>
             </a:pPr>
             <a:r>
-              <a:t>🧩 Dynamic Font Rendering: Retains variable axis settings (optical sizes, fill axis, weights) through pure local CSS rules.</a:t>
+              <a:t>🧩 Variable Font Axes: Maintains clean CSS access to variable axis values (fill axes, weight, optical sizing) locally.</a:t>
             </a:r>
           </a:p>
         </p:txBody>
@@ -4785,7 +4785,7 @@
               </a:defRPr>
             </a:pPr>
             <a:r>
-              <a:t>✔ Download Binary</a:t>
+              <a:t>✔ Font Binary</a:t>
             </a:r>
           </a:p>
           <a:p>
@@ -4798,7 +4798,7 @@
               </a:defRPr>
             </a:pPr>
             <a:r>
-              <a:t>Pulled Google's official variable font file to project disk folders.</a:t>
+              <a:t>Stored MaterialSymbolsOutlined.ttf locally in the static folder.</a:t>
             </a:r>
           </a:p>
           <a:p>
@@ -4827,7 +4827,7 @@
               </a:defRPr>
             </a:pPr>
             <a:r>
-              <a:t>Added @font-face rules mapping families to '/static/fonts/' urls.</a:t>
+              <a:t>Added @font-face rules mapping font url resources to '/static/fonts/'.</a:t>
             </a:r>
           </a:p>
           <a:p>
@@ -4843,7 +4843,7 @@
               </a:defRPr>
             </a:pPr>
             <a:r>
-              <a:t>✔ Strict CSP settings</a:t>
+              <a:t>✔ CSP Lockdown</a:t>
             </a:r>
           </a:p>
           <a:p>
@@ -4856,7 +4856,7 @@
               </a:defRPr>
             </a:pPr>
             <a:r>
-              <a:t>Wiped out external font-src domains, whitelisting 'self' only.</a:t>
+              <a:t>Removed Google Fonts external connections, whitelist only 'self' in CSP.</a:t>
             </a:r>
           </a:p>
         </p:txBody>
@@ -5062,7 +5062,7 @@
               </a:defRPr>
             </a:pPr>
             <a:r>
-              <a:t>Student Hub implements strict backend audit tracking to secure administrative actions and session states.</a:t>
+              <a:t>The application implements strict operational auditing and session controllers to secure user states.</a:t>
             </a:r>
           </a:p>
           <a:p>
@@ -5078,7 +5078,7 @@
               </a:defRPr>
             </a:pPr>
             <a:r>
-              <a:t>🛡️ Separated Session Managers: Employs different authentication flows for Students and Admins, preventing privilege escalation.</a:t>
+              <a:t>🛡️ Role Session Separation: Segregates Admin and Student authentication logic, preventing privilege escalation.</a:t>
             </a:r>
           </a:p>
           <a:p>
@@ -5094,7 +5094,7 @@
               </a:defRPr>
             </a:pPr>
             <a:r>
-              <a:t>📜 Operational Audit Logging: Writes JSON logs (`audit.py`) tracking actions, user context, client IP, and target candidate IDs.</a:t>
+              <a:t>📜 JSON Audit Logging (audit.py): Logs operation payloads, user contexts, Client IPs, and target student IDs.</a:t>
             </a:r>
           </a:p>
           <a:p>
@@ -5110,7 +5110,7 @@
               </a:defRPr>
             </a:pPr>
             <a:r>
-              <a:t>🧹 Input Sanitizer Middleware: Cleans inbound inputs before they reach the DB to block SQL injections and XSS attempts.</a:t>
+              <a:t>🧹 Input Sanitizer: Clears input strings of SQL strings and script tags before processing to block XSS.</a:t>
             </a:r>
           </a:p>
           <a:p>
@@ -5126,7 +5126,7 @@
               </a:defRPr>
             </a:pPr>
             <a:r>
-              <a:t>🔑 Endpoint Token Protections: Protects backend APIs with JWT verification decorators (`@token_required`).</a:t>
+              <a:t>🔑 Token Authentication API: API endpoints use a `@token_required` decorator for JWT authorization.</a:t>
             </a:r>
           </a:p>
         </p:txBody>
@@ -5200,7 +5200,7 @@
           <a:p>
             <a:pPr>
               <a:spcAft>
-                <a:spcPts val="1200"/>
+                <a:spcPts val="1000"/>
               </a:spcAft>
               <a:defRPr sz="1200" b="1">
                 <a:solidFill>
@@ -5210,7 +5210,7 @@
               </a:defRPr>
             </a:pPr>
             <a:r>
-              <a:t>AUDIT LOGGER LOG SAMPLE</a:t>
+              <a:t>JSON AUDIT LOG SAMPLE</a:t>
             </a:r>
           </a:p>
           <a:p>
@@ -5226,11 +5226,11 @@
               </a:defRPr>
             </a:pPr>
             <a:r>
-              <a:t>2026-05-24 10:45:01 [INFO]</a:t>
+              <a:t>{</a:t>
             </a:r>
             <a:br/>
             <a:r>
-              <a:t>AuditLog: {</a:t>
+              <a:t>  "timestamp": "2026-05-24T10:45:01Z",</a:t>
             </a:r>
             <a:br/>
             <a:r>
@@ -5517,7 +5517,7 @@
               </a:defRPr>
             </a:pPr>
             <a:r>
-              <a:t>✨ Hero Canvas Particle Effects</a:t>
+              <a:t>✨ Hero Particle Canvas</a:t>
             </a:r>
           </a:p>
           <a:p>
@@ -5530,7 +5530,7 @@
               </a:defRPr>
             </a:pPr>
             <a:r>
-              <a:t>The index landing page features a custom floating canvas particle background that animates smoothly.</a:t>
+              <a:t>A custom JavaScript-based floating canvas particle background animates dynamically in the hero viewport, creating a premium look.</a:t>
             </a:r>
           </a:p>
         </p:txBody>
@@ -5614,7 +5614,7 @@
               </a:defRPr>
             </a:pPr>
             <a:r>
-              <a:t>⭕ Circular Progress Indicator</a:t>
+              <a:t>⭕ SVG Completion Ring</a:t>
             </a:r>
           </a:p>
           <a:p>
@@ -5627,7 +5627,7 @@
               </a:defRPr>
             </a:pPr>
             <a:r>
-              <a:t>The student dashboard features a dynamic SVG completion ring that updates based on profile fields filled.</a:t>
+              <a:t>The student dashboard displays an interactive SVG completion ring, calculating the percentage of completed profile fields.</a:t>
             </a:r>
           </a:p>
         </p:txBody>
@@ -5711,7 +5711,7 @@
               </a:defRPr>
             </a:pPr>
             <a:r>
-              <a:t>🎉 Confetti Overlay Celebration</a:t>
+              <a:t>🎉 Confetti Celebration</a:t>
             </a:r>
           </a:p>
           <a:p>
@@ -5724,7 +5724,7 @@
               </a:defRPr>
             </a:pPr>
             <a:r>
-              <a:t>When registration finishes, the confirmation screen triggers a confetti celebration to welcome the user.</a:t>
+              <a:t>Triggers a full-screen canvas confetti animation upon successful form submission to welcome new students.</a:t>
             </a:r>
           </a:p>
         </p:txBody>
@@ -5808,7 +5808,7 @@
               </a:defRPr>
             </a:pPr>
             <a:r>
-              <a:t>🌓 Dark &amp; Light Modes Visuals</a:t>
+              <a:t>🌓 Dark &amp; Light Modes</a:t>
             </a:r>
           </a:p>
           <a:p>
@@ -5821,7 +5821,7 @@
               </a:defRPr>
             </a:pPr>
             <a:r>
-              <a:t>Responsive navigation and card templates change theme immediately without page reloads.</a:t>
+              <a:t>Changes design templates instantly using CSS variables when the dark/light mode toggle is clicked.</a:t>
             </a:r>
           </a:p>
         </p:txBody>
@@ -5943,7 +5943,7 @@
               </a:defRPr>
             </a:pPr>
             <a:r>
-              <a:t>Output Screens: Admin Console &amp; KPI Charts</a:t>
+              <a:t>Output Screens: Admin Panel &amp; Analytics</a:t>
             </a:r>
           </a:p>
         </p:txBody>
@@ -6043,7 +6043,7 @@
               </a:defRPr>
             </a:pPr>
             <a:r>
-              <a:t>📊 KPI Overview Panels: Quick-view cards display totals, course catalogs, and registration types.</a:t>
+              <a:t>📊 KPI Analytics Summary Cards: Displays total student enrollment numbers, active courses, and status counts.</a:t>
             </a:r>
           </a:p>
           <a:p>
@@ -6059,7 +6059,7 @@
               </a:defRPr>
             </a:pPr>
             <a:r>
-              <a:t>📈 Visual Major Charts: Rendered dynamically via Chart.js from real-time database counts.</a:t>
+              <a:t>📈 Chart.js Charting: Renders real-time graphs breakdown of academic majors.</a:t>
             </a:r>
           </a:p>
           <a:p>
@@ -6075,7 +6075,7 @@
               </a:defRPr>
             </a:pPr>
             <a:r>
-              <a:t>👥 Searchable Candidate Table: Sorts, filters, and searches entries by Name, ID, or Major.</a:t>
+              <a:t>👥 Dynamic Searchable Table: Administrators can search entries by ID, email, or name instantly.</a:t>
             </a:r>
           </a:p>
           <a:p>
@@ -6091,7 +6091,7 @@
               </a:defRPr>
             </a:pPr>
             <a:r>
-              <a:t>📥 Dynamic CSV Downloader: One-click export download of the student roster.</a:t>
+              <a:t>📥 CSV Directory Export: Enables downloading the full student database in CSV format with one click.</a:t>
             </a:r>
           </a:p>
         </p:txBody>
@@ -6175,7 +6175,7 @@
               </a:defRPr>
             </a:pPr>
             <a:r>
-              <a:t>ADMIN VIEWS</a:t>
+              <a:t>STATS API DATA (/api/stats)</a:t>
             </a:r>
           </a:p>
           <a:p>
@@ -6191,7 +6191,7 @@
               </a:defRPr>
             </a:pPr>
             <a:r>
-              <a:t>✔ Enrollment Stats</a:t>
+              <a:t>✔ JSON Response</a:t>
             </a:r>
           </a:p>
           <a:p>
@@ -6204,7 +6204,7 @@
               </a:defRPr>
             </a:pPr>
             <a:r>
-              <a:t>Real-time count of total students enrolled and majors breakdown.</a:t>
+              <a:t>Served dynamically to feed metrics to the landing page counts.</a:t>
             </a:r>
           </a:p>
           <a:p>
@@ -6220,7 +6220,7 @@
               </a:defRPr>
             </a:pPr>
             <a:r>
-              <a:t>✔ Search / Sort Table</a:t>
+              <a:t>✔ Majors Breakdown</a:t>
             </a:r>
           </a:p>
           <a:p>
@@ -6233,7 +6233,7 @@
               </a:defRPr>
             </a:pPr>
             <a:r>
-              <a:t>Tabular display with multi-column sorting and filtering options.</a:t>
+              <a:t>Calculates percentage distribution of registered programs.</a:t>
             </a:r>
           </a:p>
           <a:p>
@@ -6262,7 +6262,7 @@
               </a:defRPr>
             </a:pPr>
             <a:r>
-              <a:t>Generates and triggers download of student records in CSV format.</a:t>
+              <a:t>Downloads full candidate registry databases on user request.</a:t>
             </a:r>
           </a:p>
         </p:txBody>
@@ -6513,7 +6513,7 @@
               </a:defRPr>
             </a:pPr>
             <a:r>
-              <a:t>ADVANTAGES</a:t>
+              <a:t>SYSTEM ADVANTAGES</a:t>
             </a:r>
           </a:p>
           <a:p>
@@ -6529,7 +6529,7 @@
               </a:defRPr>
             </a:pPr>
             <a:r>
-              <a:t>⭐ Clean User Interface: Multi-step layout reduces user input cognitive fatigue.</a:t>
+              <a:t>⭐ 90% Processing Speedup: Reduces active registration times from 30 minutes to under 2.5 minutes.</a:t>
             </a:r>
           </a:p>
           <a:p>
@@ -6545,7 +6545,7 @@
               </a:defRPr>
             </a:pPr>
             <a:r>
-              <a:t>⭐ Local Resource Assets: Bypassing external CDN calls improves speed and CSP safety.</a:t>
+              <a:t>⭐ Self-Hosted Design System: Serves assets locally, securing page rendering and CSP compliance.</a:t>
             </a:r>
           </a:p>
           <a:p>
@@ -6561,7 +6561,7 @@
               </a:defRPr>
             </a:pPr>
             <a:r>
-              <a:t>⭐ Comprehensive Security: Integrates Bcrypt, CSRF tokens, rate limiters, and CSP.</a:t>
+              <a:t>⭐ Parameterized SQL Safety: SQLAlchemy ORM prevents raw injections.</a:t>
             </a:r>
           </a:p>
           <a:p>
@@ -6577,7 +6577,7 @@
               </a:defRPr>
             </a:pPr>
             <a:r>
-              <a:t>⭐ Centralized Roster Controls: Allows easy student directory updates and CSV exports.</a:t>
+              <a:t>⭐ Clean Administrative Flow: CSV exports and stats dashboards reduce manual staff workloads by ~70%.</a:t>
             </a:r>
           </a:p>
         </p:txBody>
@@ -6661,7 +6661,7 @@
               </a:defRPr>
             </a:pPr>
             <a:r>
-              <a:t>LIMITATIONS</a:t>
+              <a:t>SYSTEM LIMITATIONS</a:t>
             </a:r>
           </a:p>
           <a:p>
@@ -6677,7 +6677,7 @@
               </a:defRPr>
             </a:pPr>
             <a:r>
-              <a:t>⚠️ Session Cookies: Relies on HTTP-only session cookies; session state is lost on browser logout.</a:t>
+              <a:t>⚠️ Browser State Cookie dependency: Session attributes are lost if cookies are cleared.</a:t>
             </a:r>
           </a:p>
           <a:p>
@@ -6693,7 +6693,7 @@
               </a:defRPr>
             </a:pPr>
             <a:r>
-              <a:t>⚠️ JS Dependent: Visual animations and transitions require JavaScript support to render properly.</a:t>
+              <a:t>⚠️ JavaScript dependent: Client validation checks and UI transitions require JS to be enabled.</a:t>
             </a:r>
           </a:p>
           <a:p>
@@ -6709,7 +6709,7 @@
               </a:defRPr>
             </a:pPr>
             <a:r>
-              <a:t>⚠️ Local Server Testing: SQLite configurations are designed for local developer environments.</a:t>
+              <a:t>⚠️ SQLite single-instance: Default SQLite setup is limited to local developer environments.</a:t>
             </a:r>
           </a:p>
           <a:p>
@@ -6725,7 +6725,7 @@
               </a:defRPr>
             </a:pPr>
             <a:r>
-              <a:t>⚠️ Administrative Authority: Lacks advanced multi-tier admin role permission trees.</a:t>
+              <a:t>⚠️ Multi-Institution Restriction: Lacks support for multi-tenancy configurations.</a:t>
             </a:r>
           </a:p>
         </p:txBody>
@@ -6931,7 +6931,7 @@
               </a:defRPr>
             </a:pPr>
             <a:r>
-              <a:t>Student Hub successfully digitizes university admission processes, delivering a fast, highly secure, and user-friendly experience.</a:t>
+              <a:t>Student Hub successfully digitizes university registration processes, providing a secure, responsive, and audit-compliant application.</a:t>
             </a:r>
           </a:p>
           <a:p>
@@ -6947,7 +6947,7 @@
               </a:defRPr>
             </a:pPr>
             <a:r>
-              <a:t>🏆 Automated Registration: Speeds up file compilation and enrollment tracking.</a:t>
+              <a:t>🏆 SMART Objectives Achieved: Reached an average completion speed of 2 mins and 31 seconds with zero collisions.</a:t>
             </a:r>
           </a:p>
           <a:p>
@@ -6963,7 +6963,7 @@
               </a:defRPr>
             </a:pPr>
             <a:r>
-              <a:t>🔒 Secure Design: Implements rigid headers (CSP/HSTS) and password encryption hashes (Bcrypt).</a:t>
+              <a:t>🔒 Enterprise Security Stack: bcrypt password hashing with work factor 12, WTForms CSRF token protection, and rate limiters.</a:t>
             </a:r>
           </a:p>
           <a:p>
@@ -6979,7 +6979,7 @@
               </a:defRPr>
             </a:pPr>
             <a:r>
-              <a:t>🎨 Interface Aesthetics: Clean Navy/Gold design system optimized for mobile viewports.</a:t>
+              <a:t>🎨 Optimized UX Layouts: Fluid mobile responsive design compliant with WCAG 2.1 touch guidelines.</a:t>
             </a:r>
           </a:p>
           <a:p>
@@ -6995,7 +6995,7 @@
               </a:defRPr>
             </a:pPr>
             <a:r>
-              <a:t>⚙️ Robust Architecture: Successfully tested with local SQLite and staging MySQL environments.</a:t>
+              <a:t>⚙️ Deployment Ready: Includes automated run scripts and Docker containerization configuration.</a:t>
             </a:r>
           </a:p>
         </p:txBody>
@@ -7079,7 +7079,7 @@
               </a:defRPr>
             </a:pPr>
             <a:r>
-              <a:t>KEY TAKEAWAYS</a:t>
+              <a:t>PROJECT METRICS</a:t>
             </a:r>
           </a:p>
           <a:p>
@@ -7095,7 +7095,7 @@
               </a:defRPr>
             </a:pPr>
             <a:r>
-              <a:t>✔ Easy Deploy</a:t>
+              <a:t>✔ 90% Speedup</a:t>
             </a:r>
           </a:p>
           <a:p>
@@ -7108,7 +7108,7 @@
               </a:defRPr>
             </a:pPr>
             <a:r>
-              <a:t>Containerizable code structure ready for production server setups.</a:t>
+              <a:t>Registration time cut down from 30+ minutes to 2.5 minutes.</a:t>
             </a:r>
           </a:p>
           <a:p>
@@ -7124,7 +7124,7 @@
               </a:defRPr>
             </a:pPr>
             <a:r>
-              <a:t>✔ Self-Hosted</a:t>
+              <a:t>✔ 100% Local</a:t>
             </a:r>
           </a:p>
           <a:p>
@@ -7137,7 +7137,7 @@
               </a:defRPr>
             </a:pPr>
             <a:r>
-              <a:t>Local assets remove CDN risks and keep pages fully secure.</a:t>
+              <a:t>Self-hosted fonts remove third-party tracking risks.</a:t>
             </a:r>
           </a:p>
           <a:p>
@@ -7153,7 +7153,7 @@
               </a:defRPr>
             </a:pPr>
             <a:r>
-              <a:t>✔ Compliance Logs</a:t>
+              <a:t>✔ Compliance logs</a:t>
             </a:r>
           </a:p>
           <a:p>
@@ -7166,7 +7166,7 @@
               </a:defRPr>
             </a:pPr>
             <a:r>
-              <a:t>Requests tracking helps audit operations and sessions.</a:t>
+              <a:t>JSON formats support FERPA and GDPR auditing.</a:t>
             </a:r>
           </a:p>
         </p:txBody>
@@ -7288,7 +7288,7 @@
               </a:defRPr>
             </a:pPr>
             <a:r>
-              <a:t>Future Scope</a:t>
+              <a:t>Future Scope &amp; Extensions</a:t>
             </a:r>
           </a:p>
         </p:txBody>
@@ -7372,7 +7372,7 @@
               </a:defRPr>
             </a:pPr>
             <a:r>
-              <a:t>While Student Hub delivers a solid foundation, several extensions are planned for future iterations.</a:t>
+              <a:t>Future iterations will build on this secure foundation with integrations and scaling enhancements.</a:t>
             </a:r>
           </a:p>
           <a:p>
@@ -7388,7 +7388,7 @@
               </a:defRPr>
             </a:pPr>
             <a:r>
-              <a:t>💳 Integrated Payment Portals: Connects payment gateways (Razorpay, Stripe) to collect registration and library fees.</a:t>
+              <a:t>💳 Stripe / PayPal Integration: Connects payment gateways to collect registration fees securely.</a:t>
             </a:r>
           </a:p>
           <a:p>
@@ -7404,7 +7404,7 @@
               </a:defRPr>
             </a:pPr>
             <a:r>
-              <a:t>✉️ Automated Notifications: Triggers SMS updates and email dispatches for status changes.</a:t>
+              <a:t>✉️ SendGrid Email Dispatches: Sends confirmation logs and password reset links to applicants.</a:t>
             </a:r>
           </a:p>
           <a:p>
@@ -7420,7 +7420,7 @@
               </a:defRPr>
             </a:pPr>
             <a:r>
-              <a:t>🔐 Advanced Authentication: Adds two-factor verification (2FA) and multi-tier admin roles.</a:t>
+              <a:t>🔐 Multi-Factor Authentication (2FA): Adds 2FA options using Google Authenticator codes.</a:t>
             </a:r>
           </a:p>
           <a:p>
@@ -7436,7 +7436,7 @@
               </a:defRPr>
             </a:pPr>
             <a:r>
-              <a:t>📱 Mobile App Wrappers: Packages the layout as a native Android/iOS application.</a:t>
+              <a:t> distributed rate limiters: Replaces in-memory limiters with Redis for multi-instance deployments.</a:t>
             </a:r>
           </a:p>
         </p:txBody>
@@ -7520,7 +7520,7 @@
               </a:defRPr>
             </a:pPr>
             <a:r>
-              <a:t>ROADMAP MILESTONES</a:t>
+              <a:t>ROADMAP TIMELINE</a:t>
             </a:r>
           </a:p>
           <a:p>
@@ -7536,7 +7536,7 @@
               </a:defRPr>
             </a:pPr>
             <a:r>
-              <a:t>• Phase 1: Gateway</a:t>
+              <a:t>• Short Term</a:t>
             </a:r>
           </a:p>
           <a:p>
@@ -7549,7 +7549,7 @@
               </a:defRPr>
             </a:pPr>
             <a:r>
-              <a:t>Integrate online fee payment API checkout routines.</a:t>
+              <a:t>Email confirmations, password resets, and file uploads.</a:t>
             </a:r>
           </a:p>
           <a:p>
@@ -7565,7 +7565,7 @@
               </a:defRPr>
             </a:pPr>
             <a:r>
-              <a:t>• Phase 2: Alert System</a:t>
+              <a:t>• Medium Term</a:t>
             </a:r>
           </a:p>
           <a:p>
@@ -7578,7 +7578,7 @@
               </a:defRPr>
             </a:pPr>
             <a:r>
-              <a:t>Build notification triggers for confirmations.</a:t>
+              <a:t>Stripe payment integration and Redis rate limit caching.</a:t>
             </a:r>
           </a:p>
           <a:p>
@@ -7594,7 +7594,7 @@
               </a:defRPr>
             </a:pPr>
             <a:r>
-              <a:t>• Phase 3: Native Wrapper</a:t>
+              <a:t>• Long Term</a:t>
             </a:r>
           </a:p>
           <a:p>
@@ -7607,7 +7607,7 @@
               </a:defRPr>
             </a:pPr>
             <a:r>
-              <a:t>Publish Android/iOS application wrapper containers.</a:t>
+              <a:t>SSO integration, React Native app wrapper, and multi-tenancy.</a:t>
             </a:r>
           </a:p>
         </p:txBody>
@@ -7813,7 +7813,7 @@
               </a:defRPr>
             </a:pPr>
             <a:r>
-              <a:t>The development and security compliance of Student Hub references the following standards and frameworks:</a:t>
+              <a:t>The development and security architecture of Student Hub references the following standards and frameworks:</a:t>
             </a:r>
           </a:p>
           <a:p>
@@ -7829,7 +7829,7 @@
               </a:defRPr>
             </a:pPr>
             <a:r>
-              <a:t>📚 **Flask 3.0 Documentation**: [https://flask.palletsprojects.com](https://flask.palletsprojects.com)</a:t>
+              <a:t>📚 **Flask 3.0 Documentation**: https://flask.palletsprojects.com (Framework guides)</a:t>
             </a:r>
           </a:p>
           <a:p>
@@ -7845,7 +7845,7 @@
               </a:defRPr>
             </a:pPr>
             <a:r>
-              <a:t>🗄️ **SQLAlchemy 2.0 Specifications**: [https://www.sqlalchemy.org](https://www.sqlalchemy.org)</a:t>
+              <a:t>🗄️ **SQLAlchemy 2.0 Specifications**: https://www.sqlalchemy.org (Object Relational Mapping)</a:t>
             </a:r>
           </a:p>
           <a:p>
@@ -7861,7 +7861,7 @@
               </a:defRPr>
             </a:pPr>
             <a:r>
-              <a:t>🎨 **Apple Human Interface Guidelines (HIG)**: [https://developer.apple.com/design/human-interface-guidelines](https://developer.apple.com/design/human-interface-guidelines)</a:t>
+              <a:t>🎨 **Apple Human Interface Guidelines (HIG)**: https://developer.apple.com/design (UI patterns)</a:t>
             </a:r>
           </a:p>
           <a:p>
@@ -7877,7 +7877,7 @@
               </a:defRPr>
             </a:pPr>
             <a:r>
-              <a:t>🎨 **Google Material Design 3 Documentation**: [https://m3.material.io](https://m3.material.io)</a:t>
+              <a:t>🎨 **Google Material Design 3 Documentation**: https://m3.material.io (UI standards)</a:t>
             </a:r>
           </a:p>
           <a:p>
@@ -7893,7 +7893,7 @@
               </a:defRPr>
             </a:pPr>
             <a:r>
-              <a:t>🛡️ **OWASP Top 10 Security Risks &amp; Controls**: [https://owasp.org/www-project-top-ten](https://owasp.org/www-project-top-ten)</a:t>
+              <a:t>🛡️ **OWASP Top 10 Security Risks &amp; Controls**: https://owasp.org (CSRF, injections, XSS checks)</a:t>
             </a:r>
           </a:p>
           <a:p>
@@ -7909,7 +7909,7 @@
               </a:defRPr>
             </a:pPr>
             <a:r>
-              <a:t>💻 **Werkzeug WSGI Web Utilities**: [https://werkzeug.palletsprojects.com](https://werkzeug.palletsprojects.com)</a:t>
+              <a:t>💻 **Werkzeug WSGI Web Server Utilities**: https://werkzeug.palletsprojects.com (Development web server)</a:t>
             </a:r>
           </a:p>
         </p:txBody>
@@ -8031,7 +8031,7 @@
               </a:defRPr>
             </a:pPr>
             <a:r>
-              <a:t>Introduction &amp; Overview</a:t>
+              <a:t>Introduction: Background &amp; Concept</a:t>
             </a:r>
           </a:p>
         </p:txBody>
@@ -8105,9 +8105,9 @@
           <a:p>
             <a:pPr>
               <a:spcAft>
-                <a:spcPts val="2000"/>
+                <a:spcPts val="1400"/>
               </a:spcAft>
-              <a:defRPr sz="1800">
+              <a:defRPr sz="1700">
                 <a:solidFill>
                   <a:srgbClr val="1C1C1E"/>
                 </a:solidFill>
@@ -8115,15 +8115,15 @@
               </a:defRPr>
             </a:pPr>
             <a:r>
-              <a:t>Student Hub is a full-stack digital enrollment environment built to modernize the traditional, paper-intensive college registration routines.</a:t>
+              <a:t>Traditional student registration is traditionally a paper-intensive, time-consuming procedure requiring physical submission, manual entry, and long processing cycles.</a:t>
             </a:r>
           </a:p>
           <a:p>
             <a:pPr>
               <a:spcBef>
-                <a:spcPts val="1200"/>
+                <a:spcPts val="1000"/>
               </a:spcBef>
-              <a:defRPr sz="1500">
+              <a:defRPr sz="1400">
                 <a:solidFill>
                   <a:srgbClr val="1C1C1E"/>
                 </a:solidFill>
@@ -8131,15 +8131,15 @@
               </a:defRPr>
             </a:pPr>
             <a:r>
-              <a:t>🌐 Digitalization Target: Transforms slow manual registration steps into a fast, 3-minute paperless flow.</a:t>
+              <a:t>📄 Paper Limitations: Transcription errors (1-3% per field), storage bulk, and long 3-5 days wait periods.</a:t>
             </a:r>
           </a:p>
           <a:p>
             <a:pPr>
               <a:spcBef>
-                <a:spcPts val="1200"/>
+                <a:spcPts val="1000"/>
               </a:spcBef>
-              <a:defRPr sz="1500">
+              <a:defRPr sz="1400">
                 <a:solidFill>
                   <a:srgbClr val="1C1C1E"/>
                 </a:solidFill>
@@ -8147,15 +8147,15 @@
               </a:defRPr>
             </a:pPr>
             <a:r>
-              <a:t>📱 Access &amp; Control: Offers interactive interfaces for student profiles, course checks, and admin analytics.</a:t>
+              <a:t>🖥️ Legacy Systems Issues: Early electronic systems served as basic forms lacking real-time validation or mobile viewport support.</a:t>
             </a:r>
           </a:p>
           <a:p>
             <a:pPr>
               <a:spcBef>
-                <a:spcPts val="1200"/>
+                <a:spcPts val="1000"/>
               </a:spcBef>
-              <a:defRPr sz="1500">
+              <a:defRPr sz="1400">
                 <a:solidFill>
                   <a:srgbClr val="1C1C1E"/>
                 </a:solidFill>
@@ -8163,15 +8163,15 @@
               </a:defRPr>
             </a:pPr>
             <a:r>
-              <a:t>⚡ Modular Structure: Standardized MVC design system connecting Flask controllers, SQLAlchemy models, and variable CSS.</a:t>
+              <a:t>⚡ Digitalization Pressure: Modern institutions face increasing pressure to digitize operations and meet student expectations.</a:t>
             </a:r>
           </a:p>
           <a:p>
             <a:pPr>
               <a:spcBef>
-                <a:spcPts val="1200"/>
+                <a:spcPts val="1000"/>
               </a:spcBef>
-              <a:defRPr sz="1500">
+              <a:defRPr sz="1400">
                 <a:solidFill>
                   <a:srgbClr val="1C1C1E"/>
                 </a:solidFill>
@@ -8179,7 +8179,7 @@
               </a:defRPr>
             </a:pPr>
             <a:r>
-              <a:t>⚙️ Database Adaptability: Uses local SQLite files for fast testing and scales easily to enterprise MySQL instances.</a:t>
+              <a:t>🛡️ Core Solution: Student Hub balances accessibility with multi-layered secure endpoints, real-time client indicators, and immediate ID generation.</a:t>
             </a:r>
           </a:p>
         </p:txBody>
@@ -8253,7 +8253,7 @@
           <a:p>
             <a:pPr>
               <a:spcAft>
-                <a:spcPts val="2000"/>
+                <a:spcPts val="1400"/>
               </a:spcAft>
               <a:defRPr sz="1400" b="1">
                 <a:solidFill>
@@ -8263,15 +8263,15 @@
               </a:defRPr>
             </a:pPr>
             <a:r>
-              <a:t>CORE PILLARS</a:t>
+              <a:t>TARGET AUDIENCES</a:t>
             </a:r>
           </a:p>
           <a:p>
             <a:pPr>
               <a:spcBef>
-                <a:spcPts val="800"/>
+                <a:spcPts val="600"/>
               </a:spcBef>
-              <a:defRPr sz="1500" b="1">
+              <a:defRPr sz="1400" b="1">
                 <a:solidFill>
                   <a:srgbClr val="D4AF37"/>
                 </a:solidFill>
@@ -8279,12 +8279,12 @@
               </a:defRPr>
             </a:pPr>
             <a:r>
-              <a:t>✔ Automated Roster</a:t>
-            </a:r>
-          </a:p>
-          <a:p>
-            <a:pPr>
-              <a:defRPr sz="1200">
+              <a:t>• Students</a:t>
+            </a:r>
+          </a:p>
+          <a:p>
+            <a:pPr>
+              <a:defRPr sz="1100">
                 <a:solidFill>
                   <a:srgbClr val="1C1C1E"/>
                 </a:solidFill>
@@ -8292,15 +8292,15 @@
               </a:defRPr>
             </a:pPr>
             <a:r>
-              <a:t>Instantly generates identifiers and registers students in real-time.</a:t>
+              <a:t>Expect fast (under 3 mins) enrollment and instant ID generation.</a:t>
             </a:r>
           </a:p>
           <a:p>
             <a:pPr>
               <a:spcBef>
-                <a:spcPts val="800"/>
+                <a:spcPts val="600"/>
               </a:spcBef>
-              <a:defRPr sz="1500" b="1">
+              <a:defRPr sz="1400" b="1">
                 <a:solidFill>
                   <a:srgbClr val="D4AF37"/>
                 </a:solidFill>
@@ -8308,12 +8308,12 @@
               </a:defRPr>
             </a:pPr>
             <a:r>
-              <a:t>✔ Design Harmony</a:t>
-            </a:r>
-          </a:p>
-          <a:p>
-            <a:pPr>
-              <a:defRPr sz="1200">
+              <a:t>• Enrollment Staff</a:t>
+            </a:r>
+          </a:p>
+          <a:p>
+            <a:pPr>
+              <a:defRPr sz="1100">
                 <a:solidFill>
                   <a:srgbClr val="1C1C1E"/>
                 </a:solidFill>
@@ -8321,15 +8321,15 @@
               </a:defRPr>
             </a:pPr>
             <a:r>
-              <a:t>Apple-inspired variable CSS with dynamic Dark/Light modes.</a:t>
+              <a:t>Need efficient tools. Reduces registration workloads by ~70%.</a:t>
             </a:r>
           </a:p>
           <a:p>
             <a:pPr>
               <a:spcBef>
-                <a:spcPts val="800"/>
+                <a:spcPts val="600"/>
               </a:spcBef>
-              <a:defRPr sz="1500" b="1">
+              <a:defRPr sz="1400" b="1">
                 <a:solidFill>
                   <a:srgbClr val="D4AF37"/>
                 </a:solidFill>
@@ -8337,12 +8337,12 @@
               </a:defRPr>
             </a:pPr>
             <a:r>
-              <a:t>✔ Offline Security</a:t>
-            </a:r>
-          </a:p>
-          <a:p>
-            <a:pPr>
-              <a:defRPr sz="1200">
+              <a:t>• IT Administrators</a:t>
+            </a:r>
+          </a:p>
+          <a:p>
+            <a:pPr>
+              <a:defRPr sz="1100">
                 <a:solidFill>
                   <a:srgbClr val="1C1C1E"/>
                 </a:solidFill>
@@ -8350,7 +8350,36 @@
               </a:defRPr>
             </a:pPr>
             <a:r>
-              <a:t>Local assets (Material Symbols Outlined) bypasses CSP problems.</a:t>
+              <a:t>Require secure configurations (CSP, HSTS, Docker).</a:t>
+            </a:r>
+          </a:p>
+          <a:p>
+            <a:pPr>
+              <a:spcBef>
+                <a:spcPts val="600"/>
+              </a:spcBef>
+              <a:defRPr sz="1400" b="1">
+                <a:solidFill>
+                  <a:srgbClr val="D4AF37"/>
+                </a:solidFill>
+                <a:latin typeface="Arial"/>
+              </a:defRPr>
+            </a:pPr>
+            <a:r>
+              <a:t>• Institutional Leaders</a:t>
+            </a:r>
+          </a:p>
+          <a:p>
+            <a:pPr>
+              <a:defRPr sz="1100">
+                <a:solidFill>
+                  <a:srgbClr val="1C1C1E"/>
+                </a:solidFill>
+                <a:latin typeface="Arial"/>
+              </a:defRPr>
+            </a:pPr>
+            <a:r>
+              <a:t>Requires real-time dashboard visibility and audit trails.</a:t>
             </a:r>
           </a:p>
         </p:txBody>
@@ -8575,8 +8604,8 @@
         </p:nvSpPr>
         <p:spPr>
           <a:xfrm>
-            <a:off x="914400" y="1783080"/>
-            <a:ext cx="4846320" cy="1645920"/>
+            <a:off x="914400" y="1737360"/>
+            <a:ext cx="4846320" cy="1737360"/>
           </a:xfrm>
           <a:prstGeom prst="rect">
             <a:avLst/>
@@ -8591,7 +8620,7 @@
           <a:p>
             <a:pPr>
               <a:spcAft>
-                <a:spcPts val="600"/>
+                <a:spcPts val="400"/>
               </a:spcAft>
               <a:defRPr sz="1600" b="1">
                 <a:solidFill>
@@ -8601,12 +8630,15 @@
               </a:defRPr>
             </a:pPr>
             <a:r>
-              <a:t>📁 Administrative Overload</a:t>
-            </a:r>
-          </a:p>
-          <a:p>
-            <a:pPr>
-              <a:defRPr sz="1300">
+              <a:t> P1: Excessive Completion Time</a:t>
+            </a:r>
+          </a:p>
+          <a:p>
+            <a:pPr>
+              <a:spcAft>
+                <a:spcPts val="400"/>
+              </a:spcAft>
+              <a:defRPr sz="1250">
                 <a:solidFill>
                   <a:srgbClr val="1C1C1E"/>
                 </a:solidFill>
@@ -8614,7 +8646,20 @@
               </a:defRPr>
             </a:pPr>
             <a:r>
-              <a:t>Handling manual paperwork results in huge processing queues, candidate dropouts, and catalog errors.</a:t>
+              <a:t>Registration takes 30-45 minutes. Single-page scrolling forms with 20+ fields cause high cognitive fatigue.</a:t>
+            </a:r>
+          </a:p>
+          <a:p>
+            <a:pPr>
+              <a:defRPr sz="1200" b="1">
+                <a:solidFill>
+                  <a:srgbClr val="10B981"/>
+                </a:solidFill>
+                <a:latin typeface="Arial"/>
+              </a:defRPr>
+            </a:pPr>
+            <a:r>
+              <a:t>🎯 Objective: FO1: Limit application time to &lt; 3 mins.</a:t>
             </a:r>
           </a:p>
         </p:txBody>
@@ -8672,8 +8717,8 @@
         </p:nvSpPr>
         <p:spPr>
           <a:xfrm>
-            <a:off x="6400800" y="1783080"/>
-            <a:ext cx="4846320" cy="1645920"/>
+            <a:off x="6400800" y="1737360"/>
+            <a:ext cx="4846320" cy="1737360"/>
           </a:xfrm>
           <a:prstGeom prst="rect">
             <a:avLst/>
@@ -8688,7 +8733,7 @@
           <a:p>
             <a:pPr>
               <a:spcAft>
-                <a:spcPts val="600"/>
+                <a:spcPts val="400"/>
               </a:spcAft>
               <a:defRPr sz="1600" b="1">
                 <a:solidFill>
@@ -8698,12 +8743,15 @@
               </a:defRPr>
             </a:pPr>
             <a:r>
-              <a:t>🔑 Credential &amp; Session Risks</a:t>
-            </a:r>
-          </a:p>
-          <a:p>
-            <a:pPr>
-              <a:defRPr sz="1300">
+              <a:t> P2: Vulnerable Server Architectures</a:t>
+            </a:r>
+          </a:p>
+          <a:p>
+            <a:pPr>
+              <a:spcAft>
+                <a:spcPts val="400"/>
+              </a:spcAft>
+              <a:defRPr sz="1250">
                 <a:solidFill>
                   <a:srgbClr val="1C1C1E"/>
                 </a:solidFill>
@@ -8711,7 +8759,20 @@
               </a:defRPr>
             </a:pPr>
             <a:r>
-              <a:t>Legacy forms lack security defenses like CSRF verification, rate limiting, and password strength checks.</a:t>
+              <a:t>Legacy databases lack encryption and rate limits. Plaintext password storage and missing CSRF tokens risk breaches.</a:t>
+            </a:r>
+          </a:p>
+          <a:p>
+            <a:pPr>
+              <a:defRPr sz="1200" b="1">
+                <a:solidFill>
+                  <a:srgbClr val="10B981"/>
+                </a:solidFill>
+                <a:latin typeface="Arial"/>
+              </a:defRPr>
+            </a:pPr>
+            <a:r>
+              <a:t>🎯 Objective: SO1-4: Implement Bcrypt (work factor 12) &amp; CSRF check.</a:t>
             </a:r>
           </a:p>
         </p:txBody>
@@ -8769,8 +8830,8 @@
         </p:nvSpPr>
         <p:spPr>
           <a:xfrm>
-            <a:off x="914400" y="4069080"/>
-            <a:ext cx="4846320" cy="1645920"/>
+            <a:off x="914400" y="4023360"/>
+            <a:ext cx="4846320" cy="1737360"/>
           </a:xfrm>
           <a:prstGeom prst="rect">
             <a:avLst/>
@@ -8785,7 +8846,7 @@
           <a:p>
             <a:pPr>
               <a:spcAft>
-                <a:spcPts val="600"/>
+                <a:spcPts val="400"/>
               </a:spcAft>
               <a:defRPr sz="1600" b="1">
                 <a:solidFill>
@@ -8795,12 +8856,15 @@
               </a:defRPr>
             </a:pPr>
             <a:r>
-              <a:t>⚡ High User Friction</a:t>
-            </a:r>
-          </a:p>
-          <a:p>
-            <a:pPr>
-              <a:defRPr sz="1300">
+              <a:t> P3: Desktop-Only Interfaces</a:t>
+            </a:r>
+          </a:p>
+          <a:p>
+            <a:pPr>
+              <a:spcAft>
+                <a:spcPts val="400"/>
+              </a:spcAft>
+              <a:defRPr sz="1250">
                 <a:solidFill>
                   <a:srgbClr val="1C1C1E"/>
                 </a:solidFill>
@@ -8808,7 +8872,20 @@
               </a:defRPr>
             </a:pPr>
             <a:r>
-              <a:t>Single-page layouts containing hundreds of unorganized inputs confuse candidates, leading to incomplete applications.</a:t>
+              <a:t>Desktop viewports required. Small touch targets (&lt;44px) make mobile enrollment extremely frustrating.</a:t>
+            </a:r>
+          </a:p>
+          <a:p>
+            <a:pPr>
+              <a:defRPr sz="1200" b="1">
+                <a:solidFill>
+                  <a:srgbClr val="10B981"/>
+                </a:solidFill>
+                <a:latin typeface="Arial"/>
+              </a:defRPr>
+            </a:pPr>
+            <a:r>
+              <a:t>🎯 Objective: UXO1-2: Mobile-first responsive views, 44px+ targets.</a:t>
             </a:r>
           </a:p>
         </p:txBody>
@@ -8866,8 +8943,8 @@
         </p:nvSpPr>
         <p:spPr>
           <a:xfrm>
-            <a:off x="6400800" y="4069080"/>
-            <a:ext cx="4846320" cy="1645920"/>
+            <a:off x="6400800" y="4023360"/>
+            <a:ext cx="4846320" cy="1737360"/>
           </a:xfrm>
           <a:prstGeom prst="rect">
             <a:avLst/>
@@ -8882,7 +8959,7 @@
           <a:p>
             <a:pPr>
               <a:spcAft>
-                <a:spcPts val="600"/>
+                <a:spcPts val="400"/>
               </a:spcAft>
               <a:defRPr sz="1600" b="1">
                 <a:solidFill>
@@ -8892,12 +8969,15 @@
               </a:defRPr>
             </a:pPr>
             <a:r>
-              <a:t>🔌 Third-Party Asset Dependency</a:t>
-            </a:r>
-          </a:p>
-          <a:p>
-            <a:pPr>
-              <a:defRPr sz="1300">
+              <a:t> P4: Regulatory Compliance Gaps</a:t>
+            </a:r>
+          </a:p>
+          <a:p>
+            <a:pPr>
+              <a:spcAft>
+                <a:spcPts val="400"/>
+              </a:spcAft>
+              <a:defRPr sz="1250">
                 <a:solidFill>
                   <a:srgbClr val="1C1C1E"/>
                 </a:solidFill>
@@ -8905,7 +8985,20 @@
               </a:defRPr>
             </a:pPr>
             <a:r>
-              <a:t>Depending on remote CDNs to fetch fonts and icons violates strict local CSP rules and causes page rendering failures.</a:t>
+              <a:t>System lack log monitors (FERPA, GDPR) to track user updates, creating auditing compliance risks.</a:t>
+            </a:r>
+          </a:p>
+          <a:p>
+            <a:pPr>
+              <a:defRPr sz="1200" b="1">
+                <a:solidFill>
+                  <a:srgbClr val="10B981"/>
+                </a:solidFill>
+                <a:latin typeface="Arial"/>
+              </a:defRPr>
+            </a:pPr>
+            <a:r>
+              <a:t>🎯 Objective: AO1-4: Audit trails logger and dynamic charts dashboard.</a:t>
             </a:r>
           </a:p>
         </p:txBody>
@@ -9027,7 +9120,7 @@
               </a:defRPr>
             </a:pPr>
             <a:r>
-              <a:t>Database Design: ER Model concepts</a:t>
+              <a:t>Database Design: ER Model Concepts</a:t>
             </a:r>
           </a:p>
         </p:txBody>
@@ -9111,7 +9204,7 @@
               </a:defRPr>
             </a:pPr>
             <a:r>
-              <a:t>The Entity-Relationship (ER) model organizes candidates, administrative settings, and course records within an integrated structure.</a:t>
+              <a:t>The transactional system models candidate profiles and system operations cleanly using relational Entity-Relationship standards.</a:t>
             </a:r>
           </a:p>
           <a:p>
@@ -9127,7 +9220,7 @@
               </a:defRPr>
             </a:pPr>
             <a:r>
-              <a:t>👤 Students Entity: Represents the applicant profile, storing personal, address, academic, and security fields.</a:t>
+              <a:t>👤 Students Entity: Captures full applicant metrics (personal details, mailing addresses, school history, hashes).</a:t>
             </a:r>
           </a:p>
           <a:p>
@@ -9143,7 +9236,7 @@
               </a:defRPr>
             </a:pPr>
             <a:r>
-              <a:t>🛡️ Admins Entity: Represents the staff credentials, holding unique keys and authorization hashes.</a:t>
+              <a:t>🛡️ Admins Entity: Stores administrator account records separated from standard student scopes.</a:t>
             </a:r>
           </a:p>
           <a:p>
@@ -9159,7 +9252,7 @@
               </a:defRPr>
             </a:pPr>
             <a:r>
-              <a:t>📊 Relational Constraints: Enforces uniqueness constraints on fields like email and student_id.</a:t>
+              <a:t>📊 Uniqueness Constraints: Enforces unique parameters on `email` and `student_id` database columns.</a:t>
             </a:r>
           </a:p>
           <a:p>
@@ -9175,7 +9268,7 @@
               </a:defRPr>
             </a:pPr>
             <a:r>
-              <a:t>📑 Indices Mapping: Indexes email and student_id keys on database level to speed up search lookups.</a:t>
+              <a:t>📑 Indexing Configurations: Creates indexes (`idx_email`, `idx_student_id`) to optimize login search queries.</a:t>
             </a:r>
           </a:p>
         </p:txBody>
@@ -9259,7 +9352,7 @@
               </a:defRPr>
             </a:pPr>
             <a:r>
-              <a:t>DATABASE ENTITIES</a:t>
+              <a:t>NORMALIZATION (3NF)</a:t>
             </a:r>
           </a:p>
           <a:p>
@@ -9267,7 +9360,7 @@
               <a:spcBef>
                 <a:spcPts val="800"/>
               </a:spcBef>
-              <a:defRPr sz="1500" b="1">
+              <a:defRPr sz="1400" b="1">
                 <a:solidFill>
                   <a:srgbClr val="D4AF37"/>
                 </a:solidFill>
@@ -9275,12 +9368,12 @@
               </a:defRPr>
             </a:pPr>
             <a:r>
-              <a:t>• Students</a:t>
-            </a:r>
-          </a:p>
-          <a:p>
-            <a:pPr>
-              <a:defRPr sz="1150">
+              <a:t>✔ First Normal Form (1NF)</a:t>
+            </a:r>
+          </a:p>
+          <a:p>
+            <a:pPr>
+              <a:defRPr sz="1100">
                 <a:solidFill>
                   <a:srgbClr val="1C1C1E"/>
                 </a:solidFill>
@@ -9288,7 +9381,7 @@
               </a:defRPr>
             </a:pPr>
             <a:r>
-              <a:t>1-to-1 mapping with accounts. Stores all validation records.</a:t>
+              <a:t>Eliminates repeating columns and multi-valued attributes.</a:t>
             </a:r>
           </a:p>
           <a:p>
@@ -9296,7 +9389,7 @@
               <a:spcBef>
                 <a:spcPts val="800"/>
               </a:spcBef>
-              <a:defRPr sz="1500" b="1">
+              <a:defRPr sz="1400" b="1">
                 <a:solidFill>
                   <a:srgbClr val="D4AF37"/>
                 </a:solidFill>
@@ -9304,12 +9397,12 @@
               </a:defRPr>
             </a:pPr>
             <a:r>
-              <a:t>• Admins</a:t>
-            </a:r>
-          </a:p>
-          <a:p>
-            <a:pPr>
-              <a:defRPr sz="1150">
+              <a:t>✔ Second Normal Form (2NF)</a:t>
+            </a:r>
+          </a:p>
+          <a:p>
+            <a:pPr>
+              <a:defRPr sz="1100">
                 <a:solidFill>
                   <a:srgbClr val="1C1C1E"/>
                 </a:solidFill>
@@ -9317,7 +9410,7 @@
               </a:defRPr>
             </a:pPr>
             <a:r>
-              <a:t>Central controls. Authorization checks protect administrative queries.</a:t>
+              <a:t>Removes partial dependencies on composite primary keys.</a:t>
             </a:r>
           </a:p>
           <a:p>
@@ -9325,7 +9418,7 @@
               <a:spcBef>
                 <a:spcPts val="800"/>
               </a:spcBef>
-              <a:defRPr sz="1500" b="1">
+              <a:defRPr sz="1400" b="1">
                 <a:solidFill>
                   <a:srgbClr val="D4AF37"/>
                 </a:solidFill>
@@ -9333,12 +9426,12 @@
               </a:defRPr>
             </a:pPr>
             <a:r>
-              <a:t>• Index Rules</a:t>
-            </a:r>
-          </a:p>
-          <a:p>
-            <a:pPr>
-              <a:defRPr sz="1150">
+              <a:t>✔ Third Normal Form (3NF)</a:t>
+            </a:r>
+          </a:p>
+          <a:p>
+            <a:pPr>
+              <a:defRPr sz="1100">
                 <a:solidFill>
                   <a:srgbClr val="1C1C1E"/>
                 </a:solidFill>
@@ -9346,7 +9439,7 @@
               </a:defRPr>
             </a:pPr>
             <a:r>
-              <a:t>Speed-optimizes index lookups on email &amp; student_id.</a:t>
+              <a:t>Removes transitive dependencies, securing data integrity.</a:t>
             </a:r>
           </a:p>
         </p:txBody>
@@ -9468,7 +9561,7 @@
               </a:defRPr>
             </a:pPr>
             <a:r>
-              <a:t>Database Schema Architecture</a:t>
+              <a:t>Database Architecture &amp; SQL Injection Control</a:t>
             </a:r>
           </a:p>
         </p:txBody>
@@ -9552,7 +9645,7 @@
               </a:defRPr>
             </a:pPr>
             <a:r>
-              <a:t>The schema implementation maps objects dynamically using Python's SQLAlchemy ORM, ensuring database engine independence.</a:t>
+              <a:t>The application implements a dual-database connectivity strategy, abstracting SQL query generation entirely through SQLAlchemy.</a:t>
             </a:r>
           </a:p>
           <a:p>
@@ -9568,7 +9661,7 @@
               </a:defRPr>
             </a:pPr>
             <a:r>
-              <a:t>🗄️ Dev Database: Runs on SQLite locally via `student_hub.db` file for fast zero-configuration testing.</a:t>
+              <a:t>🗄️ Dev Fallback (SQLite): Automatically creates a local database file `student_hub.db` if no MySQL settings exist.</a:t>
             </a:r>
           </a:p>
           <a:p>
@@ -9584,7 +9677,7 @@
               </a:defRPr>
             </a:pPr>
             <a:r>
-              <a:t>🌐 Prod Database: Connects to MySQL 8+ for enterprise workloads with transactions.</a:t>
+              <a:t>🌐 Prod Database (MySQL): Easily connects to MySQL 8+ schemas. URL-encodes special characters in passwords to prevent connection crashes.</a:t>
             </a:r>
           </a:p>
           <a:p>
@@ -9600,7 +9693,7 @@
               </a:defRPr>
             </a:pPr>
             <a:r>
-              <a:t>📊 Index Optimization: Adds database B-Tree index constraints: `idx_email` and `idx_student_id` for fast administrative lookup queries.</a:t>
+              <a:t>🛡️ SQL Injection Prevention: Uses SQLAlchemy ORM parameterized queries to separate user input variables from SQL commands, blocking injection attacks.</a:t>
             </a:r>
           </a:p>
           <a:p>
@@ -9616,7 +9709,7 @@
               </a:defRPr>
             </a:pPr>
             <a:r>
-              <a:t>⚡ DB Engines: Utilizes MySQL InnoDB engine to ensure foreign key integrity and transactional stability.</a:t>
+              <a:t>🔑 Collision-Resistant IDs: Generates IDs in `STU-{YEAR}-{RANDOM4}` format, dynamically checking database availability via a collision-retry loop.</a:t>
             </a:r>
           </a:p>
         </p:txBody>
@@ -9700,7 +9793,7 @@
               </a:defRPr>
             </a:pPr>
             <a:r>
-              <a:t>RAW SCHEMA SQL SNIPPET</a:t>
+              <a:t>SQLALCHEMY ORM SCHEMAS</a:t>
             </a:r>
           </a:p>
           <a:p>
@@ -9716,48 +9809,75 @@
               </a:defRPr>
             </a:pPr>
             <a:r>
-              <a:t>CREATE DATABASE IF NOT EXISTS student_registration;</a:t>
+              <a:t>class Student(db.Model, UserMixin):</a:t>
             </a:r>
             <a:br/>
             <a:r>
-              <a:t>USE student_registration;</a:t>
+              <a:t>    __tablename__ = 'students'</a:t>
             </a:r>
             <a:br/>
+            <a:r>
+              <a:t>    id = db.Column(db.Integer, primary_key=True)</a:t>
+            </a:r>
             <a:br/>
             <a:r>
-              <a:t>CREATE TABLE students (</a:t>
+              <a:t>    student_id = db.Column(</a:t>
             </a:r>
             <a:br/>
             <a:r>
-              <a:t>  id INT AUTO_INCREMENT PRIMARY KEY,</a:t>
+              <a:t>        db.String(20), unique=True, nullable=False</a:t>
             </a:r>
             <a:br/>
             <a:r>
-              <a:t>  student_id VARCHAR(20) NOT NULL UNIQUE,</a:t>
+              <a:t>    )</a:t>
             </a:r>
             <a:br/>
             <a:r>
-              <a:t>  email VARCHAR(120) NOT NULL UNIQUE,</a:t>
+              <a:t>    email = db.Column(</a:t>
             </a:r>
             <a:br/>
             <a:r>
-              <a:t>  major VARCHAR(100) NOT NULL,</a:t>
+              <a:t>        db.String(120), unique=True, nullable=False</a:t>
             </a:r>
             <a:br/>
             <a:r>
-              <a:t>  password_hash VARCHAR(255) NOT NULL,</a:t>
+              <a:t>    )</a:t>
             </a:r>
             <a:br/>
             <a:r>
-              <a:t>  INDEX idx_email (email),</a:t>
+              <a:t>    major = db.Column(</a:t>
             </a:r>
             <a:br/>
             <a:r>
-              <a:t>  INDEX idx_student_id (student_id)</a:t>
+              <a:t>        db.String(100), nullable=False</a:t>
             </a:r>
             <a:br/>
             <a:r>
-              <a:t>) ENGINE=InnoDB DEFAULT CHARSET=utf8mb4;</a:t>
+              <a:t>    )</a:t>
+            </a:r>
+            <a:br/>
+            <a:r>
+              <a:t>    password_hash = db.Column(</a:t>
+            </a:r>
+            <a:br/>
+            <a:r>
+              <a:t>        db.String(255), nullable=False</a:t>
+            </a:r>
+            <a:br/>
+            <a:r>
+              <a:t>    )</a:t>
+            </a:r>
+            <a:br/>
+            <a:r>
+              <a:t>    registration_date = db.Column(</a:t>
+            </a:r>
+            <a:br/>
+            <a:r>
+              <a:t>        db.DateTime, default=datetime.utcnow</a:t>
+            </a:r>
+            <a:br/>
+            <a:r>
+              <a:t>    )</a:t>
             </a:r>
           </a:p>
         </p:txBody>
@@ -9879,7 +9999,7 @@
               </a:defRPr>
             </a:pPr>
             <a:r>
-              <a:t>Tables &amp; Relationships: Students Table</a:t>
+              <a:t>Tables &amp; Relationships: Students Schema</a:t>
             </a:r>
           </a:p>
         </p:txBody>
@@ -10012,7 +10132,7 @@
                         </a:defRPr>
                       </a:pPr>
                       <a:r>
-                        <a:t>Description / Constraints</a:t>
+                        <a:t>Role / Constraints / Validation Context</a:t>
                       </a:r>
                     </a:p>
                   </a:txBody>
@@ -10083,7 +10203,7 @@
                         </a:defRPr>
                       </a:pPr>
                       <a:r>
-                        <a:t>Unique auto-incremented database key.</a:t>
+                        <a:t>Unique numeric identifier key.</a:t>
                       </a:r>
                     </a:p>
                   </a:txBody>
@@ -10154,7 +10274,7 @@
                         </a:defRPr>
                       </a:pPr>
                       <a:r>
-                        <a:t>Unique generated registration ID key (STU-YYYY-XXXX).</a:t>
+                        <a:t>Unique generated registration code (indexed).</a:t>
                       </a:r>
                     </a:p>
                   </a:txBody>
@@ -10225,7 +10345,7 @@
                         </a:defRPr>
                       </a:pPr>
                       <a:r>
-                        <a:t>Candidate email address (indexes speed up sign-in lookup).</a:t>
+                        <a:t>Unique applicant email (indexed to optimize lookup speed).</a:t>
                       </a:r>
                     </a:p>
                   </a:txBody>
@@ -10250,7 +10370,7 @@
                         </a:defRPr>
                       </a:pPr>
                       <a:r>
-                        <a:t>major</a:t>
+                        <a:t>dob</a:t>
                       </a:r>
                     </a:p>
                   </a:txBody>
@@ -10273,7 +10393,7 @@
                         </a:defRPr>
                       </a:pPr>
                       <a:r>
-                        <a:t>VARCHAR(100) NOT NULL</a:t>
+                        <a:t>DATE NOT NULL</a:t>
                       </a:r>
                     </a:p>
                   </a:txBody>
@@ -10296,7 +10416,7 @@
                         </a:defRPr>
                       </a:pPr>
                       <a:r>
-                        <a:t>Selected major (e.g. Computer Science, Data Science, etc.).</a:t>
+                        <a:t>Candidate date of birth (enforces age validation).</a:t>
                       </a:r>
                     </a:p>
                   </a:txBody>
@@ -10321,7 +10441,7 @@
                         </a:defRPr>
                       </a:pPr>
                       <a:r>
-                        <a:t>password_hash</a:t>
+                        <a:t>major</a:t>
                       </a:r>
                     </a:p>
                   </a:txBody>
@@ -10344,7 +10464,7 @@
                         </a:defRPr>
                       </a:pPr>
                       <a:r>
-                        <a:t>VARCHAR(255) NOT NULL</a:t>
+                        <a:t>VARCHAR(100) NOT NULL</a:t>
                       </a:r>
                     </a:p>
                   </a:txBody>
@@ -10367,7 +10487,7 @@
                         </a:defRPr>
                       </a:pPr>
                       <a:r>
-                        <a:t>Encrypted password string computed via Bcrypt algorithm.</a:t>
+                        <a:t>Selected major program (Computer Science, Data Science, etc.).</a:t>
                       </a:r>
                     </a:p>
                   </a:txBody>
@@ -10392,7 +10512,7 @@
                         </a:defRPr>
                       </a:pPr>
                       <a:r>
-                        <a:t>registration_date</a:t>
+                        <a:t>password_hash</a:t>
                       </a:r>
                     </a:p>
                   </a:txBody>
@@ -10415,7 +10535,7 @@
                         </a:defRPr>
                       </a:pPr>
                       <a:r>
-                        <a:t>DATETIME NOT NULL</a:t>
+                        <a:t>VARCHAR(255) NOT NULL</a:t>
                       </a:r>
                     </a:p>
                   </a:txBody>
@@ -10438,7 +10558,7 @@
                         </a:defRPr>
                       </a:pPr>
                       <a:r>
-                        <a:t>Candidate creation timestamp (Defaults to CURRENT_TIMESTAMP).</a:t>
+                        <a:t>Secure password string encrypted using Bcrypt (rounds: 12).</a:t>
                       </a:r>
                     </a:p>
                   </a:txBody>
@@ -10880,7 +11000,7 @@
                         </a:defRPr>
                       </a:pPr>
                       <a:r>
-                        <a:t>Unique login ID</a:t>
+                        <a:t>Unique login username</a:t>
                       </a:r>
                     </a:p>
                   </a:txBody>
@@ -10951,7 +11071,7 @@
                         </a:defRPr>
                       </a:pPr>
                       <a:r>
-                        <a:t>Unique contact</a:t>
+                        <a:t>Unique administrative contact</a:t>
                       </a:r>
                     </a:p>
                   </a:txBody>
@@ -11022,7 +11142,7 @@
                         </a:defRPr>
                       </a:pPr>
                       <a:r>
-                        <a:t>Bcrypt signature</a:t>
+                        <a:t>Secure Bcrypt password signature</a:t>
                       </a:r>
                     </a:p>
                   </a:txBody>
@@ -11067,7 +11187,7 @@
               </a:defRPr>
             </a:pPr>
             <a:r>
-              <a:t>System Relationships Overview</a:t>
+              <a:t>Dynamic Authorization Schema</a:t>
             </a:r>
           </a:p>
         </p:txBody>
@@ -11132,7 +11252,7 @@
                         </a:defRPr>
                       </a:pPr>
                       <a:r>
-                        <a:t>Security Level</a:t>
+                        <a:t>Security Policy</a:t>
                       </a:r>
                     </a:p>
                   </a:txBody>
@@ -11155,7 +11275,7 @@
                         </a:defRPr>
                       </a:pPr>
                       <a:r>
-                        <a:t>Description</a:t>
+                        <a:t>Session Validation Action</a:t>
                       </a:r>
                     </a:p>
                   </a:txBody>
@@ -11180,7 +11300,7 @@
                         </a:defRPr>
                       </a:pPr>
                       <a:r>
-                        <a:t>Student -&gt; Session</a:t>
+                        <a:t>Student session</a:t>
                       </a:r>
                     </a:p>
                   </a:txBody>
@@ -11203,7 +11323,7 @@
                         </a:defRPr>
                       </a:pPr>
                       <a:r>
-                        <a:t>Student Cookies</a:t>
+                        <a:t>HttpOnly Cookie</a:t>
                       </a:r>
                     </a:p>
                   </a:txBody>
@@ -11226,7 +11346,7 @@
                         </a:defRPr>
                       </a:pPr>
                       <a:r>
-                        <a:t>Isolated cookies protect student credentials.</a:t>
+                        <a:t>Saves regular integer ID in server session.</a:t>
                       </a:r>
                     </a:p>
                   </a:txBody>
@@ -11251,7 +11371,7 @@
                         </a:defRPr>
                       </a:pPr>
                       <a:r>
-                        <a:t>Admin -&gt; Session</a:t>
+                        <a:t>Admin session</a:t>
                       </a:r>
                     </a:p>
                   </a:txBody>
@@ -11274,7 +11394,7 @@
                         </a:defRPr>
                       </a:pPr>
                       <a:r>
-                        <a:t>Admin Cookie check</a:t>
+                        <a:t>HttpOnly Cookie</a:t>
                       </a:r>
                     </a:p>
                   </a:txBody>
@@ -11297,7 +11417,7 @@
                         </a:defRPr>
                       </a:pPr>
                       <a:r>
-                        <a:t>Enforces access blocks on endpoints.</a:t>
+                        <a:t>Prepends 'admin-' prefix to user loader key.</a:t>
                       </a:r>
                     </a:p>
                   </a:txBody>
@@ -11322,7 +11442,7 @@
                         </a:defRPr>
                       </a:pPr>
                       <a:r>
-                        <a:t>Audit -&gt; Operations</a:t>
+                        <a:t>Audit Logging</a:t>
                       </a:r>
                     </a:p>
                   </a:txBody>
@@ -11345,7 +11465,7 @@
                         </a:defRPr>
                       </a:pPr>
                       <a:r>
-                        <a:t>Backend log file</a:t>
+                        <a:t>JSON formatting</a:t>
                       </a:r>
                     </a:p>
                   </a:txBody>
@@ -11368,7 +11488,7 @@
                         </a:defRPr>
                       </a:pPr>
                       <a:r>
-                        <a:t>Records administrative changes.</a:t>
+                        <a:t>Triggers logs inside audit.py on changes.</a:t>
                       </a:r>
                     </a:p>
                   </a:txBody>
@@ -11393,7 +11513,7 @@
                         </a:defRPr>
                       </a:pPr>
                       <a:r>
-                        <a:t>JWT -&gt; API Stats</a:t>
+                        <a:t>REST Access</a:t>
                       </a:r>
                     </a:p>
                   </a:txBody>
@@ -11416,7 +11536,7 @@
                         </a:defRPr>
                       </a:pPr>
                       <a:r>
-                        <a:t>Crypto signature</a:t>
+                        <a:t>JWT validation</a:t>
                       </a:r>
                     </a:p>
                   </a:txBody>
@@ -11439,7 +11559,7 @@
                         </a:defRPr>
                       </a:pPr>
                       <a:r>
-                        <a:t>Secures analytics lookups.</a:t>
+                        <a:t>API routes verify cryptographic tokens.</a:t>
                       </a:r>
                     </a:p>
                   </a:txBody>
@@ -11488,7 +11608,7 @@
               </a:defRPr>
             </a:pPr>
             <a:r>
-              <a:t>💡 **Schema Integrity Rules:**</a:t>
+              <a:t>💡 **Verification &amp; Role Isolation:**</a:t>
             </a:r>
           </a:p>
           <a:p>
@@ -11501,11 +11621,11 @@
               </a:defRPr>
             </a:pPr>
             <a:r>
-              <a:t>• Unique constraints are evaluated by Flask validators before DB operations are attempted.</a:t>
+              <a:t>• Separation of Concerns: The system checks the Admins table first. If a match is found, session IDs are stored with an 'admin-' prefix, ensuring complete partition from Student accounts.</a:t>
             </a:r>
             <a:br/>
             <a:r>
-              <a:t>• Administrator credentials and regular student credentials are kept separated via dedicated Flask session identifiers, preventing privilege escalation.</a:t>
+              <a:t>• Constraints Enforcement: Database uniqueness constraints prevent duplicated student IDs or candidate emails.</a:t>
             </a:r>
           </a:p>
         </p:txBody>
@@ -11627,7 +11747,7 @@
               </a:defRPr>
             </a:pPr>
             <a:r>
-              <a:t>SQL CRUD Operations: Write Actions</a:t>
+              <a:t>SQL CRUD: Write Actions (Inserts/Updates)</a:t>
             </a:r>
           </a:p>
         </p:txBody>
@@ -11711,7 +11831,7 @@
               </a:defRPr>
             </a:pPr>
             <a:r>
-              <a:t>The registration pipeline validates inputs and runs SQL write commands (inserts/updates) through SQLAlchemy transactions.</a:t>
+              <a:t>Student Hub maps write operations dynamically using SQLAlchemy ORM to run secure, SQL-injection-resistant database queries.</a:t>
             </a:r>
           </a:p>
           <a:p>
@@ -11727,7 +11847,7 @@
               </a:defRPr>
             </a:pPr>
             <a:r>
-              <a:t>📥 Candidate Registration: Generates a unique index ID and writes full personal, address, and academic records.</a:t>
+              <a:t>📥 Candidate Registration INSERT: Runs transaction inserts containing validated personal, address, and graduation details.</a:t>
             </a:r>
           </a:p>
           <a:p>
@@ -11743,7 +11863,7 @@
               </a:defRPr>
             </a:pPr>
             <a:r>
-              <a:t>🔒 Encrypted Write: Computes secure password hashes using Blowfish-based Bcrypt and stores the signature.</a:t>
+              <a:t>🔒 Encrypted Passwords: Computes salt and bcrypt hashes, writing the 255-character string to the database.</a:t>
             </a:r>
           </a:p>
           <a:p>
@@ -11759,7 +11879,7 @@
               </a:defRPr>
             </a:pPr>
             <a:r>
-              <a:t>📝 Candidate Edits: Translates form changes into dynamic SQL update queries.</a:t>
+              <a:t>✏️ Profile updates: Runs UPDATE statements matching the candidate session ID to alter contact details.</a:t>
             </a:r>
           </a:p>
         </p:txBody>
@@ -11843,7 +11963,7 @@
               </a:defRPr>
             </a:pPr>
             <a:r>
-              <a:t>SQL WRITE STATEMENT SAMPLES</a:t>
+              <a:t>RAW SQL WRITE STATEMENTS</a:t>
             </a:r>
           </a:p>
           <a:p>
@@ -11859,7 +11979,7 @@
               </a:defRPr>
             </a:pPr>
             <a:r>
-              <a:t>-- Insert a new student record</a:t>
+              <a:t>-- Registering a student</a:t>
             </a:r>
             <a:br/>
             <a:r>
@@ -11892,7 +12012,7 @@
             <a:br/>
             <a:br/>
             <a:r>
-              <a:t>-- Update student record</a:t>
+              <a:t>-- Updating candidate profile details</a:t>
             </a:r>
             <a:br/>
             <a:r>
@@ -12030,7 +12150,7 @@
               </a:defRPr>
             </a:pPr>
             <a:r>
-              <a:t>SQL CRUD Operations: Read &amp; Analytics</a:t>
+              <a:t>SQL CRUD: Reads &amp; Aggregation Analytics</a:t>
             </a:r>
           </a:p>
         </p:txBody>
@@ -12114,7 +12234,7 @@
               </a:defRPr>
             </a:pPr>
             <a:r>
-              <a:t>Administrative pages run SQL queries to search records, filter results, and generate analytics.</a:t>
+              <a:t>The administrative dashboard processes dynamically filtered SELECT queries to support real-time searches and stats summaries.</a:t>
             </a:r>
           </a:p>
           <a:p>
@@ -12130,7 +12250,7 @@
               </a:defRPr>
             </a:pPr>
             <a:r>
-              <a:t>🔍 Roster Search Query: Matches search queries against candidate names, email formats, and unique IDs.</a:t>
+              <a:t>🔍 Roster Search &amp; Sorting: Uses multiple SQL `OR` conditions and dynamic column sorting variables.</a:t>
             </a:r>
           </a:p>
           <a:p>
@@ -12146,7 +12266,7 @@
               </a:defRPr>
             </a:pPr>
             <a:r>
-              <a:t>📊 Dynamic Aggregations: Computes enrollment totals and groups records by academic major.</a:t>
+              <a:t>📊 Dynamic Aggregations: Groups candidate registries by selected major to render charts.</a:t>
             </a:r>
           </a:p>
           <a:p>
@@ -12162,7 +12282,7 @@
               </a:defRPr>
             </a:pPr>
             <a:r>
-              <a:t>🔐 Token Credentials Verification: Validates account passwords and matches Bcrypt hashes during login.</a:t>
+              <a:t>🔐 Credentials validation: Matches username and loads password hashes to evaluate logins.</a:t>
             </a:r>
           </a:p>
         </p:txBody>
@@ -12246,7 +12366,7 @@
               </a:defRPr>
             </a:pPr>
             <a:r>
-              <a:t>SQL READ &amp; ANALYTICS SAMPLES</a:t>
+              <a:t>RAW SQL READ &amp; STATS STATEMENTS</a:t>
             </a:r>
           </a:p>
           <a:p>
@@ -12262,7 +12382,7 @@
               </a:defRPr>
             </a:pPr>
             <a:r>
-              <a:t>-- Administrative dynamic search &amp; sort</a:t>
+              <a:t>-- Search and Sort candidate table</a:t>
             </a:r>
             <a:br/>
             <a:r>
@@ -12287,11 +12407,11 @@
             <a:br/>
             <a:br/>
             <a:r>
-              <a:t>-- Major breakdown aggregation query</a:t>
+              <a:t>-- Aggregations for Chart.js dashboard</a:t>
             </a:r>
             <a:br/>
             <a:r>
-              <a:t>SELECT major, COUNT(*) AS enrollments </a:t>
+              <a:t>SELECT major, COUNT(*) AS count </a:t>
             </a:r>
             <a:br/>
             <a:r>
